--- a/Materials/1620-1630_Nakagawa/はじめてのシミュレーション_R with Pharma Lab_20260408.pptx
+++ b/Materials/1620-1630_Nakagawa/はじめてのシミュレーション_R with Pharma Lab_20260408.pptx
@@ -1,14 +1,14 @@
 
 <file path=ppt/presentation.xml><?xml version="1.0" encoding="utf-8"?>
-<p:presentation xmlns:a="http://schemas.openxmlformats.org/drawingml/2006/main" xmlns:r="http://schemas.openxmlformats.org/officeDocument/2006/relationships" xmlns:p="http://schemas.openxmlformats.org/presentationml/2006/main" showSpecialPlsOnTitleSld="0">
+<p:presentation xmlns:a="http://schemas.openxmlformats.org/drawingml/2006/main" xmlns:r="http://schemas.openxmlformats.org/officeDocument/2006/relationships" xmlns:p="http://schemas.openxmlformats.org/presentationml/2006/main" showSpecialPlsOnTitleSld="0" removePersonalInfoOnSave="1">
   <p:sldMasterIdLst>
     <p:sldMasterId id="2147483648" r:id="rId1"/>
   </p:sldMasterIdLst>
   <p:notesMasterIdLst>
-    <p:notesMasterId r:id="rId15"/>
+    <p:notesMasterId r:id="rId16"/>
   </p:notesMasterIdLst>
   <p:handoutMasterIdLst>
-    <p:handoutMasterId r:id="rId16"/>
+    <p:handoutMasterId r:id="rId17"/>
   </p:handoutMasterIdLst>
   <p:sldIdLst>
     <p:sldId id="272" r:id="rId2"/>
@@ -22,8 +22,9 @@
     <p:sldId id="291" r:id="rId10"/>
     <p:sldId id="292" r:id="rId11"/>
     <p:sldId id="293" r:id="rId12"/>
-    <p:sldId id="281" r:id="rId13"/>
-    <p:sldId id="267" r:id="rId14"/>
+    <p:sldId id="295" r:id="rId13"/>
+    <p:sldId id="281" r:id="rId14"/>
+    <p:sldId id="267" r:id="rId15"/>
   </p:sldIdLst>
   <p:sldSz cx="10795000" cy="8102600"/>
   <p:notesSz cx="10795000" cy="8102600"/>
@@ -32,6 +33,14 @@
       <a:defRPr kern="0"/>
     </a:defPPr>
   </p:defaultTextStyle>
+  <p:extLst>
+    <p:ext uri="{EFAFB233-063F-42B5-8137-9DF3F51BA10A}">
+      <p15:sldGuideLst xmlns:p15="http://schemas.microsoft.com/office/powerpoint/2012/main"/>
+    </p:ext>
+    <p:ext uri="{2D200454-40CA-4A62-9FC3-DE9A4176ACB9}">
+      <p15:notesGuideLst xmlns:p15="http://schemas.microsoft.com/office/powerpoint/2012/main"/>
+    </p:ext>
+  </p:extLst>
 </p:presentation>
 </file>
 
@@ -129,7 +138,7 @@
           <a:p>
             <a:fld id="{F9721CEF-AF14-0041-915F-47CFE44F64CA}" type="datetimeFigureOut">
               <a:rPr kumimoji="1" lang="ja-JP" altLang="en-US" smtClean="0"/>
-              <a:t>2026/3/24</a:t>
+              <a:t>2026/3/30</a:t>
             </a:fld>
             <a:endParaRPr kumimoji="1" lang="ja-JP" altLang="en-US"/>
           </a:p>
@@ -306,7 +315,7 @@
           <a:p>
             <a:fld id="{466EDA11-FB64-E74C-B19E-49156B88425C}" type="datetimeFigureOut">
               <a:rPr kumimoji="1" lang="ja-JP" altLang="en-US" smtClean="0"/>
-              <a:t>2026/3/24</a:t>
+              <a:t>2026/3/30</a:t>
             </a:fld>
             <a:endParaRPr kumimoji="1" lang="ja-JP" altLang="en-US"/>
           </a:p>
@@ -742,26 +751,26 @@
               <a:t>タイトル</a:t>
             </a:r>
             <a:r>
-              <a:rPr kumimoji="1" lang="en-US" altLang="ja-JP"/>
+              <a:rPr kumimoji="1" lang="en-US" altLang="ja-JP" dirty="0"/>
               <a:t>:</a:t>
             </a:r>
             <a:r>
-              <a:rPr kumimoji="1" lang="en-US" altLang="ja-JP" err="1"/>
+              <a:rPr kumimoji="1" lang="en-US" altLang="ja-JP" dirty="0" err="1"/>
               <a:t>Meiryo</a:t>
             </a:r>
             <a:r>
-              <a:rPr kumimoji="1" lang="en-US" altLang="ja-JP"/>
+              <a:rPr kumimoji="1" lang="en-US" altLang="ja-JP" dirty="0"/>
               <a:t> UI 32pt</a:t>
             </a:r>
             <a:br>
-              <a:rPr kumimoji="1" lang="en-US" altLang="ja-JP"/>
+              <a:rPr kumimoji="1" lang="en-US" altLang="ja-JP" dirty="0"/>
             </a:br>
             <a:r>
               <a:rPr kumimoji="1" lang="ja-JP" altLang="en-US"/>
               <a:t>文字色</a:t>
             </a:r>
             <a:r>
-              <a:rPr kumimoji="1" lang="en-US" altLang="ja-JP"/>
+              <a:rPr kumimoji="1" lang="en-US" altLang="ja-JP" dirty="0"/>
               <a:t>:</a:t>
             </a:r>
             <a:r>
@@ -769,10 +778,10 @@
               <a:t>セグメントカラー</a:t>
             </a:r>
             <a:br>
-              <a:rPr kumimoji="1" lang="en-US" altLang="ja-JP"/>
+              <a:rPr kumimoji="1" lang="en-US" altLang="ja-JP" dirty="0"/>
             </a:br>
             <a:r>
-              <a:rPr kumimoji="1" lang="en-US" altLang="ja-JP"/>
+              <a:rPr kumimoji="1" lang="en-US" altLang="ja-JP" dirty="0"/>
               <a:t>XXXXXXXXXXXXXXXXXXX</a:t>
             </a:r>
             <a:endParaRPr kumimoji="1" lang="ja-JP" altLang="en-US"/>
@@ -884,71 +893,71 @@
           </a:lstStyle>
           <a:p>
             <a:r>
-              <a:rPr kumimoji="1" lang="en-US" altLang="ja-JP"/>
+              <a:rPr kumimoji="1" lang="en-US" altLang="ja-JP" dirty="0"/>
               <a:t> </a:t>
             </a:r>
             <a:r>
-              <a:rPr kumimoji="1" lang="en-US" altLang="ja-JP" err="1"/>
+              <a:rPr kumimoji="1" lang="en-US" altLang="ja-JP" dirty="0" err="1"/>
               <a:t>Meiryo</a:t>
             </a:r>
             <a:r>
-              <a:rPr kumimoji="1" lang="en-US" altLang="ja-JP"/>
+              <a:rPr kumimoji="1" lang="en-US" altLang="ja-JP" dirty="0"/>
               <a:t> UI 28ptXXXXX</a:t>
             </a:r>
           </a:p>
           <a:p>
             <a:r>
-              <a:rPr kumimoji="1" lang="en-US" altLang="ja-JP"/>
+              <a:rPr kumimoji="1" lang="en-US" altLang="ja-JP" dirty="0"/>
               <a:t> </a:t>
             </a:r>
             <a:r>
-              <a:rPr kumimoji="1" lang="en-US" altLang="ja-JP" err="1"/>
+              <a:rPr kumimoji="1" lang="en-US" altLang="ja-JP" dirty="0" err="1"/>
               <a:t>Meiryo</a:t>
             </a:r>
             <a:r>
-              <a:rPr kumimoji="1" lang="en-US" altLang="ja-JP"/>
+              <a:rPr kumimoji="1" lang="en-US" altLang="ja-JP" dirty="0"/>
               <a:t> UI 28ptXXXXX</a:t>
             </a:r>
           </a:p>
           <a:p>
             <a:r>
-              <a:rPr kumimoji="1" lang="en-US" altLang="ja-JP"/>
+              <a:rPr kumimoji="1" lang="en-US" altLang="ja-JP" dirty="0"/>
               <a:t> </a:t>
             </a:r>
             <a:r>
-              <a:rPr kumimoji="1" lang="en-US" altLang="ja-JP" err="1"/>
+              <a:rPr kumimoji="1" lang="en-US" altLang="ja-JP" dirty="0" err="1"/>
               <a:t>Meiryo</a:t>
             </a:r>
             <a:r>
-              <a:rPr kumimoji="1" lang="en-US" altLang="ja-JP"/>
+              <a:rPr kumimoji="1" lang="en-US" altLang="ja-JP" dirty="0"/>
               <a:t> UI 28ptXXXXX</a:t>
             </a:r>
           </a:p>
           <a:p>
             <a:r>
-              <a:rPr kumimoji="1" lang="en-US" altLang="ja-JP"/>
+              <a:rPr kumimoji="1" lang="en-US" altLang="ja-JP" dirty="0"/>
               <a:t> </a:t>
             </a:r>
             <a:r>
-              <a:rPr kumimoji="1" lang="en-US" altLang="ja-JP" err="1"/>
+              <a:rPr kumimoji="1" lang="en-US" altLang="ja-JP" dirty="0" err="1"/>
               <a:t>Meiryo</a:t>
             </a:r>
             <a:r>
-              <a:rPr kumimoji="1" lang="en-US" altLang="ja-JP"/>
+              <a:rPr kumimoji="1" lang="en-US" altLang="ja-JP" dirty="0"/>
               <a:t> UI 28ptXXXXX</a:t>
             </a:r>
           </a:p>
           <a:p>
             <a:r>
-              <a:rPr kumimoji="1" lang="en-US" altLang="ja-JP"/>
+              <a:rPr kumimoji="1" lang="en-US" altLang="ja-JP" dirty="0"/>
               <a:t> </a:t>
             </a:r>
             <a:r>
-              <a:rPr kumimoji="1" lang="en-US" altLang="ja-JP" err="1"/>
+              <a:rPr kumimoji="1" lang="en-US" altLang="ja-JP" dirty="0" err="1"/>
               <a:t>Meiryo</a:t>
             </a:r>
             <a:r>
-              <a:rPr kumimoji="1" lang="en-US" altLang="ja-JP"/>
+              <a:rPr kumimoji="1" lang="en-US" altLang="ja-JP" dirty="0"/>
               <a:t> UI 28ptXXXXX</a:t>
             </a:r>
             <a:endParaRPr kumimoji="1" lang="ja-JP" altLang="en-US"/>
@@ -1054,7 +1063,7 @@
               <a:pPr/>
               <a:t>‹#›</a:t>
             </a:fld>
-            <a:endParaRPr kumimoji="1" lang="en-US" altLang="ja-JP"/>
+            <a:endParaRPr kumimoji="1" lang="en-US" altLang="ja-JP" dirty="0"/>
           </a:p>
         </p:txBody>
       </p:sp>
@@ -1103,7 +1112,7 @@
               </a:rPr>
               <a:t>目次</a:t>
             </a:r>
-            <a:endParaRPr sz="2800" u="sng">
+            <a:endParaRPr sz="2800" u="sng" dirty="0">
               <a:solidFill>
                 <a:schemeClr val="accent2"/>
               </a:solidFill>
@@ -1223,60 +1232,60 @@
               </a:spcBef>
             </a:pPr>
             <a:r>
-              <a:rPr spc="150" err="1"/>
+              <a:rPr spc="150" dirty="0" err="1"/>
               <a:t>中表紙</a:t>
             </a:r>
             <a:r>
-              <a:rPr lang="en-US" spc="150"/>
+              <a:rPr lang="en-US" spc="150" dirty="0"/>
               <a:t>①</a:t>
             </a:r>
             <a:r>
-              <a:rPr spc="130"/>
+              <a:rPr spc="130" dirty="0"/>
               <a:t>:</a:t>
             </a:r>
             <a:r>
-              <a:rPr spc="130" err="1"/>
+              <a:rPr spc="130" dirty="0" err="1"/>
               <a:t>Meiryo</a:t>
             </a:r>
             <a:r>
-              <a:rPr spc="300"/>
+              <a:rPr spc="300" dirty="0"/>
               <a:t> </a:t>
             </a:r>
             <a:r>
-              <a:rPr spc="110"/>
+              <a:rPr spc="110" dirty="0"/>
               <a:t>UI</a:t>
             </a:r>
             <a:r>
-              <a:rPr lang="en-US" spc="110"/>
+              <a:rPr lang="en-US" spc="110" dirty="0"/>
               <a:t> 28</a:t>
             </a:r>
             <a:r>
-              <a:rPr spc="110"/>
+              <a:rPr spc="110" dirty="0"/>
               <a:t>pt</a:t>
             </a:r>
             <a:r>
-              <a:rPr lang="en-US" spc="110"/>
+              <a:rPr lang="en-US" spc="110" dirty="0"/>
               <a:t>/</a:t>
             </a:r>
             <a:r>
-              <a:rPr lang="en-US" spc="110" err="1"/>
+              <a:rPr lang="en-US" spc="110" dirty="0" err="1"/>
               <a:t>文字色:ブラック</a:t>
             </a:r>
             <a:br>
-              <a:rPr lang="en-US" spc="110"/>
+              <a:rPr lang="en-US" spc="110" dirty="0"/>
             </a:br>
             <a:r>
-              <a:rPr spc="130"/>
+              <a:rPr spc="130" dirty="0"/>
               <a:t>XXXXXXXXXXXXXXXX</a:t>
             </a:r>
             <a:br>
-              <a:rPr lang="en-US" spc="130"/>
+              <a:rPr lang="en-US" spc="130" dirty="0"/>
             </a:br>
             <a:r>
-              <a:rPr lang="en" altLang="ja-JP" spc="130"/>
+              <a:rPr lang="en" altLang="ja-JP" spc="130" dirty="0"/>
               <a:t>XXXXXXXXXXXXXXXX</a:t>
             </a:r>
-            <a:endParaRPr spc="130"/>
+            <a:endParaRPr spc="130" dirty="0"/>
           </a:p>
         </p:txBody>
       </p:sp>
@@ -1379,7 +1388,7 @@
               <a:pPr/>
               <a:t>‹#›</a:t>
             </a:fld>
-            <a:endParaRPr kumimoji="1" lang="en-US" altLang="ja-JP"/>
+            <a:endParaRPr kumimoji="1" lang="en-US" altLang="ja-JP" dirty="0"/>
           </a:p>
         </p:txBody>
       </p:sp>
@@ -1533,7 +1542,7 @@
               </a:spcBef>
             </a:pPr>
             <a:r>
-              <a:rPr spc="150" err="1">
+              <a:rPr spc="150" dirty="0" err="1">
                 <a:solidFill>
                   <a:srgbClr val="FFFFFF"/>
                 </a:solidFill>
@@ -1549,7 +1558,7 @@
               <a:t>②</a:t>
             </a:r>
             <a:r>
-              <a:rPr spc="130">
+              <a:rPr spc="130" dirty="0">
                 <a:solidFill>
                   <a:srgbClr val="FFFFFF"/>
                 </a:solidFill>
@@ -1557,7 +1566,7 @@
               <a:t>:</a:t>
             </a:r>
             <a:r>
-              <a:rPr spc="130" err="1">
+              <a:rPr spc="130" dirty="0" err="1">
                 <a:solidFill>
                   <a:srgbClr val="FFFFFF"/>
                 </a:solidFill>
@@ -1565,7 +1574,7 @@
               <a:t>Meiryo</a:t>
             </a:r>
             <a:r>
-              <a:rPr spc="300">
+              <a:rPr spc="300" dirty="0">
                 <a:solidFill>
                   <a:srgbClr val="FFFFFF"/>
                 </a:solidFill>
@@ -1573,7 +1582,7 @@
               <a:t> </a:t>
             </a:r>
             <a:r>
-              <a:rPr spc="110">
+              <a:rPr spc="110" dirty="0">
                 <a:solidFill>
                   <a:srgbClr val="FFFFFF"/>
                 </a:solidFill>
@@ -1581,7 +1590,7 @@
               <a:t>UI</a:t>
             </a:r>
             <a:r>
-              <a:rPr lang="en-US" spc="110">
+              <a:rPr lang="en-US" spc="110" dirty="0">
                 <a:solidFill>
                   <a:srgbClr val="FFFFFF"/>
                 </a:solidFill>
@@ -1589,7 +1598,7 @@
               <a:t> 28</a:t>
             </a:r>
             <a:r>
-              <a:rPr spc="110">
+              <a:rPr spc="110" dirty="0">
                 <a:solidFill>
                   <a:srgbClr val="FFFFFF"/>
                 </a:solidFill>
@@ -1597,7 +1606,7 @@
               <a:t>pt</a:t>
             </a:r>
             <a:r>
-              <a:rPr lang="en-US" spc="110">
+              <a:rPr lang="en-US" spc="110" dirty="0">
                 <a:solidFill>
                   <a:srgbClr val="FFFFFF"/>
                 </a:solidFill>
@@ -1605,7 +1614,7 @@
               <a:t>/</a:t>
             </a:r>
             <a:r>
-              <a:rPr lang="en-US" spc="110" err="1">
+              <a:rPr lang="en-US" spc="110" dirty="0" err="1">
                 <a:solidFill>
                   <a:srgbClr val="FFFFFF"/>
                 </a:solidFill>
@@ -1613,7 +1622,7 @@
               <a:t>文字色:ホワイト</a:t>
             </a:r>
             <a:r>
-              <a:rPr spc="110">
+              <a:rPr spc="110" dirty="0">
                 <a:solidFill>
                   <a:srgbClr val="FFFFFF"/>
                 </a:solidFill>
@@ -1621,14 +1630,14 @@
               <a:t> </a:t>
             </a:r>
             <a:br>
-              <a:rPr lang="en-US" spc="110">
+              <a:rPr lang="en-US" spc="110" dirty="0">
                 <a:solidFill>
                   <a:srgbClr val="FFFFFF"/>
                 </a:solidFill>
               </a:rPr>
             </a:br>
             <a:r>
-              <a:rPr spc="130">
+              <a:rPr spc="130" dirty="0">
                 <a:solidFill>
                   <a:srgbClr val="FFFFFF"/>
                 </a:solidFill>
@@ -1636,21 +1645,21 @@
               <a:t>XXXXXXXXXXXXXXXX</a:t>
             </a:r>
             <a:br>
-              <a:rPr lang="en-US" spc="130">
+              <a:rPr lang="en-US" spc="130" dirty="0">
                 <a:solidFill>
                   <a:srgbClr val="FFFFFF"/>
                 </a:solidFill>
               </a:rPr>
             </a:br>
             <a:r>
-              <a:rPr lang="en" altLang="ja-JP" spc="130">
+              <a:rPr lang="en" altLang="ja-JP" spc="130" dirty="0">
                 <a:solidFill>
                   <a:srgbClr val="FFFFFF"/>
                 </a:solidFill>
               </a:rPr>
               <a:t>XXXXXXXXXXXXXXXX</a:t>
             </a:r>
-            <a:endParaRPr spc="130">
+            <a:endParaRPr spc="130" dirty="0">
               <a:solidFill>
                 <a:srgbClr val="FFFFFF"/>
               </a:solidFill>
@@ -1757,7 +1766,7 @@
               <a:pPr/>
               <a:t>‹#›</a:t>
             </a:fld>
-            <a:endParaRPr kumimoji="1" lang="en-US" altLang="ja-JP"/>
+            <a:endParaRPr kumimoji="1" lang="en-US" altLang="ja-JP" dirty="0"/>
           </a:p>
         </p:txBody>
       </p:sp>
@@ -1977,7 +1986,7 @@
               <a:pPr/>
               <a:t>‹#›</a:t>
             </a:fld>
-            <a:endParaRPr kumimoji="1" lang="en-US" altLang="ja-JP"/>
+            <a:endParaRPr kumimoji="1" lang="en-US" altLang="ja-JP" dirty="0"/>
           </a:p>
         </p:txBody>
       </p:sp>
@@ -2025,15 +2034,15 @@
               <a:t>見出し</a:t>
             </a:r>
             <a:r>
-              <a:rPr kumimoji="1" lang="en-US" altLang="ja-JP"/>
+              <a:rPr kumimoji="1" lang="en-US" altLang="ja-JP" dirty="0"/>
               <a:t>:</a:t>
             </a:r>
             <a:r>
-              <a:rPr kumimoji="1" lang="en-US" altLang="ja-JP" err="1"/>
+              <a:rPr kumimoji="1" lang="en-US" altLang="ja-JP" dirty="0" err="1"/>
               <a:t>Meiryo</a:t>
             </a:r>
             <a:r>
-              <a:rPr kumimoji="1" lang="en-US" altLang="ja-JP"/>
+              <a:rPr kumimoji="1" lang="en-US" altLang="ja-JP" dirty="0"/>
               <a:t> UI 28pt/</a:t>
             </a:r>
             <a:r>
@@ -2041,7 +2050,7 @@
               <a:t>文字色</a:t>
             </a:r>
             <a:r>
-              <a:rPr kumimoji="1" lang="en-US" altLang="ja-JP"/>
+              <a:rPr kumimoji="1" lang="en-US" altLang="ja-JP" dirty="0"/>
               <a:t>:</a:t>
             </a:r>
             <a:r>
@@ -2122,164 +2131,164 @@
           </a:lstStyle>
           <a:p>
             <a:r>
-              <a:rPr lang="en-US" altLang="ja-JP" err="1"/>
+              <a:rPr lang="en-US" altLang="ja-JP" dirty="0" err="1"/>
               <a:t>小見出し:Meiryo</a:t>
             </a:r>
             <a:r>
-              <a:rPr lang="en-US" altLang="ja-JP"/>
+              <a:rPr lang="en-US" altLang="ja-JP" dirty="0"/>
               <a:t> UI Bold / 20pt / </a:t>
             </a:r>
             <a:r>
-              <a:rPr lang="en-US" altLang="ja-JP" err="1"/>
+              <a:rPr lang="en-US" altLang="ja-JP" dirty="0" err="1"/>
               <a:t>ブラック</a:t>
             </a:r>
-            <a:endParaRPr lang="en-US" altLang="ja-JP"/>
+            <a:endParaRPr lang="en-US" altLang="ja-JP" dirty="0"/>
           </a:p>
           <a:p>
             <a:pPr lvl="1"/>
             <a:r>
-              <a:rPr lang="en-US" altLang="ja-JP" err="1"/>
+              <a:rPr lang="en-US" altLang="ja-JP" dirty="0" err="1"/>
               <a:t>本文:Meiryo</a:t>
             </a:r>
             <a:r>
-              <a:rPr lang="en-US" altLang="ja-JP"/>
+              <a:rPr lang="en-US" altLang="ja-JP" dirty="0"/>
               <a:t> UI Regular/ 20pt / </a:t>
             </a:r>
             <a:r>
-              <a:rPr lang="en-US" altLang="ja-JP" err="1"/>
+              <a:rPr lang="en-US" altLang="ja-JP" dirty="0" err="1"/>
               <a:t>ブラック</a:t>
             </a:r>
-            <a:endParaRPr lang="en-US" altLang="ja-JP"/>
-          </a:p>
-          <a:p>
-            <a:r>
-              <a:rPr lang="en-US" altLang="ja-JP" err="1"/>
+            <a:endParaRPr lang="en-US" altLang="ja-JP" dirty="0"/>
+          </a:p>
+          <a:p>
+            <a:r>
+              <a:rPr lang="en-US" altLang="ja-JP" dirty="0" err="1"/>
               <a:t>小見出し:Meiryo</a:t>
             </a:r>
             <a:r>
-              <a:rPr lang="en-US" altLang="ja-JP"/>
+              <a:rPr lang="en-US" altLang="ja-JP" dirty="0"/>
               <a:t> UI Bold / 20pt / </a:t>
             </a:r>
             <a:r>
-              <a:rPr lang="en-US" altLang="ja-JP" err="1"/>
+              <a:rPr lang="en-US" altLang="ja-JP" dirty="0" err="1"/>
               <a:t>ブラック</a:t>
             </a:r>
-            <a:endParaRPr lang="en-US" altLang="ja-JP"/>
+            <a:endParaRPr lang="en-US" altLang="ja-JP" dirty="0"/>
           </a:p>
           <a:p>
             <a:pPr lvl="1"/>
             <a:r>
-              <a:rPr lang="en-US" altLang="ja-JP" err="1"/>
+              <a:rPr lang="en-US" altLang="ja-JP" dirty="0" err="1"/>
               <a:t>本文:Meiryo</a:t>
             </a:r>
             <a:r>
-              <a:rPr lang="en-US" altLang="ja-JP"/>
+              <a:rPr lang="en-US" altLang="ja-JP" dirty="0"/>
               <a:t> UI Regular/ 20pt / </a:t>
             </a:r>
             <a:r>
-              <a:rPr lang="en-US" altLang="ja-JP" err="1"/>
+              <a:rPr lang="en-US" altLang="ja-JP" dirty="0" err="1"/>
               <a:t>ブラック</a:t>
             </a:r>
-            <a:endParaRPr lang="en-US" altLang="ja-JP"/>
-          </a:p>
-          <a:p>
-            <a:r>
-              <a:rPr lang="en-US" altLang="ja-JP" err="1"/>
+            <a:endParaRPr lang="en-US" altLang="ja-JP" dirty="0"/>
+          </a:p>
+          <a:p>
+            <a:r>
+              <a:rPr lang="en-US" altLang="ja-JP" dirty="0" err="1"/>
               <a:t>小見出し:Meiryo</a:t>
             </a:r>
             <a:r>
-              <a:rPr lang="en-US" altLang="ja-JP"/>
+              <a:rPr lang="en-US" altLang="ja-JP" dirty="0"/>
               <a:t> UI Bold / 20pt / </a:t>
             </a:r>
             <a:r>
-              <a:rPr lang="en-US" altLang="ja-JP" err="1"/>
+              <a:rPr lang="en-US" altLang="ja-JP" dirty="0" err="1"/>
               <a:t>ブラック</a:t>
             </a:r>
-            <a:endParaRPr lang="en-US" altLang="ja-JP"/>
+            <a:endParaRPr lang="en-US" altLang="ja-JP" dirty="0"/>
           </a:p>
           <a:p>
             <a:pPr lvl="1"/>
             <a:r>
-              <a:rPr lang="en-US" altLang="ja-JP" err="1"/>
+              <a:rPr lang="en-US" altLang="ja-JP" dirty="0" err="1"/>
               <a:t>本文:Meiryo</a:t>
             </a:r>
             <a:r>
-              <a:rPr lang="en-US" altLang="ja-JP"/>
+              <a:rPr lang="en-US" altLang="ja-JP" dirty="0"/>
               <a:t> UI Regular/ 20pt / </a:t>
             </a:r>
             <a:r>
-              <a:rPr lang="en-US" altLang="ja-JP" err="1"/>
+              <a:rPr lang="en-US" altLang="ja-JP" dirty="0" err="1"/>
               <a:t>ブラック</a:t>
             </a:r>
-            <a:endParaRPr lang="en-US" altLang="ja-JP"/>
-          </a:p>
-          <a:p>
-            <a:r>
-              <a:rPr lang="en-US" altLang="ja-JP" err="1"/>
+            <a:endParaRPr lang="en-US" altLang="ja-JP" dirty="0"/>
+          </a:p>
+          <a:p>
+            <a:r>
+              <a:rPr lang="en-US" altLang="ja-JP" dirty="0" err="1"/>
               <a:t>小見出し:Meiryo</a:t>
             </a:r>
             <a:r>
-              <a:rPr lang="en-US" altLang="ja-JP"/>
+              <a:rPr lang="en-US" altLang="ja-JP" dirty="0"/>
               <a:t> UI Bold / 20pt / </a:t>
             </a:r>
             <a:r>
-              <a:rPr lang="en-US" altLang="ja-JP" err="1"/>
+              <a:rPr lang="en-US" altLang="ja-JP" dirty="0" err="1"/>
               <a:t>ブラック</a:t>
             </a:r>
-            <a:endParaRPr lang="en-US" altLang="ja-JP"/>
+            <a:endParaRPr lang="en-US" altLang="ja-JP" dirty="0"/>
           </a:p>
           <a:p>
             <a:pPr lvl="1"/>
             <a:r>
-              <a:rPr lang="en-US" altLang="ja-JP" err="1"/>
+              <a:rPr lang="en-US" altLang="ja-JP" dirty="0" err="1"/>
               <a:t>本文:Meiryo</a:t>
             </a:r>
             <a:r>
-              <a:rPr lang="en-US" altLang="ja-JP"/>
+              <a:rPr lang="en-US" altLang="ja-JP" dirty="0"/>
               <a:t> UI Regular/ 20pt / </a:t>
             </a:r>
             <a:r>
-              <a:rPr lang="en-US" altLang="ja-JP" err="1"/>
+              <a:rPr lang="en-US" altLang="ja-JP" dirty="0" err="1"/>
               <a:t>ブラック</a:t>
             </a:r>
-            <a:endParaRPr lang="en-US" altLang="ja-JP"/>
-          </a:p>
-          <a:p>
-            <a:r>
-              <a:rPr lang="en-US" altLang="ja-JP" err="1"/>
+            <a:endParaRPr lang="en-US" altLang="ja-JP" dirty="0"/>
+          </a:p>
+          <a:p>
+            <a:r>
+              <a:rPr lang="en-US" altLang="ja-JP" dirty="0" err="1"/>
               <a:t>小見出し:Meiryo</a:t>
             </a:r>
             <a:r>
-              <a:rPr lang="en-US" altLang="ja-JP"/>
+              <a:rPr lang="en-US" altLang="ja-JP" dirty="0"/>
               <a:t> UI Bold / 20pt / </a:t>
             </a:r>
             <a:r>
-              <a:rPr lang="en-US" altLang="ja-JP" err="1"/>
+              <a:rPr lang="en-US" altLang="ja-JP" dirty="0" err="1"/>
               <a:t>ブラック</a:t>
             </a:r>
-            <a:endParaRPr lang="en-US" altLang="ja-JP"/>
+            <a:endParaRPr lang="en-US" altLang="ja-JP" dirty="0"/>
           </a:p>
           <a:p>
             <a:pPr lvl="1"/>
             <a:r>
-              <a:rPr lang="en-US" altLang="ja-JP" err="1"/>
+              <a:rPr lang="en-US" altLang="ja-JP" dirty="0" err="1"/>
               <a:t>本文:Meiryo</a:t>
             </a:r>
             <a:r>
-              <a:rPr lang="en-US" altLang="ja-JP"/>
+              <a:rPr lang="en-US" altLang="ja-JP" dirty="0"/>
               <a:t> UI Regular/ 20pt / </a:t>
             </a:r>
             <a:r>
-              <a:rPr lang="en-US" altLang="ja-JP" err="1"/>
+              <a:rPr lang="en-US" altLang="ja-JP" dirty="0" err="1"/>
               <a:t>ブラック</a:t>
             </a:r>
-            <a:endParaRPr lang="en-US" altLang="ja-JP"/>
-          </a:p>
-          <a:p>
-            <a:endParaRPr lang="en-US" altLang="ja-JP"/>
-          </a:p>
-          <a:p>
-            <a:endParaRPr lang="en-US" altLang="ja-JP"/>
+            <a:endParaRPr lang="en-US" altLang="ja-JP" dirty="0"/>
+          </a:p>
+          <a:p>
+            <a:endParaRPr lang="en-US" altLang="ja-JP" dirty="0"/>
+          </a:p>
+          <a:p>
+            <a:endParaRPr lang="en-US" altLang="ja-JP" dirty="0"/>
           </a:p>
         </p:txBody>
       </p:sp>
@@ -2323,19 +2332,19 @@
           </a:lstStyle>
           <a:p>
             <a:r>
-              <a:rPr lang="en-US" altLang="ja-JP" err="1"/>
+              <a:rPr lang="en-US" altLang="ja-JP" dirty="0" err="1"/>
               <a:t>見出し:Meiryo</a:t>
             </a:r>
             <a:r>
-              <a:rPr lang="en-US" altLang="ja-JP"/>
+              <a:rPr lang="en-US" altLang="ja-JP" dirty="0"/>
               <a:t> UI 24pt / </a:t>
             </a:r>
             <a:r>
-              <a:rPr lang="en-US" altLang="ja-JP" err="1"/>
+              <a:rPr lang="en-US" altLang="ja-JP" dirty="0" err="1"/>
               <a:t>セグメントカラ</a:t>
             </a:r>
             <a:r>
-              <a:rPr lang="en-US" altLang="ja-JP"/>
+              <a:rPr lang="en-US" altLang="ja-JP" dirty="0"/>
               <a:t>ー</a:t>
             </a:r>
           </a:p>
@@ -2531,7 +2540,7 @@
               <a:pPr/>
               <a:t>‹#›</a:t>
             </a:fld>
-            <a:endParaRPr kumimoji="1" lang="en-US" altLang="ja-JP"/>
+            <a:endParaRPr kumimoji="1" lang="en-US" altLang="ja-JP" dirty="0"/>
           </a:p>
         </p:txBody>
       </p:sp>
@@ -2579,15 +2588,15 @@
               <a:t>見出し</a:t>
             </a:r>
             <a:r>
-              <a:rPr kumimoji="1" lang="en-US" altLang="ja-JP"/>
+              <a:rPr kumimoji="1" lang="en-US" altLang="ja-JP" dirty="0"/>
               <a:t>:</a:t>
             </a:r>
             <a:r>
-              <a:rPr kumimoji="1" lang="en-US" altLang="ja-JP" err="1"/>
+              <a:rPr kumimoji="1" lang="en-US" altLang="ja-JP" dirty="0" err="1"/>
               <a:t>Meiryo</a:t>
             </a:r>
             <a:r>
-              <a:rPr kumimoji="1" lang="en-US" altLang="ja-JP"/>
+              <a:rPr kumimoji="1" lang="en-US" altLang="ja-JP" dirty="0"/>
               <a:t> UI 28pt/</a:t>
             </a:r>
             <a:r>
@@ -2595,7 +2604,7 @@
               <a:t>文字色</a:t>
             </a:r>
             <a:r>
-              <a:rPr kumimoji="1" lang="en-US" altLang="ja-JP"/>
+              <a:rPr kumimoji="1" lang="en-US" altLang="ja-JP" dirty="0"/>
               <a:t>:</a:t>
             </a:r>
             <a:r>
@@ -2676,164 +2685,164 @@
           </a:lstStyle>
           <a:p>
             <a:r>
-              <a:rPr lang="en-US" altLang="ja-JP" err="1"/>
+              <a:rPr lang="en-US" altLang="ja-JP" dirty="0" err="1"/>
               <a:t>小見出し:Meiryo</a:t>
             </a:r>
             <a:r>
-              <a:rPr lang="en-US" altLang="ja-JP"/>
+              <a:rPr lang="en-US" altLang="ja-JP" dirty="0"/>
               <a:t> UI Bold / 20pt / </a:t>
             </a:r>
             <a:r>
-              <a:rPr lang="en-US" altLang="ja-JP" err="1"/>
+              <a:rPr lang="en-US" altLang="ja-JP" dirty="0" err="1"/>
               <a:t>ブラック</a:t>
             </a:r>
-            <a:endParaRPr lang="en-US" altLang="ja-JP"/>
+            <a:endParaRPr lang="en-US" altLang="ja-JP" dirty="0"/>
           </a:p>
           <a:p>
             <a:pPr lvl="1"/>
             <a:r>
-              <a:rPr lang="en-US" altLang="ja-JP" err="1"/>
+              <a:rPr lang="en-US" altLang="ja-JP" dirty="0" err="1"/>
               <a:t>本文:Meiryo</a:t>
             </a:r>
             <a:r>
-              <a:rPr lang="en-US" altLang="ja-JP"/>
+              <a:rPr lang="en-US" altLang="ja-JP" dirty="0"/>
               <a:t> UI Regular/ 20pt / </a:t>
             </a:r>
             <a:r>
-              <a:rPr lang="en-US" altLang="ja-JP" err="1"/>
+              <a:rPr lang="en-US" altLang="ja-JP" dirty="0" err="1"/>
               <a:t>ブラック</a:t>
             </a:r>
-            <a:endParaRPr lang="en-US" altLang="ja-JP"/>
-          </a:p>
-          <a:p>
-            <a:r>
-              <a:rPr lang="en-US" altLang="ja-JP" err="1"/>
+            <a:endParaRPr lang="en-US" altLang="ja-JP" dirty="0"/>
+          </a:p>
+          <a:p>
+            <a:r>
+              <a:rPr lang="en-US" altLang="ja-JP" dirty="0" err="1"/>
               <a:t>小見出し:Meiryo</a:t>
             </a:r>
             <a:r>
-              <a:rPr lang="en-US" altLang="ja-JP"/>
+              <a:rPr lang="en-US" altLang="ja-JP" dirty="0"/>
               <a:t> UI Bold / 20pt / </a:t>
             </a:r>
             <a:r>
-              <a:rPr lang="en-US" altLang="ja-JP" err="1"/>
+              <a:rPr lang="en-US" altLang="ja-JP" dirty="0" err="1"/>
               <a:t>ブラック</a:t>
             </a:r>
-            <a:endParaRPr lang="en-US" altLang="ja-JP"/>
+            <a:endParaRPr lang="en-US" altLang="ja-JP" dirty="0"/>
           </a:p>
           <a:p>
             <a:pPr lvl="1"/>
             <a:r>
-              <a:rPr lang="en-US" altLang="ja-JP" err="1"/>
+              <a:rPr lang="en-US" altLang="ja-JP" dirty="0" err="1"/>
               <a:t>本文:Meiryo</a:t>
             </a:r>
             <a:r>
-              <a:rPr lang="en-US" altLang="ja-JP"/>
+              <a:rPr lang="en-US" altLang="ja-JP" dirty="0"/>
               <a:t> UI Regular/ 20pt / </a:t>
             </a:r>
             <a:r>
-              <a:rPr lang="en-US" altLang="ja-JP" err="1"/>
+              <a:rPr lang="en-US" altLang="ja-JP" dirty="0" err="1"/>
               <a:t>ブラック</a:t>
             </a:r>
-            <a:endParaRPr lang="en-US" altLang="ja-JP"/>
-          </a:p>
-          <a:p>
-            <a:r>
-              <a:rPr lang="en-US" altLang="ja-JP" err="1"/>
+            <a:endParaRPr lang="en-US" altLang="ja-JP" dirty="0"/>
+          </a:p>
+          <a:p>
+            <a:r>
+              <a:rPr lang="en-US" altLang="ja-JP" dirty="0" err="1"/>
               <a:t>小見出し:Meiryo</a:t>
             </a:r>
             <a:r>
-              <a:rPr lang="en-US" altLang="ja-JP"/>
+              <a:rPr lang="en-US" altLang="ja-JP" dirty="0"/>
               <a:t> UI Bold / 20pt / </a:t>
             </a:r>
             <a:r>
-              <a:rPr lang="en-US" altLang="ja-JP" err="1"/>
+              <a:rPr lang="en-US" altLang="ja-JP" dirty="0" err="1"/>
               <a:t>ブラック</a:t>
             </a:r>
-            <a:endParaRPr lang="en-US" altLang="ja-JP"/>
+            <a:endParaRPr lang="en-US" altLang="ja-JP" dirty="0"/>
           </a:p>
           <a:p>
             <a:pPr lvl="1"/>
             <a:r>
-              <a:rPr lang="en-US" altLang="ja-JP" err="1"/>
+              <a:rPr lang="en-US" altLang="ja-JP" dirty="0" err="1"/>
               <a:t>本文:Meiryo</a:t>
             </a:r>
             <a:r>
-              <a:rPr lang="en-US" altLang="ja-JP"/>
+              <a:rPr lang="en-US" altLang="ja-JP" dirty="0"/>
               <a:t> UI Regular/ 20pt / </a:t>
             </a:r>
             <a:r>
-              <a:rPr lang="en-US" altLang="ja-JP" err="1"/>
+              <a:rPr lang="en-US" altLang="ja-JP" dirty="0" err="1"/>
               <a:t>ブラック</a:t>
             </a:r>
-            <a:endParaRPr lang="en-US" altLang="ja-JP"/>
-          </a:p>
-          <a:p>
-            <a:r>
-              <a:rPr lang="en-US" altLang="ja-JP" err="1"/>
+            <a:endParaRPr lang="en-US" altLang="ja-JP" dirty="0"/>
+          </a:p>
+          <a:p>
+            <a:r>
+              <a:rPr lang="en-US" altLang="ja-JP" dirty="0" err="1"/>
               <a:t>小見出し:Meiryo</a:t>
             </a:r>
             <a:r>
-              <a:rPr lang="en-US" altLang="ja-JP"/>
+              <a:rPr lang="en-US" altLang="ja-JP" dirty="0"/>
               <a:t> UI Bold / 20pt / </a:t>
             </a:r>
             <a:r>
-              <a:rPr lang="en-US" altLang="ja-JP" err="1"/>
+              <a:rPr lang="en-US" altLang="ja-JP" dirty="0" err="1"/>
               <a:t>ブラック</a:t>
             </a:r>
-            <a:endParaRPr lang="en-US" altLang="ja-JP"/>
+            <a:endParaRPr lang="en-US" altLang="ja-JP" dirty="0"/>
           </a:p>
           <a:p>
             <a:pPr lvl="1"/>
             <a:r>
-              <a:rPr lang="en-US" altLang="ja-JP" err="1"/>
+              <a:rPr lang="en-US" altLang="ja-JP" dirty="0" err="1"/>
               <a:t>本文:Meiryo</a:t>
             </a:r>
             <a:r>
-              <a:rPr lang="en-US" altLang="ja-JP"/>
+              <a:rPr lang="en-US" altLang="ja-JP" dirty="0"/>
               <a:t> UI Regular/ 20pt / </a:t>
             </a:r>
             <a:r>
-              <a:rPr lang="en-US" altLang="ja-JP" err="1"/>
+              <a:rPr lang="en-US" altLang="ja-JP" dirty="0" err="1"/>
               <a:t>ブラック</a:t>
             </a:r>
-            <a:endParaRPr lang="en-US" altLang="ja-JP"/>
-          </a:p>
-          <a:p>
-            <a:r>
-              <a:rPr lang="en-US" altLang="ja-JP" err="1"/>
+            <a:endParaRPr lang="en-US" altLang="ja-JP" dirty="0"/>
+          </a:p>
+          <a:p>
+            <a:r>
+              <a:rPr lang="en-US" altLang="ja-JP" dirty="0" err="1"/>
               <a:t>小見出し:Meiryo</a:t>
             </a:r>
             <a:r>
-              <a:rPr lang="en-US" altLang="ja-JP"/>
+              <a:rPr lang="en-US" altLang="ja-JP" dirty="0"/>
               <a:t> UI Bold / 20pt / </a:t>
             </a:r>
             <a:r>
-              <a:rPr lang="en-US" altLang="ja-JP" err="1"/>
+              <a:rPr lang="en-US" altLang="ja-JP" dirty="0" err="1"/>
               <a:t>ブラック</a:t>
             </a:r>
-            <a:endParaRPr lang="en-US" altLang="ja-JP"/>
+            <a:endParaRPr lang="en-US" altLang="ja-JP" dirty="0"/>
           </a:p>
           <a:p>
             <a:pPr lvl="1"/>
             <a:r>
-              <a:rPr lang="en-US" altLang="ja-JP" err="1"/>
+              <a:rPr lang="en-US" altLang="ja-JP" dirty="0" err="1"/>
               <a:t>本文:Meiryo</a:t>
             </a:r>
             <a:r>
-              <a:rPr lang="en-US" altLang="ja-JP"/>
+              <a:rPr lang="en-US" altLang="ja-JP" dirty="0"/>
               <a:t> UI Regular/ 20pt / </a:t>
             </a:r>
             <a:r>
-              <a:rPr lang="en-US" altLang="ja-JP" err="1"/>
+              <a:rPr lang="en-US" altLang="ja-JP" dirty="0" err="1"/>
               <a:t>ブラック</a:t>
             </a:r>
-            <a:endParaRPr lang="en-US" altLang="ja-JP"/>
-          </a:p>
-          <a:p>
-            <a:endParaRPr lang="en-US" altLang="ja-JP"/>
-          </a:p>
-          <a:p>
-            <a:endParaRPr lang="en-US" altLang="ja-JP"/>
+            <a:endParaRPr lang="en-US" altLang="ja-JP" dirty="0"/>
+          </a:p>
+          <a:p>
+            <a:endParaRPr lang="en-US" altLang="ja-JP" dirty="0"/>
+          </a:p>
+          <a:p>
+            <a:endParaRPr lang="en-US" altLang="ja-JP" dirty="0"/>
           </a:p>
         </p:txBody>
       </p:sp>
@@ -2877,19 +2886,19 @@
           </a:lstStyle>
           <a:p>
             <a:r>
-              <a:rPr lang="en-US" altLang="ja-JP" err="1"/>
+              <a:rPr lang="en-US" altLang="ja-JP" dirty="0" err="1"/>
               <a:t>見出し:Meiryo</a:t>
             </a:r>
             <a:r>
-              <a:rPr lang="en-US" altLang="ja-JP"/>
+              <a:rPr lang="en-US" altLang="ja-JP" dirty="0"/>
               <a:t> UI 24pt / </a:t>
             </a:r>
             <a:r>
-              <a:rPr lang="en-US" altLang="ja-JP" err="1"/>
+              <a:rPr lang="en-US" altLang="ja-JP" dirty="0" err="1"/>
               <a:t>セグメントカラ</a:t>
             </a:r>
             <a:r>
-              <a:rPr lang="en-US" altLang="ja-JP"/>
+              <a:rPr lang="en-US" altLang="ja-JP" dirty="0"/>
               <a:t>ー</a:t>
             </a:r>
           </a:p>
@@ -3085,7 +3094,7 @@
               <a:pPr/>
               <a:t>‹#›</a:t>
             </a:fld>
-            <a:endParaRPr kumimoji="1" lang="en-US" altLang="ja-JP"/>
+            <a:endParaRPr kumimoji="1" lang="en-US" altLang="ja-JP" dirty="0"/>
           </a:p>
         </p:txBody>
       </p:sp>
@@ -3145,6 +3154,11 @@
   <p:clrMapOvr>
     <a:masterClrMapping/>
   </p:clrMapOvr>
+  <p:extLst>
+    <p:ext uri="{DCECCB84-F9BA-43D5-87BE-67443E8EF086}">
+      <p15:sldGuideLst xmlns:p15="http://schemas.microsoft.com/office/powerpoint/2012/main"/>
+    </p:ext>
+  </p:extLst>
 </p:sldLayout>
 </file>
 
@@ -3297,7 +3311,7 @@
               <a:pPr/>
               <a:t>‹#›</a:t>
             </a:fld>
-            <a:endParaRPr kumimoji="1" lang="en-US" altLang="ja-JP"/>
+            <a:endParaRPr kumimoji="1" lang="en-US" altLang="ja-JP" dirty="0"/>
           </a:p>
         </p:txBody>
       </p:sp>
@@ -3534,14 +3548,14 @@
           <a:lstStyle/>
           <a:p>
             <a:r>
-              <a:rPr kumimoji="1" lang="en-US" altLang="ja-JP" sz="2400"/>
+              <a:rPr kumimoji="1" lang="en-US" altLang="ja-JP" sz="2400" dirty="0"/>
               <a:t>R with Pharma Lab</a:t>
             </a:r>
             <a:br>
-              <a:rPr kumimoji="1" lang="en-US" altLang="ja-JP"/>
+              <a:rPr kumimoji="1" lang="en-US" altLang="ja-JP" dirty="0"/>
             </a:br>
             <a:r>
-              <a:rPr kumimoji="1" lang="ja-JP" altLang="en-US"/>
+              <a:rPr kumimoji="1" lang="ja-JP" altLang="en-US" dirty="0"/>
               <a:t>はじめてのシミュレーション</a:t>
             </a:r>
           </a:p>
@@ -3580,7 +3594,7 @@
               </a:lnSpc>
             </a:pPr>
             <a:r>
-              <a:rPr lang="ja-JP" altLang="en-US" sz="1200">
+              <a:rPr lang="ja-JP" altLang="en-US" sz="1200" dirty="0">
                 <a:solidFill>
                   <a:schemeClr val="tx1"/>
                 </a:solidFill>
@@ -3589,7 +3603,7 @@
               </a:rPr>
               <a:t>中川　雄貴</a:t>
             </a:r>
-            <a:endParaRPr lang="en" altLang="ja-JP" sz="1200">
+            <a:endParaRPr lang="en" altLang="ja-JP" sz="1200" dirty="0">
               <a:solidFill>
                 <a:schemeClr val="tx1"/>
               </a:solidFill>
@@ -3628,7 +3642,7 @@
           <a:lstStyle/>
           <a:p>
             <a:r>
-              <a:rPr kumimoji="1" lang="en-US" altLang="ja-JP" sz="1200">
+              <a:rPr kumimoji="1" lang="en-US" altLang="ja-JP" sz="1200" dirty="0">
                 <a:solidFill>
                   <a:schemeClr val="tx1"/>
                 </a:solidFill>
@@ -3638,7 +3652,7 @@
               <a:t>2026</a:t>
             </a:r>
             <a:r>
-              <a:rPr kumimoji="1" lang="ja-JP" altLang="en-US" sz="1200">
+              <a:rPr kumimoji="1" lang="ja-JP" altLang="en-US" sz="1200" dirty="0">
                 <a:solidFill>
                   <a:schemeClr val="tx1"/>
                 </a:solidFill>
@@ -3648,7 +3662,7 @@
               <a:t>年</a:t>
             </a:r>
             <a:r>
-              <a:rPr kumimoji="1" lang="en-US" altLang="ja-JP" sz="1200">
+              <a:rPr kumimoji="1" lang="en-US" altLang="ja-JP" sz="1200" dirty="0">
                 <a:solidFill>
                   <a:schemeClr val="tx1"/>
                 </a:solidFill>
@@ -3658,7 +3672,7 @@
               <a:t>4</a:t>
             </a:r>
             <a:r>
-              <a:rPr kumimoji="1" lang="ja-JP" altLang="en-US" sz="1200">
+              <a:rPr kumimoji="1" lang="ja-JP" altLang="en-US" sz="1200" dirty="0">
                 <a:solidFill>
                   <a:schemeClr val="tx1"/>
                 </a:solidFill>
@@ -3668,7 +3682,7 @@
               <a:t>月</a:t>
             </a:r>
             <a:r>
-              <a:rPr kumimoji="1" lang="en-US" altLang="ja-JP" sz="1200">
+              <a:rPr kumimoji="1" lang="en-US" altLang="ja-JP" sz="1200" dirty="0">
                 <a:solidFill>
                   <a:schemeClr val="tx1"/>
                 </a:solidFill>
@@ -3678,7 +3692,7 @@
               <a:t>8</a:t>
             </a:r>
             <a:r>
-              <a:rPr kumimoji="1" lang="ja-JP" altLang="en-US" sz="1200">
+              <a:rPr kumimoji="1" lang="ja-JP" altLang="en-US" sz="1200" dirty="0">
                 <a:solidFill>
                   <a:schemeClr val="tx1"/>
                 </a:solidFill>
@@ -3751,7 +3765,7 @@
               <a:rPr kumimoji="1" lang="en-US" altLang="ja-JP" smtClean="0"/>
               <a:t>10</a:t>
             </a:fld>
-            <a:endParaRPr kumimoji="1" lang="en-US" altLang="ja-JP"/>
+            <a:endParaRPr kumimoji="1" lang="en-US" altLang="ja-JP" dirty="0"/>
           </a:p>
         </p:txBody>
       </p:sp>
@@ -3784,227 +3798,227 @@
           <a:lstStyle/>
           <a:p>
             <a:r>
-              <a:rPr lang="en-US" altLang="ja-JP" sz="1600"/>
+              <a:rPr lang="en-US" altLang="ja-JP" sz="1600" dirty="0"/>
               <a:t>data &lt;- c(55, 24, 97, 77, 63, 86, 5, 42, 30, 14)</a:t>
             </a:r>
           </a:p>
           <a:p>
             <a:r>
-              <a:rPr lang="en-US" altLang="ja-JP" sz="1600"/>
+              <a:rPr lang="en-US" altLang="ja-JP" sz="1600" dirty="0"/>
               <a:t>B &lt;- 10000</a:t>
             </a:r>
           </a:p>
           <a:p>
-            <a:endParaRPr lang="en-US" altLang="ja-JP" sz="1600"/>
-          </a:p>
-          <a:p>
-            <a:r>
-              <a:rPr lang="en-US" altLang="ja-JP" sz="1600" err="1"/>
+            <a:endParaRPr lang="en-US" altLang="ja-JP" sz="1600" dirty="0"/>
+          </a:p>
+          <a:p>
+            <a:r>
+              <a:rPr lang="en-US" altLang="ja-JP" sz="1600" dirty="0" err="1"/>
               <a:t>boot_data</a:t>
             </a:r>
             <a:r>
-              <a:rPr lang="en-US" altLang="ja-JP" sz="1600"/>
+              <a:rPr lang="en-US" altLang="ja-JP" sz="1600" dirty="0"/>
               <a:t> &lt;- rep(0, each = B)</a:t>
             </a:r>
           </a:p>
           <a:p>
-            <a:endParaRPr lang="en-US" altLang="ja-JP" sz="1600"/>
-          </a:p>
-          <a:p>
-            <a:r>
-              <a:rPr lang="en-US" altLang="ja-JP" sz="1600" err="1"/>
+            <a:endParaRPr lang="en-US" altLang="ja-JP" sz="1600" dirty="0"/>
+          </a:p>
+          <a:p>
+            <a:r>
+              <a:rPr lang="en-US" altLang="ja-JP" sz="1600" dirty="0" err="1"/>
               <a:t>set.seed</a:t>
             </a:r>
             <a:r>
-              <a:rPr lang="en-US" altLang="ja-JP" sz="1600"/>
+              <a:rPr lang="en-US" altLang="ja-JP" sz="1600" dirty="0"/>
               <a:t>(123)</a:t>
             </a:r>
           </a:p>
           <a:p>
-            <a:endParaRPr lang="en-US" altLang="ja-JP" sz="1600"/>
-          </a:p>
-          <a:p>
-            <a:r>
-              <a:rPr lang="en-US" altLang="ja-JP" sz="1600"/>
+            <a:endParaRPr lang="en-US" altLang="ja-JP" sz="1600" dirty="0"/>
+          </a:p>
+          <a:p>
+            <a:r>
+              <a:rPr lang="en-US" altLang="ja-JP" sz="1600" dirty="0"/>
               <a:t>for (</a:t>
             </a:r>
             <a:r>
-              <a:rPr lang="en-US" altLang="ja-JP" sz="1600" err="1"/>
+              <a:rPr lang="en-US" altLang="ja-JP" sz="1600" dirty="0" err="1"/>
               <a:t>i</a:t>
             </a:r>
             <a:r>
-              <a:rPr lang="en-US" altLang="ja-JP" sz="1600"/>
+              <a:rPr lang="en-US" altLang="ja-JP" sz="1600" dirty="0"/>
               <a:t> in 1:B) {</a:t>
             </a:r>
           </a:p>
           <a:p>
             <a:r>
-              <a:rPr lang="en-US" altLang="ja-JP" sz="1600"/>
+              <a:rPr lang="en-US" altLang="ja-JP" sz="1600" dirty="0"/>
               <a:t>  </a:t>
             </a:r>
             <a:r>
-              <a:rPr lang="en-US" altLang="ja-JP" sz="1600" err="1"/>
+              <a:rPr lang="en-US" altLang="ja-JP" sz="1600" dirty="0" err="1"/>
               <a:t>boot_data</a:t>
             </a:r>
             <a:r>
-              <a:rPr lang="en-US" altLang="ja-JP" sz="1600"/>
+              <a:rPr lang="en-US" altLang="ja-JP" sz="1600" dirty="0"/>
               <a:t>[</a:t>
             </a:r>
             <a:r>
-              <a:rPr lang="en-US" altLang="ja-JP" sz="1600" err="1"/>
+              <a:rPr lang="en-US" altLang="ja-JP" sz="1600" dirty="0" err="1"/>
               <a:t>i</a:t>
             </a:r>
             <a:r>
-              <a:rPr lang="en-US" altLang="ja-JP" sz="1600"/>
+              <a:rPr lang="en-US" altLang="ja-JP" sz="1600" dirty="0"/>
               <a:t>] &lt;- mean(sample(data, size=length(data), replace=TRUE))</a:t>
             </a:r>
           </a:p>
           <a:p>
             <a:r>
-              <a:rPr lang="en-US" altLang="ja-JP" sz="1600"/>
+              <a:rPr lang="en-US" altLang="ja-JP" sz="1600" dirty="0"/>
               <a:t>}</a:t>
             </a:r>
           </a:p>
           <a:p>
-            <a:endParaRPr lang="en-US" altLang="ja-JP" sz="1600"/>
-          </a:p>
-          <a:p>
-            <a:r>
-              <a:rPr lang="en-US" altLang="ja-JP" sz="1600"/>
+            <a:endParaRPr lang="en-US" altLang="ja-JP" sz="1600" dirty="0"/>
+          </a:p>
+          <a:p>
+            <a:r>
+              <a:rPr lang="en-US" altLang="ja-JP" sz="1600" dirty="0"/>
               <a:t>mean(</a:t>
             </a:r>
             <a:r>
-              <a:rPr lang="en-US" altLang="ja-JP" sz="1600" err="1"/>
+              <a:rPr lang="en-US" altLang="ja-JP" sz="1600" dirty="0" err="1"/>
               <a:t>boot_data</a:t>
             </a:r>
             <a:r>
-              <a:rPr lang="en-US" altLang="ja-JP" sz="1600"/>
+              <a:rPr lang="en-US" altLang="ja-JP" sz="1600" dirty="0"/>
               <a:t>)</a:t>
             </a:r>
           </a:p>
           <a:p>
             <a:r>
-              <a:rPr lang="en-US" altLang="ja-JP" sz="1600"/>
+              <a:rPr lang="en-US" altLang="ja-JP" sz="1600" dirty="0"/>
               <a:t>quantile(</a:t>
             </a:r>
             <a:r>
-              <a:rPr lang="en-US" altLang="ja-JP" sz="1600" err="1"/>
+              <a:rPr lang="en-US" altLang="ja-JP" sz="1600" dirty="0" err="1"/>
               <a:t>boot_data</a:t>
             </a:r>
             <a:r>
-              <a:rPr lang="en-US" altLang="ja-JP" sz="1600"/>
+              <a:rPr lang="en-US" altLang="ja-JP" sz="1600" dirty="0"/>
               <a:t>, prob=c(0.025, 0.975))</a:t>
             </a:r>
           </a:p>
           <a:p>
-            <a:endParaRPr lang="en-US" altLang="ja-JP" sz="1600"/>
-          </a:p>
-          <a:p>
-            <a:r>
-              <a:rPr lang="en-US" altLang="ja-JP" sz="1600"/>
+            <a:endParaRPr lang="en-US" altLang="ja-JP" sz="1600" dirty="0"/>
+          </a:p>
+          <a:p>
+            <a:r>
+              <a:rPr lang="en-US" altLang="ja-JP" sz="1600" dirty="0"/>
               <a:t>hist(</a:t>
             </a:r>
             <a:r>
-              <a:rPr lang="en-US" altLang="ja-JP" sz="1600" err="1"/>
+              <a:rPr lang="en-US" altLang="ja-JP" sz="1600" dirty="0" err="1"/>
               <a:t>boot_data</a:t>
             </a:r>
             <a:r>
-              <a:rPr lang="en-US" altLang="ja-JP" sz="1600"/>
+              <a:rPr lang="en-US" altLang="ja-JP" sz="1600" dirty="0"/>
               <a:t>, breaks = 10, </a:t>
             </a:r>
             <a:r>
-              <a:rPr lang="en-US" altLang="ja-JP" sz="1600" err="1"/>
+              <a:rPr lang="en-US" altLang="ja-JP" sz="1600" dirty="0" err="1"/>
               <a:t>xlim</a:t>
             </a:r>
             <a:r>
-              <a:rPr lang="en-US" altLang="ja-JP" sz="1600"/>
+              <a:rPr lang="en-US" altLang="ja-JP" sz="1600" dirty="0"/>
               <a:t> = c(0, 100), </a:t>
             </a:r>
             <a:r>
-              <a:rPr lang="en-US" altLang="ja-JP" sz="1600" err="1"/>
+              <a:rPr lang="en-US" altLang="ja-JP" sz="1600" dirty="0" err="1"/>
               <a:t>ylim</a:t>
             </a:r>
             <a:r>
-              <a:rPr lang="en-US" altLang="ja-JP" sz="1600"/>
+              <a:rPr lang="en-US" altLang="ja-JP" sz="1600" dirty="0"/>
               <a:t> = c(0, 2500), col = "</a:t>
             </a:r>
             <a:r>
-              <a:rPr lang="en-US" altLang="ja-JP" sz="1600" err="1"/>
+              <a:rPr lang="en-US" altLang="ja-JP" sz="1600" dirty="0" err="1"/>
               <a:t>lightblue</a:t>
             </a:r>
             <a:r>
-              <a:rPr lang="en-US" altLang="ja-JP" sz="1600"/>
+              <a:rPr lang="en-US" altLang="ja-JP" sz="1600" dirty="0"/>
               <a:t>")</a:t>
             </a:r>
           </a:p>
           <a:p>
             <a:r>
-              <a:rPr lang="en-US" altLang="ja-JP" sz="1600" err="1"/>
+              <a:rPr lang="en-US" altLang="ja-JP" sz="1600" dirty="0" err="1"/>
               <a:t>abline</a:t>
             </a:r>
             <a:r>
-              <a:rPr lang="en-US" altLang="ja-JP" sz="1600"/>
+              <a:rPr lang="en-US" altLang="ja-JP" sz="1600" dirty="0"/>
               <a:t>(v=quantile(</a:t>
             </a:r>
             <a:r>
-              <a:rPr lang="en-US" altLang="ja-JP" sz="1600" err="1"/>
+              <a:rPr lang="en-US" altLang="ja-JP" sz="1600" dirty="0" err="1"/>
               <a:t>boot_data</a:t>
             </a:r>
             <a:r>
-              <a:rPr lang="en-US" altLang="ja-JP" sz="1600"/>
+              <a:rPr lang="en-US" altLang="ja-JP" sz="1600" dirty="0"/>
               <a:t>, prob=0.025), col  = "red", </a:t>
             </a:r>
             <a:r>
-              <a:rPr lang="en-US" altLang="ja-JP" sz="1600" err="1"/>
+              <a:rPr lang="en-US" altLang="ja-JP" sz="1600" dirty="0" err="1"/>
               <a:t>lty</a:t>
             </a:r>
             <a:r>
-              <a:rPr lang="en-US" altLang="ja-JP" sz="1600"/>
+              <a:rPr lang="en-US" altLang="ja-JP" sz="1600" dirty="0"/>
               <a:t> = 2, </a:t>
             </a:r>
             <a:r>
-              <a:rPr lang="en-US" altLang="ja-JP" sz="1600" err="1"/>
+              <a:rPr lang="en-US" altLang="ja-JP" sz="1600" dirty="0" err="1"/>
               <a:t>lwd</a:t>
             </a:r>
             <a:r>
-              <a:rPr lang="en-US" altLang="ja-JP" sz="1600"/>
+              <a:rPr lang="en-US" altLang="ja-JP" sz="1600" dirty="0"/>
               <a:t> = 3)</a:t>
             </a:r>
           </a:p>
           <a:p>
             <a:r>
-              <a:rPr lang="en-US" altLang="ja-JP" sz="1600" err="1"/>
+              <a:rPr lang="en-US" altLang="ja-JP" sz="1600" dirty="0" err="1"/>
               <a:t>abline</a:t>
             </a:r>
             <a:r>
-              <a:rPr lang="en-US" altLang="ja-JP" sz="1600"/>
+              <a:rPr lang="en-US" altLang="ja-JP" sz="1600" dirty="0"/>
               <a:t>(v=quantile(</a:t>
             </a:r>
             <a:r>
-              <a:rPr lang="en-US" altLang="ja-JP" sz="1600" err="1"/>
+              <a:rPr lang="en-US" altLang="ja-JP" sz="1600" dirty="0" err="1"/>
               <a:t>boot_data</a:t>
             </a:r>
             <a:r>
-              <a:rPr lang="en-US" altLang="ja-JP" sz="1600"/>
+              <a:rPr lang="en-US" altLang="ja-JP" sz="1600" dirty="0"/>
               <a:t>, prob=0.975), col  = "red", </a:t>
             </a:r>
             <a:r>
-              <a:rPr lang="en-US" altLang="ja-JP" sz="1600" err="1"/>
+              <a:rPr lang="en-US" altLang="ja-JP" sz="1600" dirty="0" err="1"/>
               <a:t>lty</a:t>
             </a:r>
             <a:r>
-              <a:rPr lang="en-US" altLang="ja-JP" sz="1600"/>
+              <a:rPr lang="en-US" altLang="ja-JP" sz="1600" dirty="0"/>
               <a:t> = 2, </a:t>
             </a:r>
             <a:r>
-              <a:rPr lang="en-US" altLang="ja-JP" sz="1600" err="1"/>
+              <a:rPr lang="en-US" altLang="ja-JP" sz="1600" dirty="0" err="1"/>
               <a:t>lwd</a:t>
             </a:r>
             <a:r>
-              <a:rPr lang="en-US" altLang="ja-JP" sz="1600"/>
+              <a:rPr lang="en-US" altLang="ja-JP" sz="1600" dirty="0"/>
               <a:t> = 3)</a:t>
             </a:r>
-            <a:endParaRPr lang="ja-JP" altLang="en-US" sz="1600"/>
+            <a:endParaRPr lang="ja-JP" altLang="en-US" sz="1600" dirty="0"/>
           </a:p>
         </p:txBody>
       </p:sp>
@@ -4035,7 +4049,7 @@
           <a:lstStyle/>
           <a:p>
             <a:r>
-              <a:rPr kumimoji="1" lang="ja-JP" altLang="en-US">
+              <a:rPr kumimoji="1" lang="ja-JP" altLang="en-US" dirty="0">
                 <a:latin typeface="ＭＳ Ｐゴシック" panose="020B0600070205080204" pitchFamily="50" charset="-128"/>
                 <a:ea typeface="ＭＳ Ｐゴシック" panose="020B0600070205080204" pitchFamily="50" charset="-128"/>
                 <a:cs typeface="Arial" panose="020B0604020202020204" pitchFamily="34" charset="0"/>
@@ -4043,7 +4057,7 @@
               <a:t>ノンパラメトリック・ブートストラップ法　</a:t>
             </a:r>
             <a:r>
-              <a:rPr kumimoji="1" lang="en-US" altLang="ja-JP">
+              <a:rPr kumimoji="1" lang="en-US" altLang="ja-JP" dirty="0">
                 <a:latin typeface="ＭＳ Ｐゴシック" panose="020B0600070205080204" pitchFamily="50" charset="-128"/>
                 <a:ea typeface="ＭＳ Ｐゴシック" panose="020B0600070205080204" pitchFamily="50" charset="-128"/>
                 <a:cs typeface="Arial" panose="020B0604020202020204" pitchFamily="34" charset="0"/>
@@ -4051,7 +4065,7 @@
               <a:t>-</a:t>
             </a:r>
             <a:r>
-              <a:rPr kumimoji="1" lang="ja-JP" altLang="en-US">
+              <a:rPr kumimoji="1" lang="ja-JP" altLang="en-US" dirty="0">
                 <a:latin typeface="ＭＳ Ｐゴシック" panose="020B0600070205080204" pitchFamily="50" charset="-128"/>
                 <a:ea typeface="ＭＳ Ｐゴシック" panose="020B0600070205080204" pitchFamily="50" charset="-128"/>
                 <a:cs typeface="Arial" panose="020B0604020202020204" pitchFamily="34" charset="0"/>
@@ -4059,14 +4073,14 @@
               <a:t>パーセンタイル法</a:t>
             </a:r>
             <a:r>
-              <a:rPr kumimoji="1" lang="en-US" altLang="ja-JP">
+              <a:rPr kumimoji="1" lang="en-US" altLang="ja-JP" dirty="0">
                 <a:latin typeface="ＭＳ Ｐゴシック" panose="020B0600070205080204" pitchFamily="50" charset="-128"/>
                 <a:ea typeface="ＭＳ Ｐゴシック" panose="020B0600070205080204" pitchFamily="50" charset="-128"/>
                 <a:cs typeface="Arial" panose="020B0604020202020204" pitchFamily="34" charset="0"/>
               </a:rPr>
               <a:t>-</a:t>
             </a:r>
-            <a:endParaRPr kumimoji="1" lang="ja-JP" altLang="en-US">
+            <a:endParaRPr kumimoji="1" lang="ja-JP" altLang="en-US" dirty="0">
               <a:latin typeface="ＭＳ Ｐゴシック" panose="020B0600070205080204" pitchFamily="50" charset="-128"/>
               <a:ea typeface="ＭＳ Ｐゴシック" panose="020B0600070205080204" pitchFamily="50" charset="-128"/>
               <a:cs typeface="Arial" panose="020B0604020202020204" pitchFamily="34" charset="0"/>
@@ -4295,11 +4309,11 @@
           <a:lstStyle/>
           <a:p>
             <a:r>
-              <a:rPr lang="en-US" altLang="ja-JP" sz="1600"/>
+              <a:rPr lang="en-US" altLang="ja-JP" sz="1600" dirty="0"/>
               <a:t>replace=TRUE</a:t>
             </a:r>
             <a:r>
-              <a:rPr lang="ja-JP" altLang="en-US" sz="1600">
+              <a:rPr lang="ja-JP" altLang="en-US" sz="1600" dirty="0">
                 <a:latin typeface="ＭＳ Ｐゴシック" panose="020B0600070205080204" pitchFamily="50" charset="-128"/>
                 <a:ea typeface="ＭＳ Ｐゴシック" panose="020B0600070205080204" pitchFamily="50" charset="-128"/>
               </a:rPr>
@@ -4337,10 +4351,10 @@
           <a:lstStyle/>
           <a:p>
             <a:r>
-              <a:rPr lang="ja-JP" altLang="en-US" sz="1600"/>
+              <a:rPr lang="ja-JP" altLang="en-US" sz="1600" dirty="0"/>
               <a:t>信頼区間用のパーセンタイルを取得</a:t>
             </a:r>
-            <a:endParaRPr lang="ja-JP" altLang="en-US" sz="1600">
+            <a:endParaRPr lang="ja-JP" altLang="en-US" sz="1600" dirty="0">
               <a:latin typeface="ＭＳ Ｐゴシック" panose="020B0600070205080204" pitchFamily="50" charset="-128"/>
               <a:ea typeface="ＭＳ Ｐゴシック" panose="020B0600070205080204" pitchFamily="50" charset="-128"/>
             </a:endParaRPr>
@@ -4408,7 +4422,7 @@
               <a:rPr kumimoji="1" lang="en-US" altLang="ja-JP" smtClean="0"/>
               <a:t>11</a:t>
             </a:fld>
-            <a:endParaRPr kumimoji="1" lang="en-US" altLang="ja-JP"/>
+            <a:endParaRPr kumimoji="1" lang="en-US" altLang="ja-JP" dirty="0"/>
           </a:p>
         </p:txBody>
       </p:sp>
@@ -4472,7 +4486,7 @@
           <a:p>
             <a:pPr algn="l" latinLnBrk="1"/>
             <a:r>
-              <a:rPr lang="en-US" altLang="ja-JP" b="0" i="0">
+              <a:rPr lang="en-US" altLang="ja-JP" b="0" i="0" dirty="0">
                 <a:solidFill>
                   <a:srgbClr val="002060"/>
                 </a:solidFill>
@@ -4482,7 +4496,7 @@
               <a:t>mean(</a:t>
             </a:r>
             <a:r>
-              <a:rPr lang="en-US" altLang="ja-JP" b="0" i="0" err="1">
+              <a:rPr lang="en-US" altLang="ja-JP" b="0" i="0" dirty="0" err="1">
                 <a:solidFill>
                   <a:srgbClr val="002060"/>
                 </a:solidFill>
@@ -4492,7 +4506,7 @@
               <a:t>boot_data</a:t>
             </a:r>
             <a:r>
-              <a:rPr lang="en-US" altLang="ja-JP" b="0" i="0">
+              <a:rPr lang="en-US" altLang="ja-JP" b="0" i="0" dirty="0">
                 <a:solidFill>
                   <a:srgbClr val="002060"/>
                 </a:solidFill>
@@ -4505,7 +4519,7 @@
           <a:p>
             <a:pPr algn="l" latinLnBrk="1"/>
             <a:r>
-              <a:rPr lang="en-US" altLang="ja-JP" b="0" i="0">
+              <a:rPr lang="en-US" altLang="ja-JP" b="0" i="0" dirty="0">
                 <a:solidFill>
                   <a:schemeClr val="tx1"/>
                 </a:solidFill>
@@ -4519,7 +4533,7 @@
             <a:pPr algn="l" latinLnBrk="1">
               <a:buNone/>
             </a:pPr>
-            <a:endParaRPr lang="en-US" altLang="ja-JP" b="0" i="0">
+            <a:endParaRPr lang="en-US" altLang="ja-JP" b="0" i="0" dirty="0">
               <a:solidFill>
                 <a:srgbClr val="C792EA"/>
               </a:solidFill>
@@ -4532,7 +4546,7 @@
               <a:buNone/>
             </a:pPr>
             <a:r>
-              <a:rPr lang="en-US" altLang="ja-JP" b="0" i="0">
+              <a:rPr lang="en-US" altLang="ja-JP" b="0" i="0" dirty="0">
                 <a:solidFill>
                   <a:srgbClr val="002060"/>
                 </a:solidFill>
@@ -4542,7 +4556,7 @@
               <a:t>quantile(</a:t>
             </a:r>
             <a:r>
-              <a:rPr lang="en-US" altLang="ja-JP" b="0" i="0" err="1">
+              <a:rPr lang="en-US" altLang="ja-JP" b="0" i="0" dirty="0" err="1">
                 <a:solidFill>
                   <a:srgbClr val="002060"/>
                 </a:solidFill>
@@ -4552,7 +4566,7 @@
               <a:t>boot_data</a:t>
             </a:r>
             <a:r>
-              <a:rPr lang="en-US" altLang="ja-JP" b="0" i="0">
+              <a:rPr lang="en-US" altLang="ja-JP" b="0" i="0" dirty="0">
                 <a:solidFill>
                   <a:srgbClr val="002060"/>
                 </a:solidFill>
@@ -4567,7 +4581,7 @@
               <a:buNone/>
             </a:pPr>
             <a:r>
-              <a:rPr lang="en-US" altLang="ja-JP" b="0" i="0">
+              <a:rPr lang="en-US" altLang="ja-JP" b="0" i="0" dirty="0">
                 <a:solidFill>
                   <a:schemeClr val="tx1"/>
                 </a:solidFill>
@@ -4582,7 +4596,7 @@
               <a:buNone/>
             </a:pPr>
             <a:r>
-              <a:rPr lang="en-US" altLang="ja-JP" b="0" i="0">
+              <a:rPr lang="en-US" altLang="ja-JP" b="0" i="0" dirty="0">
                 <a:solidFill>
                   <a:schemeClr val="tx1"/>
                 </a:solidFill>
@@ -4621,7 +4635,7 @@
           <a:lstStyle/>
           <a:p>
             <a:r>
-              <a:rPr kumimoji="1" lang="ja-JP" altLang="en-US">
+              <a:rPr kumimoji="1" lang="ja-JP" altLang="en-US" dirty="0">
                 <a:latin typeface="ＭＳ Ｐゴシック" panose="020B0600070205080204" pitchFamily="50" charset="-128"/>
                 <a:ea typeface="ＭＳ Ｐゴシック" panose="020B0600070205080204" pitchFamily="50" charset="-128"/>
                 <a:cs typeface="Arial" panose="020B0604020202020204" pitchFamily="34" charset="0"/>
@@ -4629,7 +4643,7 @@
               <a:t>ノンパラメトリック・ブートストラップ法　</a:t>
             </a:r>
             <a:r>
-              <a:rPr kumimoji="1" lang="en-US" altLang="ja-JP">
+              <a:rPr kumimoji="1" lang="en-US" altLang="ja-JP" dirty="0">
                 <a:latin typeface="ＭＳ Ｐゴシック" panose="020B0600070205080204" pitchFamily="50" charset="-128"/>
                 <a:ea typeface="ＭＳ Ｐゴシック" panose="020B0600070205080204" pitchFamily="50" charset="-128"/>
                 <a:cs typeface="Arial" panose="020B0604020202020204" pitchFamily="34" charset="0"/>
@@ -4637,7 +4651,7 @@
               <a:t>-</a:t>
             </a:r>
             <a:r>
-              <a:rPr kumimoji="1" lang="ja-JP" altLang="en-US">
+              <a:rPr kumimoji="1" lang="ja-JP" altLang="en-US" dirty="0">
                 <a:latin typeface="ＭＳ Ｐゴシック" panose="020B0600070205080204" pitchFamily="50" charset="-128"/>
                 <a:ea typeface="ＭＳ Ｐゴシック" panose="020B0600070205080204" pitchFamily="50" charset="-128"/>
                 <a:cs typeface="Arial" panose="020B0604020202020204" pitchFamily="34" charset="0"/>
@@ -4645,14 +4659,14 @@
               <a:t>パーセンタイル法</a:t>
             </a:r>
             <a:r>
-              <a:rPr kumimoji="1" lang="en-US" altLang="ja-JP">
+              <a:rPr kumimoji="1" lang="en-US" altLang="ja-JP" dirty="0">
                 <a:latin typeface="ＭＳ Ｐゴシック" panose="020B0600070205080204" pitchFamily="50" charset="-128"/>
                 <a:ea typeface="ＭＳ Ｐゴシック" panose="020B0600070205080204" pitchFamily="50" charset="-128"/>
                 <a:cs typeface="Arial" panose="020B0604020202020204" pitchFamily="34" charset="0"/>
               </a:rPr>
               <a:t>-</a:t>
             </a:r>
-            <a:endParaRPr kumimoji="1" lang="ja-JP" altLang="en-US">
+            <a:endParaRPr kumimoji="1" lang="ja-JP" altLang="en-US" dirty="0">
               <a:latin typeface="ＭＳ Ｐゴシック" panose="020B0600070205080204" pitchFamily="50" charset="-128"/>
               <a:ea typeface="ＭＳ Ｐゴシック" panose="020B0600070205080204" pitchFamily="50" charset="-128"/>
               <a:cs typeface="Arial" panose="020B0604020202020204" pitchFamily="34" charset="0"/>
@@ -4674,6 +4688,297 @@
 </file>
 
 <file path=ppt/slides/slide12.xml><?xml version="1.0" encoding="utf-8"?>
+<p:sld xmlns:a="http://schemas.openxmlformats.org/drawingml/2006/main" xmlns:r="http://schemas.openxmlformats.org/officeDocument/2006/relationships" xmlns:p="http://schemas.openxmlformats.org/presentationml/2006/main">
+  <p:cSld>
+    <p:spTree>
+      <p:nvGrpSpPr>
+        <p:cNvPr id="1" name="">
+          <a:extLst>
+            <a:ext uri="{FF2B5EF4-FFF2-40B4-BE49-F238E27FC236}">
+              <a16:creationId xmlns:a16="http://schemas.microsoft.com/office/drawing/2014/main" id="{ABF3B74D-C5B7-7091-8C58-96F3645C39FC}"/>
+            </a:ext>
+          </a:extLst>
+        </p:cNvPr>
+        <p:cNvGrpSpPr/>
+        <p:nvPr/>
+      </p:nvGrpSpPr>
+      <p:grpSpPr>
+        <a:xfrm>
+          <a:off x="0" y="0"/>
+          <a:ext cx="0" cy="0"/>
+          <a:chOff x="0" y="0"/>
+          <a:chExt cx="0" cy="0"/>
+        </a:xfrm>
+      </p:grpSpPr>
+      <p:sp>
+        <p:nvSpPr>
+          <p:cNvPr id="2" name="スライド番号プレースホルダー 1">
+            <a:extLst>
+              <a:ext uri="{FF2B5EF4-FFF2-40B4-BE49-F238E27FC236}">
+                <a16:creationId xmlns:a16="http://schemas.microsoft.com/office/drawing/2014/main" id="{CB8F79D4-C9FA-BB5E-79DF-064FEB42704D}"/>
+              </a:ext>
+            </a:extLst>
+          </p:cNvPr>
+          <p:cNvSpPr>
+            <a:spLocks noGrp="1"/>
+          </p:cNvSpPr>
+          <p:nvPr>
+            <p:ph type="sldNum" sz="quarter" idx="4"/>
+          </p:nvPr>
+        </p:nvSpPr>
+        <p:spPr/>
+        <p:txBody>
+          <a:bodyPr/>
+          <a:lstStyle/>
+          <a:p>
+            <a:fld id="{B5F5E71E-47DD-B14E-8899-BE4D6071454B}" type="slidenum">
+              <a:rPr kumimoji="1" lang="en-US" altLang="ja-JP" smtClean="0"/>
+              <a:t>12</a:t>
+            </a:fld>
+            <a:endParaRPr kumimoji="1" lang="en-US" altLang="ja-JP" dirty="0"/>
+          </a:p>
+        </p:txBody>
+      </p:sp>
+      <p:sp>
+        <p:nvSpPr>
+          <p:cNvPr id="8" name="タイトル 2">
+            <a:extLst>
+              <a:ext uri="{FF2B5EF4-FFF2-40B4-BE49-F238E27FC236}">
+                <a16:creationId xmlns:a16="http://schemas.microsoft.com/office/drawing/2014/main" id="{880F6A4C-EDEB-A4E0-607F-6F93533B83A2}"/>
+              </a:ext>
+            </a:extLst>
+          </p:cNvPr>
+          <p:cNvSpPr>
+            <a:spLocks noGrp="1"/>
+          </p:cNvSpPr>
+          <p:nvPr>
+            <p:ph type="title"/>
+          </p:nvPr>
+        </p:nvSpPr>
+        <p:spPr>
+          <a:xfrm>
+            <a:off x="368300" y="180002"/>
+            <a:ext cx="10058400" cy="469583"/>
+          </a:xfrm>
+        </p:spPr>
+        <p:txBody>
+          <a:bodyPr/>
+          <a:lstStyle/>
+          <a:p>
+            <a:r>
+              <a:rPr kumimoji="1" lang="ja-JP" altLang="en-US" dirty="0">
+                <a:latin typeface="ＭＳ Ｐゴシック" panose="020B0600070205080204" pitchFamily="50" charset="-128"/>
+                <a:ea typeface="ＭＳ Ｐゴシック" panose="020B0600070205080204" pitchFamily="50" charset="-128"/>
+                <a:cs typeface="Arial" panose="020B0604020202020204" pitchFamily="34" charset="0"/>
+              </a:rPr>
+              <a:t>参考文献</a:t>
+            </a:r>
+          </a:p>
+        </p:txBody>
+      </p:sp>
+      <p:sp>
+        <p:nvSpPr>
+          <p:cNvPr id="3" name="テキスト ボックス 2">
+            <a:extLst>
+              <a:ext uri="{FF2B5EF4-FFF2-40B4-BE49-F238E27FC236}">
+                <a16:creationId xmlns:a16="http://schemas.microsoft.com/office/drawing/2014/main" id="{840753C8-AE35-07AA-6973-05EED3308B63}"/>
+              </a:ext>
+            </a:extLst>
+          </p:cNvPr>
+          <p:cNvSpPr txBox="1"/>
+          <p:nvPr/>
+        </p:nvSpPr>
+        <p:spPr>
+          <a:xfrm>
+            <a:off x="368300" y="1231900"/>
+            <a:ext cx="10058400" cy="2554545"/>
+          </a:xfrm>
+          <a:prstGeom prst="rect">
+            <a:avLst/>
+          </a:prstGeom>
+          <a:noFill/>
+        </p:spPr>
+        <p:txBody>
+          <a:bodyPr wrap="square">
+            <a:spAutoFit/>
+          </a:bodyPr>
+          <a:lstStyle/>
+          <a:p>
+            <a:pPr marL="342900" indent="-342900">
+              <a:buFont typeface="+mj-lt"/>
+              <a:buAutoNum type="arabicPeriod"/>
+            </a:pPr>
+            <a:r>
+              <a:rPr lang="ja-JP" altLang="en-US" sz="1600" dirty="0"/>
+              <a:t>小杉考司，紀ノ定保礼，清水裕士（</a:t>
+            </a:r>
+            <a:r>
+              <a:rPr lang="en-US" altLang="ja-JP" sz="1600" dirty="0"/>
+              <a:t>2023</a:t>
+            </a:r>
+            <a:r>
+              <a:rPr lang="ja-JP" altLang="en-US" sz="1600" dirty="0"/>
+              <a:t>）．数値シミュレーションで読み解く統計のしくみ </a:t>
+            </a:r>
+            <a:r>
+              <a:rPr lang="en-US" altLang="ja-JP" sz="1600" dirty="0"/>
+              <a:t>-R</a:t>
+            </a:r>
+            <a:r>
+              <a:rPr lang="ja-JP" altLang="en-US" sz="1600" dirty="0"/>
+              <a:t>でためしてわかる心理統計</a:t>
+            </a:r>
+            <a:r>
+              <a:rPr lang="en-US" altLang="ja-JP" sz="1600" dirty="0"/>
+              <a:t>-</a:t>
+            </a:r>
+            <a:r>
+              <a:rPr lang="ja-JP" altLang="en-US" sz="1600" dirty="0"/>
+              <a:t>．技術評論社．</a:t>
+            </a:r>
+            <a:endParaRPr lang="en-US" altLang="ja-JP" sz="1600" dirty="0"/>
+          </a:p>
+          <a:p>
+            <a:pPr marL="342900" indent="-342900">
+              <a:buFont typeface="+mj-lt"/>
+              <a:buAutoNum type="arabicPeriod"/>
+            </a:pPr>
+            <a:endParaRPr lang="en-US" altLang="ja-JP" sz="1600" dirty="0"/>
+          </a:p>
+          <a:p>
+            <a:pPr marL="342900" indent="-342900">
+              <a:buFont typeface="+mj-lt"/>
+              <a:buAutoNum type="arabicPeriod"/>
+            </a:pPr>
+            <a:r>
+              <a:rPr lang="ja-JP" altLang="en-US" sz="1600" dirty="0"/>
+              <a:t>日本統計学会（編）（</a:t>
+            </a:r>
+            <a:r>
+              <a:rPr lang="en-US" altLang="ja-JP" sz="1600" dirty="0"/>
+              <a:t>2020</a:t>
+            </a:r>
+            <a:r>
+              <a:rPr lang="ja-JP" altLang="en-US" sz="1600" dirty="0"/>
+              <a:t>）．統計学実践ワークブック．学術図書出版社．</a:t>
+            </a:r>
+            <a:endParaRPr lang="en-US" altLang="ja-JP" sz="1600" dirty="0"/>
+          </a:p>
+          <a:p>
+            <a:pPr marL="342900" indent="-342900">
+              <a:buFont typeface="+mj-lt"/>
+              <a:buAutoNum type="arabicPeriod"/>
+            </a:pPr>
+            <a:endParaRPr lang="en-US" altLang="ja-JP" sz="1600" dirty="0"/>
+          </a:p>
+          <a:p>
+            <a:pPr marL="342900" indent="-342900">
+              <a:buFont typeface="+mj-lt"/>
+              <a:buAutoNum type="arabicPeriod"/>
+            </a:pPr>
+            <a:r>
+              <a:rPr lang="zh-TW" altLang="en-US" sz="1600" dirty="0"/>
+              <a:t>東京大学教養学部統計学教室（編）（</a:t>
+            </a:r>
+            <a:r>
+              <a:rPr lang="en-US" altLang="zh-TW" sz="1600" dirty="0"/>
+              <a:t>1991</a:t>
+            </a:r>
+            <a:r>
+              <a:rPr lang="zh-TW" altLang="en-US" sz="1600" dirty="0"/>
+              <a:t>）．統計学入門（基礎統計学 </a:t>
+            </a:r>
+            <a:r>
+              <a:rPr lang="en-US" altLang="zh-TW" sz="1600" dirty="0"/>
+              <a:t>I</a:t>
+            </a:r>
+            <a:r>
+              <a:rPr lang="zh-TW" altLang="en-US" sz="1600" dirty="0"/>
+              <a:t>）．東京：東京大学出版会．</a:t>
+            </a:r>
+            <a:endParaRPr lang="en-US" altLang="ja-JP" sz="1600" dirty="0"/>
+          </a:p>
+          <a:p>
+            <a:pPr marL="342900" indent="-342900">
+              <a:buFont typeface="+mj-lt"/>
+              <a:buAutoNum type="arabicPeriod"/>
+            </a:pPr>
+            <a:endParaRPr lang="en-US" altLang="ja-JP" sz="1600" dirty="0"/>
+          </a:p>
+          <a:p>
+            <a:pPr marL="342900" indent="-342900">
+              <a:buFont typeface="+mj-lt"/>
+              <a:buAutoNum type="arabicPeriod"/>
+            </a:pPr>
+            <a:r>
+              <a:rPr lang="ja-JP" altLang="en-US" sz="1600" dirty="0"/>
+              <a:t>ブートストラップ法で平均値の</a:t>
+            </a:r>
+            <a:r>
+              <a:rPr lang="en-US" altLang="ja-JP" sz="1600" dirty="0"/>
+              <a:t>95%</a:t>
+            </a:r>
+            <a:r>
+              <a:rPr lang="ja-JP" altLang="en-US" sz="1600" dirty="0"/>
+              <a:t>信頼区間を求めよう！統計</a:t>
+            </a:r>
+            <a:r>
+              <a:rPr lang="en-US" altLang="ja-JP" sz="1600" dirty="0"/>
+              <a:t>ER</a:t>
+            </a:r>
+            <a:r>
+              <a:rPr lang="ja-JP" altLang="en-US" sz="1600" dirty="0"/>
+              <a:t>．</a:t>
+            </a:r>
+            <a:r>
+              <a:rPr lang="en-US" altLang="ja-JP" sz="1600" dirty="0"/>
+              <a:t>https://best-biostatistics.com/toukei-er/entry/bootstrap-method-calculate-95-percent-confidence-interval-mean/</a:t>
+            </a:r>
+            <a:r>
+              <a:rPr lang="ja-JP" altLang="en-US" sz="1600" dirty="0"/>
+              <a:t>（最終参照日：</a:t>
+            </a:r>
+            <a:r>
+              <a:rPr lang="en-US" altLang="ja-JP" sz="1600" dirty="0"/>
+              <a:t>2026</a:t>
+            </a:r>
+            <a:r>
+              <a:rPr lang="ja-JP" altLang="en-US" sz="1600" dirty="0"/>
+              <a:t>年</a:t>
+            </a:r>
+            <a:r>
+              <a:rPr lang="en-US" altLang="ja-JP" sz="1600" dirty="0"/>
+              <a:t>3</a:t>
+            </a:r>
+            <a:r>
+              <a:rPr lang="ja-JP" altLang="en-US" sz="1600" dirty="0"/>
+              <a:t>月</a:t>
+            </a:r>
+            <a:r>
+              <a:rPr lang="en-US" altLang="ja-JP" sz="1600" dirty="0"/>
+              <a:t>30</a:t>
+            </a:r>
+            <a:r>
+              <a:rPr lang="ja-JP" altLang="en-US" sz="1600" dirty="0"/>
+              <a:t>日）</a:t>
+            </a:r>
+          </a:p>
+        </p:txBody>
+      </p:sp>
+    </p:spTree>
+    <p:extLst>
+      <p:ext uri="{BB962C8B-B14F-4D97-AF65-F5344CB8AC3E}">
+        <p14:creationId xmlns:p14="http://schemas.microsoft.com/office/powerpoint/2010/main" val="828151788"/>
+      </p:ext>
+    </p:extLst>
+  </p:cSld>
+  <p:clrMapOvr>
+    <a:masterClrMapping/>
+  </p:clrMapOvr>
+</p:sld>
+</file>
+
+<file path=ppt/slides/slide13.xml><?xml version="1.0" encoding="utf-8"?>
 <p:sld xmlns:a="http://schemas.openxmlformats.org/drawingml/2006/main" xmlns:r="http://schemas.openxmlformats.org/officeDocument/2006/relationships" xmlns:p="http://schemas.openxmlformats.org/presentationml/2006/main">
   <p:cSld>
     <p:spTree>
@@ -4713,9 +5018,9 @@
           <a:p>
             <a:fld id="{3855BDEE-5BDE-3F4B-A67A-3F0F70216356}" type="slidenum">
               <a:rPr kumimoji="1" lang="en-US" altLang="ja-JP" smtClean="0"/>
-              <a:t>12</a:t>
+              <a:t>13</a:t>
             </a:fld>
-            <a:endParaRPr kumimoji="1" lang="en-US" altLang="ja-JP"/>
+            <a:endParaRPr kumimoji="1" lang="en-US" altLang="ja-JP" dirty="0"/>
           </a:p>
         </p:txBody>
       </p:sp>
@@ -4760,7 +5065,7 @@
 </p:sld>
 </file>
 
-<file path=ppt/slides/slide13.xml><?xml version="1.0" encoding="utf-8"?>
+<file path=ppt/slides/slide14.xml><?xml version="1.0" encoding="utf-8"?>
 <p:sld xmlns:a="http://schemas.openxmlformats.org/drawingml/2006/main" xmlns:r="http://schemas.openxmlformats.org/officeDocument/2006/relationships" xmlns:p="http://schemas.openxmlformats.org/presentationml/2006/main">
   <p:cSld>
     <p:spTree>
@@ -4873,7 +5178,7 @@
               <a:rPr kumimoji="1" lang="en-US" altLang="ja-JP" smtClean="0"/>
               <a:t>2</a:t>
             </a:fld>
-            <a:endParaRPr kumimoji="1" lang="en-US" altLang="ja-JP"/>
+            <a:endParaRPr kumimoji="1" lang="en-US" altLang="ja-JP" dirty="0"/>
           </a:p>
         </p:txBody>
       </p:sp>
@@ -4899,13 +5204,13 @@
           <a:lstStyle/>
           <a:p>
             <a:r>
-              <a:rPr kumimoji="1" lang="en-US" altLang="ja-JP">
+              <a:rPr kumimoji="1" lang="en-US" altLang="ja-JP" dirty="0">
                 <a:latin typeface="Aptos Narrow" panose="020B0004020202020204" pitchFamily="34" charset="0"/>
                 <a:ea typeface="ＭＳ Ｐゴシック" panose="020B0600070205080204" pitchFamily="50" charset="-128"/>
               </a:rPr>
               <a:t>Introduction</a:t>
             </a:r>
-            <a:endParaRPr kumimoji="1" lang="ja-JP" altLang="en-US"/>
+            <a:endParaRPr kumimoji="1" lang="ja-JP" altLang="en-US" dirty="0"/>
           </a:p>
         </p:txBody>
       </p:sp>
@@ -4938,7 +5243,7 @@
           <a:lstStyle/>
           <a:p>
             <a:r>
-              <a:rPr lang="en-US" altLang="ja-JP" sz="2400" u="sng">
+              <a:rPr lang="en-US" altLang="ja-JP" sz="2400" u="sng" dirty="0">
                 <a:latin typeface="Arial" panose="020B0604020202020204" pitchFamily="34" charset="0"/>
                 <a:ea typeface="ＭＳ Ｐゴシック" panose="020B0600070205080204" pitchFamily="50" charset="-128"/>
                 <a:cs typeface="Arial" panose="020B0604020202020204" pitchFamily="34" charset="0"/>
@@ -4946,14 +5251,14 @@
               <a:t>R</a:t>
             </a:r>
             <a:r>
-              <a:rPr lang="ja-JP" altLang="en-US" sz="2400" u="sng">
+              <a:rPr lang="ja-JP" altLang="en-US" sz="2400" u="sng" dirty="0">
                 <a:latin typeface="Arial" panose="020B0604020202020204" pitchFamily="34" charset="0"/>
                 <a:ea typeface="ＭＳ Ｐゴシック" panose="020B0600070205080204" pitchFamily="50" charset="-128"/>
                 <a:cs typeface="Arial" panose="020B0604020202020204" pitchFamily="34" charset="0"/>
               </a:rPr>
               <a:t>初心者</a:t>
             </a:r>
-            <a:endParaRPr lang="en-US" altLang="ja-JP" sz="2400" u="sng">
+            <a:endParaRPr lang="en-US" altLang="ja-JP" sz="2400" u="sng" dirty="0">
               <a:latin typeface="Arial" panose="020B0604020202020204" pitchFamily="34" charset="0"/>
               <a:ea typeface="ＭＳ Ｐゴシック" panose="020B0600070205080204" pitchFamily="50" charset="-128"/>
               <a:cs typeface="Arial" panose="020B0604020202020204" pitchFamily="34" charset="0"/>
@@ -4965,7 +5270,7 @@
               <a:buChar char="•"/>
             </a:pPr>
             <a:r>
-              <a:rPr kumimoji="1" lang="ja-JP" altLang="en-US" sz="2400">
+              <a:rPr kumimoji="1" lang="ja-JP" altLang="en-US" sz="2400" dirty="0">
                 <a:latin typeface="Arial" panose="020B0604020202020204" pitchFamily="34" charset="0"/>
                 <a:ea typeface="ＭＳ Ｐゴシック" panose="020B0600070205080204" pitchFamily="50" charset="-128"/>
                 <a:cs typeface="Arial" panose="020B0604020202020204" pitchFamily="34" charset="0"/>
@@ -4973,7 +5278,7 @@
               <a:t>簡単なプログラムで</a:t>
             </a:r>
             <a:r>
-              <a:rPr kumimoji="1" lang="en-US" altLang="ja-JP" sz="2400">
+              <a:rPr kumimoji="1" lang="en-US" altLang="ja-JP" sz="2400" dirty="0">
                 <a:latin typeface="Arial" panose="020B0604020202020204" pitchFamily="34" charset="0"/>
                 <a:ea typeface="ＭＳ Ｐゴシック" panose="020B0600070205080204" pitchFamily="50" charset="-128"/>
                 <a:cs typeface="Arial" panose="020B0604020202020204" pitchFamily="34" charset="0"/>
@@ -4981,14 +5286,14 @@
               <a:t>R</a:t>
             </a:r>
             <a:r>
-              <a:rPr kumimoji="1" lang="ja-JP" altLang="en-US" sz="2400">
+              <a:rPr kumimoji="1" lang="ja-JP" altLang="en-US" sz="2400" dirty="0">
                 <a:latin typeface="Arial" panose="020B0604020202020204" pitchFamily="34" charset="0"/>
                 <a:ea typeface="ＭＳ Ｐゴシック" panose="020B0600070205080204" pitchFamily="50" charset="-128"/>
                 <a:cs typeface="Arial" panose="020B0604020202020204" pitchFamily="34" charset="0"/>
               </a:rPr>
               <a:t>を学ぶ</a:t>
             </a:r>
-            <a:endParaRPr kumimoji="1" lang="en-US" altLang="ja-JP" sz="2400">
+            <a:endParaRPr kumimoji="1" lang="en-US" altLang="ja-JP" sz="2400" dirty="0">
               <a:latin typeface="Arial" panose="020B0604020202020204" pitchFamily="34" charset="0"/>
               <a:ea typeface="ＭＳ Ｐゴシック" panose="020B0600070205080204" pitchFamily="50" charset="-128"/>
               <a:cs typeface="Arial" panose="020B0604020202020204" pitchFamily="34" charset="0"/>
@@ -5000,7 +5305,7 @@
               <a:buChar char="•"/>
             </a:pPr>
             <a:r>
-              <a:rPr kumimoji="1" lang="en-US" altLang="ja-JP" sz="2400">
+              <a:rPr kumimoji="1" lang="en-US" altLang="ja-JP" sz="2400" dirty="0">
                 <a:latin typeface="Arial" panose="020B0604020202020204" pitchFamily="34" charset="0"/>
                 <a:ea typeface="ＭＳ Ｐゴシック" panose="020B0600070205080204" pitchFamily="50" charset="-128"/>
                 <a:cs typeface="Arial" panose="020B0604020202020204" pitchFamily="34" charset="0"/>
@@ -5008,28 +5313,28 @@
               <a:t>SAS</a:t>
             </a:r>
             <a:r>
-              <a:rPr kumimoji="1" lang="ja-JP" altLang="en-US" sz="2400">
+              <a:rPr kumimoji="1" lang="ja-JP" altLang="en-US" sz="2400" dirty="0">
                 <a:latin typeface="Arial" panose="020B0604020202020204" pitchFamily="34" charset="0"/>
                 <a:ea typeface="ＭＳ Ｐゴシック" panose="020B0600070205080204" pitchFamily="50" charset="-128"/>
                 <a:cs typeface="Arial" panose="020B0604020202020204" pitchFamily="34" charset="0"/>
               </a:rPr>
               <a:t>との違いを知る</a:t>
             </a:r>
-            <a:endParaRPr kumimoji="1" lang="en-US" altLang="ja-JP" sz="2400">
+            <a:endParaRPr kumimoji="1" lang="en-US" altLang="ja-JP" sz="2400" dirty="0">
               <a:latin typeface="Arial" panose="020B0604020202020204" pitchFamily="34" charset="0"/>
               <a:ea typeface="ＭＳ Ｐゴシック" panose="020B0600070205080204" pitchFamily="50" charset="-128"/>
               <a:cs typeface="Arial" panose="020B0604020202020204" pitchFamily="34" charset="0"/>
             </a:endParaRPr>
           </a:p>
           <a:p>
-            <a:endParaRPr lang="en-US" altLang="ja-JP" sz="2400" u="sng">
+            <a:endParaRPr lang="en-US" altLang="ja-JP" sz="2400" u="sng" dirty="0">
               <a:latin typeface="Arial" panose="020B0604020202020204" pitchFamily="34" charset="0"/>
               <a:ea typeface="ＭＳ Ｐゴシック" panose="020B0600070205080204" pitchFamily="50" charset="-128"/>
               <a:cs typeface="Arial" panose="020B0604020202020204" pitchFamily="34" charset="0"/>
             </a:endParaRPr>
           </a:p>
           <a:p>
-            <a:endParaRPr lang="en-US" altLang="ja-JP" sz="2400" u="sng">
+            <a:endParaRPr lang="en-US" altLang="ja-JP" sz="2400" u="sng" dirty="0">
               <a:latin typeface="Arial" panose="020B0604020202020204" pitchFamily="34" charset="0"/>
               <a:ea typeface="ＭＳ Ｐゴシック" panose="020B0600070205080204" pitchFamily="50" charset="-128"/>
               <a:cs typeface="Arial" panose="020B0604020202020204" pitchFamily="34" charset="0"/>
@@ -5037,14 +5342,14 @@
           </a:p>
           <a:p>
             <a:r>
-              <a:rPr lang="ja-JP" altLang="en-US" sz="2400" u="sng">
+              <a:rPr lang="ja-JP" altLang="en-US" sz="2400" u="sng" dirty="0">
                 <a:latin typeface="Arial" panose="020B0604020202020204" pitchFamily="34" charset="0"/>
                 <a:ea typeface="ＭＳ Ｐゴシック" panose="020B0600070205080204" pitchFamily="50" charset="-128"/>
                 <a:cs typeface="Arial" panose="020B0604020202020204" pitchFamily="34" charset="0"/>
               </a:rPr>
               <a:t>シミュレーション</a:t>
             </a:r>
-            <a:endParaRPr lang="en-US" altLang="ja-JP" sz="2400" u="sng">
+            <a:endParaRPr lang="en-US" altLang="ja-JP" sz="2400" u="sng" dirty="0">
               <a:latin typeface="Arial" panose="020B0604020202020204" pitchFamily="34" charset="0"/>
               <a:ea typeface="ＭＳ Ｐゴシック" panose="020B0600070205080204" pitchFamily="50" charset="-128"/>
               <a:cs typeface="Arial" panose="020B0604020202020204" pitchFamily="34" charset="0"/>
@@ -5056,14 +5361,14 @@
               <a:buChar char="•"/>
             </a:pPr>
             <a:r>
-              <a:rPr kumimoji="1" lang="ja-JP" altLang="en-US" sz="2400">
+              <a:rPr kumimoji="1" lang="ja-JP" altLang="en-US" sz="2400" dirty="0">
                 <a:latin typeface="Arial" panose="020B0604020202020204" pitchFamily="34" charset="0"/>
                 <a:ea typeface="ＭＳ Ｐゴシック" panose="020B0600070205080204" pitchFamily="50" charset="-128"/>
                 <a:cs typeface="Arial" panose="020B0604020202020204" pitchFamily="34" charset="0"/>
               </a:rPr>
               <a:t>視覚化による統計手法の理解促進</a:t>
             </a:r>
-            <a:endParaRPr kumimoji="1" lang="en-US" altLang="ja-JP" sz="2400">
+            <a:endParaRPr kumimoji="1" lang="en-US" altLang="ja-JP" sz="2400" dirty="0">
               <a:latin typeface="Arial" panose="020B0604020202020204" pitchFamily="34" charset="0"/>
               <a:ea typeface="ＭＳ Ｐゴシック" panose="020B0600070205080204" pitchFamily="50" charset="-128"/>
               <a:cs typeface="Arial" panose="020B0604020202020204" pitchFamily="34" charset="0"/>
@@ -5075,14 +5380,14 @@
               <a:buChar char="•"/>
             </a:pPr>
             <a:r>
-              <a:rPr kumimoji="1" lang="ja-JP" altLang="en-US" sz="2400">
+              <a:rPr kumimoji="1" lang="ja-JP" altLang="en-US" sz="2400" dirty="0">
                 <a:latin typeface="Arial" panose="020B0604020202020204" pitchFamily="34" charset="0"/>
                 <a:ea typeface="ＭＳ Ｐゴシック" panose="020B0600070205080204" pitchFamily="50" charset="-128"/>
                 <a:cs typeface="Arial" panose="020B0604020202020204" pitchFamily="34" charset="0"/>
               </a:rPr>
               <a:t>実務での活用</a:t>
             </a:r>
-            <a:endParaRPr kumimoji="1" lang="en-US" altLang="ja-JP" sz="2400">
+            <a:endParaRPr kumimoji="1" lang="en-US" altLang="ja-JP" sz="2400" dirty="0">
               <a:latin typeface="Arial" panose="020B0604020202020204" pitchFamily="34" charset="0"/>
               <a:ea typeface="ＭＳ Ｐゴシック" panose="020B0600070205080204" pitchFamily="50" charset="-128"/>
               <a:cs typeface="Arial" panose="020B0604020202020204" pitchFamily="34" charset="0"/>
@@ -5094,14 +5399,14 @@
               <a:buChar char="ü"/>
             </a:pPr>
             <a:r>
-              <a:rPr kumimoji="1" lang="ja-JP" altLang="en-US" sz="2400">
+              <a:rPr kumimoji="1" lang="ja-JP" altLang="en-US" sz="2400" dirty="0">
                 <a:latin typeface="Arial" panose="020B0604020202020204" pitchFamily="34" charset="0"/>
                 <a:ea typeface="ＭＳ Ｐゴシック" panose="020B0600070205080204" pitchFamily="50" charset="-128"/>
                 <a:cs typeface="Arial" panose="020B0604020202020204" pitchFamily="34" charset="0"/>
               </a:rPr>
               <a:t>症例数設計の妥当性確認</a:t>
             </a:r>
-            <a:endParaRPr kumimoji="1" lang="en-US" altLang="ja-JP" sz="2400">
+            <a:endParaRPr kumimoji="1" lang="en-US" altLang="ja-JP" sz="2400" dirty="0">
               <a:latin typeface="Arial" panose="020B0604020202020204" pitchFamily="34" charset="0"/>
               <a:ea typeface="ＭＳ Ｐゴシック" panose="020B0600070205080204" pitchFamily="50" charset="-128"/>
               <a:cs typeface="Arial" panose="020B0604020202020204" pitchFamily="34" charset="0"/>
@@ -5113,14 +5418,14 @@
               <a:buChar char="ü"/>
             </a:pPr>
             <a:r>
-              <a:rPr kumimoji="1" lang="ja-JP" altLang="en-US" sz="2400">
+              <a:rPr kumimoji="1" lang="ja-JP" altLang="en-US" sz="2400" dirty="0">
                 <a:latin typeface="Arial" panose="020B0604020202020204" pitchFamily="34" charset="0"/>
                 <a:ea typeface="ＭＳ Ｐゴシック" panose="020B0600070205080204" pitchFamily="50" charset="-128"/>
                 <a:cs typeface="Arial" panose="020B0604020202020204" pitchFamily="34" charset="0"/>
               </a:rPr>
               <a:t>推定値の精度および不確実性の評価</a:t>
             </a:r>
-            <a:endParaRPr kumimoji="1" lang="en-US" altLang="ja-JP" sz="2400">
+            <a:endParaRPr kumimoji="1" lang="en-US" altLang="ja-JP" sz="2400" dirty="0">
               <a:latin typeface="Arial" panose="020B0604020202020204" pitchFamily="34" charset="0"/>
               <a:ea typeface="ＭＳ Ｐゴシック" panose="020B0600070205080204" pitchFamily="50" charset="-128"/>
               <a:cs typeface="Arial" panose="020B0604020202020204" pitchFamily="34" charset="0"/>
@@ -5131,7 +5436,7 @@
               <a:buFont typeface="Wingdings" panose="05000000000000000000" pitchFamily="2" charset="2"/>
               <a:buChar char="ü"/>
             </a:pPr>
-            <a:endParaRPr kumimoji="1" lang="en-US" altLang="ja-JP" sz="2400">
+            <a:endParaRPr kumimoji="1" lang="en-US" altLang="ja-JP" sz="2400" dirty="0">
               <a:latin typeface="Arial" panose="020B0604020202020204" pitchFamily="34" charset="0"/>
               <a:ea typeface="ＭＳ Ｐゴシック" panose="020B0600070205080204" pitchFamily="50" charset="-128"/>
               <a:cs typeface="Arial" panose="020B0604020202020204" pitchFamily="34" charset="0"/>
@@ -5200,7 +5505,7 @@
               <a:rPr kumimoji="1" lang="en-US" altLang="ja-JP" smtClean="0"/>
               <a:t>3</a:t>
             </a:fld>
-            <a:endParaRPr kumimoji="1" lang="en-US" altLang="ja-JP"/>
+            <a:endParaRPr kumimoji="1" lang="en-US" altLang="ja-JP" dirty="0"/>
           </a:p>
         </p:txBody>
       </p:sp>
@@ -5226,7 +5531,7 @@
           <a:lstStyle/>
           <a:p>
             <a:r>
-              <a:rPr kumimoji="1" lang="en-US" altLang="ja-JP">
+              <a:rPr kumimoji="1" lang="en-US" altLang="ja-JP" dirty="0">
                 <a:latin typeface="Arial" panose="020B0604020202020204" pitchFamily="34" charset="0"/>
                 <a:ea typeface="ＭＳ Ｐゴシック" panose="020B0600070205080204" pitchFamily="50" charset="-128"/>
                 <a:cs typeface="Arial" panose="020B0604020202020204" pitchFamily="34" charset="0"/>
@@ -5234,7 +5539,7 @@
               <a:t>2</a:t>
             </a:r>
             <a:r>
-              <a:rPr kumimoji="1" lang="ja-JP" altLang="en-US">
+              <a:rPr kumimoji="1" lang="ja-JP" altLang="en-US" dirty="0">
                 <a:latin typeface="Arial" panose="020B0604020202020204" pitchFamily="34" charset="0"/>
                 <a:ea typeface="ＭＳ Ｐゴシック" panose="020B0600070205080204" pitchFamily="50" charset="-128"/>
                 <a:cs typeface="Arial" panose="020B0604020202020204" pitchFamily="34" charset="0"/>
@@ -5242,7 +5547,7 @@
               <a:t>標本</a:t>
             </a:r>
             <a:r>
-              <a:rPr kumimoji="1" lang="en-US" altLang="ja-JP">
+              <a:rPr kumimoji="1" lang="en-US" altLang="ja-JP" dirty="0">
                 <a:latin typeface="Arial" panose="020B0604020202020204" pitchFamily="34" charset="0"/>
                 <a:ea typeface="ＭＳ Ｐゴシック" panose="020B0600070205080204" pitchFamily="50" charset="-128"/>
                 <a:cs typeface="Arial" panose="020B0604020202020204" pitchFamily="34" charset="0"/>
@@ -5250,7 +5555,7 @@
               <a:t>t</a:t>
             </a:r>
             <a:r>
-              <a:rPr kumimoji="1" lang="ja-JP" altLang="en-US">
+              <a:rPr kumimoji="1" lang="ja-JP" altLang="en-US" dirty="0">
                 <a:latin typeface="Arial" panose="020B0604020202020204" pitchFamily="34" charset="0"/>
                 <a:ea typeface="ＭＳ Ｐゴシック" panose="020B0600070205080204" pitchFamily="50" charset="-128"/>
                 <a:cs typeface="Arial" panose="020B0604020202020204" pitchFamily="34" charset="0"/>
@@ -5258,14 +5563,14 @@
               <a:t>検定　</a:t>
             </a:r>
             <a:r>
-              <a:rPr kumimoji="1" lang="en-US" altLang="ja-JP">
+              <a:rPr kumimoji="1" lang="en-US" altLang="ja-JP" dirty="0">
                 <a:latin typeface="Arial" panose="020B0604020202020204" pitchFamily="34" charset="0"/>
                 <a:ea typeface="ＭＳ Ｐゴシック" panose="020B0600070205080204" pitchFamily="50" charset="-128"/>
                 <a:cs typeface="Arial" panose="020B0604020202020204" pitchFamily="34" charset="0"/>
               </a:rPr>
               <a:t>Student or Welch ?</a:t>
             </a:r>
-            <a:endParaRPr kumimoji="1" lang="ja-JP" altLang="en-US">
+            <a:endParaRPr kumimoji="1" lang="ja-JP" altLang="en-US" dirty="0">
               <a:latin typeface="Arial" panose="020B0604020202020204" pitchFamily="34" charset="0"/>
               <a:cs typeface="Arial" panose="020B0604020202020204" pitchFamily="34" charset="0"/>
             </a:endParaRPr>
@@ -5353,28 +5658,28 @@
               <a:p>
                 <a:pPr algn="ctr"/>
                 <a:r>
-                  <a:rPr kumimoji="1" lang="en-US" altLang="ja-JP" sz="3200">
+                  <a:rPr kumimoji="1" lang="en-US" altLang="ja-JP" sz="3200" dirty="0">
                     <a:latin typeface="Aptos Narrow" panose="020B0004020202020204" pitchFamily="34" charset="0"/>
                     <a:ea typeface="ＭＳ Ｐゴシック" panose="020B0600070205080204" pitchFamily="50" charset="-128"/>
                   </a:rPr>
                   <a:t>2</a:t>
                 </a:r>
                 <a:r>
-                  <a:rPr kumimoji="1" lang="ja-JP" altLang="en-US" sz="3200">
+                  <a:rPr kumimoji="1" lang="ja-JP" altLang="en-US" sz="3200" dirty="0">
                     <a:latin typeface="Aptos Narrow" panose="020B0004020202020204" pitchFamily="34" charset="0"/>
                     <a:ea typeface="ＭＳ Ｐゴシック" panose="020B0600070205080204" pitchFamily="50" charset="-128"/>
                   </a:rPr>
                   <a:t>標本</a:t>
                 </a:r>
                 <a:r>
-                  <a:rPr kumimoji="1" lang="en-US" altLang="ja-JP" sz="3200">
+                  <a:rPr kumimoji="1" lang="en-US" altLang="ja-JP" sz="3200" dirty="0">
                     <a:latin typeface="Aptos Narrow" panose="020B0004020202020204" pitchFamily="34" charset="0"/>
                     <a:ea typeface="ＭＳ Ｐゴシック" panose="020B0600070205080204" pitchFamily="50" charset="-128"/>
                   </a:rPr>
                   <a:t>t</a:t>
                 </a:r>
                 <a:r>
-                  <a:rPr kumimoji="1" lang="ja-JP" altLang="en-US" sz="3200">
+                  <a:rPr kumimoji="1" lang="ja-JP" altLang="en-US" sz="3200" dirty="0">
                     <a:latin typeface="Aptos Narrow" panose="020B0004020202020204" pitchFamily="34" charset="0"/>
                     <a:ea typeface="ＭＳ Ｐゴシック" panose="020B0600070205080204" pitchFamily="50" charset="-128"/>
                   </a:rPr>
@@ -5466,7 +5771,7 @@
               <a:p>
                 <a:pPr algn="ctr"/>
                 <a:r>
-                  <a:rPr kumimoji="1" lang="ja-JP" altLang="en-US" sz="3200">
+                  <a:rPr kumimoji="1" lang="ja-JP" altLang="en-US" sz="3200" dirty="0">
                     <a:latin typeface="Aptos Narrow" panose="020B0004020202020204" pitchFamily="34" charset="0"/>
                     <a:ea typeface="ＭＳ Ｐゴシック" panose="020B0600070205080204" pitchFamily="50" charset="-128"/>
                   </a:rPr>
@@ -5600,7 +5905,7 @@
               <a:p>
                 <a:pPr algn="ctr"/>
                 <a:r>
-                  <a:rPr kumimoji="1" lang="en-US" altLang="ja-JP" sz="3200">
+                  <a:rPr kumimoji="1" lang="en-US" altLang="ja-JP" sz="3200" dirty="0">
                     <a:latin typeface="Arial" panose="020B0604020202020204" pitchFamily="34" charset="0"/>
                     <a:ea typeface="ＭＳ Ｐゴシック" panose="020B0600070205080204" pitchFamily="50" charset="-128"/>
                     <a:cs typeface="Arial" panose="020B0604020202020204" pitchFamily="34" charset="0"/>
@@ -5608,7 +5913,7 @@
                   <a:t>Student</a:t>
                 </a:r>
                 <a:r>
-                  <a:rPr kumimoji="1" lang="ja-JP" altLang="en-US" sz="3200">
+                  <a:rPr kumimoji="1" lang="ja-JP" altLang="en-US" sz="3200" dirty="0">
                     <a:latin typeface="Arial" panose="020B0604020202020204" pitchFamily="34" charset="0"/>
                     <a:ea typeface="ＭＳ Ｐゴシック" panose="020B0600070205080204" pitchFamily="50" charset="-128"/>
                     <a:cs typeface="Arial" panose="020B0604020202020204" pitchFamily="34" charset="0"/>
@@ -5616,7 +5921,7 @@
                   <a:t>の</a:t>
                 </a:r>
                 <a:r>
-                  <a:rPr kumimoji="1" lang="en-US" altLang="ja-JP" sz="3200">
+                  <a:rPr kumimoji="1" lang="en-US" altLang="ja-JP" sz="3200" dirty="0">
                     <a:latin typeface="Arial" panose="020B0604020202020204" pitchFamily="34" charset="0"/>
                     <a:ea typeface="ＭＳ Ｐゴシック" panose="020B0600070205080204" pitchFamily="50" charset="-128"/>
                     <a:cs typeface="Arial" panose="020B0604020202020204" pitchFamily="34" charset="0"/>
@@ -5624,7 +5929,7 @@
                   <a:t>t</a:t>
                 </a:r>
                 <a:r>
-                  <a:rPr kumimoji="1" lang="ja-JP" altLang="en-US" sz="3200">
+                  <a:rPr kumimoji="1" lang="ja-JP" altLang="en-US" sz="3200" dirty="0">
                     <a:latin typeface="Arial" panose="020B0604020202020204" pitchFamily="34" charset="0"/>
                     <a:ea typeface="ＭＳ Ｐゴシック" panose="020B0600070205080204" pitchFamily="50" charset="-128"/>
                     <a:cs typeface="Arial" panose="020B0604020202020204" pitchFamily="34" charset="0"/>
@@ -5675,7 +5980,7 @@
               <a:p>
                 <a:pPr algn="ctr"/>
                 <a:r>
-                  <a:rPr kumimoji="1" lang="en-US" altLang="ja-JP" sz="3200">
+                  <a:rPr kumimoji="1" lang="en-US" altLang="ja-JP" sz="3200" dirty="0">
                     <a:latin typeface="Arial" panose="020B0604020202020204" pitchFamily="34" charset="0"/>
                     <a:ea typeface="ＭＳ Ｐゴシック" panose="020B0600070205080204" pitchFamily="50" charset="-128"/>
                     <a:cs typeface="Arial" panose="020B0604020202020204" pitchFamily="34" charset="0"/>
@@ -5683,7 +5988,7 @@
                   <a:t>Welch</a:t>
                 </a:r>
                 <a:r>
-                  <a:rPr kumimoji="1" lang="ja-JP" altLang="en-US" sz="3200">
+                  <a:rPr kumimoji="1" lang="ja-JP" altLang="en-US" sz="3200" dirty="0">
                     <a:latin typeface="Arial" panose="020B0604020202020204" pitchFamily="34" charset="0"/>
                     <a:ea typeface="ＭＳ Ｐゴシック" panose="020B0600070205080204" pitchFamily="50" charset="-128"/>
                     <a:cs typeface="Arial" panose="020B0604020202020204" pitchFamily="34" charset="0"/>
@@ -5691,7 +5996,7 @@
                   <a:t>の</a:t>
                 </a:r>
                 <a:r>
-                  <a:rPr kumimoji="1" lang="en-US" altLang="ja-JP" sz="3200">
+                  <a:rPr kumimoji="1" lang="en-US" altLang="ja-JP" sz="3200" dirty="0">
                     <a:latin typeface="Arial" panose="020B0604020202020204" pitchFamily="34" charset="0"/>
                     <a:ea typeface="ＭＳ Ｐゴシック" panose="020B0600070205080204" pitchFamily="50" charset="-128"/>
                     <a:cs typeface="Arial" panose="020B0604020202020204" pitchFamily="34" charset="0"/>
@@ -5699,7 +6004,7 @@
                   <a:t>t</a:t>
                 </a:r>
                 <a:r>
-                  <a:rPr kumimoji="1" lang="ja-JP" altLang="en-US" sz="3200">
+                  <a:rPr kumimoji="1" lang="ja-JP" altLang="en-US" sz="3200" dirty="0">
                     <a:latin typeface="Arial" panose="020B0604020202020204" pitchFamily="34" charset="0"/>
                     <a:ea typeface="ＭＳ Ｐゴシック" panose="020B0600070205080204" pitchFamily="50" charset="-128"/>
                     <a:cs typeface="Arial" panose="020B0604020202020204" pitchFamily="34" charset="0"/>
@@ -5757,13 +6062,13 @@
             <a:p>
               <a:pPr algn="ctr"/>
               <a:r>
-                <a:rPr kumimoji="1" lang="en-US" altLang="ja-JP" sz="2800">
+                <a:rPr kumimoji="1" lang="en-US" altLang="ja-JP" sz="2800" dirty="0">
                   <a:latin typeface="Arial" panose="020B0604020202020204" pitchFamily="34" charset="0"/>
                   <a:cs typeface="Arial" panose="020B0604020202020204" pitchFamily="34" charset="0"/>
                 </a:rPr>
                 <a:t>Yes</a:t>
               </a:r>
-              <a:endParaRPr kumimoji="1" lang="ja-JP" altLang="en-US" sz="2800">
+              <a:endParaRPr kumimoji="1" lang="ja-JP" altLang="en-US" sz="2800" dirty="0">
                 <a:latin typeface="Arial" panose="020B0604020202020204" pitchFamily="34" charset="0"/>
                 <a:cs typeface="Arial" panose="020B0604020202020204" pitchFamily="34" charset="0"/>
               </a:endParaRPr>
@@ -5817,13 +6122,13 @@
             <a:p>
               <a:pPr algn="ctr"/>
               <a:r>
-                <a:rPr kumimoji="1" lang="en-US" altLang="ja-JP" sz="2800">
+                <a:rPr kumimoji="1" lang="en-US" altLang="ja-JP" sz="2800" dirty="0">
                   <a:latin typeface="Arial" panose="020B0604020202020204" pitchFamily="34" charset="0"/>
                   <a:cs typeface="Arial" panose="020B0604020202020204" pitchFamily="34" charset="0"/>
                 </a:rPr>
                 <a:t>No</a:t>
               </a:r>
-              <a:endParaRPr kumimoji="1" lang="ja-JP" altLang="en-US" sz="2800">
+              <a:endParaRPr kumimoji="1" lang="ja-JP" altLang="en-US" sz="2800" dirty="0">
                 <a:latin typeface="Arial" panose="020B0604020202020204" pitchFamily="34" charset="0"/>
                 <a:cs typeface="Arial" panose="020B0604020202020204" pitchFamily="34" charset="0"/>
               </a:endParaRPr>
@@ -5892,7 +6197,7 @@
               <a:rPr kumimoji="1" lang="en-US" altLang="ja-JP" smtClean="0"/>
               <a:t>4</a:t>
             </a:fld>
-            <a:endParaRPr kumimoji="1" lang="en-US" altLang="ja-JP"/>
+            <a:endParaRPr kumimoji="1" lang="en-US" altLang="ja-JP" dirty="0"/>
           </a:p>
         </p:txBody>
       </p:sp>
@@ -5972,7 +6277,7 @@
                     <a:p>
                       <a:pPr algn="ctr"/>
                       <a:r>
-                        <a:rPr kumimoji="1" lang="ja-JP" altLang="en-US" sz="2400">
+                        <a:rPr kumimoji="1" lang="ja-JP" altLang="en-US" sz="2400" dirty="0">
                           <a:latin typeface="Arial" panose="020B0604020202020204" pitchFamily="34" charset="0"/>
                           <a:ea typeface="ＭＳ Ｐゴシック" panose="020B0600070205080204" pitchFamily="50" charset="-128"/>
                           <a:cs typeface="Arial" panose="020B0604020202020204" pitchFamily="34" charset="0"/>
@@ -5980,14 +6285,14 @@
                         <a:t>群</a:t>
                       </a:r>
                       <a:r>
-                        <a:rPr kumimoji="1" lang="en-US" altLang="ja-JP" sz="2400">
+                        <a:rPr kumimoji="1" lang="en-US" altLang="ja-JP" sz="2400" dirty="0">
                           <a:latin typeface="Arial" panose="020B0604020202020204" pitchFamily="34" charset="0"/>
                           <a:ea typeface="ＭＳ Ｐゴシック" panose="020B0600070205080204" pitchFamily="50" charset="-128"/>
                           <a:cs typeface="Arial" panose="020B0604020202020204" pitchFamily="34" charset="0"/>
                         </a:rPr>
                         <a:t>A</a:t>
                       </a:r>
-                      <a:endParaRPr kumimoji="1" lang="ja-JP" altLang="en-US" sz="2400">
+                      <a:endParaRPr kumimoji="1" lang="ja-JP" altLang="en-US" sz="2400" dirty="0">
                         <a:latin typeface="Arial" panose="020B0604020202020204" pitchFamily="34" charset="0"/>
                         <a:ea typeface="ＭＳ Ｐゴシック" panose="020B0600070205080204" pitchFamily="50" charset="-128"/>
                         <a:cs typeface="Arial" panose="020B0604020202020204" pitchFamily="34" charset="0"/>
@@ -6003,7 +6308,7 @@
                     <a:p>
                       <a:pPr algn="ctr"/>
                       <a:r>
-                        <a:rPr kumimoji="1" lang="ja-JP" altLang="en-US" sz="2400">
+                        <a:rPr kumimoji="1" lang="ja-JP" altLang="en-US" sz="2400" dirty="0">
                           <a:latin typeface="Arial" panose="020B0604020202020204" pitchFamily="34" charset="0"/>
                           <a:ea typeface="ＭＳ Ｐゴシック" panose="020B0600070205080204" pitchFamily="50" charset="-128"/>
                           <a:cs typeface="Arial" panose="020B0604020202020204" pitchFamily="34" charset="0"/>
@@ -6011,14 +6316,14 @@
                         <a:t>群</a:t>
                       </a:r>
                       <a:r>
-                        <a:rPr kumimoji="1" lang="en-US" altLang="ja-JP" sz="2400">
+                        <a:rPr kumimoji="1" lang="en-US" altLang="ja-JP" sz="2400" dirty="0">
                           <a:latin typeface="Arial" panose="020B0604020202020204" pitchFamily="34" charset="0"/>
                           <a:ea typeface="ＭＳ Ｐゴシック" panose="020B0600070205080204" pitchFamily="50" charset="-128"/>
                           <a:cs typeface="Arial" panose="020B0604020202020204" pitchFamily="34" charset="0"/>
                         </a:rPr>
                         <a:t>B</a:t>
                       </a:r>
-                      <a:endParaRPr kumimoji="1" lang="ja-JP" altLang="en-US" sz="2400">
+                      <a:endParaRPr kumimoji="1" lang="ja-JP" altLang="en-US" sz="2400" dirty="0">
                         <a:latin typeface="Arial" panose="020B0604020202020204" pitchFamily="34" charset="0"/>
                         <a:ea typeface="ＭＳ Ｐゴシック" panose="020B0600070205080204" pitchFamily="50" charset="-128"/>
                         <a:cs typeface="Arial" panose="020B0604020202020204" pitchFamily="34" charset="0"/>
@@ -6041,7 +6346,7 @@
                     <a:p>
                       <a:pPr algn="ctr"/>
                       <a:r>
-                        <a:rPr kumimoji="1" lang="ja-JP" altLang="en-US" sz="2400">
+                        <a:rPr kumimoji="1" lang="ja-JP" altLang="en-US" sz="2400" dirty="0">
                           <a:latin typeface="Arial" panose="020B0604020202020204" pitchFamily="34" charset="0"/>
                           <a:ea typeface="ＭＳ Ｐゴシック" panose="020B0600070205080204" pitchFamily="50" charset="-128"/>
                           <a:cs typeface="Arial" panose="020B0604020202020204" pitchFamily="34" charset="0"/>
@@ -6059,14 +6364,14 @@
                     <a:p>
                       <a:pPr algn="ctr"/>
                       <a:r>
-                        <a:rPr kumimoji="1" lang="en-US" altLang="ja-JP" sz="2400">
+                        <a:rPr kumimoji="1" lang="en-US" altLang="ja-JP" sz="2400" dirty="0">
                           <a:latin typeface="Arial" panose="020B0604020202020204" pitchFamily="34" charset="0"/>
                           <a:ea typeface="ＭＳ Ｐゴシック" panose="020B0600070205080204" pitchFamily="50" charset="-128"/>
                           <a:cs typeface="Arial" panose="020B0604020202020204" pitchFamily="34" charset="0"/>
                         </a:rPr>
                         <a:t>25</a:t>
                       </a:r>
-                      <a:endParaRPr kumimoji="1" lang="ja-JP" altLang="en-US" sz="2400">
+                      <a:endParaRPr kumimoji="1" lang="ja-JP" altLang="en-US" sz="2400" dirty="0">
                         <a:latin typeface="Arial" panose="020B0604020202020204" pitchFamily="34" charset="0"/>
                         <a:ea typeface="ＭＳ Ｐゴシック" panose="020B0600070205080204" pitchFamily="50" charset="-128"/>
                         <a:cs typeface="Arial" panose="020B0604020202020204" pitchFamily="34" charset="0"/>
@@ -6082,14 +6387,14 @@
                     <a:p>
                       <a:pPr algn="ctr"/>
                       <a:r>
-                        <a:rPr kumimoji="1" lang="en-US" altLang="ja-JP" sz="2400">
+                        <a:rPr kumimoji="1" lang="en-US" altLang="ja-JP" sz="2400" dirty="0">
                           <a:latin typeface="Arial" panose="020B0604020202020204" pitchFamily="34" charset="0"/>
                           <a:ea typeface="ＭＳ Ｐゴシック" panose="020B0600070205080204" pitchFamily="50" charset="-128"/>
                           <a:cs typeface="Arial" panose="020B0604020202020204" pitchFamily="34" charset="0"/>
                         </a:rPr>
                         <a:t>25</a:t>
                       </a:r>
-                      <a:endParaRPr kumimoji="1" lang="ja-JP" altLang="en-US" sz="2400">
+                      <a:endParaRPr kumimoji="1" lang="ja-JP" altLang="en-US" sz="2400" dirty="0">
                         <a:latin typeface="Arial" panose="020B0604020202020204" pitchFamily="34" charset="0"/>
                         <a:ea typeface="ＭＳ Ｐゴシック" panose="020B0600070205080204" pitchFamily="50" charset="-128"/>
                         <a:cs typeface="Arial" panose="020B0604020202020204" pitchFamily="34" charset="0"/>
@@ -6112,7 +6417,7 @@
                     <a:p>
                       <a:pPr algn="ctr"/>
                       <a:r>
-                        <a:rPr kumimoji="1" lang="ja-JP" altLang="en-US" sz="2400">
+                        <a:rPr kumimoji="1" lang="ja-JP" altLang="en-US" sz="2400" dirty="0">
                           <a:latin typeface="Arial" panose="020B0604020202020204" pitchFamily="34" charset="0"/>
                           <a:ea typeface="ＭＳ Ｐゴシック" panose="020B0600070205080204" pitchFamily="50" charset="-128"/>
                           <a:cs typeface="Arial" panose="020B0604020202020204" pitchFamily="34" charset="0"/>
@@ -6130,14 +6435,14 @@
                     <a:p>
                       <a:pPr algn="ctr"/>
                       <a:r>
-                        <a:rPr kumimoji="1" lang="en-US" altLang="ja-JP" sz="2400">
+                        <a:rPr kumimoji="1" lang="en-US" altLang="ja-JP" sz="2400" dirty="0">
                           <a:latin typeface="Arial" panose="020B0604020202020204" pitchFamily="34" charset="0"/>
                           <a:ea typeface="ＭＳ Ｐゴシック" panose="020B0600070205080204" pitchFamily="50" charset="-128"/>
                           <a:cs typeface="Arial" panose="020B0604020202020204" pitchFamily="34" charset="0"/>
                         </a:rPr>
                         <a:t>0</a:t>
                       </a:r>
-                      <a:endParaRPr kumimoji="1" lang="ja-JP" altLang="en-US" sz="2400">
+                      <a:endParaRPr kumimoji="1" lang="ja-JP" altLang="en-US" sz="2400" dirty="0">
                         <a:latin typeface="Arial" panose="020B0604020202020204" pitchFamily="34" charset="0"/>
                         <a:ea typeface="ＭＳ Ｐゴシック" panose="020B0600070205080204" pitchFamily="50" charset="-128"/>
                         <a:cs typeface="Arial" panose="020B0604020202020204" pitchFamily="34" charset="0"/>
@@ -6153,14 +6458,14 @@
                     <a:p>
                       <a:pPr algn="ctr"/>
                       <a:r>
-                        <a:rPr kumimoji="1" lang="en-US" altLang="ja-JP" sz="2400">
+                        <a:rPr kumimoji="1" lang="en-US" altLang="ja-JP" sz="2400" dirty="0">
                           <a:latin typeface="Arial" panose="020B0604020202020204" pitchFamily="34" charset="0"/>
                           <a:ea typeface="ＭＳ Ｐゴシック" panose="020B0600070205080204" pitchFamily="50" charset="-128"/>
                           <a:cs typeface="Arial" panose="020B0604020202020204" pitchFamily="34" charset="0"/>
                         </a:rPr>
                         <a:t>0</a:t>
                       </a:r>
-                      <a:endParaRPr kumimoji="1" lang="ja-JP" altLang="en-US" sz="2400">
+                      <a:endParaRPr kumimoji="1" lang="ja-JP" altLang="en-US" sz="2400" dirty="0">
                         <a:latin typeface="Arial" panose="020B0604020202020204" pitchFamily="34" charset="0"/>
                         <a:ea typeface="ＭＳ Ｐゴシック" panose="020B0600070205080204" pitchFamily="50" charset="-128"/>
                         <a:cs typeface="Arial" panose="020B0604020202020204" pitchFamily="34" charset="0"/>
@@ -6183,7 +6488,7 @@
                     <a:p>
                       <a:pPr algn="ctr"/>
                       <a:r>
-                        <a:rPr kumimoji="1" lang="ja-JP" altLang="en-US" sz="2400">
+                        <a:rPr kumimoji="1" lang="ja-JP" altLang="en-US" sz="2400" dirty="0">
                           <a:latin typeface="Arial" panose="020B0604020202020204" pitchFamily="34" charset="0"/>
                           <a:ea typeface="ＭＳ Ｐゴシック" panose="020B0600070205080204" pitchFamily="50" charset="-128"/>
                           <a:cs typeface="Arial" panose="020B0604020202020204" pitchFamily="34" charset="0"/>
@@ -6201,14 +6506,14 @@
                     <a:p>
                       <a:pPr algn="ctr"/>
                       <a:r>
-                        <a:rPr kumimoji="1" lang="en-US" altLang="ja-JP" sz="2400">
+                        <a:rPr kumimoji="1" lang="en-US" altLang="ja-JP" sz="2400" dirty="0">
                           <a:latin typeface="Arial" panose="020B0604020202020204" pitchFamily="34" charset="0"/>
                           <a:ea typeface="ＭＳ Ｐゴシック" panose="020B0600070205080204" pitchFamily="50" charset="-128"/>
                           <a:cs typeface="Arial" panose="020B0604020202020204" pitchFamily="34" charset="0"/>
                         </a:rPr>
                         <a:t>1</a:t>
                       </a:r>
-                      <a:endParaRPr kumimoji="1" lang="ja-JP" altLang="en-US" sz="2400">
+                      <a:endParaRPr kumimoji="1" lang="ja-JP" altLang="en-US" sz="2400" dirty="0">
                         <a:latin typeface="Arial" panose="020B0604020202020204" pitchFamily="34" charset="0"/>
                         <a:ea typeface="ＭＳ Ｐゴシック" panose="020B0600070205080204" pitchFamily="50" charset="-128"/>
                         <a:cs typeface="Arial" panose="020B0604020202020204" pitchFamily="34" charset="0"/>
@@ -6224,7 +6529,7 @@
                     <a:p>
                       <a:pPr algn="ctr"/>
                       <a:r>
-                        <a:rPr kumimoji="1" lang="en-US" altLang="ja-JP" sz="2400">
+                        <a:rPr kumimoji="1" lang="en-US" altLang="ja-JP" sz="2400" dirty="0">
                           <a:solidFill>
                             <a:srgbClr val="FF0000"/>
                           </a:solidFill>
@@ -6234,7 +6539,7 @@
                         </a:rPr>
                         <a:t>0.1, 0.5, 1, 2, 5, 10</a:t>
                       </a:r>
-                      <a:endParaRPr kumimoji="1" lang="ja-JP" altLang="en-US" sz="2400">
+                      <a:endParaRPr kumimoji="1" lang="ja-JP" altLang="en-US" sz="2400" dirty="0">
                         <a:solidFill>
                           <a:srgbClr val="FF0000"/>
                         </a:solidFill>
@@ -6260,7 +6565,7 @@
                     <a:p>
                       <a:pPr algn="ctr"/>
                       <a:r>
-                        <a:rPr kumimoji="1" lang="ja-JP" altLang="en-US" sz="2400">
+                        <a:rPr kumimoji="1" lang="ja-JP" altLang="en-US" sz="2400" dirty="0">
                           <a:latin typeface="Arial" panose="020B0604020202020204" pitchFamily="34" charset="0"/>
                           <a:ea typeface="ＭＳ Ｐゴシック" panose="020B0600070205080204" pitchFamily="50" charset="-128"/>
                           <a:cs typeface="Arial" panose="020B0604020202020204" pitchFamily="34" charset="0"/>
@@ -6278,14 +6583,14 @@
                     <a:p>
                       <a:pPr algn="ctr"/>
                       <a:r>
-                        <a:rPr kumimoji="1" lang="en-US" altLang="ja-JP" sz="2400">
+                        <a:rPr kumimoji="1" lang="en-US" altLang="ja-JP" sz="2400" dirty="0">
                           <a:latin typeface="Arial" panose="020B0604020202020204" pitchFamily="34" charset="0"/>
                           <a:ea typeface="ＭＳ Ｐゴシック" panose="020B0600070205080204" pitchFamily="50" charset="-128"/>
                           <a:cs typeface="Arial" panose="020B0604020202020204" pitchFamily="34" charset="0"/>
                         </a:rPr>
                         <a:t>0.05</a:t>
                       </a:r>
-                      <a:endParaRPr kumimoji="1" lang="ja-JP" altLang="en-US" sz="2400">
+                      <a:endParaRPr kumimoji="1" lang="ja-JP" altLang="en-US" sz="2400" dirty="0">
                         <a:latin typeface="Arial" panose="020B0604020202020204" pitchFamily="34" charset="0"/>
                         <a:ea typeface="ＭＳ Ｐゴシック" panose="020B0600070205080204" pitchFamily="50" charset="-128"/>
                         <a:cs typeface="Arial" panose="020B0604020202020204" pitchFamily="34" charset="0"/>
@@ -6300,7 +6605,7 @@
                     <a:lstStyle/>
                     <a:p>
                       <a:pPr algn="ctr"/>
-                      <a:endParaRPr kumimoji="1" lang="ja-JP" altLang="en-US">
+                      <a:endParaRPr kumimoji="1" lang="ja-JP" altLang="en-US" dirty="0">
                         <a:latin typeface="Arial" panose="020B0604020202020204" pitchFamily="34" charset="0"/>
                         <a:ea typeface="ＭＳ Ｐゴシック" panose="020B0600070205080204" pitchFamily="50" charset="-128"/>
                         <a:cs typeface="Arial" panose="020B0604020202020204" pitchFamily="34" charset="0"/>
@@ -6323,7 +6628,7 @@
                     <a:p>
                       <a:pPr algn="ctr"/>
                       <a:r>
-                        <a:rPr kumimoji="1" lang="ja-JP" altLang="en-US" sz="2400">
+                        <a:rPr kumimoji="1" lang="ja-JP" altLang="en-US" sz="2400" dirty="0">
                           <a:latin typeface="Arial" panose="020B0604020202020204" pitchFamily="34" charset="0"/>
                           <a:ea typeface="ＭＳ Ｐゴシック" panose="020B0600070205080204" pitchFamily="50" charset="-128"/>
                           <a:cs typeface="Arial" panose="020B0604020202020204" pitchFamily="34" charset="0"/>
@@ -6341,14 +6646,14 @@
                     <a:p>
                       <a:pPr algn="ctr"/>
                       <a:r>
-                        <a:rPr kumimoji="1" lang="en-US" altLang="ja-JP" sz="2400">
+                        <a:rPr kumimoji="1" lang="en-US" altLang="ja-JP" sz="2400" dirty="0">
                           <a:latin typeface="Arial" panose="020B0604020202020204" pitchFamily="34" charset="0"/>
                           <a:ea typeface="ＭＳ Ｐゴシック" panose="020B0600070205080204" pitchFamily="50" charset="-128"/>
                           <a:cs typeface="Arial" panose="020B0604020202020204" pitchFamily="34" charset="0"/>
                         </a:rPr>
                         <a:t>10000</a:t>
                       </a:r>
-                      <a:endParaRPr kumimoji="1" lang="ja-JP" altLang="en-US" sz="2400">
+                      <a:endParaRPr kumimoji="1" lang="ja-JP" altLang="en-US" sz="2400" dirty="0">
                         <a:latin typeface="Arial" panose="020B0604020202020204" pitchFamily="34" charset="0"/>
                         <a:ea typeface="ＭＳ Ｐゴシック" panose="020B0600070205080204" pitchFamily="50" charset="-128"/>
                         <a:cs typeface="Arial" panose="020B0604020202020204" pitchFamily="34" charset="0"/>
@@ -6363,7 +6668,7 @@
                     <a:lstStyle/>
                     <a:p>
                       <a:pPr algn="ctr"/>
-                      <a:endParaRPr kumimoji="1" lang="ja-JP" altLang="en-US">
+                      <a:endParaRPr kumimoji="1" lang="ja-JP" altLang="en-US" dirty="0">
                         <a:latin typeface="Arial" panose="020B0604020202020204" pitchFamily="34" charset="0"/>
                         <a:ea typeface="ＭＳ Ｐゴシック" panose="020B0600070205080204" pitchFamily="50" charset="-128"/>
                         <a:cs typeface="Arial" panose="020B0604020202020204" pitchFamily="34" charset="0"/>
@@ -6411,7 +6716,7 @@
           <a:lstStyle/>
           <a:p>
             <a:r>
-              <a:rPr lang="ja-JP" altLang="en-US" sz="2400">
+              <a:rPr lang="ja-JP" altLang="en-US" sz="2400" dirty="0">
                 <a:latin typeface="Arial" panose="020B0604020202020204" pitchFamily="34" charset="0"/>
                 <a:ea typeface="ＭＳ Ｐゴシック" panose="020B0600070205080204" pitchFamily="50" charset="-128"/>
                 <a:cs typeface="Arial" panose="020B0604020202020204" pitchFamily="34" charset="0"/>
@@ -6419,7 +6724,7 @@
               <a:t>サンプルサイズ，母平均が同じで，母標準偏差が異なる場合</a:t>
             </a:r>
             <a:r>
-              <a:rPr lang="en-US" altLang="ja-JP" sz="2400">
+              <a:rPr lang="en-US" altLang="ja-JP" sz="2400" dirty="0">
                 <a:latin typeface="Arial" panose="020B0604020202020204" pitchFamily="34" charset="0"/>
                 <a:ea typeface="ＭＳ Ｐゴシック" panose="020B0600070205080204" pitchFamily="50" charset="-128"/>
                 <a:cs typeface="Arial" panose="020B0604020202020204" pitchFamily="34" charset="0"/>
@@ -6429,7 +6734,7 @@
           </a:p>
           <a:p>
             <a:r>
-              <a:rPr kumimoji="1" lang="ja-JP" altLang="en-US" sz="2400">
+              <a:rPr kumimoji="1" lang="ja-JP" altLang="en-US" sz="2400" dirty="0">
                 <a:latin typeface="Arial" panose="020B0604020202020204" pitchFamily="34" charset="0"/>
                 <a:ea typeface="ＭＳ Ｐゴシック" panose="020B0600070205080204" pitchFamily="50" charset="-128"/>
                 <a:cs typeface="Arial" panose="020B0604020202020204" pitchFamily="34" charset="0"/>
@@ -6437,7 +6742,7 @@
               <a:t>本当は２群間の</a:t>
             </a:r>
             <a:r>
-              <a:rPr lang="ja-JP" altLang="en-US" sz="2400">
+              <a:rPr lang="ja-JP" altLang="en-US" sz="2400" dirty="0">
                 <a:latin typeface="Arial" panose="020B0604020202020204" pitchFamily="34" charset="0"/>
                 <a:ea typeface="ＭＳ Ｐゴシック" panose="020B0600070205080204" pitchFamily="50" charset="-128"/>
                 <a:cs typeface="Arial" panose="020B0604020202020204" pitchFamily="34" charset="0"/>
@@ -6445,14 +6750,14 @@
               <a:t>母平均</a:t>
             </a:r>
             <a:r>
-              <a:rPr kumimoji="1" lang="ja-JP" altLang="en-US" sz="2400">
+              <a:rPr kumimoji="1" lang="ja-JP" altLang="en-US" sz="2400" dirty="0">
                 <a:latin typeface="Arial" panose="020B0604020202020204" pitchFamily="34" charset="0"/>
                 <a:ea typeface="ＭＳ Ｐゴシック" panose="020B0600070205080204" pitchFamily="50" charset="-128"/>
                 <a:cs typeface="Arial" panose="020B0604020202020204" pitchFamily="34" charset="0"/>
               </a:rPr>
               <a:t>には差がないはず！</a:t>
             </a:r>
-            <a:endParaRPr kumimoji="1" lang="en-US" altLang="ja-JP" sz="2400">
+            <a:endParaRPr kumimoji="1" lang="en-US" altLang="ja-JP" sz="2400" dirty="0">
               <a:latin typeface="Arial" panose="020B0604020202020204" pitchFamily="34" charset="0"/>
               <a:ea typeface="ＭＳ Ｐゴシック" panose="020B0600070205080204" pitchFamily="50" charset="-128"/>
               <a:cs typeface="Arial" panose="020B0604020202020204" pitchFamily="34" charset="0"/>
@@ -6460,7 +6765,7 @@
           </a:p>
           <a:p>
             <a:r>
-              <a:rPr lang="ja-JP" altLang="en-US" sz="2400">
+              <a:rPr lang="ja-JP" altLang="en-US" sz="2400" dirty="0">
                 <a:latin typeface="Arial" panose="020B0604020202020204" pitchFamily="34" charset="0"/>
                 <a:ea typeface="ＭＳ Ｐゴシック" panose="020B0600070205080204" pitchFamily="50" charset="-128"/>
                 <a:cs typeface="Arial" panose="020B0604020202020204" pitchFamily="34" charset="0"/>
@@ -6468,7 +6773,7 @@
               <a:t>⇒ 誤って有意と判定される</a:t>
             </a:r>
             <a:r>
-              <a:rPr lang="en-US" altLang="ja-JP" sz="2400">
+              <a:rPr lang="en-US" altLang="ja-JP" sz="2400" dirty="0">
                 <a:latin typeface="Arial" panose="020B0604020202020204" pitchFamily="34" charset="0"/>
                 <a:ea typeface="ＭＳ Ｐゴシック" panose="020B0600070205080204" pitchFamily="50" charset="-128"/>
                 <a:cs typeface="Arial" panose="020B0604020202020204" pitchFamily="34" charset="0"/>
@@ -6476,14 +6781,14 @@
               <a:t>α</a:t>
             </a:r>
             <a:r>
-              <a:rPr lang="ja-JP" altLang="en-US" sz="2400">
+              <a:rPr lang="ja-JP" altLang="en-US" sz="2400" dirty="0">
                 <a:latin typeface="Arial" panose="020B0604020202020204" pitchFamily="34" charset="0"/>
                 <a:ea typeface="ＭＳ Ｐゴシック" panose="020B0600070205080204" pitchFamily="50" charset="-128"/>
                 <a:cs typeface="Arial" panose="020B0604020202020204" pitchFamily="34" charset="0"/>
               </a:rPr>
               <a:t>エラーがどうなるかを確認．</a:t>
             </a:r>
-            <a:endParaRPr kumimoji="1" lang="ja-JP" altLang="en-US" sz="2400">
+            <a:endParaRPr kumimoji="1" lang="ja-JP" altLang="en-US" sz="2400" dirty="0">
               <a:latin typeface="Arial" panose="020B0604020202020204" pitchFamily="34" charset="0"/>
               <a:ea typeface="ＭＳ Ｐゴシック" panose="020B0600070205080204" pitchFamily="50" charset="-128"/>
               <a:cs typeface="Arial" panose="020B0604020202020204" pitchFamily="34" charset="0"/>
@@ -6518,7 +6823,7 @@
           <a:lstStyle/>
           <a:p>
             <a:r>
-              <a:rPr kumimoji="1" lang="en-US" altLang="ja-JP">
+              <a:rPr kumimoji="1" lang="en-US" altLang="ja-JP" dirty="0">
                 <a:latin typeface="Arial" panose="020B0604020202020204" pitchFamily="34" charset="0"/>
                 <a:ea typeface="ＭＳ Ｐゴシック" panose="020B0600070205080204" pitchFamily="50" charset="-128"/>
                 <a:cs typeface="Arial" panose="020B0604020202020204" pitchFamily="34" charset="0"/>
@@ -6526,7 +6831,7 @@
               <a:t>2</a:t>
             </a:r>
             <a:r>
-              <a:rPr kumimoji="1" lang="ja-JP" altLang="en-US">
+              <a:rPr kumimoji="1" lang="ja-JP" altLang="en-US" dirty="0">
                 <a:latin typeface="Arial" panose="020B0604020202020204" pitchFamily="34" charset="0"/>
                 <a:ea typeface="ＭＳ Ｐゴシック" panose="020B0600070205080204" pitchFamily="50" charset="-128"/>
                 <a:cs typeface="Arial" panose="020B0604020202020204" pitchFamily="34" charset="0"/>
@@ -6534,7 +6839,7 @@
               <a:t>標本</a:t>
             </a:r>
             <a:r>
-              <a:rPr kumimoji="1" lang="en-US" altLang="ja-JP">
+              <a:rPr kumimoji="1" lang="en-US" altLang="ja-JP" dirty="0">
                 <a:latin typeface="Arial" panose="020B0604020202020204" pitchFamily="34" charset="0"/>
                 <a:ea typeface="ＭＳ Ｐゴシック" panose="020B0600070205080204" pitchFamily="50" charset="-128"/>
                 <a:cs typeface="Arial" panose="020B0604020202020204" pitchFamily="34" charset="0"/>
@@ -6542,7 +6847,7 @@
               <a:t>t</a:t>
             </a:r>
             <a:r>
-              <a:rPr kumimoji="1" lang="ja-JP" altLang="en-US">
+              <a:rPr kumimoji="1" lang="ja-JP" altLang="en-US" dirty="0">
                 <a:latin typeface="Arial" panose="020B0604020202020204" pitchFamily="34" charset="0"/>
                 <a:ea typeface="ＭＳ Ｐゴシック" panose="020B0600070205080204" pitchFamily="50" charset="-128"/>
                 <a:cs typeface="Arial" panose="020B0604020202020204" pitchFamily="34" charset="0"/>
@@ -6550,14 +6855,14 @@
               <a:t>検定　</a:t>
             </a:r>
             <a:r>
-              <a:rPr kumimoji="1" lang="en-US" altLang="ja-JP">
+              <a:rPr kumimoji="1" lang="en-US" altLang="ja-JP" dirty="0">
                 <a:latin typeface="Arial" panose="020B0604020202020204" pitchFamily="34" charset="0"/>
                 <a:ea typeface="ＭＳ Ｐゴシック" panose="020B0600070205080204" pitchFamily="50" charset="-128"/>
                 <a:cs typeface="Arial" panose="020B0604020202020204" pitchFamily="34" charset="0"/>
               </a:rPr>
               <a:t>Student or Welch ?</a:t>
             </a:r>
-            <a:endParaRPr kumimoji="1" lang="ja-JP" altLang="en-US">
+            <a:endParaRPr kumimoji="1" lang="ja-JP" altLang="en-US" dirty="0">
               <a:latin typeface="Arial" panose="020B0604020202020204" pitchFamily="34" charset="0"/>
               <a:cs typeface="Arial" panose="020B0604020202020204" pitchFamily="34" charset="0"/>
             </a:endParaRPr>
@@ -6625,7 +6930,7 @@
               <a:rPr kumimoji="1" lang="en-US" altLang="ja-JP" smtClean="0"/>
               <a:t>5</a:t>
             </a:fld>
-            <a:endParaRPr kumimoji="1" lang="en-US" altLang="ja-JP"/>
+            <a:endParaRPr kumimoji="1" lang="en-US" altLang="ja-JP" dirty="0"/>
           </a:p>
         </p:txBody>
       </p:sp>
@@ -6658,7 +6963,7 @@
           <a:lstStyle/>
           <a:p>
             <a:r>
-              <a:rPr lang="en-US" altLang="ja-JP" sz="1600">
+              <a:rPr lang="en-US" altLang="ja-JP" sz="1600" dirty="0">
                 <a:latin typeface="+mn-lt"/>
                 <a:ea typeface="ＭＳ Ｐゴシック" panose="020B0600070205080204" pitchFamily="50" charset="-128"/>
               </a:rPr>
@@ -6667,7 +6972,7 @@
           </a:p>
           <a:p>
             <a:r>
-              <a:rPr lang="en-US" altLang="ja-JP" sz="1600">
+              <a:rPr lang="en-US" altLang="ja-JP" sz="1600" dirty="0">
                 <a:latin typeface="+mn-lt"/>
                 <a:ea typeface="ＭＳ Ｐゴシック" panose="020B0600070205080204" pitchFamily="50" charset="-128"/>
               </a:rPr>
@@ -6676,14 +6981,14 @@
           </a:p>
           <a:p>
             <a:r>
-              <a:rPr lang="en-US" altLang="ja-JP" sz="1600" err="1">
+              <a:rPr lang="en-US" altLang="ja-JP" sz="1600" dirty="0" err="1">
                 <a:latin typeface="+mn-lt"/>
                 <a:ea typeface="ＭＳ Ｐゴシック" panose="020B0600070205080204" pitchFamily="50" charset="-128"/>
               </a:rPr>
               <a:t>sigma_a</a:t>
             </a:r>
             <a:r>
-              <a:rPr lang="en-US" altLang="ja-JP" sz="1600">
+              <a:rPr lang="en-US" altLang="ja-JP" sz="1600" dirty="0">
                 <a:latin typeface="+mn-lt"/>
                 <a:ea typeface="ＭＳ Ｐゴシック" panose="020B0600070205080204" pitchFamily="50" charset="-128"/>
               </a:rPr>
@@ -6692,14 +6997,14 @@
           </a:p>
           <a:p>
             <a:r>
-              <a:rPr lang="en-US" altLang="ja-JP" sz="1600" err="1">
+              <a:rPr lang="en-US" altLang="ja-JP" sz="1600" dirty="0" err="1">
                 <a:latin typeface="+mn-lt"/>
                 <a:ea typeface="ＭＳ Ｐゴシック" panose="020B0600070205080204" pitchFamily="50" charset="-128"/>
               </a:rPr>
               <a:t>sigma_b</a:t>
             </a:r>
             <a:r>
-              <a:rPr lang="en-US" altLang="ja-JP" sz="1600">
+              <a:rPr lang="en-US" altLang="ja-JP" sz="1600" dirty="0">
                 <a:latin typeface="+mn-lt"/>
                 <a:ea typeface="ＭＳ Ｐゴシック" panose="020B0600070205080204" pitchFamily="50" charset="-128"/>
               </a:rPr>
@@ -6707,28 +7012,28 @@
             </a:r>
           </a:p>
           <a:p>
-            <a:endParaRPr lang="en-US" altLang="ja-JP" sz="1600">
+            <a:endParaRPr lang="en-US" altLang="ja-JP" sz="1600" dirty="0">
               <a:latin typeface="+mn-lt"/>
               <a:ea typeface="ＭＳ Ｐゴシック" panose="020B0600070205080204" pitchFamily="50" charset="-128"/>
             </a:endParaRPr>
           </a:p>
           <a:p>
             <a:r>
-              <a:rPr lang="en-US" altLang="ja-JP" sz="1600">
+              <a:rPr lang="en-US" altLang="ja-JP" sz="1600" dirty="0">
                 <a:latin typeface="+mn-lt"/>
                 <a:ea typeface="ＭＳ Ｐゴシック" panose="020B0600070205080204" pitchFamily="50" charset="-128"/>
               </a:rPr>
               <a:t>l &lt;- length(</a:t>
             </a:r>
             <a:r>
-              <a:rPr lang="en-US" altLang="ja-JP" sz="1600" err="1">
+              <a:rPr lang="en-US" altLang="ja-JP" sz="1600" dirty="0" err="1">
                 <a:latin typeface="+mn-lt"/>
                 <a:ea typeface="ＭＳ Ｐゴシック" panose="020B0600070205080204" pitchFamily="50" charset="-128"/>
               </a:rPr>
               <a:t>sigma_b</a:t>
             </a:r>
             <a:r>
-              <a:rPr lang="en-US" altLang="ja-JP" sz="1600">
+              <a:rPr lang="en-US" altLang="ja-JP" sz="1600" dirty="0">
                 <a:latin typeface="+mn-lt"/>
                 <a:ea typeface="ＭＳ Ｐゴシック" panose="020B0600070205080204" pitchFamily="50" charset="-128"/>
               </a:rPr>
@@ -6736,14 +7041,14 @@
             </a:r>
           </a:p>
           <a:p>
-            <a:endParaRPr lang="en-US" altLang="ja-JP" sz="1600">
+            <a:endParaRPr lang="en-US" altLang="ja-JP" sz="1600" dirty="0">
               <a:latin typeface="+mn-lt"/>
               <a:ea typeface="ＭＳ Ｐゴシック" panose="020B0600070205080204" pitchFamily="50" charset="-128"/>
             </a:endParaRPr>
           </a:p>
           <a:p>
             <a:r>
-              <a:rPr lang="en-US" altLang="ja-JP" sz="1600">
+              <a:rPr lang="en-US" altLang="ja-JP" sz="1600" dirty="0">
                 <a:latin typeface="+mn-lt"/>
                 <a:ea typeface="ＭＳ Ｐゴシック" panose="020B0600070205080204" pitchFamily="50" charset="-128"/>
               </a:rPr>
@@ -6752,7 +7057,7 @@
           </a:p>
           <a:p>
             <a:r>
-              <a:rPr lang="en-US" altLang="ja-JP" sz="1600">
+              <a:rPr lang="en-US" altLang="ja-JP" sz="1600" dirty="0">
                 <a:latin typeface="+mn-lt"/>
                 <a:ea typeface="ＭＳ Ｐゴシック" panose="020B0600070205080204" pitchFamily="50" charset="-128"/>
               </a:rPr>
@@ -6760,21 +7065,21 @@
             </a:r>
           </a:p>
           <a:p>
-            <a:endParaRPr lang="en-US" altLang="ja-JP" sz="1600">
+            <a:endParaRPr lang="en-US" altLang="ja-JP" sz="1600" dirty="0">
               <a:latin typeface="+mn-lt"/>
               <a:ea typeface="ＭＳ Ｐゴシック" panose="020B0600070205080204" pitchFamily="50" charset="-128"/>
             </a:endParaRPr>
           </a:p>
           <a:p>
             <a:r>
-              <a:rPr lang="en-US" altLang="ja-JP" sz="1600" err="1">
+              <a:rPr lang="en-US" altLang="ja-JP" sz="1600" dirty="0" err="1">
                 <a:latin typeface="+mn-lt"/>
                 <a:ea typeface="ＭＳ Ｐゴシック" panose="020B0600070205080204" pitchFamily="50" charset="-128"/>
               </a:rPr>
               <a:t>pvalue</a:t>
             </a:r>
             <a:r>
-              <a:rPr lang="en-US" altLang="ja-JP" sz="1600">
+              <a:rPr lang="en-US" altLang="ja-JP" sz="1600" dirty="0">
                 <a:latin typeface="+mn-lt"/>
                 <a:ea typeface="ＭＳ Ｐゴシック" panose="020B0600070205080204" pitchFamily="50" charset="-128"/>
               </a:rPr>
@@ -6782,21 +7087,21 @@
             </a:r>
           </a:p>
           <a:p>
-            <a:endParaRPr lang="en-US" altLang="ja-JP" sz="1600">
+            <a:endParaRPr lang="en-US" altLang="ja-JP" sz="1600" dirty="0">
               <a:latin typeface="+mn-lt"/>
               <a:ea typeface="ＭＳ Ｐゴシック" panose="020B0600070205080204" pitchFamily="50" charset="-128"/>
             </a:endParaRPr>
           </a:p>
           <a:p>
             <a:r>
-              <a:rPr lang="en-US" altLang="ja-JP" sz="1600" err="1">
+              <a:rPr lang="en-US" altLang="ja-JP" sz="1600" dirty="0" err="1">
                 <a:latin typeface="+mn-lt"/>
                 <a:ea typeface="ＭＳ Ｐゴシック" panose="020B0600070205080204" pitchFamily="50" charset="-128"/>
               </a:rPr>
               <a:t>set.seed</a:t>
             </a:r>
             <a:r>
-              <a:rPr lang="en-US" altLang="ja-JP" sz="1600">
+              <a:rPr lang="en-US" altLang="ja-JP" sz="1600" dirty="0">
                 <a:latin typeface="+mn-lt"/>
                 <a:ea typeface="ＭＳ Ｐゴシック" panose="020B0600070205080204" pitchFamily="50" charset="-128"/>
               </a:rPr>
@@ -6805,21 +7110,21 @@
           </a:p>
           <a:p>
             <a:r>
-              <a:rPr lang="en-US" altLang="ja-JP" sz="1600">
+              <a:rPr lang="en-US" altLang="ja-JP" sz="1600" dirty="0">
                 <a:latin typeface="+mn-lt"/>
                 <a:ea typeface="ＭＳ Ｐゴシック" panose="020B0600070205080204" pitchFamily="50" charset="-128"/>
               </a:rPr>
               <a:t>for (</a:t>
             </a:r>
             <a:r>
-              <a:rPr lang="en-US" altLang="ja-JP" sz="1600" err="1">
+              <a:rPr lang="en-US" altLang="ja-JP" sz="1600" dirty="0" err="1">
                 <a:latin typeface="+mn-lt"/>
                 <a:ea typeface="ＭＳ Ｐゴシック" panose="020B0600070205080204" pitchFamily="50" charset="-128"/>
               </a:rPr>
               <a:t>i</a:t>
             </a:r>
             <a:r>
-              <a:rPr lang="en-US" altLang="ja-JP" sz="1600">
+              <a:rPr lang="en-US" altLang="ja-JP" sz="1600" dirty="0">
                 <a:latin typeface="+mn-lt"/>
                 <a:ea typeface="ＭＳ Ｐゴシック" panose="020B0600070205080204" pitchFamily="50" charset="-128"/>
               </a:rPr>
@@ -6828,21 +7133,21 @@
           </a:p>
           <a:p>
             <a:r>
-              <a:rPr lang="en-US" altLang="ja-JP" sz="1600">
+              <a:rPr lang="en-US" altLang="ja-JP" sz="1600" dirty="0">
                 <a:latin typeface="+mn-lt"/>
                 <a:ea typeface="ＭＳ Ｐゴシック" panose="020B0600070205080204" pitchFamily="50" charset="-128"/>
               </a:rPr>
               <a:t>  for (j in 1</a:t>
             </a:r>
             <a:r>
-              <a:rPr lang="ja-JP" altLang="en-US" sz="1600">
+              <a:rPr lang="ja-JP" altLang="en-US" sz="1600" dirty="0">
                 <a:latin typeface="+mn-lt"/>
                 <a:ea typeface="ＭＳ Ｐゴシック" panose="020B0600070205080204" pitchFamily="50" charset="-128"/>
               </a:rPr>
               <a:t> </a:t>
             </a:r>
             <a:r>
-              <a:rPr lang="en-US" altLang="ja-JP" sz="1600">
+              <a:rPr lang="en-US" altLang="ja-JP" sz="1600" dirty="0">
                 <a:latin typeface="+mn-lt"/>
                 <a:ea typeface="ＭＳ Ｐゴシック" panose="020B0600070205080204" pitchFamily="50" charset="-128"/>
               </a:rPr>
@@ -6851,49 +7156,49 @@
           </a:p>
           <a:p>
             <a:r>
-              <a:rPr lang="en-US" altLang="ja-JP" sz="1600">
+              <a:rPr lang="en-US" altLang="ja-JP" sz="1600" dirty="0">
                 <a:latin typeface="+mn-lt"/>
                 <a:ea typeface="ＭＳ Ｐゴシック" panose="020B0600070205080204" pitchFamily="50" charset="-128"/>
               </a:rPr>
               <a:t>    </a:t>
             </a:r>
             <a:r>
-              <a:rPr lang="en-US" altLang="ja-JP" sz="1600" err="1">
+              <a:rPr lang="en-US" altLang="ja-JP" sz="1600" dirty="0" err="1">
                 <a:latin typeface="+mn-lt"/>
                 <a:ea typeface="ＭＳ Ｐゴシック" panose="020B0600070205080204" pitchFamily="50" charset="-128"/>
               </a:rPr>
               <a:t>y_a</a:t>
             </a:r>
             <a:r>
-              <a:rPr lang="en-US" altLang="ja-JP" sz="1600">
+              <a:rPr lang="en-US" altLang="ja-JP" sz="1600" dirty="0">
                 <a:latin typeface="+mn-lt"/>
                 <a:ea typeface="ＭＳ Ｐゴシック" panose="020B0600070205080204" pitchFamily="50" charset="-128"/>
               </a:rPr>
               <a:t> &lt;- </a:t>
             </a:r>
             <a:r>
-              <a:rPr lang="en-US" altLang="ja-JP" sz="1600" err="1">
+              <a:rPr lang="en-US" altLang="ja-JP" sz="1600" dirty="0" err="1">
                 <a:latin typeface="+mn-lt"/>
                 <a:ea typeface="ＭＳ Ｐゴシック" panose="020B0600070205080204" pitchFamily="50" charset="-128"/>
               </a:rPr>
               <a:t>rnorm</a:t>
             </a:r>
             <a:r>
-              <a:rPr lang="en-US" altLang="ja-JP" sz="1600">
+              <a:rPr lang="en-US" altLang="ja-JP" sz="1600" dirty="0">
                 <a:latin typeface="+mn-lt"/>
                 <a:ea typeface="ＭＳ Ｐゴシック" panose="020B0600070205080204" pitchFamily="50" charset="-128"/>
               </a:rPr>
               <a:t>(n[1], mu[1], </a:t>
             </a:r>
             <a:r>
-              <a:rPr lang="en-US" altLang="ja-JP" sz="1600" err="1">
+              <a:rPr lang="en-US" altLang="ja-JP" sz="1600" dirty="0" err="1">
                 <a:latin typeface="+mn-lt"/>
                 <a:ea typeface="ＭＳ Ｐゴシック" panose="020B0600070205080204" pitchFamily="50" charset="-128"/>
               </a:rPr>
               <a:t>sigma_a</a:t>
             </a:r>
             <a:r>
-              <a:rPr lang="en-US" altLang="ja-JP" sz="1600">
+              <a:rPr lang="en-US" altLang="ja-JP" sz="1600" dirty="0">
                 <a:latin typeface="+mn-lt"/>
                 <a:ea typeface="ＭＳ Ｐゴシック" panose="020B0600070205080204" pitchFamily="50" charset="-128"/>
               </a:rPr>
@@ -6902,63 +7207,63 @@
           </a:p>
           <a:p>
             <a:r>
-              <a:rPr lang="en-US" altLang="ja-JP" sz="1600">
+              <a:rPr lang="en-US" altLang="ja-JP" sz="1600" dirty="0">
                 <a:latin typeface="+mn-lt"/>
                 <a:ea typeface="ＭＳ Ｐゴシック" panose="020B0600070205080204" pitchFamily="50" charset="-128"/>
               </a:rPr>
               <a:t>    </a:t>
             </a:r>
             <a:r>
-              <a:rPr lang="en-US" altLang="ja-JP" sz="1600" err="1">
+              <a:rPr lang="en-US" altLang="ja-JP" sz="1600" dirty="0" err="1">
                 <a:latin typeface="+mn-lt"/>
                 <a:ea typeface="ＭＳ Ｐゴシック" panose="020B0600070205080204" pitchFamily="50" charset="-128"/>
               </a:rPr>
               <a:t>y_b</a:t>
             </a:r>
             <a:r>
-              <a:rPr lang="en-US" altLang="ja-JP" sz="1600">
+              <a:rPr lang="en-US" altLang="ja-JP" sz="1600" dirty="0">
                 <a:latin typeface="+mn-lt"/>
                 <a:ea typeface="ＭＳ Ｐゴシック" panose="020B0600070205080204" pitchFamily="50" charset="-128"/>
               </a:rPr>
               <a:t> &lt;- </a:t>
             </a:r>
             <a:r>
-              <a:rPr lang="en-US" altLang="ja-JP" sz="1600" err="1">
+              <a:rPr lang="en-US" altLang="ja-JP" sz="1600" dirty="0" err="1">
                 <a:latin typeface="+mn-lt"/>
                 <a:ea typeface="ＭＳ Ｐゴシック" panose="020B0600070205080204" pitchFamily="50" charset="-128"/>
               </a:rPr>
               <a:t>rnorm</a:t>
             </a:r>
             <a:r>
-              <a:rPr lang="en-US" altLang="ja-JP" sz="1600">
+              <a:rPr lang="en-US" altLang="ja-JP" sz="1600" dirty="0">
                 <a:latin typeface="+mn-lt"/>
                 <a:ea typeface="ＭＳ Ｐゴシック" panose="020B0600070205080204" pitchFamily="50" charset="-128"/>
               </a:rPr>
               <a:t>(n[2], mu[2], </a:t>
             </a:r>
             <a:r>
-              <a:rPr lang="en-US" altLang="ja-JP" sz="1600" err="1">
+              <a:rPr lang="en-US" altLang="ja-JP" sz="1600" dirty="0" err="1">
                 <a:latin typeface="+mn-lt"/>
                 <a:ea typeface="ＭＳ Ｐゴシック" panose="020B0600070205080204" pitchFamily="50" charset="-128"/>
               </a:rPr>
               <a:t>sigma_b</a:t>
             </a:r>
             <a:r>
-              <a:rPr lang="en-US" altLang="ja-JP" sz="1600">
+              <a:rPr lang="en-US" altLang="ja-JP" sz="1600" dirty="0">
                 <a:latin typeface="+mn-lt"/>
                 <a:ea typeface="ＭＳ Ｐゴシック" panose="020B0600070205080204" pitchFamily="50" charset="-128"/>
               </a:rPr>
               <a:t>[</a:t>
             </a:r>
             <a:r>
-              <a:rPr lang="en-US" altLang="ja-JP" sz="1600" err="1">
+              <a:rPr lang="en-US" altLang="ja-JP" sz="1600" dirty="0" err="1">
                 <a:latin typeface="+mn-lt"/>
                 <a:ea typeface="ＭＳ Ｐゴシック" panose="020B0600070205080204" pitchFamily="50" charset="-128"/>
               </a:rPr>
               <a:t>i</a:t>
             </a:r>
             <a:r>
-              <a:rPr lang="en-US" altLang="ja-JP" sz="1600">
+              <a:rPr lang="en-US" altLang="ja-JP" sz="1600" dirty="0">
                 <a:latin typeface="+mn-lt"/>
                 <a:ea typeface="ＭＳ Ｐゴシック" panose="020B0600070205080204" pitchFamily="50" charset="-128"/>
               </a:rPr>
@@ -6967,63 +7272,63 @@
           </a:p>
           <a:p>
             <a:r>
-              <a:rPr lang="en-US" altLang="ja-JP" sz="1600">
+              <a:rPr lang="en-US" altLang="ja-JP" sz="1600" dirty="0">
                 <a:latin typeface="+mn-lt"/>
                 <a:ea typeface="ＭＳ Ｐゴシック" panose="020B0600070205080204" pitchFamily="50" charset="-128"/>
               </a:rPr>
               <a:t>    result &lt;- </a:t>
             </a:r>
             <a:r>
-              <a:rPr lang="en-US" altLang="ja-JP" sz="1600" err="1">
+              <a:rPr lang="en-US" altLang="ja-JP" sz="1600" dirty="0" err="1">
                 <a:latin typeface="+mn-lt"/>
                 <a:ea typeface="ＭＳ Ｐゴシック" panose="020B0600070205080204" pitchFamily="50" charset="-128"/>
               </a:rPr>
               <a:t>t.test</a:t>
             </a:r>
             <a:r>
-              <a:rPr lang="en-US" altLang="ja-JP" sz="1600">
+              <a:rPr lang="en-US" altLang="ja-JP" sz="1600" dirty="0">
                 <a:latin typeface="+mn-lt"/>
                 <a:ea typeface="ＭＳ Ｐゴシック" panose="020B0600070205080204" pitchFamily="50" charset="-128"/>
               </a:rPr>
               <a:t>(</a:t>
             </a:r>
             <a:r>
-              <a:rPr lang="en-US" altLang="ja-JP" sz="1600" err="1">
+              <a:rPr lang="en-US" altLang="ja-JP" sz="1600" dirty="0" err="1">
                 <a:latin typeface="+mn-lt"/>
                 <a:ea typeface="ＭＳ Ｐゴシック" panose="020B0600070205080204" pitchFamily="50" charset="-128"/>
               </a:rPr>
               <a:t>y_a</a:t>
             </a:r>
             <a:r>
-              <a:rPr lang="en-US" altLang="ja-JP" sz="1600">
+              <a:rPr lang="en-US" altLang="ja-JP" sz="1600" dirty="0">
                 <a:latin typeface="+mn-lt"/>
                 <a:ea typeface="ＭＳ Ｐゴシック" panose="020B0600070205080204" pitchFamily="50" charset="-128"/>
               </a:rPr>
               <a:t>, </a:t>
             </a:r>
             <a:r>
-              <a:rPr lang="en-US" altLang="ja-JP" sz="1600" err="1">
+              <a:rPr lang="en-US" altLang="ja-JP" sz="1600" dirty="0" err="1">
                 <a:latin typeface="+mn-lt"/>
                 <a:ea typeface="ＭＳ Ｐゴシック" panose="020B0600070205080204" pitchFamily="50" charset="-128"/>
               </a:rPr>
               <a:t>y_b</a:t>
             </a:r>
             <a:r>
-              <a:rPr lang="en-US" altLang="ja-JP" sz="1600">
+              <a:rPr lang="en-US" altLang="ja-JP" sz="1600" dirty="0">
                 <a:latin typeface="+mn-lt"/>
                 <a:ea typeface="ＭＳ Ｐゴシック" panose="020B0600070205080204" pitchFamily="50" charset="-128"/>
               </a:rPr>
               <a:t>, </a:t>
             </a:r>
             <a:r>
-              <a:rPr lang="en-US" altLang="ja-JP" sz="1600" err="1">
+              <a:rPr lang="en-US" altLang="ja-JP" sz="1600" dirty="0" err="1">
                 <a:latin typeface="+mn-lt"/>
                 <a:ea typeface="ＭＳ Ｐゴシック" panose="020B0600070205080204" pitchFamily="50" charset="-128"/>
               </a:rPr>
               <a:t>var.equal</a:t>
             </a:r>
             <a:r>
-              <a:rPr lang="en-US" altLang="ja-JP" sz="1600">
+              <a:rPr lang="en-US" altLang="ja-JP" sz="1600" dirty="0">
                 <a:latin typeface="+mn-lt"/>
                 <a:ea typeface="ＭＳ Ｐゴシック" panose="020B0600070205080204" pitchFamily="50" charset="-128"/>
               </a:rPr>
@@ -7032,62 +7337,62 @@
           </a:p>
           <a:p>
             <a:r>
-              <a:rPr lang="en-US" altLang="ja-JP" sz="1600">
+              <a:rPr lang="en-US" altLang="ja-JP" sz="1600" dirty="0">
                 <a:latin typeface="+mn-lt"/>
                 <a:ea typeface="ＭＳ Ｐゴシック" panose="020B0600070205080204" pitchFamily="50" charset="-128"/>
               </a:rPr>
               <a:t>    </a:t>
             </a:r>
             <a:r>
-              <a:rPr lang="en-US" altLang="ja-JP" sz="1600" err="1">
+              <a:rPr lang="en-US" altLang="ja-JP" sz="1600" dirty="0" err="1">
                 <a:latin typeface="+mn-lt"/>
                 <a:ea typeface="ＭＳ Ｐゴシック" panose="020B0600070205080204" pitchFamily="50" charset="-128"/>
               </a:rPr>
               <a:t>pvalue</a:t>
             </a:r>
             <a:r>
-              <a:rPr lang="en-US" altLang="ja-JP" sz="1600">
+              <a:rPr lang="en-US" altLang="ja-JP" sz="1600" dirty="0">
                 <a:latin typeface="+mn-lt"/>
                 <a:ea typeface="ＭＳ Ｐゴシック" panose="020B0600070205080204" pitchFamily="50" charset="-128"/>
               </a:rPr>
               <a:t>[</a:t>
             </a:r>
             <a:r>
-              <a:rPr lang="en-US" altLang="ja-JP" sz="1600" err="1">
+              <a:rPr lang="en-US" altLang="ja-JP" sz="1600" dirty="0" err="1">
                 <a:latin typeface="+mn-lt"/>
                 <a:ea typeface="ＭＳ Ｐゴシック" panose="020B0600070205080204" pitchFamily="50" charset="-128"/>
               </a:rPr>
               <a:t>i</a:t>
             </a:r>
             <a:r>
-              <a:rPr lang="en-US" altLang="ja-JP" sz="1600">
+              <a:rPr lang="en-US" altLang="ja-JP" sz="1600" dirty="0">
                 <a:latin typeface="+mn-lt"/>
                 <a:ea typeface="ＭＳ Ｐゴシック" panose="020B0600070205080204" pitchFamily="50" charset="-128"/>
               </a:rPr>
               <a:t>, j] &lt;- </a:t>
             </a:r>
             <a:r>
-              <a:rPr lang="en-US" altLang="ja-JP" sz="1600" err="1">
+              <a:rPr lang="en-US" altLang="ja-JP" sz="1600" dirty="0" err="1">
                 <a:latin typeface="+mn-lt"/>
                 <a:ea typeface="ＭＳ Ｐゴシック" panose="020B0600070205080204" pitchFamily="50" charset="-128"/>
               </a:rPr>
               <a:t>result$p.value</a:t>
             </a:r>
-            <a:endParaRPr lang="en-US" altLang="ja-JP" sz="1600">
+            <a:endParaRPr lang="en-US" altLang="ja-JP" sz="1600" dirty="0">
               <a:latin typeface="+mn-lt"/>
               <a:ea typeface="ＭＳ Ｐゴシック" panose="020B0600070205080204" pitchFamily="50" charset="-128"/>
             </a:endParaRPr>
           </a:p>
           <a:p>
             <a:r>
-              <a:rPr lang="ja-JP" altLang="en-US" sz="1600">
+              <a:rPr lang="ja-JP" altLang="en-US" sz="1600" dirty="0">
                 <a:latin typeface="+mn-lt"/>
                 <a:ea typeface="ＭＳ Ｐゴシック" panose="020B0600070205080204" pitchFamily="50" charset="-128"/>
               </a:rPr>
               <a:t>  </a:t>
             </a:r>
             <a:r>
-              <a:rPr lang="en-US" altLang="ja-JP" sz="1600">
+              <a:rPr lang="en-US" altLang="ja-JP" sz="1600" dirty="0">
                 <a:latin typeface="+mn-lt"/>
                 <a:ea typeface="ＭＳ Ｐゴシック" panose="020B0600070205080204" pitchFamily="50" charset="-128"/>
               </a:rPr>
@@ -7096,7 +7401,7 @@
           </a:p>
           <a:p>
             <a:r>
-              <a:rPr lang="en-US" altLang="ja-JP" sz="1600">
+              <a:rPr lang="en-US" altLang="ja-JP" sz="1600" dirty="0">
                 <a:latin typeface="+mn-lt"/>
                 <a:ea typeface="ＭＳ Ｐゴシック" panose="020B0600070205080204" pitchFamily="50" charset="-128"/>
               </a:rPr>
@@ -7104,14 +7409,14 @@
             </a:r>
           </a:p>
           <a:p>
-            <a:endParaRPr lang="en-US" altLang="ja-JP" sz="1600">
+            <a:endParaRPr lang="en-US" altLang="ja-JP" sz="1600" dirty="0">
               <a:latin typeface="+mn-lt"/>
               <a:ea typeface="ＭＳ Ｐゴシック" panose="020B0600070205080204" pitchFamily="50" charset="-128"/>
             </a:endParaRPr>
           </a:p>
           <a:p>
             <a:r>
-              <a:rPr lang="en-US" altLang="ja-JP" sz="1600">
+              <a:rPr lang="en-US" altLang="ja-JP" sz="1600" dirty="0">
                 <a:latin typeface="+mn-lt"/>
                 <a:ea typeface="ＭＳ Ｐゴシック" panose="020B0600070205080204" pitchFamily="50" charset="-128"/>
               </a:rPr>
@@ -7120,21 +7425,21 @@
           </a:p>
           <a:p>
             <a:r>
-              <a:rPr lang="en-US" altLang="ja-JP" sz="1600">
+              <a:rPr lang="en-US" altLang="ja-JP" sz="1600" dirty="0">
                 <a:latin typeface="+mn-lt"/>
                 <a:ea typeface="ＭＳ Ｐゴシック" panose="020B0600070205080204" pitchFamily="50" charset="-128"/>
               </a:rPr>
               <a:t>for (</a:t>
             </a:r>
             <a:r>
-              <a:rPr lang="en-US" altLang="ja-JP" sz="1600" err="1">
+              <a:rPr lang="en-US" altLang="ja-JP" sz="1600" dirty="0" err="1">
                 <a:latin typeface="+mn-lt"/>
                 <a:ea typeface="ＭＳ Ｐゴシック" panose="020B0600070205080204" pitchFamily="50" charset="-128"/>
               </a:rPr>
               <a:t>i</a:t>
             </a:r>
             <a:r>
-              <a:rPr lang="en-US" altLang="ja-JP" sz="1600">
+              <a:rPr lang="en-US" altLang="ja-JP" sz="1600" dirty="0">
                 <a:latin typeface="+mn-lt"/>
                 <a:ea typeface="ＭＳ Ｐゴシック" panose="020B0600070205080204" pitchFamily="50" charset="-128"/>
               </a:rPr>
@@ -7143,63 +7448,63 @@
           </a:p>
           <a:p>
             <a:r>
-              <a:rPr lang="en-US" altLang="ja-JP" sz="1600">
+              <a:rPr lang="en-US" altLang="ja-JP" sz="1600" dirty="0">
                 <a:latin typeface="+mn-lt"/>
                 <a:ea typeface="ＭＳ Ｐゴシック" panose="020B0600070205080204" pitchFamily="50" charset="-128"/>
               </a:rPr>
               <a:t>  type1error[</a:t>
             </a:r>
             <a:r>
-              <a:rPr lang="en-US" altLang="ja-JP" sz="1600" err="1">
+              <a:rPr lang="en-US" altLang="ja-JP" sz="1600" dirty="0" err="1">
                 <a:latin typeface="+mn-lt"/>
                 <a:ea typeface="ＭＳ Ｐゴシック" panose="020B0600070205080204" pitchFamily="50" charset="-128"/>
               </a:rPr>
               <a:t>i</a:t>
             </a:r>
             <a:r>
-              <a:rPr lang="en-US" altLang="ja-JP" sz="1600">
+              <a:rPr lang="en-US" altLang="ja-JP" sz="1600" dirty="0">
                 <a:latin typeface="+mn-lt"/>
                 <a:ea typeface="ＭＳ Ｐゴシック" panose="020B0600070205080204" pitchFamily="50" charset="-128"/>
               </a:rPr>
               <a:t>] &lt;- </a:t>
             </a:r>
             <a:r>
-              <a:rPr lang="en-US" altLang="ja-JP" sz="1600" err="1">
+              <a:rPr lang="en-US" altLang="ja-JP" sz="1600" dirty="0" err="1">
                 <a:latin typeface="+mn-lt"/>
                 <a:ea typeface="ＭＳ Ｐゴシック" panose="020B0600070205080204" pitchFamily="50" charset="-128"/>
               </a:rPr>
               <a:t>ifelse</a:t>
             </a:r>
             <a:r>
-              <a:rPr lang="en-US" altLang="ja-JP" sz="1600">
+              <a:rPr lang="en-US" altLang="ja-JP" sz="1600" dirty="0">
                 <a:latin typeface="+mn-lt"/>
                 <a:ea typeface="ＭＳ Ｐゴシック" panose="020B0600070205080204" pitchFamily="50" charset="-128"/>
               </a:rPr>
               <a:t>(</a:t>
             </a:r>
             <a:r>
-              <a:rPr lang="en-US" altLang="ja-JP" sz="1600" err="1">
+              <a:rPr lang="en-US" altLang="ja-JP" sz="1600" dirty="0" err="1">
                 <a:latin typeface="+mn-lt"/>
                 <a:ea typeface="ＭＳ Ｐゴシック" panose="020B0600070205080204" pitchFamily="50" charset="-128"/>
               </a:rPr>
               <a:t>pvalue</a:t>
             </a:r>
             <a:r>
-              <a:rPr lang="en-US" altLang="ja-JP" sz="1600">
+              <a:rPr lang="en-US" altLang="ja-JP" sz="1600" dirty="0">
                 <a:latin typeface="+mn-lt"/>
                 <a:ea typeface="ＭＳ Ｐゴシック" panose="020B0600070205080204" pitchFamily="50" charset="-128"/>
               </a:rPr>
               <a:t>[</a:t>
             </a:r>
             <a:r>
-              <a:rPr lang="en-US" altLang="ja-JP" sz="1600" err="1">
+              <a:rPr lang="en-US" altLang="ja-JP" sz="1600" dirty="0" err="1">
                 <a:latin typeface="+mn-lt"/>
                 <a:ea typeface="ＭＳ Ｐゴシック" panose="020B0600070205080204" pitchFamily="50" charset="-128"/>
               </a:rPr>
               <a:t>i</a:t>
             </a:r>
             <a:r>
-              <a:rPr lang="en-US" altLang="ja-JP" sz="1600">
+              <a:rPr lang="en-US" altLang="ja-JP" sz="1600" dirty="0">
                 <a:latin typeface="+mn-lt"/>
                 <a:ea typeface="ＭＳ Ｐゴシック" panose="020B0600070205080204" pitchFamily="50" charset="-128"/>
               </a:rPr>
@@ -7208,13 +7513,13 @@
           </a:p>
           <a:p>
             <a:r>
-              <a:rPr lang="en-US" altLang="ja-JP" sz="1600">
+              <a:rPr lang="en-US" altLang="ja-JP" sz="1600" dirty="0">
                 <a:latin typeface="+mn-lt"/>
                 <a:ea typeface="ＭＳ Ｐゴシック" panose="020B0600070205080204" pitchFamily="50" charset="-128"/>
               </a:rPr>
               <a:t>}</a:t>
             </a:r>
-            <a:endParaRPr lang="ja-JP" altLang="en-US" sz="1600">
+            <a:endParaRPr lang="ja-JP" altLang="en-US" sz="1600" dirty="0">
               <a:latin typeface="+mn-lt"/>
               <a:ea typeface="ＭＳ Ｐゴシック" panose="020B0600070205080204" pitchFamily="50" charset="-128"/>
             </a:endParaRPr>
@@ -7248,7 +7553,7 @@
           <a:lstStyle/>
           <a:p>
             <a:r>
-              <a:rPr kumimoji="1" lang="en-US" altLang="ja-JP">
+              <a:rPr kumimoji="1" lang="en-US" altLang="ja-JP" dirty="0">
                 <a:latin typeface="Arial" panose="020B0604020202020204" pitchFamily="34" charset="0"/>
                 <a:ea typeface="ＭＳ Ｐゴシック" panose="020B0600070205080204" pitchFamily="50" charset="-128"/>
                 <a:cs typeface="Arial" panose="020B0604020202020204" pitchFamily="34" charset="0"/>
@@ -7256,7 +7561,7 @@
               <a:t>2</a:t>
             </a:r>
             <a:r>
-              <a:rPr kumimoji="1" lang="ja-JP" altLang="en-US">
+              <a:rPr kumimoji="1" lang="ja-JP" altLang="en-US" dirty="0">
                 <a:latin typeface="Arial" panose="020B0604020202020204" pitchFamily="34" charset="0"/>
                 <a:ea typeface="ＭＳ Ｐゴシック" panose="020B0600070205080204" pitchFamily="50" charset="-128"/>
                 <a:cs typeface="Arial" panose="020B0604020202020204" pitchFamily="34" charset="0"/>
@@ -7264,7 +7569,7 @@
               <a:t>標本</a:t>
             </a:r>
             <a:r>
-              <a:rPr kumimoji="1" lang="en-US" altLang="ja-JP">
+              <a:rPr kumimoji="1" lang="en-US" altLang="ja-JP" dirty="0">
                 <a:latin typeface="Arial" panose="020B0604020202020204" pitchFamily="34" charset="0"/>
                 <a:ea typeface="ＭＳ Ｐゴシック" panose="020B0600070205080204" pitchFamily="50" charset="-128"/>
                 <a:cs typeface="Arial" panose="020B0604020202020204" pitchFamily="34" charset="0"/>
@@ -7272,7 +7577,7 @@
               <a:t>t</a:t>
             </a:r>
             <a:r>
-              <a:rPr kumimoji="1" lang="ja-JP" altLang="en-US">
+              <a:rPr kumimoji="1" lang="ja-JP" altLang="en-US" dirty="0">
                 <a:latin typeface="Arial" panose="020B0604020202020204" pitchFamily="34" charset="0"/>
                 <a:ea typeface="ＭＳ Ｐゴシック" panose="020B0600070205080204" pitchFamily="50" charset="-128"/>
                 <a:cs typeface="Arial" panose="020B0604020202020204" pitchFamily="34" charset="0"/>
@@ -7280,14 +7585,14 @@
               <a:t>検定　</a:t>
             </a:r>
             <a:r>
-              <a:rPr kumimoji="1" lang="en-US" altLang="ja-JP">
+              <a:rPr kumimoji="1" lang="en-US" altLang="ja-JP" dirty="0">
                 <a:latin typeface="Arial" panose="020B0604020202020204" pitchFamily="34" charset="0"/>
                 <a:ea typeface="ＭＳ Ｐゴシック" panose="020B0600070205080204" pitchFamily="50" charset="-128"/>
                 <a:cs typeface="Arial" panose="020B0604020202020204" pitchFamily="34" charset="0"/>
               </a:rPr>
               <a:t>Student or Welch ?</a:t>
             </a:r>
-            <a:endParaRPr kumimoji="1" lang="ja-JP" altLang="en-US">
+            <a:endParaRPr kumimoji="1" lang="ja-JP" altLang="en-US" dirty="0">
               <a:latin typeface="Arial" panose="020B0604020202020204" pitchFamily="34" charset="0"/>
               <a:cs typeface="Arial" panose="020B0604020202020204" pitchFamily="34" charset="0"/>
             </a:endParaRPr>
@@ -7419,28 +7724,28 @@
           <a:lstStyle/>
           <a:p>
             <a:r>
-              <a:rPr lang="en-US" altLang="ja-JP" sz="1600" err="1">
+              <a:rPr lang="en-US" altLang="ja-JP" sz="1600" dirty="0" err="1">
                 <a:latin typeface="+mn-lt"/>
                 <a:ea typeface="ＭＳ Ｐゴシック" panose="020B0600070205080204" pitchFamily="50" charset="-128"/>
               </a:rPr>
               <a:t>var.equal</a:t>
             </a:r>
             <a:r>
-              <a:rPr lang="en-US" altLang="ja-JP" sz="1600">
+              <a:rPr lang="en-US" altLang="ja-JP" sz="1600" dirty="0">
                 <a:latin typeface="+mn-lt"/>
                 <a:ea typeface="ＭＳ Ｐゴシック" panose="020B0600070205080204" pitchFamily="50" charset="-128"/>
               </a:rPr>
               <a:t> = TRUE</a:t>
             </a:r>
             <a:r>
-              <a:rPr lang="ja-JP" altLang="en-US" sz="1600">
+              <a:rPr lang="ja-JP" altLang="en-US" sz="1600" dirty="0">
                 <a:latin typeface="+mn-lt"/>
                 <a:ea typeface="ＭＳ Ｐゴシック" panose="020B0600070205080204" pitchFamily="50" charset="-128"/>
               </a:rPr>
               <a:t>：</a:t>
             </a:r>
             <a:r>
-              <a:rPr kumimoji="1" lang="en-US" altLang="ja-JP" sz="1600">
+              <a:rPr kumimoji="1" lang="en-US" altLang="ja-JP" sz="1600" dirty="0">
                 <a:latin typeface="+mn-lt"/>
                 <a:ea typeface="ＭＳ Ｐゴシック" panose="020B0600070205080204" pitchFamily="50" charset="-128"/>
                 <a:cs typeface="Arial" panose="020B0604020202020204" pitchFamily="34" charset="0"/>
@@ -7448,7 +7753,7 @@
               <a:t> Student</a:t>
             </a:r>
             <a:r>
-              <a:rPr kumimoji="1" lang="ja-JP" altLang="en-US" sz="1600">
+              <a:rPr kumimoji="1" lang="ja-JP" altLang="en-US" sz="1600" dirty="0">
                 <a:latin typeface="+mn-lt"/>
                 <a:ea typeface="ＭＳ Ｐゴシック" panose="020B0600070205080204" pitchFamily="50" charset="-128"/>
                 <a:cs typeface="Arial" panose="020B0604020202020204" pitchFamily="34" charset="0"/>
@@ -7456,7 +7761,7 @@
               <a:t>の</a:t>
             </a:r>
             <a:r>
-              <a:rPr kumimoji="1" lang="en-US" altLang="ja-JP" sz="1600">
+              <a:rPr kumimoji="1" lang="en-US" altLang="ja-JP" sz="1600" dirty="0">
                 <a:latin typeface="+mn-lt"/>
                 <a:ea typeface="ＭＳ Ｐゴシック" panose="020B0600070205080204" pitchFamily="50" charset="-128"/>
                 <a:cs typeface="Arial" panose="020B0604020202020204" pitchFamily="34" charset="0"/>
@@ -7464,14 +7769,14 @@
               <a:t>t</a:t>
             </a:r>
             <a:r>
-              <a:rPr kumimoji="1" lang="ja-JP" altLang="en-US" sz="1600">
+              <a:rPr kumimoji="1" lang="ja-JP" altLang="en-US" sz="1600" dirty="0">
                 <a:latin typeface="+mn-lt"/>
                 <a:ea typeface="ＭＳ Ｐゴシック" panose="020B0600070205080204" pitchFamily="50" charset="-128"/>
                 <a:cs typeface="Arial" panose="020B0604020202020204" pitchFamily="34" charset="0"/>
               </a:rPr>
               <a:t>検定</a:t>
             </a:r>
-            <a:endParaRPr kumimoji="1" lang="en-US" altLang="ja-JP" sz="1600">
+            <a:endParaRPr kumimoji="1" lang="en-US" altLang="ja-JP" sz="1600" dirty="0">
               <a:latin typeface="+mn-lt"/>
               <a:ea typeface="ＭＳ Ｐゴシック" panose="020B0600070205080204" pitchFamily="50" charset="-128"/>
               <a:cs typeface="Arial" panose="020B0604020202020204" pitchFamily="34" charset="0"/>
@@ -7479,28 +7784,28 @@
           </a:p>
           <a:p>
             <a:r>
-              <a:rPr lang="en-US" altLang="ja-JP" sz="1600" err="1">
+              <a:rPr lang="en-US" altLang="ja-JP" sz="1600" dirty="0" err="1">
                 <a:latin typeface="+mn-lt"/>
                 <a:ea typeface="ＭＳ Ｐゴシック" panose="020B0600070205080204" pitchFamily="50" charset="-128"/>
               </a:rPr>
               <a:t>var.equal</a:t>
             </a:r>
             <a:r>
-              <a:rPr lang="en-US" altLang="ja-JP" sz="1600">
+              <a:rPr lang="en-US" altLang="ja-JP" sz="1600" dirty="0">
                 <a:latin typeface="+mn-lt"/>
                 <a:ea typeface="ＭＳ Ｐゴシック" panose="020B0600070205080204" pitchFamily="50" charset="-128"/>
               </a:rPr>
               <a:t> = FALSE</a:t>
             </a:r>
             <a:r>
-              <a:rPr lang="ja-JP" altLang="en-US" sz="1600">
+              <a:rPr lang="ja-JP" altLang="en-US" sz="1600" dirty="0">
                 <a:latin typeface="+mn-lt"/>
                 <a:ea typeface="ＭＳ Ｐゴシック" panose="020B0600070205080204" pitchFamily="50" charset="-128"/>
               </a:rPr>
               <a:t>：</a:t>
             </a:r>
             <a:r>
-              <a:rPr kumimoji="1" lang="en-US" altLang="ja-JP" sz="1600">
+              <a:rPr kumimoji="1" lang="en-US" altLang="ja-JP" sz="1600" dirty="0">
                 <a:latin typeface="+mn-lt"/>
                 <a:ea typeface="ＭＳ Ｐゴシック" panose="020B0600070205080204" pitchFamily="50" charset="-128"/>
                 <a:cs typeface="Arial" panose="020B0604020202020204" pitchFamily="34" charset="0"/>
@@ -7508,7 +7813,7 @@
               <a:t> Welch</a:t>
             </a:r>
             <a:r>
-              <a:rPr kumimoji="1" lang="ja-JP" altLang="en-US" sz="1600">
+              <a:rPr kumimoji="1" lang="ja-JP" altLang="en-US" sz="1600" dirty="0">
                 <a:latin typeface="+mn-lt"/>
                 <a:ea typeface="ＭＳ Ｐゴシック" panose="020B0600070205080204" pitchFamily="50" charset="-128"/>
                 <a:cs typeface="Arial" panose="020B0604020202020204" pitchFamily="34" charset="0"/>
@@ -7516,7 +7821,7 @@
               <a:t>の</a:t>
             </a:r>
             <a:r>
-              <a:rPr kumimoji="1" lang="en-US" altLang="ja-JP" sz="1600">
+              <a:rPr kumimoji="1" lang="en-US" altLang="ja-JP" sz="1600" dirty="0">
                 <a:latin typeface="+mn-lt"/>
                 <a:ea typeface="ＭＳ Ｐゴシック" panose="020B0600070205080204" pitchFamily="50" charset="-128"/>
                 <a:cs typeface="Arial" panose="020B0604020202020204" pitchFamily="34" charset="0"/>
@@ -7524,14 +7829,14 @@
               <a:t>t</a:t>
             </a:r>
             <a:r>
-              <a:rPr kumimoji="1" lang="ja-JP" altLang="en-US" sz="1600">
+              <a:rPr kumimoji="1" lang="ja-JP" altLang="en-US" sz="1600" dirty="0">
                 <a:latin typeface="+mn-lt"/>
                 <a:ea typeface="ＭＳ Ｐゴシック" panose="020B0600070205080204" pitchFamily="50" charset="-128"/>
                 <a:cs typeface="Arial" panose="020B0604020202020204" pitchFamily="34" charset="0"/>
               </a:rPr>
               <a:t>検定（デフォルト）</a:t>
             </a:r>
-            <a:endParaRPr kumimoji="1" lang="en-US" altLang="ja-JP" sz="1600">
+            <a:endParaRPr kumimoji="1" lang="en-US" altLang="ja-JP" sz="1600" dirty="0">
               <a:latin typeface="+mn-lt"/>
               <a:ea typeface="ＭＳ Ｐゴシック" panose="020B0600070205080204" pitchFamily="50" charset="-128"/>
               <a:cs typeface="Arial" panose="020B0604020202020204" pitchFamily="34" charset="0"/>
@@ -7664,7 +7969,7 @@
           <a:lstStyle/>
           <a:p>
             <a:r>
-              <a:rPr lang="en-US" altLang="ja-JP" b="1">
+              <a:rPr lang="en-US" altLang="ja-JP" b="1" dirty="0">
                 <a:latin typeface="+mn-lt"/>
                 <a:ea typeface="ＭＳ Ｐゴシック" panose="020B0600070205080204" pitchFamily="50" charset="-128"/>
               </a:rPr>
@@ -7673,14 +7978,14 @@
           </a:p>
           <a:p>
             <a:r>
-              <a:rPr kumimoji="1" lang="ja-JP" altLang="en-US" sz="1600">
+              <a:rPr kumimoji="1" lang="ja-JP" altLang="en-US" sz="1600" dirty="0">
                 <a:latin typeface="+mn-lt"/>
                 <a:ea typeface="ＭＳ Ｐゴシック" panose="020B0600070205080204" pitchFamily="50" charset="-128"/>
                 <a:cs typeface="Arial" panose="020B0604020202020204" pitchFamily="34" charset="0"/>
               </a:rPr>
               <a:t>ループ等で結果を溜める入れ物（ベクトル・行列・リスト等）を，最初に必要サイズで作っておく」 というパフォーマンス最適化</a:t>
             </a:r>
-            <a:endParaRPr kumimoji="1" lang="en-US" altLang="ja-JP" sz="1600">
+            <a:endParaRPr kumimoji="1" lang="en-US" altLang="ja-JP" sz="1600" dirty="0">
               <a:latin typeface="+mn-lt"/>
               <a:ea typeface="ＭＳ Ｐゴシック" panose="020B0600070205080204" pitchFamily="50" charset="-128"/>
               <a:cs typeface="Arial" panose="020B0604020202020204" pitchFamily="34" charset="0"/>
@@ -7766,14 +8071,14 @@
           <a:lstStyle/>
           <a:p>
             <a:r>
-              <a:rPr kumimoji="1" lang="ja-JP" altLang="en-US" sz="1600">
+              <a:rPr kumimoji="1" lang="ja-JP" altLang="en-US" sz="1600" dirty="0">
                 <a:latin typeface="+mn-lt"/>
                 <a:ea typeface="ＭＳ Ｐゴシック" panose="020B0600070205080204" pitchFamily="50" charset="-128"/>
                 <a:cs typeface="Arial" panose="020B0604020202020204" pitchFamily="34" charset="0"/>
               </a:rPr>
               <a:t>事前準備</a:t>
             </a:r>
-            <a:endParaRPr lang="ja-JP" altLang="en-US" sz="1600"/>
+            <a:endParaRPr lang="ja-JP" altLang="en-US" sz="1600" dirty="0"/>
           </a:p>
         </p:txBody>
       </p:sp>
@@ -7858,7 +8163,7 @@
           <a:lstStyle/>
           <a:p>
             <a:r>
-              <a:rPr kumimoji="1" lang="en-US" altLang="ja-JP" sz="1600">
+              <a:rPr kumimoji="1" lang="en-US" altLang="ja-JP" sz="1600" dirty="0">
                 <a:latin typeface="+mn-lt"/>
                 <a:ea typeface="ＭＳ Ｐゴシック" panose="020B0600070205080204" pitchFamily="50" charset="-128"/>
                 <a:cs typeface="Arial" panose="020B0604020202020204" pitchFamily="34" charset="0"/>
@@ -7866,7 +8171,7 @@
               <a:t>2</a:t>
             </a:r>
             <a:r>
-              <a:rPr kumimoji="1" lang="ja-JP" altLang="en-US" sz="1600">
+              <a:rPr kumimoji="1" lang="ja-JP" altLang="en-US" sz="1600" dirty="0">
                 <a:latin typeface="+mn-lt"/>
                 <a:ea typeface="ＭＳ Ｐゴシック" panose="020B0600070205080204" pitchFamily="50" charset="-128"/>
                 <a:cs typeface="Arial" panose="020B0604020202020204" pitchFamily="34" charset="0"/>
@@ -7874,7 +8179,7 @@
               <a:t>群の平均差の</a:t>
             </a:r>
             <a:r>
-              <a:rPr kumimoji="1" lang="en-US" altLang="ja-JP" sz="1600">
+              <a:rPr kumimoji="1" lang="en-US" altLang="ja-JP" sz="1600" dirty="0">
                 <a:latin typeface="+mn-lt"/>
                 <a:ea typeface="ＭＳ Ｐゴシック" panose="020B0600070205080204" pitchFamily="50" charset="-128"/>
                 <a:cs typeface="Arial" panose="020B0604020202020204" pitchFamily="34" charset="0"/>
@@ -7882,14 +8187,14 @@
               <a:t>t</a:t>
             </a:r>
             <a:r>
-              <a:rPr kumimoji="1" lang="ja-JP" altLang="en-US" sz="1600">
+              <a:rPr kumimoji="1" lang="ja-JP" altLang="en-US" sz="1600" dirty="0">
                 <a:latin typeface="+mn-lt"/>
                 <a:ea typeface="ＭＳ Ｐゴシック" panose="020B0600070205080204" pitchFamily="50" charset="-128"/>
                 <a:cs typeface="Arial" panose="020B0604020202020204" pitchFamily="34" charset="0"/>
               </a:rPr>
               <a:t>検定を、繰り返しシミュレーションを実施．</a:t>
             </a:r>
-            <a:endParaRPr kumimoji="1" lang="en-US" altLang="ja-JP" sz="1600">
+            <a:endParaRPr kumimoji="1" lang="en-US" altLang="ja-JP" sz="1600" dirty="0">
               <a:latin typeface="+mn-lt"/>
               <a:ea typeface="ＭＳ Ｐゴシック" panose="020B0600070205080204" pitchFamily="50" charset="-128"/>
               <a:cs typeface="Arial" panose="020B0604020202020204" pitchFamily="34" charset="0"/>
@@ -7897,7 +8202,7 @@
           </a:p>
           <a:p>
             <a:r>
-              <a:rPr kumimoji="1" lang="en-US" altLang="ja-JP" sz="1600">
+              <a:rPr kumimoji="1" lang="en-US" altLang="ja-JP" sz="1600" dirty="0">
                 <a:latin typeface="+mn-lt"/>
                 <a:ea typeface="ＭＳ Ｐゴシック" panose="020B0600070205080204" pitchFamily="50" charset="-128"/>
                 <a:cs typeface="Arial" panose="020B0604020202020204" pitchFamily="34" charset="0"/>
@@ -7905,7 +8210,7 @@
               <a:t>p</a:t>
             </a:r>
             <a:r>
-              <a:rPr kumimoji="1" lang="ja-JP" altLang="en-US" sz="1600">
+              <a:rPr kumimoji="1" lang="ja-JP" altLang="en-US" sz="1600" dirty="0">
                 <a:latin typeface="+mn-lt"/>
                 <a:ea typeface="ＭＳ Ｐゴシック" panose="020B0600070205080204" pitchFamily="50" charset="-128"/>
                 <a:cs typeface="Arial" panose="020B0604020202020204" pitchFamily="34" charset="0"/>
@@ -7913,7 +8218,7 @@
               <a:t>値を</a:t>
             </a:r>
             <a:r>
-              <a:rPr kumimoji="1" lang="en-US" altLang="ja-JP" sz="1600" err="1">
+              <a:rPr kumimoji="1" lang="en-US" altLang="ja-JP" sz="1600" dirty="0" err="1">
                 <a:latin typeface="+mn-lt"/>
                 <a:ea typeface="ＭＳ Ｐゴシック" panose="020B0600070205080204" pitchFamily="50" charset="-128"/>
                 <a:cs typeface="Arial" panose="020B0604020202020204" pitchFamily="34" charset="0"/>
@@ -7921,14 +8226,14 @@
               <a:t>pvalue</a:t>
             </a:r>
             <a:r>
-              <a:rPr kumimoji="1" lang="ja-JP" altLang="en-US" sz="1600">
+              <a:rPr kumimoji="1" lang="ja-JP" altLang="en-US" sz="1600" dirty="0">
                 <a:latin typeface="+mn-lt"/>
                 <a:ea typeface="ＭＳ Ｐゴシック" panose="020B0600070205080204" pitchFamily="50" charset="-128"/>
                 <a:cs typeface="Arial" panose="020B0604020202020204" pitchFamily="34" charset="0"/>
               </a:rPr>
               <a:t>に蓄積していく．</a:t>
             </a:r>
-            <a:endParaRPr kumimoji="1" lang="en-US" altLang="ja-JP" sz="1600">
+            <a:endParaRPr kumimoji="1" lang="en-US" altLang="ja-JP" sz="1600" dirty="0">
               <a:latin typeface="+mn-lt"/>
               <a:ea typeface="ＭＳ Ｐゴシック" panose="020B0600070205080204" pitchFamily="50" charset="-128"/>
               <a:cs typeface="Arial" panose="020B0604020202020204" pitchFamily="34" charset="0"/>
@@ -8017,30 +8322,30 @@
           <a:lstStyle/>
           <a:p>
             <a:r>
-              <a:rPr lang="en-US" altLang="ja-JP" sz="1600">
+              <a:rPr lang="en-US" altLang="ja-JP" sz="1600" dirty="0">
                 <a:ea typeface="ＭＳ Ｐゴシック" panose="020B0600070205080204" pitchFamily="50" charset="-128"/>
               </a:rPr>
               <a:t>p</a:t>
             </a:r>
             <a:r>
-              <a:rPr lang="ja-JP" altLang="en-US" sz="1600">
+              <a:rPr lang="ja-JP" altLang="en-US" sz="1600" dirty="0">
                 <a:ea typeface="ＭＳ Ｐゴシック" panose="020B0600070205080204" pitchFamily="50" charset="-128"/>
               </a:rPr>
               <a:t>値が</a:t>
             </a:r>
             <a:r>
-              <a:rPr lang="en-US" altLang="ja-JP" sz="1600">
+              <a:rPr lang="en-US" altLang="ja-JP" sz="1600" dirty="0">
                 <a:ea typeface="ＭＳ Ｐゴシック" panose="020B0600070205080204" pitchFamily="50" charset="-128"/>
               </a:rPr>
               <a:t>0.05</a:t>
             </a:r>
             <a:r>
-              <a:rPr lang="ja-JP" altLang="en-US" sz="1600">
+              <a:rPr lang="ja-JP" altLang="en-US" sz="1600" dirty="0">
                 <a:ea typeface="ＭＳ Ｐゴシック" panose="020B0600070205080204" pitchFamily="50" charset="-128"/>
               </a:rPr>
               <a:t>未満かどうかを判定</a:t>
             </a:r>
-            <a:endParaRPr lang="ja-JP" altLang="en-US" sz="1600"/>
+            <a:endParaRPr lang="ja-JP" altLang="en-US" sz="1600" dirty="0"/>
           </a:p>
         </p:txBody>
       </p:sp>
@@ -8105,7 +8410,7 @@
               <a:rPr kumimoji="1" lang="en-US" altLang="ja-JP" smtClean="0"/>
               <a:t>6</a:t>
             </a:fld>
-            <a:endParaRPr kumimoji="1" lang="en-US" altLang="ja-JP"/>
+            <a:endParaRPr kumimoji="1" lang="en-US" altLang="ja-JP" dirty="0"/>
           </a:p>
         </p:txBody>
       </p:sp>
@@ -8169,7 +8474,7 @@
           <a:p>
             <a:pPr algn="ctr"/>
             <a:r>
-              <a:rPr lang="ja-JP" altLang="en-US" sz="2800">
+              <a:rPr lang="ja-JP" altLang="en-US" sz="2800" dirty="0">
                 <a:latin typeface="Arial" panose="020B0604020202020204" pitchFamily="34" charset="0"/>
                 <a:ea typeface="ＭＳ Ｐゴシック" panose="020B0600070205080204" pitchFamily="50" charset="-128"/>
                 <a:cs typeface="Arial" panose="020B0604020202020204" pitchFamily="34" charset="0"/>
@@ -8177,7 +8482,7 @@
               <a:t>思ったよりも</a:t>
             </a:r>
             <a:r>
-              <a:rPr lang="en-US" altLang="ja-JP" sz="2800">
+              <a:rPr lang="en-US" altLang="ja-JP" sz="2800" dirty="0">
                 <a:latin typeface="Arial" panose="020B0604020202020204" pitchFamily="34" charset="0"/>
                 <a:ea typeface="ＭＳ Ｐゴシック" panose="020B0600070205080204" pitchFamily="50" charset="-128"/>
                 <a:cs typeface="Arial" panose="020B0604020202020204" pitchFamily="34" charset="0"/>
@@ -8185,7 +8490,7 @@
               <a:t>α</a:t>
             </a:r>
             <a:r>
-              <a:rPr lang="ja-JP" altLang="en-US" sz="2800">
+              <a:rPr lang="ja-JP" altLang="en-US" sz="2800" dirty="0">
                 <a:latin typeface="Arial" panose="020B0604020202020204" pitchFamily="34" charset="0"/>
                 <a:ea typeface="ＭＳ Ｐゴシック" panose="020B0600070205080204" pitchFamily="50" charset="-128"/>
                 <a:cs typeface="Arial" panose="020B0604020202020204" pitchFamily="34" charset="0"/>
@@ -8193,14 +8498,14 @@
               <a:t>エラーは増加しない</a:t>
             </a:r>
             <a:r>
-              <a:rPr lang="en-US" altLang="ja-JP" sz="2800">
+              <a:rPr lang="en-US" altLang="ja-JP" sz="2800" dirty="0">
                 <a:latin typeface="Arial" panose="020B0604020202020204" pitchFamily="34" charset="0"/>
                 <a:ea typeface="ＭＳ Ｐゴシック" panose="020B0600070205080204" pitchFamily="50" charset="-128"/>
                 <a:cs typeface="Arial" panose="020B0604020202020204" pitchFamily="34" charset="0"/>
               </a:rPr>
               <a:t>…?</a:t>
             </a:r>
-            <a:endParaRPr lang="ja-JP" altLang="en-US" sz="2800"/>
+            <a:endParaRPr lang="ja-JP" altLang="en-US" sz="2800" dirty="0"/>
           </a:p>
         </p:txBody>
       </p:sp>
@@ -8231,7 +8536,7 @@
           <a:lstStyle/>
           <a:p>
             <a:r>
-              <a:rPr kumimoji="1" lang="en-US" altLang="ja-JP">
+              <a:rPr kumimoji="1" lang="en-US" altLang="ja-JP" dirty="0">
                 <a:latin typeface="Arial" panose="020B0604020202020204" pitchFamily="34" charset="0"/>
                 <a:ea typeface="ＭＳ Ｐゴシック" panose="020B0600070205080204" pitchFamily="50" charset="-128"/>
                 <a:cs typeface="Arial" panose="020B0604020202020204" pitchFamily="34" charset="0"/>
@@ -8239,7 +8544,7 @@
               <a:t>2</a:t>
             </a:r>
             <a:r>
-              <a:rPr kumimoji="1" lang="ja-JP" altLang="en-US">
+              <a:rPr kumimoji="1" lang="ja-JP" altLang="en-US" dirty="0">
                 <a:latin typeface="Arial" panose="020B0604020202020204" pitchFamily="34" charset="0"/>
                 <a:ea typeface="ＭＳ Ｐゴシック" panose="020B0600070205080204" pitchFamily="50" charset="-128"/>
                 <a:cs typeface="Arial" panose="020B0604020202020204" pitchFamily="34" charset="0"/>
@@ -8247,7 +8552,7 @@
               <a:t>標本</a:t>
             </a:r>
             <a:r>
-              <a:rPr kumimoji="1" lang="en-US" altLang="ja-JP">
+              <a:rPr kumimoji="1" lang="en-US" altLang="ja-JP" dirty="0">
                 <a:latin typeface="Arial" panose="020B0604020202020204" pitchFamily="34" charset="0"/>
                 <a:ea typeface="ＭＳ Ｐゴシック" panose="020B0600070205080204" pitchFamily="50" charset="-128"/>
                 <a:cs typeface="Arial" panose="020B0604020202020204" pitchFamily="34" charset="0"/>
@@ -8255,7 +8560,7 @@
               <a:t>t</a:t>
             </a:r>
             <a:r>
-              <a:rPr kumimoji="1" lang="ja-JP" altLang="en-US">
+              <a:rPr kumimoji="1" lang="ja-JP" altLang="en-US" dirty="0">
                 <a:latin typeface="Arial" panose="020B0604020202020204" pitchFamily="34" charset="0"/>
                 <a:ea typeface="ＭＳ Ｐゴシック" panose="020B0600070205080204" pitchFamily="50" charset="-128"/>
                 <a:cs typeface="Arial" panose="020B0604020202020204" pitchFamily="34" charset="0"/>
@@ -8263,14 +8568,14 @@
               <a:t>検定　</a:t>
             </a:r>
             <a:r>
-              <a:rPr kumimoji="1" lang="en-US" altLang="ja-JP">
+              <a:rPr kumimoji="1" lang="en-US" altLang="ja-JP" dirty="0">
                 <a:latin typeface="Arial" panose="020B0604020202020204" pitchFamily="34" charset="0"/>
                 <a:ea typeface="ＭＳ Ｐゴシック" panose="020B0600070205080204" pitchFamily="50" charset="-128"/>
                 <a:cs typeface="Arial" panose="020B0604020202020204" pitchFamily="34" charset="0"/>
               </a:rPr>
               <a:t>Student or Welch ?</a:t>
             </a:r>
-            <a:endParaRPr kumimoji="1" lang="ja-JP" altLang="en-US">
+            <a:endParaRPr kumimoji="1" lang="ja-JP" altLang="en-US" dirty="0">
               <a:latin typeface="Arial" panose="020B0604020202020204" pitchFamily="34" charset="0"/>
               <a:cs typeface="Arial" panose="020B0604020202020204" pitchFamily="34" charset="0"/>
             </a:endParaRPr>
@@ -8338,7 +8643,7 @@
               <a:rPr kumimoji="1" lang="en-US" altLang="ja-JP" smtClean="0"/>
               <a:t>7</a:t>
             </a:fld>
-            <a:endParaRPr kumimoji="1" lang="en-US" altLang="ja-JP"/>
+            <a:endParaRPr kumimoji="1" lang="en-US" altLang="ja-JP" dirty="0"/>
           </a:p>
         </p:txBody>
       </p:sp>
@@ -8418,7 +8723,7 @@
                     <a:p>
                       <a:pPr algn="ctr"/>
                       <a:r>
-                        <a:rPr kumimoji="1" lang="ja-JP" altLang="en-US" sz="2400">
+                        <a:rPr kumimoji="1" lang="ja-JP" altLang="en-US" sz="2400" dirty="0">
                           <a:latin typeface="Arial" panose="020B0604020202020204" pitchFamily="34" charset="0"/>
                           <a:ea typeface="ＭＳ Ｐゴシック" panose="020B0600070205080204" pitchFamily="50" charset="-128"/>
                           <a:cs typeface="Arial" panose="020B0604020202020204" pitchFamily="34" charset="0"/>
@@ -8426,14 +8731,14 @@
                         <a:t>群</a:t>
                       </a:r>
                       <a:r>
-                        <a:rPr kumimoji="1" lang="en-US" altLang="ja-JP" sz="2400">
+                        <a:rPr kumimoji="1" lang="en-US" altLang="ja-JP" sz="2400" dirty="0">
                           <a:latin typeface="Arial" panose="020B0604020202020204" pitchFamily="34" charset="0"/>
                           <a:ea typeface="ＭＳ Ｐゴシック" panose="020B0600070205080204" pitchFamily="50" charset="-128"/>
                           <a:cs typeface="Arial" panose="020B0604020202020204" pitchFamily="34" charset="0"/>
                         </a:rPr>
                         <a:t>A</a:t>
                       </a:r>
-                      <a:endParaRPr kumimoji="1" lang="ja-JP" altLang="en-US" sz="2400">
+                      <a:endParaRPr kumimoji="1" lang="ja-JP" altLang="en-US" sz="2400" dirty="0">
                         <a:latin typeface="Arial" panose="020B0604020202020204" pitchFamily="34" charset="0"/>
                         <a:ea typeface="ＭＳ Ｐゴシック" panose="020B0600070205080204" pitchFamily="50" charset="-128"/>
                         <a:cs typeface="Arial" panose="020B0604020202020204" pitchFamily="34" charset="0"/>
@@ -8449,7 +8754,7 @@
                     <a:p>
                       <a:pPr algn="ctr"/>
                       <a:r>
-                        <a:rPr kumimoji="1" lang="ja-JP" altLang="en-US" sz="2400">
+                        <a:rPr kumimoji="1" lang="ja-JP" altLang="en-US" sz="2400" dirty="0">
                           <a:latin typeface="Arial" panose="020B0604020202020204" pitchFamily="34" charset="0"/>
                           <a:ea typeface="ＭＳ Ｐゴシック" panose="020B0600070205080204" pitchFamily="50" charset="-128"/>
                           <a:cs typeface="Arial" panose="020B0604020202020204" pitchFamily="34" charset="0"/>
@@ -8457,14 +8762,14 @@
                         <a:t>群</a:t>
                       </a:r>
                       <a:r>
-                        <a:rPr kumimoji="1" lang="en-US" altLang="ja-JP" sz="2400">
+                        <a:rPr kumimoji="1" lang="en-US" altLang="ja-JP" sz="2400" dirty="0">
                           <a:latin typeface="Arial" panose="020B0604020202020204" pitchFamily="34" charset="0"/>
                           <a:ea typeface="ＭＳ Ｐゴシック" panose="020B0600070205080204" pitchFamily="50" charset="-128"/>
                           <a:cs typeface="Arial" panose="020B0604020202020204" pitchFamily="34" charset="0"/>
                         </a:rPr>
                         <a:t>B</a:t>
                       </a:r>
-                      <a:endParaRPr kumimoji="1" lang="ja-JP" altLang="en-US" sz="2400">
+                      <a:endParaRPr kumimoji="1" lang="ja-JP" altLang="en-US" sz="2400" dirty="0">
                         <a:latin typeface="Arial" panose="020B0604020202020204" pitchFamily="34" charset="0"/>
                         <a:ea typeface="ＭＳ Ｐゴシック" panose="020B0600070205080204" pitchFamily="50" charset="-128"/>
                         <a:cs typeface="Arial" panose="020B0604020202020204" pitchFamily="34" charset="0"/>
@@ -8487,7 +8792,7 @@
                     <a:p>
                       <a:pPr algn="ctr"/>
                       <a:r>
-                        <a:rPr kumimoji="1" lang="ja-JP" altLang="en-US" sz="2400">
+                        <a:rPr kumimoji="1" lang="ja-JP" altLang="en-US" sz="2400" dirty="0">
                           <a:latin typeface="Arial" panose="020B0604020202020204" pitchFamily="34" charset="0"/>
                           <a:ea typeface="ＭＳ Ｐゴシック" panose="020B0600070205080204" pitchFamily="50" charset="-128"/>
                           <a:cs typeface="Arial" panose="020B0604020202020204" pitchFamily="34" charset="0"/>
@@ -8505,14 +8810,14 @@
                     <a:p>
                       <a:pPr algn="ctr"/>
                       <a:r>
-                        <a:rPr kumimoji="1" lang="en-US" altLang="ja-JP" sz="2400">
+                        <a:rPr kumimoji="1" lang="en-US" altLang="ja-JP" sz="2400" dirty="0">
                           <a:latin typeface="Arial" panose="020B0604020202020204" pitchFamily="34" charset="0"/>
                           <a:ea typeface="ＭＳ Ｐゴシック" panose="020B0600070205080204" pitchFamily="50" charset="-128"/>
                           <a:cs typeface="Arial" panose="020B0604020202020204" pitchFamily="34" charset="0"/>
                         </a:rPr>
                         <a:t>25</a:t>
                       </a:r>
-                      <a:endParaRPr kumimoji="1" lang="ja-JP" altLang="en-US" sz="2400">
+                      <a:endParaRPr kumimoji="1" lang="ja-JP" altLang="en-US" sz="2400" dirty="0">
                         <a:latin typeface="Arial" panose="020B0604020202020204" pitchFamily="34" charset="0"/>
                         <a:ea typeface="ＭＳ Ｐゴシック" panose="020B0600070205080204" pitchFamily="50" charset="-128"/>
                         <a:cs typeface="Arial" panose="020B0604020202020204" pitchFamily="34" charset="0"/>
@@ -8528,7 +8833,7 @@
                     <a:p>
                       <a:pPr algn="ctr"/>
                       <a:r>
-                        <a:rPr kumimoji="1" lang="en-US" altLang="ja-JP" sz="2400">
+                        <a:rPr kumimoji="1" lang="en-US" altLang="ja-JP" sz="2400" dirty="0">
                           <a:solidFill>
                             <a:srgbClr val="FF00FF"/>
                           </a:solidFill>
@@ -8539,7 +8844,7 @@
                         <a:t>10</a:t>
                       </a:r>
                       <a:r>
-                        <a:rPr kumimoji="1" lang="en-US" altLang="ja-JP" sz="2400">
+                        <a:rPr kumimoji="1" lang="en-US" altLang="ja-JP" sz="2400" dirty="0">
                           <a:latin typeface="Arial" panose="020B0604020202020204" pitchFamily="34" charset="0"/>
                           <a:ea typeface="ＭＳ Ｐゴシック" panose="020B0600070205080204" pitchFamily="50" charset="-128"/>
                           <a:cs typeface="Arial" panose="020B0604020202020204" pitchFamily="34" charset="0"/>
@@ -8547,7 +8852,7 @@
                         <a:t>, 25, </a:t>
                       </a:r>
                       <a:r>
-                        <a:rPr kumimoji="1" lang="en-US" altLang="ja-JP" sz="2400">
+                        <a:rPr kumimoji="1" lang="en-US" altLang="ja-JP" sz="2400" dirty="0">
                           <a:solidFill>
                             <a:srgbClr val="FF00FF"/>
                           </a:solidFill>
@@ -8557,7 +8862,7 @@
                         </a:rPr>
                         <a:t>50</a:t>
                       </a:r>
-                      <a:endParaRPr kumimoji="1" lang="ja-JP" altLang="en-US" sz="2400">
+                      <a:endParaRPr kumimoji="1" lang="ja-JP" altLang="en-US" sz="2400" dirty="0">
                         <a:solidFill>
                           <a:srgbClr val="FF00FF"/>
                         </a:solidFill>
@@ -8583,7 +8888,7 @@
                     <a:p>
                       <a:pPr algn="ctr"/>
                       <a:r>
-                        <a:rPr kumimoji="1" lang="ja-JP" altLang="en-US" sz="2400">
+                        <a:rPr kumimoji="1" lang="ja-JP" altLang="en-US" sz="2400" dirty="0">
                           <a:latin typeface="Arial" panose="020B0604020202020204" pitchFamily="34" charset="0"/>
                           <a:ea typeface="ＭＳ Ｐゴシック" panose="020B0600070205080204" pitchFamily="50" charset="-128"/>
                           <a:cs typeface="Arial" panose="020B0604020202020204" pitchFamily="34" charset="0"/>
@@ -8601,14 +8906,14 @@
                     <a:p>
                       <a:pPr algn="ctr"/>
                       <a:r>
-                        <a:rPr kumimoji="1" lang="en-US" altLang="ja-JP" sz="2400">
+                        <a:rPr kumimoji="1" lang="en-US" altLang="ja-JP" sz="2400" dirty="0">
                           <a:latin typeface="Arial" panose="020B0604020202020204" pitchFamily="34" charset="0"/>
                           <a:ea typeface="ＭＳ Ｐゴシック" panose="020B0600070205080204" pitchFamily="50" charset="-128"/>
                           <a:cs typeface="Arial" panose="020B0604020202020204" pitchFamily="34" charset="0"/>
                         </a:rPr>
                         <a:t>0</a:t>
                       </a:r>
-                      <a:endParaRPr kumimoji="1" lang="ja-JP" altLang="en-US" sz="2400">
+                      <a:endParaRPr kumimoji="1" lang="ja-JP" altLang="en-US" sz="2400" dirty="0">
                         <a:latin typeface="Arial" panose="020B0604020202020204" pitchFamily="34" charset="0"/>
                         <a:ea typeface="ＭＳ Ｐゴシック" panose="020B0600070205080204" pitchFamily="50" charset="-128"/>
                         <a:cs typeface="Arial" panose="020B0604020202020204" pitchFamily="34" charset="0"/>
@@ -8624,14 +8929,14 @@
                     <a:p>
                       <a:pPr algn="ctr"/>
                       <a:r>
-                        <a:rPr kumimoji="1" lang="en-US" altLang="ja-JP" sz="2400">
+                        <a:rPr kumimoji="1" lang="en-US" altLang="ja-JP" sz="2400" dirty="0">
                           <a:latin typeface="Arial" panose="020B0604020202020204" pitchFamily="34" charset="0"/>
                           <a:ea typeface="ＭＳ Ｐゴシック" panose="020B0600070205080204" pitchFamily="50" charset="-128"/>
                           <a:cs typeface="Arial" panose="020B0604020202020204" pitchFamily="34" charset="0"/>
                         </a:rPr>
                         <a:t>0</a:t>
                       </a:r>
-                      <a:endParaRPr kumimoji="1" lang="ja-JP" altLang="en-US" sz="2400">
+                      <a:endParaRPr kumimoji="1" lang="ja-JP" altLang="en-US" sz="2400" dirty="0">
                         <a:latin typeface="Arial" panose="020B0604020202020204" pitchFamily="34" charset="0"/>
                         <a:ea typeface="ＭＳ Ｐゴシック" panose="020B0600070205080204" pitchFamily="50" charset="-128"/>
                         <a:cs typeface="Arial" panose="020B0604020202020204" pitchFamily="34" charset="0"/>
@@ -8654,7 +8959,7 @@
                     <a:p>
                       <a:pPr algn="ctr"/>
                       <a:r>
-                        <a:rPr kumimoji="1" lang="ja-JP" altLang="en-US" sz="2400">
+                        <a:rPr kumimoji="1" lang="ja-JP" altLang="en-US" sz="2400" dirty="0">
                           <a:latin typeface="Arial" panose="020B0604020202020204" pitchFamily="34" charset="0"/>
                           <a:ea typeface="ＭＳ Ｐゴシック" panose="020B0600070205080204" pitchFamily="50" charset="-128"/>
                           <a:cs typeface="Arial" panose="020B0604020202020204" pitchFamily="34" charset="0"/>
@@ -8672,14 +8977,14 @@
                     <a:p>
                       <a:pPr algn="ctr"/>
                       <a:r>
-                        <a:rPr kumimoji="1" lang="en-US" altLang="ja-JP" sz="2400">
+                        <a:rPr kumimoji="1" lang="en-US" altLang="ja-JP" sz="2400" dirty="0">
                           <a:latin typeface="Arial" panose="020B0604020202020204" pitchFamily="34" charset="0"/>
                           <a:ea typeface="ＭＳ Ｐゴシック" panose="020B0600070205080204" pitchFamily="50" charset="-128"/>
                           <a:cs typeface="Arial" panose="020B0604020202020204" pitchFamily="34" charset="0"/>
                         </a:rPr>
                         <a:t>1</a:t>
                       </a:r>
-                      <a:endParaRPr kumimoji="1" lang="ja-JP" altLang="en-US" sz="2400">
+                      <a:endParaRPr kumimoji="1" lang="ja-JP" altLang="en-US" sz="2400" dirty="0">
                         <a:latin typeface="Arial" panose="020B0604020202020204" pitchFamily="34" charset="0"/>
                         <a:ea typeface="ＭＳ Ｐゴシック" panose="020B0600070205080204" pitchFamily="50" charset="-128"/>
                         <a:cs typeface="Arial" panose="020B0604020202020204" pitchFamily="34" charset="0"/>
@@ -8695,7 +9000,7 @@
                     <a:p>
                       <a:pPr algn="ctr"/>
                       <a:r>
-                        <a:rPr kumimoji="1" lang="en-US" altLang="ja-JP" sz="2400">
+                        <a:rPr kumimoji="1" lang="en-US" altLang="ja-JP" sz="2400" dirty="0">
                           <a:solidFill>
                             <a:srgbClr val="FF0000"/>
                           </a:solidFill>
@@ -8705,7 +9010,7 @@
                         </a:rPr>
                         <a:t>0.1, 0.5, 1, 2, 5, 10</a:t>
                       </a:r>
-                      <a:endParaRPr kumimoji="1" lang="ja-JP" altLang="en-US" sz="2400">
+                      <a:endParaRPr kumimoji="1" lang="ja-JP" altLang="en-US" sz="2400" dirty="0">
                         <a:solidFill>
                           <a:srgbClr val="FF0000"/>
                         </a:solidFill>
@@ -8731,7 +9036,7 @@
                     <a:p>
                       <a:pPr algn="ctr"/>
                       <a:r>
-                        <a:rPr kumimoji="1" lang="ja-JP" altLang="en-US" sz="2400">
+                        <a:rPr kumimoji="1" lang="ja-JP" altLang="en-US" sz="2400" dirty="0">
                           <a:latin typeface="Arial" panose="020B0604020202020204" pitchFamily="34" charset="0"/>
                           <a:ea typeface="ＭＳ Ｐゴシック" panose="020B0600070205080204" pitchFamily="50" charset="-128"/>
                           <a:cs typeface="Arial" panose="020B0604020202020204" pitchFamily="34" charset="0"/>
@@ -8749,14 +9054,14 @@
                     <a:p>
                       <a:pPr algn="ctr"/>
                       <a:r>
-                        <a:rPr kumimoji="1" lang="en-US" altLang="ja-JP" sz="2400">
+                        <a:rPr kumimoji="1" lang="en-US" altLang="ja-JP" sz="2400" dirty="0">
                           <a:latin typeface="Arial" panose="020B0604020202020204" pitchFamily="34" charset="0"/>
                           <a:ea typeface="ＭＳ Ｐゴシック" panose="020B0600070205080204" pitchFamily="50" charset="-128"/>
                           <a:cs typeface="Arial" panose="020B0604020202020204" pitchFamily="34" charset="0"/>
                         </a:rPr>
                         <a:t>0.05</a:t>
                       </a:r>
-                      <a:endParaRPr kumimoji="1" lang="ja-JP" altLang="en-US" sz="2400">
+                      <a:endParaRPr kumimoji="1" lang="ja-JP" altLang="en-US" sz="2400" dirty="0">
                         <a:latin typeface="Arial" panose="020B0604020202020204" pitchFamily="34" charset="0"/>
                         <a:ea typeface="ＭＳ Ｐゴシック" panose="020B0600070205080204" pitchFamily="50" charset="-128"/>
                         <a:cs typeface="Arial" panose="020B0604020202020204" pitchFamily="34" charset="0"/>
@@ -8771,7 +9076,7 @@
                     <a:lstStyle/>
                     <a:p>
                       <a:pPr algn="ctr"/>
-                      <a:endParaRPr kumimoji="1" lang="ja-JP" altLang="en-US">
+                      <a:endParaRPr kumimoji="1" lang="ja-JP" altLang="en-US" dirty="0">
                         <a:latin typeface="Arial" panose="020B0604020202020204" pitchFamily="34" charset="0"/>
                         <a:ea typeface="ＭＳ Ｐゴシック" panose="020B0600070205080204" pitchFamily="50" charset="-128"/>
                         <a:cs typeface="Arial" panose="020B0604020202020204" pitchFamily="34" charset="0"/>
@@ -8794,7 +9099,7 @@
                     <a:p>
                       <a:pPr algn="ctr"/>
                       <a:r>
-                        <a:rPr kumimoji="1" lang="ja-JP" altLang="en-US" sz="2400">
+                        <a:rPr kumimoji="1" lang="ja-JP" altLang="en-US" sz="2400" dirty="0">
                           <a:latin typeface="Arial" panose="020B0604020202020204" pitchFamily="34" charset="0"/>
                           <a:ea typeface="ＭＳ Ｐゴシック" panose="020B0600070205080204" pitchFamily="50" charset="-128"/>
                           <a:cs typeface="Arial" panose="020B0604020202020204" pitchFamily="34" charset="0"/>
@@ -8812,14 +9117,14 @@
                     <a:p>
                       <a:pPr algn="ctr"/>
                       <a:r>
-                        <a:rPr kumimoji="1" lang="en-US" altLang="ja-JP" sz="2400">
+                        <a:rPr kumimoji="1" lang="en-US" altLang="ja-JP" sz="2400" dirty="0">
                           <a:latin typeface="Arial" panose="020B0604020202020204" pitchFamily="34" charset="0"/>
                           <a:ea typeface="ＭＳ Ｐゴシック" panose="020B0600070205080204" pitchFamily="50" charset="-128"/>
                           <a:cs typeface="Arial" panose="020B0604020202020204" pitchFamily="34" charset="0"/>
                         </a:rPr>
                         <a:t>10000</a:t>
                       </a:r>
-                      <a:endParaRPr kumimoji="1" lang="ja-JP" altLang="en-US" sz="2400">
+                      <a:endParaRPr kumimoji="1" lang="ja-JP" altLang="en-US" sz="2400" dirty="0">
                         <a:latin typeface="Arial" panose="020B0604020202020204" pitchFamily="34" charset="0"/>
                         <a:ea typeface="ＭＳ Ｐゴシック" panose="020B0600070205080204" pitchFamily="50" charset="-128"/>
                         <a:cs typeface="Arial" panose="020B0604020202020204" pitchFamily="34" charset="0"/>
@@ -8834,7 +9139,7 @@
                     <a:lstStyle/>
                     <a:p>
                       <a:pPr algn="ctr"/>
-                      <a:endParaRPr kumimoji="1" lang="ja-JP" altLang="en-US">
+                      <a:endParaRPr kumimoji="1" lang="ja-JP" altLang="en-US" dirty="0">
                         <a:latin typeface="Arial" panose="020B0604020202020204" pitchFamily="34" charset="0"/>
                         <a:ea typeface="ＭＳ Ｐゴシック" panose="020B0600070205080204" pitchFamily="50" charset="-128"/>
                         <a:cs typeface="Arial" panose="020B0604020202020204" pitchFamily="34" charset="0"/>
@@ -8882,7 +9187,7 @@
           <a:lstStyle/>
           <a:p>
             <a:r>
-              <a:rPr lang="ja-JP" altLang="en-US" sz="2400">
+              <a:rPr lang="ja-JP" altLang="en-US" sz="2400" dirty="0">
                 <a:latin typeface="Arial" panose="020B0604020202020204" pitchFamily="34" charset="0"/>
                 <a:ea typeface="ＭＳ Ｐゴシック" panose="020B0600070205080204" pitchFamily="50" charset="-128"/>
                 <a:cs typeface="Arial" panose="020B0604020202020204" pitchFamily="34" charset="0"/>
@@ -8890,7 +9195,7 @@
               <a:t>母平均が同じで，母標準偏差が異なる場合</a:t>
             </a:r>
             <a:r>
-              <a:rPr lang="en-US" altLang="ja-JP" sz="2400">
+              <a:rPr lang="en-US" altLang="ja-JP" sz="2400" dirty="0">
                 <a:latin typeface="Arial" panose="020B0604020202020204" pitchFamily="34" charset="0"/>
                 <a:ea typeface="ＭＳ Ｐゴシック" panose="020B0600070205080204" pitchFamily="50" charset="-128"/>
                 <a:cs typeface="Arial" panose="020B0604020202020204" pitchFamily="34" charset="0"/>
@@ -8900,7 +9205,7 @@
           </a:p>
           <a:p>
             <a:r>
-              <a:rPr kumimoji="1" lang="ja-JP" altLang="en-US" sz="2400">
+              <a:rPr kumimoji="1" lang="ja-JP" altLang="en-US" sz="2400" dirty="0">
                 <a:latin typeface="Arial" panose="020B0604020202020204" pitchFamily="34" charset="0"/>
                 <a:ea typeface="ＭＳ Ｐゴシック" panose="020B0600070205080204" pitchFamily="50" charset="-128"/>
                 <a:cs typeface="Arial" panose="020B0604020202020204" pitchFamily="34" charset="0"/>
@@ -8908,7 +9213,7 @@
               <a:t>本当は２群間の</a:t>
             </a:r>
             <a:r>
-              <a:rPr lang="ja-JP" altLang="en-US" sz="2400">
+              <a:rPr lang="ja-JP" altLang="en-US" sz="2400" dirty="0">
                 <a:latin typeface="Arial" panose="020B0604020202020204" pitchFamily="34" charset="0"/>
                 <a:ea typeface="ＭＳ Ｐゴシック" panose="020B0600070205080204" pitchFamily="50" charset="-128"/>
                 <a:cs typeface="Arial" panose="020B0604020202020204" pitchFamily="34" charset="0"/>
@@ -8916,14 +9221,14 @@
               <a:t>母平均</a:t>
             </a:r>
             <a:r>
-              <a:rPr kumimoji="1" lang="ja-JP" altLang="en-US" sz="2400">
+              <a:rPr kumimoji="1" lang="ja-JP" altLang="en-US" sz="2400" dirty="0">
                 <a:latin typeface="Arial" panose="020B0604020202020204" pitchFamily="34" charset="0"/>
                 <a:ea typeface="ＭＳ Ｐゴシック" panose="020B0600070205080204" pitchFamily="50" charset="-128"/>
                 <a:cs typeface="Arial" panose="020B0604020202020204" pitchFamily="34" charset="0"/>
               </a:rPr>
               <a:t>には差がないはず！</a:t>
             </a:r>
-            <a:endParaRPr kumimoji="1" lang="en-US" altLang="ja-JP" sz="2400">
+            <a:endParaRPr kumimoji="1" lang="en-US" altLang="ja-JP" sz="2400" dirty="0">
               <a:latin typeface="Arial" panose="020B0604020202020204" pitchFamily="34" charset="0"/>
               <a:ea typeface="ＭＳ Ｐゴシック" panose="020B0600070205080204" pitchFamily="50" charset="-128"/>
               <a:cs typeface="Arial" panose="020B0604020202020204" pitchFamily="34" charset="0"/>
@@ -8931,7 +9236,7 @@
           </a:p>
           <a:p>
             <a:r>
-              <a:rPr lang="ja-JP" altLang="en-US" sz="2400">
+              <a:rPr lang="ja-JP" altLang="en-US" sz="2400" dirty="0">
                 <a:latin typeface="Arial" panose="020B0604020202020204" pitchFamily="34" charset="0"/>
                 <a:ea typeface="ＭＳ Ｐゴシック" panose="020B0600070205080204" pitchFamily="50" charset="-128"/>
                 <a:cs typeface="Arial" panose="020B0604020202020204" pitchFamily="34" charset="0"/>
@@ -8939,7 +9244,7 @@
               <a:t>⇒</a:t>
             </a:r>
             <a:r>
-              <a:rPr lang="ja-JP" altLang="en-US" sz="2400">
+              <a:rPr lang="ja-JP" altLang="en-US" sz="2400" dirty="0">
                 <a:solidFill>
                   <a:srgbClr val="FF00FF"/>
                 </a:solidFill>
@@ -8950,7 +9255,7 @@
               <a:t>サンプルサイズ</a:t>
             </a:r>
             <a:r>
-              <a:rPr lang="ja-JP" altLang="en-US" sz="2400">
+              <a:rPr lang="ja-JP" altLang="en-US" sz="2400" dirty="0">
                 <a:latin typeface="Arial" panose="020B0604020202020204" pitchFamily="34" charset="0"/>
                 <a:ea typeface="ＭＳ Ｐゴシック" panose="020B0600070205080204" pitchFamily="50" charset="-128"/>
                 <a:cs typeface="Arial" panose="020B0604020202020204" pitchFamily="34" charset="0"/>
@@ -8958,7 +9263,7 @@
               <a:t>が異なる場合，誤って有意と判定される</a:t>
             </a:r>
             <a:r>
-              <a:rPr lang="en-US" altLang="ja-JP" sz="2400">
+              <a:rPr lang="en-US" altLang="ja-JP" sz="2400" dirty="0">
                 <a:latin typeface="Arial" panose="020B0604020202020204" pitchFamily="34" charset="0"/>
                 <a:ea typeface="ＭＳ Ｐゴシック" panose="020B0600070205080204" pitchFamily="50" charset="-128"/>
                 <a:cs typeface="Arial" panose="020B0604020202020204" pitchFamily="34" charset="0"/>
@@ -8966,14 +9271,14 @@
               <a:t>α</a:t>
             </a:r>
             <a:r>
-              <a:rPr lang="ja-JP" altLang="en-US" sz="2400">
+              <a:rPr lang="ja-JP" altLang="en-US" sz="2400" dirty="0">
                 <a:latin typeface="Arial" panose="020B0604020202020204" pitchFamily="34" charset="0"/>
                 <a:ea typeface="ＭＳ Ｐゴシック" panose="020B0600070205080204" pitchFamily="50" charset="-128"/>
                 <a:cs typeface="Arial" panose="020B0604020202020204" pitchFamily="34" charset="0"/>
               </a:rPr>
               <a:t>エラーがどうなるか確認</a:t>
             </a:r>
-            <a:endParaRPr kumimoji="1" lang="ja-JP" altLang="en-US" sz="2400">
+            <a:endParaRPr kumimoji="1" lang="ja-JP" altLang="en-US" sz="2400" dirty="0">
               <a:latin typeface="Arial" panose="020B0604020202020204" pitchFamily="34" charset="0"/>
               <a:ea typeface="ＭＳ Ｐゴシック" panose="020B0600070205080204" pitchFamily="50" charset="-128"/>
               <a:cs typeface="Arial" panose="020B0604020202020204" pitchFamily="34" charset="0"/>
@@ -9008,7 +9313,7 @@
           <a:lstStyle/>
           <a:p>
             <a:r>
-              <a:rPr kumimoji="1" lang="en-US" altLang="ja-JP">
+              <a:rPr kumimoji="1" lang="en-US" altLang="ja-JP" dirty="0">
                 <a:latin typeface="Arial" panose="020B0604020202020204" pitchFamily="34" charset="0"/>
                 <a:ea typeface="ＭＳ Ｐゴシック" panose="020B0600070205080204" pitchFamily="50" charset="-128"/>
                 <a:cs typeface="Arial" panose="020B0604020202020204" pitchFamily="34" charset="0"/>
@@ -9016,7 +9321,7 @@
               <a:t>2</a:t>
             </a:r>
             <a:r>
-              <a:rPr kumimoji="1" lang="ja-JP" altLang="en-US">
+              <a:rPr kumimoji="1" lang="ja-JP" altLang="en-US" dirty="0">
                 <a:latin typeface="Arial" panose="020B0604020202020204" pitchFamily="34" charset="0"/>
                 <a:ea typeface="ＭＳ Ｐゴシック" panose="020B0600070205080204" pitchFamily="50" charset="-128"/>
                 <a:cs typeface="Arial" panose="020B0604020202020204" pitchFamily="34" charset="0"/>
@@ -9024,7 +9329,7 @@
               <a:t>標本</a:t>
             </a:r>
             <a:r>
-              <a:rPr kumimoji="1" lang="en-US" altLang="ja-JP">
+              <a:rPr kumimoji="1" lang="en-US" altLang="ja-JP" dirty="0">
                 <a:latin typeface="Arial" panose="020B0604020202020204" pitchFamily="34" charset="0"/>
                 <a:ea typeface="ＭＳ Ｐゴシック" panose="020B0600070205080204" pitchFamily="50" charset="-128"/>
                 <a:cs typeface="Arial" panose="020B0604020202020204" pitchFamily="34" charset="0"/>
@@ -9032,7 +9337,7 @@
               <a:t>t</a:t>
             </a:r>
             <a:r>
-              <a:rPr kumimoji="1" lang="ja-JP" altLang="en-US">
+              <a:rPr kumimoji="1" lang="ja-JP" altLang="en-US" dirty="0">
                 <a:latin typeface="Arial" panose="020B0604020202020204" pitchFamily="34" charset="0"/>
                 <a:ea typeface="ＭＳ Ｐゴシック" panose="020B0600070205080204" pitchFamily="50" charset="-128"/>
                 <a:cs typeface="Arial" panose="020B0604020202020204" pitchFamily="34" charset="0"/>
@@ -9040,14 +9345,14 @@
               <a:t>検定　</a:t>
             </a:r>
             <a:r>
-              <a:rPr kumimoji="1" lang="en-US" altLang="ja-JP">
+              <a:rPr kumimoji="1" lang="en-US" altLang="ja-JP" dirty="0">
                 <a:latin typeface="Arial" panose="020B0604020202020204" pitchFamily="34" charset="0"/>
                 <a:ea typeface="ＭＳ Ｐゴシック" panose="020B0600070205080204" pitchFamily="50" charset="-128"/>
                 <a:cs typeface="Arial" panose="020B0604020202020204" pitchFamily="34" charset="0"/>
               </a:rPr>
               <a:t>Student or Welch ?</a:t>
             </a:r>
-            <a:endParaRPr kumimoji="1" lang="ja-JP" altLang="en-US">
+            <a:endParaRPr kumimoji="1" lang="ja-JP" altLang="en-US" dirty="0">
               <a:latin typeface="Arial" panose="020B0604020202020204" pitchFamily="34" charset="0"/>
               <a:cs typeface="Arial" panose="020B0604020202020204" pitchFamily="34" charset="0"/>
             </a:endParaRPr>
@@ -9115,7 +9420,7 @@
               <a:rPr kumimoji="1" lang="en-US" altLang="ja-JP" smtClean="0"/>
               <a:t>8</a:t>
             </a:fld>
-            <a:endParaRPr kumimoji="1" lang="en-US" altLang="ja-JP"/>
+            <a:endParaRPr kumimoji="1" lang="en-US" altLang="ja-JP" dirty="0"/>
           </a:p>
         </p:txBody>
       </p:sp>
@@ -9236,7 +9541,7 @@
           <a:lstStyle/>
           <a:p>
             <a:r>
-              <a:rPr kumimoji="1" lang="en-US" altLang="ja-JP">
+              <a:rPr kumimoji="1" lang="en-US" altLang="ja-JP" dirty="0">
                 <a:latin typeface="Arial" panose="020B0604020202020204" pitchFamily="34" charset="0"/>
                 <a:ea typeface="ＭＳ Ｐゴシック" panose="020B0600070205080204" pitchFamily="50" charset="-128"/>
                 <a:cs typeface="Arial" panose="020B0604020202020204" pitchFamily="34" charset="0"/>
@@ -9244,7 +9549,7 @@
               <a:t>2</a:t>
             </a:r>
             <a:r>
-              <a:rPr kumimoji="1" lang="ja-JP" altLang="en-US">
+              <a:rPr kumimoji="1" lang="ja-JP" altLang="en-US" dirty="0">
                 <a:latin typeface="Arial" panose="020B0604020202020204" pitchFamily="34" charset="0"/>
                 <a:ea typeface="ＭＳ Ｐゴシック" panose="020B0600070205080204" pitchFamily="50" charset="-128"/>
                 <a:cs typeface="Arial" panose="020B0604020202020204" pitchFamily="34" charset="0"/>
@@ -9252,7 +9557,7 @@
               <a:t>標本</a:t>
             </a:r>
             <a:r>
-              <a:rPr kumimoji="1" lang="en-US" altLang="ja-JP">
+              <a:rPr kumimoji="1" lang="en-US" altLang="ja-JP" dirty="0">
                 <a:latin typeface="Arial" panose="020B0604020202020204" pitchFamily="34" charset="0"/>
                 <a:ea typeface="ＭＳ Ｐゴシック" panose="020B0600070205080204" pitchFamily="50" charset="-128"/>
                 <a:cs typeface="Arial" panose="020B0604020202020204" pitchFamily="34" charset="0"/>
@@ -9260,7 +9565,7 @@
               <a:t>t</a:t>
             </a:r>
             <a:r>
-              <a:rPr kumimoji="1" lang="ja-JP" altLang="en-US">
+              <a:rPr kumimoji="1" lang="ja-JP" altLang="en-US" dirty="0">
                 <a:latin typeface="Arial" panose="020B0604020202020204" pitchFamily="34" charset="0"/>
                 <a:ea typeface="ＭＳ Ｐゴシック" panose="020B0600070205080204" pitchFamily="50" charset="-128"/>
                 <a:cs typeface="Arial" panose="020B0604020202020204" pitchFamily="34" charset="0"/>
@@ -9268,20 +9573,1443 @@
               <a:t>検定　</a:t>
             </a:r>
             <a:r>
-              <a:rPr kumimoji="1" lang="en-US" altLang="ja-JP">
+              <a:rPr kumimoji="1" lang="en-US" altLang="ja-JP" dirty="0">
                 <a:latin typeface="Arial" panose="020B0604020202020204" pitchFamily="34" charset="0"/>
                 <a:ea typeface="ＭＳ Ｐゴシック" panose="020B0600070205080204" pitchFamily="50" charset="-128"/>
                 <a:cs typeface="Arial" panose="020B0604020202020204" pitchFamily="34" charset="0"/>
               </a:rPr>
               <a:t>Student or Welch ?</a:t>
             </a:r>
-            <a:endParaRPr kumimoji="1" lang="ja-JP" altLang="en-US">
+            <a:endParaRPr kumimoji="1" lang="ja-JP" altLang="en-US" dirty="0">
               <a:latin typeface="Arial" panose="020B0604020202020204" pitchFamily="34" charset="0"/>
               <a:cs typeface="Arial" panose="020B0604020202020204" pitchFamily="34" charset="0"/>
             </a:endParaRPr>
           </a:p>
         </p:txBody>
       </p:sp>
+      <mc:AlternateContent xmlns:mc="http://schemas.openxmlformats.org/markup-compatibility/2006">
+        <mc:Choice xmlns:a14="http://schemas.microsoft.com/office/drawing/2010/main" Requires="a14">
+          <p:graphicFrame>
+            <p:nvGraphicFramePr>
+              <p:cNvPr id="5" name="表 4">
+                <a:extLst>
+                  <a:ext uri="{FF2B5EF4-FFF2-40B4-BE49-F238E27FC236}">
+                    <a16:creationId xmlns:a16="http://schemas.microsoft.com/office/drawing/2014/main" id="{A36D32C2-D7FC-D327-3A0F-52ED5E1EFF81}"/>
+                  </a:ext>
+                </a:extLst>
+              </p:cNvPr>
+              <p:cNvGraphicFramePr>
+                <a:graphicFrameLocks noGrp="1"/>
+              </p:cNvGraphicFramePr>
+              <p:nvPr>
+                <p:extLst>
+                  <p:ext uri="{D42A27DB-BD31-4B8C-83A1-F6EECF244321}">
+                    <p14:modId xmlns:p14="http://schemas.microsoft.com/office/powerpoint/2010/main" val="3976717326"/>
+                  </p:ext>
+                </p:extLst>
+              </p:nvPr>
+            </p:nvGraphicFramePr>
+            <p:xfrm>
+              <a:off x="5791831" y="4714868"/>
+              <a:ext cx="4534540" cy="1310132"/>
+            </p:xfrm>
+            <a:graphic>
+              <a:graphicData uri="http://schemas.openxmlformats.org/drawingml/2006/table">
+                <a:tbl>
+                  <a:tblPr firstRow="1" bandRow="1">
+                    <a:tableStyleId>{2D5ABB26-0587-4C30-8999-92F81FD0307C}</a:tableStyleId>
+                  </a:tblPr>
+                  <a:tblGrid>
+                    <a:gridCol w="2267270">
+                      <a:extLst>
+                        <a:ext uri="{9D8B030D-6E8A-4147-A177-3AD203B41FA5}">
+                          <a16:colId xmlns:a16="http://schemas.microsoft.com/office/drawing/2014/main" val="1134367869"/>
+                        </a:ext>
+                      </a:extLst>
+                    </a:gridCol>
+                    <a:gridCol w="2267270">
+                      <a:extLst>
+                        <a:ext uri="{9D8B030D-6E8A-4147-A177-3AD203B41FA5}">
+                          <a16:colId xmlns:a16="http://schemas.microsoft.com/office/drawing/2014/main" val="1714499800"/>
+                        </a:ext>
+                      </a:extLst>
+                    </a:gridCol>
+                  </a:tblGrid>
+                  <a:tr h="370840">
+                    <a:tc>
+                      <a:txBody>
+                        <a:bodyPr/>
+                        <a:lstStyle/>
+                        <a:p>
+                          <a:pPr marL="0" marR="0" lvl="0" indent="0" algn="ctr" defTabSz="914400" eaLnBrk="1" fontAlgn="auto" latinLnBrk="0" hangingPunct="1">
+                            <a:lnSpc>
+                              <a:spcPct val="100000"/>
+                            </a:lnSpc>
+                            <a:spcBef>
+                              <a:spcPts val="0"/>
+                            </a:spcBef>
+                            <a:spcAft>
+                              <a:spcPts val="0"/>
+                            </a:spcAft>
+                            <a:buClrTx/>
+                            <a:buSzTx/>
+                            <a:buFontTx/>
+                            <a:buNone/>
+                            <a:tabLst/>
+                            <a:defRPr/>
+                          </a:pPr>
+                          <a:r>
+                            <a:rPr kumimoji="1" lang="en-US" altLang="ja-JP" sz="1800" dirty="0">
+                              <a:latin typeface="Arial" panose="020B0604020202020204" pitchFamily="34" charset="0"/>
+                              <a:ea typeface="ＭＳ Ｐゴシック" panose="020B0600070205080204" pitchFamily="50" charset="-128"/>
+                              <a:cs typeface="Arial" panose="020B0604020202020204" pitchFamily="34" charset="0"/>
+                            </a:rPr>
+                            <a:t>Student</a:t>
+                          </a:r>
+                          <a:r>
+                            <a:rPr kumimoji="1" lang="ja-JP" altLang="en-US" sz="1800" dirty="0">
+                              <a:latin typeface="Arial" panose="020B0604020202020204" pitchFamily="34" charset="0"/>
+                              <a:ea typeface="ＭＳ Ｐゴシック" panose="020B0600070205080204" pitchFamily="50" charset="-128"/>
+                              <a:cs typeface="Arial" panose="020B0604020202020204" pitchFamily="34" charset="0"/>
+                            </a:rPr>
+                            <a:t>の</a:t>
+                          </a:r>
+                          <a:r>
+                            <a:rPr kumimoji="1" lang="en-US" altLang="ja-JP" sz="1800" dirty="0">
+                              <a:latin typeface="Arial" panose="020B0604020202020204" pitchFamily="34" charset="0"/>
+                              <a:ea typeface="ＭＳ Ｐゴシック" panose="020B0600070205080204" pitchFamily="50" charset="-128"/>
+                              <a:cs typeface="Arial" panose="020B0604020202020204" pitchFamily="34" charset="0"/>
+                            </a:rPr>
+                            <a:t>t</a:t>
+                          </a:r>
+                          <a:r>
+                            <a:rPr kumimoji="1" lang="ja-JP" altLang="en-US" sz="1800" dirty="0">
+                              <a:latin typeface="Arial" panose="020B0604020202020204" pitchFamily="34" charset="0"/>
+                              <a:ea typeface="ＭＳ Ｐゴシック" panose="020B0600070205080204" pitchFamily="50" charset="-128"/>
+                              <a:cs typeface="Arial" panose="020B0604020202020204" pitchFamily="34" charset="0"/>
+                            </a:rPr>
+                            <a:t>検定</a:t>
+                          </a:r>
+                        </a:p>
+                      </a:txBody>
+                      <a:tcPr>
+                        <a:lnL w="12700" cap="flat" cmpd="sng" algn="ctr">
+                          <a:solidFill>
+                            <a:schemeClr val="tx1"/>
+                          </a:solidFill>
+                          <a:prstDash val="solid"/>
+                          <a:round/>
+                          <a:headEnd type="none" w="med" len="med"/>
+                          <a:tailEnd type="none" w="med" len="med"/>
+                        </a:lnL>
+                        <a:lnT w="12700" cap="flat" cmpd="sng" algn="ctr">
+                          <a:solidFill>
+                            <a:schemeClr val="tx1"/>
+                          </a:solidFill>
+                          <a:prstDash val="solid"/>
+                          <a:round/>
+                          <a:headEnd type="none" w="med" len="med"/>
+                          <a:tailEnd type="none" w="med" len="med"/>
+                        </a:lnT>
+                      </a:tcPr>
+                    </a:tc>
+                    <a:tc>
+                      <a:txBody>
+                        <a:bodyPr/>
+                        <a:lstStyle/>
+                        <a:p>
+                          <a:pPr marL="0" marR="0" lvl="0" indent="0" algn="ctr" defTabSz="914400" eaLnBrk="1" fontAlgn="auto" latinLnBrk="0" hangingPunct="1">
+                            <a:lnSpc>
+                              <a:spcPct val="100000"/>
+                            </a:lnSpc>
+                            <a:spcBef>
+                              <a:spcPts val="0"/>
+                            </a:spcBef>
+                            <a:spcAft>
+                              <a:spcPts val="0"/>
+                            </a:spcAft>
+                            <a:buClrTx/>
+                            <a:buSzTx/>
+                            <a:buFontTx/>
+                            <a:buNone/>
+                            <a:tabLst/>
+                            <a:defRPr/>
+                          </a:pPr>
+                          <a:r>
+                            <a:rPr kumimoji="1" lang="en-US" altLang="ja-JP" sz="1800" dirty="0">
+                              <a:latin typeface="Arial" panose="020B0604020202020204" pitchFamily="34" charset="0"/>
+                              <a:ea typeface="ＭＳ Ｐゴシック" panose="020B0600070205080204" pitchFamily="50" charset="-128"/>
+                              <a:cs typeface="Arial" panose="020B0604020202020204" pitchFamily="34" charset="0"/>
+                            </a:rPr>
+                            <a:t>Welch</a:t>
+                          </a:r>
+                          <a:r>
+                            <a:rPr kumimoji="1" lang="ja-JP" altLang="en-US" sz="1800" dirty="0">
+                              <a:latin typeface="Arial" panose="020B0604020202020204" pitchFamily="34" charset="0"/>
+                              <a:ea typeface="ＭＳ Ｐゴシック" panose="020B0600070205080204" pitchFamily="50" charset="-128"/>
+                              <a:cs typeface="Arial" panose="020B0604020202020204" pitchFamily="34" charset="0"/>
+                            </a:rPr>
+                            <a:t>の</a:t>
+                          </a:r>
+                          <a:r>
+                            <a:rPr kumimoji="1" lang="en-US" altLang="ja-JP" sz="1800" dirty="0">
+                              <a:latin typeface="Arial" panose="020B0604020202020204" pitchFamily="34" charset="0"/>
+                              <a:ea typeface="ＭＳ Ｐゴシック" panose="020B0600070205080204" pitchFamily="50" charset="-128"/>
+                              <a:cs typeface="Arial" panose="020B0604020202020204" pitchFamily="34" charset="0"/>
+                            </a:rPr>
+                            <a:t>t</a:t>
+                          </a:r>
+                          <a:r>
+                            <a:rPr kumimoji="1" lang="ja-JP" altLang="en-US" sz="1800" dirty="0">
+                              <a:latin typeface="Arial" panose="020B0604020202020204" pitchFamily="34" charset="0"/>
+                              <a:ea typeface="ＭＳ Ｐゴシック" panose="020B0600070205080204" pitchFamily="50" charset="-128"/>
+                              <a:cs typeface="Arial" panose="020B0604020202020204" pitchFamily="34" charset="0"/>
+                            </a:rPr>
+                            <a:t>検定</a:t>
+                          </a:r>
+                        </a:p>
+                      </a:txBody>
+                      <a:tcPr>
+                        <a:lnR w="12700" cap="flat" cmpd="sng" algn="ctr">
+                          <a:solidFill>
+                            <a:schemeClr val="tx1"/>
+                          </a:solidFill>
+                          <a:prstDash val="solid"/>
+                          <a:round/>
+                          <a:headEnd type="none" w="med" len="med"/>
+                          <a:tailEnd type="none" w="med" len="med"/>
+                        </a:lnR>
+                        <a:lnT w="12700" cap="flat" cmpd="sng" algn="ctr">
+                          <a:solidFill>
+                            <a:schemeClr val="tx1"/>
+                          </a:solidFill>
+                          <a:prstDash val="solid"/>
+                          <a:round/>
+                          <a:headEnd type="none" w="med" len="med"/>
+                          <a:tailEnd type="none" w="med" len="med"/>
+                        </a:lnT>
+                      </a:tcPr>
+                    </a:tc>
+                    <a:extLst>
+                      <a:ext uri="{0D108BD9-81ED-4DB2-BD59-A6C34878D82A}">
+                        <a16:rowId xmlns:a16="http://schemas.microsoft.com/office/drawing/2014/main" val="1467442495"/>
+                      </a:ext>
+                    </a:extLst>
+                  </a:tr>
+                  <a:tr h="370840">
+                    <a:tc>
+                      <a:txBody>
+                        <a:bodyPr/>
+                        <a:lstStyle/>
+                        <a:p>
+                          <a:pPr marL="0" marR="0" lvl="0" indent="0" defTabSz="914400" eaLnBrk="1" fontAlgn="auto" latinLnBrk="0" hangingPunct="1">
+                            <a:lnSpc>
+                              <a:spcPct val="100000"/>
+                            </a:lnSpc>
+                            <a:spcBef>
+                              <a:spcPts val="0"/>
+                            </a:spcBef>
+                            <a:spcAft>
+                              <a:spcPts val="0"/>
+                            </a:spcAft>
+                            <a:buClrTx/>
+                            <a:buSzTx/>
+                            <a:buFontTx/>
+                            <a:buNone/>
+                            <a:tabLst/>
+                            <a:defRPr/>
+                          </a:pPr>
+                          <a14:m>
+                            <m:oMathPara xmlns:m="http://schemas.openxmlformats.org/officeDocument/2006/math">
+                              <m:oMathParaPr>
+                                <m:jc m:val="centerGroup"/>
+                              </m:oMathParaPr>
+                              <m:oMath xmlns:m="http://schemas.openxmlformats.org/officeDocument/2006/math">
+                                <m:r>
+                                  <a:rPr kumimoji="1" lang="en-US" altLang="ja-JP" b="0" i="1" smtClean="0">
+                                    <a:latin typeface="Cambria Math" panose="02040503050406030204" pitchFamily="18" charset="0"/>
+                                  </a:rPr>
+                                  <m:t>𝑡</m:t>
+                                </m:r>
+                                <m:r>
+                                  <a:rPr kumimoji="1" lang="en-US" altLang="ja-JP" b="0" i="1" smtClean="0">
+                                    <a:latin typeface="Cambria Math" panose="02040503050406030204" pitchFamily="18" charset="0"/>
+                                  </a:rPr>
+                                  <m:t>=</m:t>
+                                </m:r>
+                                <m:f>
+                                  <m:fPr>
+                                    <m:ctrlPr>
+                                      <a:rPr kumimoji="1" lang="en-US" altLang="ja-JP" b="0" i="1" smtClean="0">
+                                        <a:latin typeface="Cambria Math" panose="02040503050406030204" pitchFamily="18" charset="0"/>
+                                      </a:rPr>
+                                    </m:ctrlPr>
+                                  </m:fPr>
+                                  <m:num>
+                                    <m:acc>
+                                      <m:accPr>
+                                        <m:chr m:val="̅"/>
+                                        <m:ctrlPr>
+                                          <a:rPr kumimoji="1" lang="en-US" altLang="ja-JP" b="0" i="1" smtClean="0">
+                                            <a:latin typeface="Cambria Math" panose="02040503050406030204" pitchFamily="18" charset="0"/>
+                                          </a:rPr>
+                                        </m:ctrlPr>
+                                      </m:accPr>
+                                      <m:e>
+                                        <m:sSub>
+                                          <m:sSubPr>
+                                            <m:ctrlPr>
+                                              <a:rPr kumimoji="1" lang="en-US" altLang="ja-JP" b="0" i="1" smtClean="0">
+                                                <a:latin typeface="Cambria Math" panose="02040503050406030204" pitchFamily="18" charset="0"/>
+                                              </a:rPr>
+                                            </m:ctrlPr>
+                                          </m:sSubPr>
+                                          <m:e>
+                                            <m:r>
+                                              <a:rPr kumimoji="1" lang="en-US" altLang="ja-JP" b="0" i="1" smtClean="0">
+                                                <a:latin typeface="Cambria Math" panose="02040503050406030204" pitchFamily="18" charset="0"/>
+                                              </a:rPr>
+                                              <m:t>𝑥</m:t>
+                                            </m:r>
+                                          </m:e>
+                                          <m:sub>
+                                            <m:r>
+                                              <a:rPr kumimoji="1" lang="en-US" altLang="ja-JP" b="0" i="1" smtClean="0">
+                                                <a:latin typeface="Cambria Math" panose="02040503050406030204" pitchFamily="18" charset="0"/>
+                                              </a:rPr>
+                                              <m:t>1</m:t>
+                                            </m:r>
+                                          </m:sub>
+                                        </m:sSub>
+                                      </m:e>
+                                    </m:acc>
+                                    <m:r>
+                                      <a:rPr kumimoji="1" lang="en-US" altLang="ja-JP" b="0" i="1" smtClean="0">
+                                        <a:latin typeface="Cambria Math" panose="02040503050406030204" pitchFamily="18" charset="0"/>
+                                      </a:rPr>
+                                      <m:t>−</m:t>
+                                    </m:r>
+                                    <m:acc>
+                                      <m:accPr>
+                                        <m:chr m:val="̅"/>
+                                        <m:ctrlPr>
+                                          <a:rPr kumimoji="1" lang="en-US" altLang="ja-JP" b="0" i="1" smtClean="0">
+                                            <a:latin typeface="Cambria Math" panose="02040503050406030204" pitchFamily="18" charset="0"/>
+                                          </a:rPr>
+                                        </m:ctrlPr>
+                                      </m:accPr>
+                                      <m:e>
+                                        <m:sSub>
+                                          <m:sSubPr>
+                                            <m:ctrlPr>
+                                              <a:rPr kumimoji="1" lang="en-US" altLang="ja-JP" b="0" i="1" smtClean="0">
+                                                <a:latin typeface="Cambria Math" panose="02040503050406030204" pitchFamily="18" charset="0"/>
+                                              </a:rPr>
+                                            </m:ctrlPr>
+                                          </m:sSubPr>
+                                          <m:e>
+                                            <m:r>
+                                              <a:rPr kumimoji="1" lang="en-US" altLang="ja-JP" b="0" i="1" smtClean="0">
+                                                <a:latin typeface="Cambria Math" panose="02040503050406030204" pitchFamily="18" charset="0"/>
+                                              </a:rPr>
+                                              <m:t>𝑥</m:t>
+                                            </m:r>
+                                          </m:e>
+                                          <m:sub>
+                                            <m:r>
+                                              <a:rPr kumimoji="1" lang="en-US" altLang="ja-JP" b="0" i="1" smtClean="0">
+                                                <a:latin typeface="Cambria Math" panose="02040503050406030204" pitchFamily="18" charset="0"/>
+                                              </a:rPr>
+                                              <m:t>2</m:t>
+                                            </m:r>
+                                          </m:sub>
+                                        </m:sSub>
+                                      </m:e>
+                                    </m:acc>
+                                  </m:num>
+                                  <m:den>
+                                    <m:r>
+                                      <a:rPr kumimoji="1" lang="en-US" altLang="ja-JP" b="0" i="1" smtClean="0">
+                                        <a:latin typeface="Cambria Math" panose="02040503050406030204" pitchFamily="18" charset="0"/>
+                                      </a:rPr>
+                                      <m:t>𝑠</m:t>
+                                    </m:r>
+                                    <m:rad>
+                                      <m:radPr>
+                                        <m:degHide m:val="on"/>
+                                        <m:ctrlPr>
+                                          <a:rPr kumimoji="1" lang="en-US" altLang="ja-JP" b="0" i="1" smtClean="0">
+                                            <a:latin typeface="Cambria Math" panose="02040503050406030204" pitchFamily="18" charset="0"/>
+                                          </a:rPr>
+                                        </m:ctrlPr>
+                                      </m:radPr>
+                                      <m:deg/>
+                                      <m:e>
+                                        <m:f>
+                                          <m:fPr>
+                                            <m:ctrlPr>
+                                              <a:rPr kumimoji="1" lang="en-US" altLang="ja-JP" b="0" i="1" smtClean="0">
+                                                <a:latin typeface="Cambria Math" panose="02040503050406030204" pitchFamily="18" charset="0"/>
+                                              </a:rPr>
+                                            </m:ctrlPr>
+                                          </m:fPr>
+                                          <m:num>
+                                            <m:r>
+                                              <a:rPr kumimoji="1" lang="en-US" altLang="ja-JP" b="0" i="1" smtClean="0">
+                                                <a:latin typeface="Cambria Math" panose="02040503050406030204" pitchFamily="18" charset="0"/>
+                                              </a:rPr>
+                                              <m:t>1</m:t>
+                                            </m:r>
+                                          </m:num>
+                                          <m:den>
+                                            <m:sSub>
+                                              <m:sSubPr>
+                                                <m:ctrlPr>
+                                                  <a:rPr kumimoji="1" lang="en-US" altLang="ja-JP" b="0" i="1" smtClean="0">
+                                                    <a:latin typeface="Cambria Math" panose="02040503050406030204" pitchFamily="18" charset="0"/>
+                                                  </a:rPr>
+                                                </m:ctrlPr>
+                                              </m:sSubPr>
+                                              <m:e>
+                                                <m:r>
+                                                  <a:rPr kumimoji="1" lang="en-US" altLang="ja-JP" b="0" i="1" smtClean="0">
+                                                    <a:latin typeface="Cambria Math" panose="02040503050406030204" pitchFamily="18" charset="0"/>
+                                                  </a:rPr>
+                                                  <m:t>𝑛</m:t>
+                                                </m:r>
+                                              </m:e>
+                                              <m:sub>
+                                                <m:r>
+                                                  <a:rPr kumimoji="1" lang="en-US" altLang="ja-JP" b="0" i="1" smtClean="0">
+                                                    <a:latin typeface="Cambria Math" panose="02040503050406030204" pitchFamily="18" charset="0"/>
+                                                  </a:rPr>
+                                                  <m:t>1</m:t>
+                                                </m:r>
+                                              </m:sub>
+                                            </m:sSub>
+                                          </m:den>
+                                        </m:f>
+                                        <m:r>
+                                          <a:rPr kumimoji="1" lang="en-US" altLang="ja-JP" b="0" i="1" smtClean="0">
+                                            <a:latin typeface="Cambria Math" panose="02040503050406030204" pitchFamily="18" charset="0"/>
+                                          </a:rPr>
+                                          <m:t>+</m:t>
+                                        </m:r>
+                                        <m:f>
+                                          <m:fPr>
+                                            <m:ctrlPr>
+                                              <a:rPr kumimoji="1" lang="en-US" altLang="ja-JP" b="0" i="1" smtClean="0">
+                                                <a:latin typeface="Cambria Math" panose="02040503050406030204" pitchFamily="18" charset="0"/>
+                                              </a:rPr>
+                                            </m:ctrlPr>
+                                          </m:fPr>
+                                          <m:num>
+                                            <m:r>
+                                              <a:rPr kumimoji="1" lang="en-US" altLang="ja-JP" b="0" i="1" smtClean="0">
+                                                <a:latin typeface="Cambria Math" panose="02040503050406030204" pitchFamily="18" charset="0"/>
+                                              </a:rPr>
+                                              <m:t>1</m:t>
+                                            </m:r>
+                                          </m:num>
+                                          <m:den>
+                                            <m:sSub>
+                                              <m:sSubPr>
+                                                <m:ctrlPr>
+                                                  <a:rPr kumimoji="1" lang="en-US" altLang="ja-JP" b="0" i="1" smtClean="0">
+                                                    <a:latin typeface="Cambria Math" panose="02040503050406030204" pitchFamily="18" charset="0"/>
+                                                  </a:rPr>
+                                                </m:ctrlPr>
+                                              </m:sSubPr>
+                                              <m:e>
+                                                <m:r>
+                                                  <a:rPr kumimoji="1" lang="en-US" altLang="ja-JP" b="0" i="1" smtClean="0">
+                                                    <a:latin typeface="Cambria Math" panose="02040503050406030204" pitchFamily="18" charset="0"/>
+                                                  </a:rPr>
+                                                  <m:t>𝑛</m:t>
+                                                </m:r>
+                                              </m:e>
+                                              <m:sub>
+                                                <m:r>
+                                                  <a:rPr kumimoji="1" lang="en-US" altLang="ja-JP" b="0" i="1" smtClean="0">
+                                                    <a:latin typeface="Cambria Math" panose="02040503050406030204" pitchFamily="18" charset="0"/>
+                                                  </a:rPr>
+                                                  <m:t>2</m:t>
+                                                </m:r>
+                                              </m:sub>
+                                            </m:sSub>
+                                          </m:den>
+                                        </m:f>
+                                      </m:e>
+                                    </m:rad>
+                                  </m:den>
+                                </m:f>
+                              </m:oMath>
+                            </m:oMathPara>
+                          </a14:m>
+                          <a:endParaRPr kumimoji="1" lang="ja-JP" altLang="en-US" dirty="0"/>
+                        </a:p>
+                      </a:txBody>
+                      <a:tcPr>
+                        <a:lnL w="12700" cap="flat" cmpd="sng" algn="ctr">
+                          <a:solidFill>
+                            <a:schemeClr val="tx1"/>
+                          </a:solidFill>
+                          <a:prstDash val="solid"/>
+                          <a:round/>
+                          <a:headEnd type="none" w="med" len="med"/>
+                          <a:tailEnd type="none" w="med" len="med"/>
+                        </a:lnL>
+                        <a:lnB w="12700" cap="flat" cmpd="sng" algn="ctr">
+                          <a:solidFill>
+                            <a:schemeClr val="tx1"/>
+                          </a:solidFill>
+                          <a:prstDash val="solid"/>
+                          <a:round/>
+                          <a:headEnd type="none" w="med" len="med"/>
+                          <a:tailEnd type="none" w="med" len="med"/>
+                        </a:lnB>
+                      </a:tcPr>
+                    </a:tc>
+                    <a:tc>
+                      <a:txBody>
+                        <a:bodyPr/>
+                        <a:lstStyle/>
+                        <a:p>
+                          <a:pPr marL="0" marR="0" lvl="0" indent="0" defTabSz="914400" eaLnBrk="1" fontAlgn="auto" latinLnBrk="0" hangingPunct="1">
+                            <a:lnSpc>
+                              <a:spcPct val="100000"/>
+                            </a:lnSpc>
+                            <a:spcBef>
+                              <a:spcPts val="0"/>
+                            </a:spcBef>
+                            <a:spcAft>
+                              <a:spcPts val="0"/>
+                            </a:spcAft>
+                            <a:buClrTx/>
+                            <a:buSzTx/>
+                            <a:buFontTx/>
+                            <a:buNone/>
+                            <a:tabLst/>
+                            <a:defRPr/>
+                          </a:pPr>
+                          <a14:m>
+                            <m:oMathPara xmlns:m="http://schemas.openxmlformats.org/officeDocument/2006/math">
+                              <m:oMathParaPr>
+                                <m:jc m:val="centerGroup"/>
+                              </m:oMathParaPr>
+                              <m:oMath xmlns:m="http://schemas.openxmlformats.org/officeDocument/2006/math">
+                                <m:r>
+                                  <a:rPr kumimoji="1" lang="en-US" altLang="ja-JP" b="0" i="1" smtClean="0">
+                                    <a:latin typeface="Cambria Math" panose="02040503050406030204" pitchFamily="18" charset="0"/>
+                                  </a:rPr>
+                                  <m:t>𝑡</m:t>
+                                </m:r>
+                                <m:r>
+                                  <a:rPr kumimoji="1" lang="en-US" altLang="ja-JP" b="0" i="1" smtClean="0">
+                                    <a:latin typeface="Cambria Math" panose="02040503050406030204" pitchFamily="18" charset="0"/>
+                                  </a:rPr>
+                                  <m:t>=</m:t>
+                                </m:r>
+                                <m:f>
+                                  <m:fPr>
+                                    <m:ctrlPr>
+                                      <a:rPr kumimoji="1" lang="en-US" altLang="ja-JP" b="0" i="1" smtClean="0">
+                                        <a:latin typeface="Cambria Math" panose="02040503050406030204" pitchFamily="18" charset="0"/>
+                                      </a:rPr>
+                                    </m:ctrlPr>
+                                  </m:fPr>
+                                  <m:num>
+                                    <m:acc>
+                                      <m:accPr>
+                                        <m:chr m:val="̅"/>
+                                        <m:ctrlPr>
+                                          <a:rPr kumimoji="1" lang="en-US" altLang="ja-JP" b="0" i="1" smtClean="0">
+                                            <a:latin typeface="Cambria Math" panose="02040503050406030204" pitchFamily="18" charset="0"/>
+                                          </a:rPr>
+                                        </m:ctrlPr>
+                                      </m:accPr>
+                                      <m:e>
+                                        <m:sSub>
+                                          <m:sSubPr>
+                                            <m:ctrlPr>
+                                              <a:rPr kumimoji="1" lang="en-US" altLang="ja-JP" b="0" i="1" smtClean="0">
+                                                <a:latin typeface="Cambria Math" panose="02040503050406030204" pitchFamily="18" charset="0"/>
+                                              </a:rPr>
+                                            </m:ctrlPr>
+                                          </m:sSubPr>
+                                          <m:e>
+                                            <m:r>
+                                              <a:rPr kumimoji="1" lang="en-US" altLang="ja-JP" b="0" i="1" smtClean="0">
+                                                <a:latin typeface="Cambria Math" panose="02040503050406030204" pitchFamily="18" charset="0"/>
+                                              </a:rPr>
+                                              <m:t>𝑥</m:t>
+                                            </m:r>
+                                          </m:e>
+                                          <m:sub>
+                                            <m:r>
+                                              <a:rPr kumimoji="1" lang="en-US" altLang="ja-JP" b="0" i="1" smtClean="0">
+                                                <a:latin typeface="Cambria Math" panose="02040503050406030204" pitchFamily="18" charset="0"/>
+                                              </a:rPr>
+                                              <m:t>1</m:t>
+                                            </m:r>
+                                          </m:sub>
+                                        </m:sSub>
+                                      </m:e>
+                                    </m:acc>
+                                    <m:r>
+                                      <a:rPr kumimoji="1" lang="en-US" altLang="ja-JP" b="0" i="1" smtClean="0">
+                                        <a:latin typeface="Cambria Math" panose="02040503050406030204" pitchFamily="18" charset="0"/>
+                                      </a:rPr>
+                                      <m:t>−</m:t>
+                                    </m:r>
+                                    <m:acc>
+                                      <m:accPr>
+                                        <m:chr m:val="̅"/>
+                                        <m:ctrlPr>
+                                          <a:rPr kumimoji="1" lang="en-US" altLang="ja-JP" b="0" i="1" smtClean="0">
+                                            <a:latin typeface="Cambria Math" panose="02040503050406030204" pitchFamily="18" charset="0"/>
+                                          </a:rPr>
+                                        </m:ctrlPr>
+                                      </m:accPr>
+                                      <m:e>
+                                        <m:sSub>
+                                          <m:sSubPr>
+                                            <m:ctrlPr>
+                                              <a:rPr kumimoji="1" lang="en-US" altLang="ja-JP" b="0" i="1" smtClean="0">
+                                                <a:latin typeface="Cambria Math" panose="02040503050406030204" pitchFamily="18" charset="0"/>
+                                              </a:rPr>
+                                            </m:ctrlPr>
+                                          </m:sSubPr>
+                                          <m:e>
+                                            <m:r>
+                                              <a:rPr kumimoji="1" lang="en-US" altLang="ja-JP" b="0" i="1" smtClean="0">
+                                                <a:latin typeface="Cambria Math" panose="02040503050406030204" pitchFamily="18" charset="0"/>
+                                              </a:rPr>
+                                              <m:t>𝑥</m:t>
+                                            </m:r>
+                                          </m:e>
+                                          <m:sub>
+                                            <m:r>
+                                              <a:rPr kumimoji="1" lang="en-US" altLang="ja-JP" b="0" i="1" smtClean="0">
+                                                <a:latin typeface="Cambria Math" panose="02040503050406030204" pitchFamily="18" charset="0"/>
+                                              </a:rPr>
+                                              <m:t>2</m:t>
+                                            </m:r>
+                                          </m:sub>
+                                        </m:sSub>
+                                      </m:e>
+                                    </m:acc>
+                                  </m:num>
+                                  <m:den>
+                                    <m:rad>
+                                      <m:radPr>
+                                        <m:degHide m:val="on"/>
+                                        <m:ctrlPr>
+                                          <a:rPr kumimoji="1" lang="en-US" altLang="ja-JP" b="0" i="1" smtClean="0">
+                                            <a:latin typeface="Cambria Math" panose="02040503050406030204" pitchFamily="18" charset="0"/>
+                                          </a:rPr>
+                                        </m:ctrlPr>
+                                      </m:radPr>
+                                      <m:deg/>
+                                      <m:e>
+                                        <m:f>
+                                          <m:fPr>
+                                            <m:ctrlPr>
+                                              <a:rPr kumimoji="1" lang="en-US" altLang="ja-JP" b="0" i="1" smtClean="0">
+                                                <a:latin typeface="Cambria Math" panose="02040503050406030204" pitchFamily="18" charset="0"/>
+                                              </a:rPr>
+                                            </m:ctrlPr>
+                                          </m:fPr>
+                                          <m:num>
+                                            <m:sSup>
+                                              <m:sSupPr>
+                                                <m:ctrlPr>
+                                                  <a:rPr kumimoji="1" lang="en-US" altLang="ja-JP" b="0" i="1" smtClean="0">
+                                                    <a:latin typeface="Cambria Math" panose="02040503050406030204" pitchFamily="18" charset="0"/>
+                                                  </a:rPr>
+                                                </m:ctrlPr>
+                                              </m:sSupPr>
+                                              <m:e>
+                                                <m:sSub>
+                                                  <m:sSubPr>
+                                                    <m:ctrlPr>
+                                                      <a:rPr kumimoji="1" lang="en-US" altLang="ja-JP" b="0" i="1" smtClean="0">
+                                                        <a:latin typeface="Cambria Math" panose="02040503050406030204" pitchFamily="18" charset="0"/>
+                                                      </a:rPr>
+                                                    </m:ctrlPr>
+                                                  </m:sSubPr>
+                                                  <m:e>
+                                                    <m:r>
+                                                      <a:rPr kumimoji="1" lang="en-US" altLang="ja-JP" b="0" i="1" smtClean="0">
+                                                        <a:latin typeface="Cambria Math" panose="02040503050406030204" pitchFamily="18" charset="0"/>
+                                                      </a:rPr>
+                                                      <m:t>𝑠</m:t>
+                                                    </m:r>
+                                                  </m:e>
+                                                  <m:sub>
+                                                    <m:r>
+                                                      <a:rPr kumimoji="1" lang="en-US" altLang="ja-JP" b="0" i="1" smtClean="0">
+                                                        <a:latin typeface="Cambria Math" panose="02040503050406030204" pitchFamily="18" charset="0"/>
+                                                      </a:rPr>
+                                                      <m:t>1</m:t>
+                                                    </m:r>
+                                                  </m:sub>
+                                                </m:sSub>
+                                              </m:e>
+                                              <m:sup>
+                                                <m:r>
+                                                  <a:rPr kumimoji="1" lang="en-US" altLang="ja-JP" b="0" i="1" smtClean="0">
+                                                    <a:latin typeface="Cambria Math" panose="02040503050406030204" pitchFamily="18" charset="0"/>
+                                                  </a:rPr>
+                                                  <m:t>2</m:t>
+                                                </m:r>
+                                              </m:sup>
+                                            </m:sSup>
+                                          </m:num>
+                                          <m:den>
+                                            <m:sSub>
+                                              <m:sSubPr>
+                                                <m:ctrlPr>
+                                                  <a:rPr kumimoji="1" lang="en-US" altLang="ja-JP" b="0" i="1" smtClean="0">
+                                                    <a:latin typeface="Cambria Math" panose="02040503050406030204" pitchFamily="18" charset="0"/>
+                                                  </a:rPr>
+                                                </m:ctrlPr>
+                                              </m:sSubPr>
+                                              <m:e>
+                                                <m:r>
+                                                  <a:rPr kumimoji="1" lang="en-US" altLang="ja-JP" b="0" i="1" smtClean="0">
+                                                    <a:latin typeface="Cambria Math" panose="02040503050406030204" pitchFamily="18" charset="0"/>
+                                                  </a:rPr>
+                                                  <m:t>𝑛</m:t>
+                                                </m:r>
+                                              </m:e>
+                                              <m:sub>
+                                                <m:r>
+                                                  <a:rPr kumimoji="1" lang="en-US" altLang="ja-JP" b="0" i="1" smtClean="0">
+                                                    <a:latin typeface="Cambria Math" panose="02040503050406030204" pitchFamily="18" charset="0"/>
+                                                  </a:rPr>
+                                                  <m:t>1</m:t>
+                                                </m:r>
+                                              </m:sub>
+                                            </m:sSub>
+                                          </m:den>
+                                        </m:f>
+                                        <m:r>
+                                          <a:rPr kumimoji="1" lang="en-US" altLang="ja-JP" b="0" i="1" smtClean="0">
+                                            <a:latin typeface="Cambria Math" panose="02040503050406030204" pitchFamily="18" charset="0"/>
+                                          </a:rPr>
+                                          <m:t>+</m:t>
+                                        </m:r>
+                                        <m:f>
+                                          <m:fPr>
+                                            <m:ctrlPr>
+                                              <a:rPr kumimoji="1" lang="en-US" altLang="ja-JP" b="0" i="1" smtClean="0">
+                                                <a:latin typeface="Cambria Math" panose="02040503050406030204" pitchFamily="18" charset="0"/>
+                                              </a:rPr>
+                                            </m:ctrlPr>
+                                          </m:fPr>
+                                          <m:num>
+                                            <m:sSup>
+                                              <m:sSupPr>
+                                                <m:ctrlPr>
+                                                  <a:rPr kumimoji="1" lang="en-US" altLang="ja-JP" b="0" i="1" smtClean="0">
+                                                    <a:latin typeface="Cambria Math" panose="02040503050406030204" pitchFamily="18" charset="0"/>
+                                                  </a:rPr>
+                                                </m:ctrlPr>
+                                              </m:sSupPr>
+                                              <m:e>
+                                                <m:sSub>
+                                                  <m:sSubPr>
+                                                    <m:ctrlPr>
+                                                      <a:rPr kumimoji="1" lang="en-US" altLang="ja-JP" b="0" i="1" smtClean="0">
+                                                        <a:latin typeface="Cambria Math" panose="02040503050406030204" pitchFamily="18" charset="0"/>
+                                                      </a:rPr>
+                                                    </m:ctrlPr>
+                                                  </m:sSubPr>
+                                                  <m:e>
+                                                    <m:r>
+                                                      <a:rPr kumimoji="1" lang="en-US" altLang="ja-JP" b="0" i="1" smtClean="0">
+                                                        <a:latin typeface="Cambria Math" panose="02040503050406030204" pitchFamily="18" charset="0"/>
+                                                      </a:rPr>
+                                                      <m:t>𝑠</m:t>
+                                                    </m:r>
+                                                  </m:e>
+                                                  <m:sub>
+                                                    <m:r>
+                                                      <a:rPr kumimoji="1" lang="en-US" altLang="ja-JP" b="0" i="1" smtClean="0">
+                                                        <a:latin typeface="Cambria Math" panose="02040503050406030204" pitchFamily="18" charset="0"/>
+                                                      </a:rPr>
+                                                      <m:t>2</m:t>
+                                                    </m:r>
+                                                  </m:sub>
+                                                </m:sSub>
+                                              </m:e>
+                                              <m:sup>
+                                                <m:r>
+                                                  <a:rPr kumimoji="1" lang="en-US" altLang="ja-JP" b="0" i="1" smtClean="0">
+                                                    <a:latin typeface="Cambria Math" panose="02040503050406030204" pitchFamily="18" charset="0"/>
+                                                  </a:rPr>
+                                                  <m:t>2</m:t>
+                                                </m:r>
+                                              </m:sup>
+                                            </m:sSup>
+                                          </m:num>
+                                          <m:den>
+                                            <m:sSub>
+                                              <m:sSubPr>
+                                                <m:ctrlPr>
+                                                  <a:rPr kumimoji="1" lang="en-US" altLang="ja-JP" b="0" i="1" smtClean="0">
+                                                    <a:latin typeface="Cambria Math" panose="02040503050406030204" pitchFamily="18" charset="0"/>
+                                                  </a:rPr>
+                                                </m:ctrlPr>
+                                              </m:sSubPr>
+                                              <m:e>
+                                                <m:r>
+                                                  <a:rPr kumimoji="1" lang="en-US" altLang="ja-JP" b="0" i="1" smtClean="0">
+                                                    <a:latin typeface="Cambria Math" panose="02040503050406030204" pitchFamily="18" charset="0"/>
+                                                  </a:rPr>
+                                                  <m:t>𝑛</m:t>
+                                                </m:r>
+                                              </m:e>
+                                              <m:sub>
+                                                <m:r>
+                                                  <a:rPr kumimoji="1" lang="en-US" altLang="ja-JP" b="0" i="1" smtClean="0">
+                                                    <a:latin typeface="Cambria Math" panose="02040503050406030204" pitchFamily="18" charset="0"/>
+                                                  </a:rPr>
+                                                  <m:t>2</m:t>
+                                                </m:r>
+                                              </m:sub>
+                                            </m:sSub>
+                                          </m:den>
+                                        </m:f>
+                                      </m:e>
+                                    </m:rad>
+                                  </m:den>
+                                </m:f>
+                              </m:oMath>
+                            </m:oMathPara>
+                          </a14:m>
+                          <a:endParaRPr kumimoji="1" lang="ja-JP" altLang="en-US" dirty="0"/>
+                        </a:p>
+                      </a:txBody>
+                      <a:tcPr>
+                        <a:lnR w="12700" cap="flat" cmpd="sng" algn="ctr">
+                          <a:solidFill>
+                            <a:schemeClr val="tx1"/>
+                          </a:solidFill>
+                          <a:prstDash val="solid"/>
+                          <a:round/>
+                          <a:headEnd type="none" w="med" len="med"/>
+                          <a:tailEnd type="none" w="med" len="med"/>
+                        </a:lnR>
+                        <a:lnB w="12700" cap="flat" cmpd="sng" algn="ctr">
+                          <a:solidFill>
+                            <a:schemeClr val="tx1"/>
+                          </a:solidFill>
+                          <a:prstDash val="solid"/>
+                          <a:round/>
+                          <a:headEnd type="none" w="med" len="med"/>
+                          <a:tailEnd type="none" w="med" len="med"/>
+                        </a:lnB>
+                      </a:tcPr>
+                    </a:tc>
+                    <a:extLst>
+                      <a:ext uri="{0D108BD9-81ED-4DB2-BD59-A6C34878D82A}">
+                        <a16:rowId xmlns:a16="http://schemas.microsoft.com/office/drawing/2014/main" val="1647804494"/>
+                      </a:ext>
+                    </a:extLst>
+                  </a:tr>
+                </a:tbl>
+              </a:graphicData>
+            </a:graphic>
+          </p:graphicFrame>
+        </mc:Choice>
+        <mc:Fallback>
+          <p:graphicFrame>
+            <p:nvGraphicFramePr>
+              <p:cNvPr id="5" name="表 4">
+                <a:extLst>
+                  <a:ext uri="{FF2B5EF4-FFF2-40B4-BE49-F238E27FC236}">
+                    <a16:creationId xmlns:a16="http://schemas.microsoft.com/office/drawing/2014/main" id="{A36D32C2-D7FC-D327-3A0F-52ED5E1EFF81}"/>
+                  </a:ext>
+                </a:extLst>
+              </p:cNvPr>
+              <p:cNvGraphicFramePr>
+                <a:graphicFrameLocks noGrp="1"/>
+              </p:cNvGraphicFramePr>
+              <p:nvPr>
+                <p:extLst>
+                  <p:ext uri="{D42A27DB-BD31-4B8C-83A1-F6EECF244321}">
+                    <p14:modId xmlns:p14="http://schemas.microsoft.com/office/powerpoint/2010/main" val="3976717326"/>
+                  </p:ext>
+                </p:extLst>
+              </p:nvPr>
+            </p:nvGraphicFramePr>
+            <p:xfrm>
+              <a:off x="5791831" y="4714868"/>
+              <a:ext cx="4534540" cy="1310132"/>
+            </p:xfrm>
+            <a:graphic>
+              <a:graphicData uri="http://schemas.openxmlformats.org/drawingml/2006/table">
+                <a:tbl>
+                  <a:tblPr firstRow="1" bandRow="1">
+                    <a:tableStyleId>{2D5ABB26-0587-4C30-8999-92F81FD0307C}</a:tableStyleId>
+                  </a:tblPr>
+                  <a:tblGrid>
+                    <a:gridCol w="2267270">
+                      <a:extLst>
+                        <a:ext uri="{9D8B030D-6E8A-4147-A177-3AD203B41FA5}">
+                          <a16:colId xmlns:a16="http://schemas.microsoft.com/office/drawing/2014/main" val="1134367869"/>
+                        </a:ext>
+                      </a:extLst>
+                    </a:gridCol>
+                    <a:gridCol w="2267270">
+                      <a:extLst>
+                        <a:ext uri="{9D8B030D-6E8A-4147-A177-3AD203B41FA5}">
+                          <a16:colId xmlns:a16="http://schemas.microsoft.com/office/drawing/2014/main" val="1714499800"/>
+                        </a:ext>
+                      </a:extLst>
+                    </a:gridCol>
+                  </a:tblGrid>
+                  <a:tr h="370840">
+                    <a:tc>
+                      <a:txBody>
+                        <a:bodyPr/>
+                        <a:lstStyle/>
+                        <a:p>
+                          <a:pPr marL="0" marR="0" lvl="0" indent="0" algn="ctr" defTabSz="914400" eaLnBrk="1" fontAlgn="auto" latinLnBrk="0" hangingPunct="1">
+                            <a:lnSpc>
+                              <a:spcPct val="100000"/>
+                            </a:lnSpc>
+                            <a:spcBef>
+                              <a:spcPts val="0"/>
+                            </a:spcBef>
+                            <a:spcAft>
+                              <a:spcPts val="0"/>
+                            </a:spcAft>
+                            <a:buClrTx/>
+                            <a:buSzTx/>
+                            <a:buFontTx/>
+                            <a:buNone/>
+                            <a:tabLst/>
+                            <a:defRPr/>
+                          </a:pPr>
+                          <a:r>
+                            <a:rPr kumimoji="1" lang="en-US" altLang="ja-JP" sz="1800" dirty="0">
+                              <a:latin typeface="Arial" panose="020B0604020202020204" pitchFamily="34" charset="0"/>
+                              <a:ea typeface="ＭＳ Ｐゴシック" panose="020B0600070205080204" pitchFamily="50" charset="-128"/>
+                              <a:cs typeface="Arial" panose="020B0604020202020204" pitchFamily="34" charset="0"/>
+                            </a:rPr>
+                            <a:t>Student</a:t>
+                          </a:r>
+                          <a:r>
+                            <a:rPr kumimoji="1" lang="ja-JP" altLang="en-US" sz="1800" dirty="0">
+                              <a:latin typeface="Arial" panose="020B0604020202020204" pitchFamily="34" charset="0"/>
+                              <a:ea typeface="ＭＳ Ｐゴシック" panose="020B0600070205080204" pitchFamily="50" charset="-128"/>
+                              <a:cs typeface="Arial" panose="020B0604020202020204" pitchFamily="34" charset="0"/>
+                            </a:rPr>
+                            <a:t>の</a:t>
+                          </a:r>
+                          <a:r>
+                            <a:rPr kumimoji="1" lang="en-US" altLang="ja-JP" sz="1800" dirty="0">
+                              <a:latin typeface="Arial" panose="020B0604020202020204" pitchFamily="34" charset="0"/>
+                              <a:ea typeface="ＭＳ Ｐゴシック" panose="020B0600070205080204" pitchFamily="50" charset="-128"/>
+                              <a:cs typeface="Arial" panose="020B0604020202020204" pitchFamily="34" charset="0"/>
+                            </a:rPr>
+                            <a:t>t</a:t>
+                          </a:r>
+                          <a:r>
+                            <a:rPr kumimoji="1" lang="ja-JP" altLang="en-US" sz="1800" dirty="0">
+                              <a:latin typeface="Arial" panose="020B0604020202020204" pitchFamily="34" charset="0"/>
+                              <a:ea typeface="ＭＳ Ｐゴシック" panose="020B0600070205080204" pitchFamily="50" charset="-128"/>
+                              <a:cs typeface="Arial" panose="020B0604020202020204" pitchFamily="34" charset="0"/>
+                            </a:rPr>
+                            <a:t>検定</a:t>
+                          </a:r>
+                        </a:p>
+                      </a:txBody>
+                      <a:tcPr>
+                        <a:lnL w="12700" cap="flat" cmpd="sng" algn="ctr">
+                          <a:solidFill>
+                            <a:schemeClr val="tx1"/>
+                          </a:solidFill>
+                          <a:prstDash val="solid"/>
+                          <a:round/>
+                          <a:headEnd type="none" w="med" len="med"/>
+                          <a:tailEnd type="none" w="med" len="med"/>
+                        </a:lnL>
+                        <a:lnT w="12700" cap="flat" cmpd="sng" algn="ctr">
+                          <a:solidFill>
+                            <a:schemeClr val="tx1"/>
+                          </a:solidFill>
+                          <a:prstDash val="solid"/>
+                          <a:round/>
+                          <a:headEnd type="none" w="med" len="med"/>
+                          <a:tailEnd type="none" w="med" len="med"/>
+                        </a:lnT>
+                      </a:tcPr>
+                    </a:tc>
+                    <a:tc>
+                      <a:txBody>
+                        <a:bodyPr/>
+                        <a:lstStyle/>
+                        <a:p>
+                          <a:pPr marL="0" marR="0" lvl="0" indent="0" algn="ctr" defTabSz="914400" eaLnBrk="1" fontAlgn="auto" latinLnBrk="0" hangingPunct="1">
+                            <a:lnSpc>
+                              <a:spcPct val="100000"/>
+                            </a:lnSpc>
+                            <a:spcBef>
+                              <a:spcPts val="0"/>
+                            </a:spcBef>
+                            <a:spcAft>
+                              <a:spcPts val="0"/>
+                            </a:spcAft>
+                            <a:buClrTx/>
+                            <a:buSzTx/>
+                            <a:buFontTx/>
+                            <a:buNone/>
+                            <a:tabLst/>
+                            <a:defRPr/>
+                          </a:pPr>
+                          <a:r>
+                            <a:rPr kumimoji="1" lang="en-US" altLang="ja-JP" sz="1800" dirty="0">
+                              <a:latin typeface="Arial" panose="020B0604020202020204" pitchFamily="34" charset="0"/>
+                              <a:ea typeface="ＭＳ Ｐゴシック" panose="020B0600070205080204" pitchFamily="50" charset="-128"/>
+                              <a:cs typeface="Arial" panose="020B0604020202020204" pitchFamily="34" charset="0"/>
+                            </a:rPr>
+                            <a:t>Welch</a:t>
+                          </a:r>
+                          <a:r>
+                            <a:rPr kumimoji="1" lang="ja-JP" altLang="en-US" sz="1800" dirty="0">
+                              <a:latin typeface="Arial" panose="020B0604020202020204" pitchFamily="34" charset="0"/>
+                              <a:ea typeface="ＭＳ Ｐゴシック" panose="020B0600070205080204" pitchFamily="50" charset="-128"/>
+                              <a:cs typeface="Arial" panose="020B0604020202020204" pitchFamily="34" charset="0"/>
+                            </a:rPr>
+                            <a:t>の</a:t>
+                          </a:r>
+                          <a:r>
+                            <a:rPr kumimoji="1" lang="en-US" altLang="ja-JP" sz="1800" dirty="0">
+                              <a:latin typeface="Arial" panose="020B0604020202020204" pitchFamily="34" charset="0"/>
+                              <a:ea typeface="ＭＳ Ｐゴシック" panose="020B0600070205080204" pitchFamily="50" charset="-128"/>
+                              <a:cs typeface="Arial" panose="020B0604020202020204" pitchFamily="34" charset="0"/>
+                            </a:rPr>
+                            <a:t>t</a:t>
+                          </a:r>
+                          <a:r>
+                            <a:rPr kumimoji="1" lang="ja-JP" altLang="en-US" sz="1800" dirty="0">
+                              <a:latin typeface="Arial" panose="020B0604020202020204" pitchFamily="34" charset="0"/>
+                              <a:ea typeface="ＭＳ Ｐゴシック" panose="020B0600070205080204" pitchFamily="50" charset="-128"/>
+                              <a:cs typeface="Arial" panose="020B0604020202020204" pitchFamily="34" charset="0"/>
+                            </a:rPr>
+                            <a:t>検定</a:t>
+                          </a:r>
+                        </a:p>
+                      </a:txBody>
+                      <a:tcPr>
+                        <a:lnR w="12700" cap="flat" cmpd="sng" algn="ctr">
+                          <a:solidFill>
+                            <a:schemeClr val="tx1"/>
+                          </a:solidFill>
+                          <a:prstDash val="solid"/>
+                          <a:round/>
+                          <a:headEnd type="none" w="med" len="med"/>
+                          <a:tailEnd type="none" w="med" len="med"/>
+                        </a:lnR>
+                        <a:lnT w="12700" cap="flat" cmpd="sng" algn="ctr">
+                          <a:solidFill>
+                            <a:schemeClr val="tx1"/>
+                          </a:solidFill>
+                          <a:prstDash val="solid"/>
+                          <a:round/>
+                          <a:headEnd type="none" w="med" len="med"/>
+                          <a:tailEnd type="none" w="med" len="med"/>
+                        </a:lnT>
+                      </a:tcPr>
+                    </a:tc>
+                    <a:extLst>
+                      <a:ext uri="{0D108BD9-81ED-4DB2-BD59-A6C34878D82A}">
+                        <a16:rowId xmlns:a16="http://schemas.microsoft.com/office/drawing/2014/main" val="1467442495"/>
+                      </a:ext>
+                    </a:extLst>
+                  </a:tr>
+                  <a:tr h="939292">
+                    <a:tc>
+                      <a:txBody>
+                        <a:bodyPr/>
+                        <a:lstStyle/>
+                        <a:p>
+                          <a:endParaRPr lang="ja-JP"/>
+                        </a:p>
+                      </a:txBody>
+                      <a:tcPr>
+                        <a:lnL w="12700" cap="flat" cmpd="sng" algn="ctr">
+                          <a:solidFill>
+                            <a:schemeClr val="tx1"/>
+                          </a:solidFill>
+                          <a:prstDash val="solid"/>
+                          <a:round/>
+                          <a:headEnd type="none" w="med" len="med"/>
+                          <a:tailEnd type="none" w="med" len="med"/>
+                        </a:lnL>
+                        <a:lnB w="12700" cap="flat" cmpd="sng" algn="ctr">
+                          <a:solidFill>
+                            <a:schemeClr val="tx1"/>
+                          </a:solidFill>
+                          <a:prstDash val="solid"/>
+                          <a:round/>
+                          <a:headEnd type="none" w="med" len="med"/>
+                          <a:tailEnd type="none" w="med" len="med"/>
+                        </a:lnB>
+                        <a:blipFill>
+                          <a:blip r:embed="rId5"/>
+                          <a:stretch>
+                            <a:fillRect l="-269" t="-43871" r="-100806" b="-1290"/>
+                          </a:stretch>
+                        </a:blipFill>
+                      </a:tcPr>
+                    </a:tc>
+                    <a:tc>
+                      <a:txBody>
+                        <a:bodyPr/>
+                        <a:lstStyle/>
+                        <a:p>
+                          <a:endParaRPr lang="ja-JP"/>
+                        </a:p>
+                      </a:txBody>
+                      <a:tcPr>
+                        <a:lnR w="12700" cap="flat" cmpd="sng" algn="ctr">
+                          <a:solidFill>
+                            <a:schemeClr val="tx1"/>
+                          </a:solidFill>
+                          <a:prstDash val="solid"/>
+                          <a:round/>
+                          <a:headEnd type="none" w="med" len="med"/>
+                          <a:tailEnd type="none" w="med" len="med"/>
+                        </a:lnR>
+                        <a:lnB w="12700" cap="flat" cmpd="sng" algn="ctr">
+                          <a:solidFill>
+                            <a:schemeClr val="tx1"/>
+                          </a:solidFill>
+                          <a:prstDash val="solid"/>
+                          <a:round/>
+                          <a:headEnd type="none" w="med" len="med"/>
+                          <a:tailEnd type="none" w="med" len="med"/>
+                        </a:lnB>
+                        <a:blipFill>
+                          <a:blip r:embed="rId5"/>
+                          <a:stretch>
+                            <a:fillRect l="-100269" t="-43871" r="-806" b="-1290"/>
+                          </a:stretch>
+                        </a:blipFill>
+                      </a:tcPr>
+                    </a:tc>
+                    <a:extLst>
+                      <a:ext uri="{0D108BD9-81ED-4DB2-BD59-A6C34878D82A}">
+                        <a16:rowId xmlns:a16="http://schemas.microsoft.com/office/drawing/2014/main" val="1647804494"/>
+                      </a:ext>
+                    </a:extLst>
+                  </a:tr>
+                </a:tbl>
+              </a:graphicData>
+            </a:graphic>
+          </p:graphicFrame>
+        </mc:Fallback>
+      </mc:AlternateContent>
+      <mc:AlternateContent xmlns:mc="http://schemas.openxmlformats.org/markup-compatibility/2006">
+        <mc:Choice xmlns:a14="http://schemas.microsoft.com/office/drawing/2010/main" Requires="a14">
+          <p:sp>
+            <p:nvSpPr>
+              <p:cNvPr id="10" name="テキスト ボックス 9">
+                <a:extLst>
+                  <a:ext uri="{FF2B5EF4-FFF2-40B4-BE49-F238E27FC236}">
+                    <a16:creationId xmlns:a16="http://schemas.microsoft.com/office/drawing/2014/main" id="{1A712853-9A45-066E-9001-8201AC4CE169}"/>
+                  </a:ext>
+                </a:extLst>
+              </p:cNvPr>
+              <p:cNvSpPr txBox="1"/>
+              <p:nvPr/>
+            </p:nvSpPr>
+            <p:spPr>
+              <a:xfrm>
+                <a:off x="6007100" y="6025000"/>
+                <a:ext cx="4038600" cy="1221104"/>
+              </a:xfrm>
+              <a:prstGeom prst="rect">
+                <a:avLst/>
+              </a:prstGeom>
+              <a:noFill/>
+            </p:spPr>
+            <p:txBody>
+              <a:bodyPr wrap="square">
+                <a:spAutoFit/>
+              </a:bodyPr>
+              <a:lstStyle/>
+              <a:p>
+                <a:pPr/>
+                <a14:m>
+                  <m:oMath xmlns:m="http://schemas.openxmlformats.org/officeDocument/2006/math">
+                    <m:acc>
+                      <m:accPr>
+                        <m:chr m:val="̅"/>
+                        <m:ctrlPr>
+                          <a:rPr kumimoji="1" lang="en-US" altLang="ja-JP" b="0" i="1" smtClean="0">
+                            <a:latin typeface="Cambria Math" panose="02040503050406030204" pitchFamily="18" charset="0"/>
+                          </a:rPr>
+                        </m:ctrlPr>
+                      </m:accPr>
+                      <m:e>
+                        <m:sSub>
+                          <m:sSubPr>
+                            <m:ctrlPr>
+                              <a:rPr kumimoji="1" lang="en-US" altLang="ja-JP" b="0" i="1" smtClean="0">
+                                <a:latin typeface="Cambria Math" panose="02040503050406030204" pitchFamily="18" charset="0"/>
+                              </a:rPr>
+                            </m:ctrlPr>
+                          </m:sSubPr>
+                          <m:e>
+                            <m:r>
+                              <a:rPr kumimoji="1" lang="en-US" altLang="ja-JP" b="0" i="1" smtClean="0">
+                                <a:latin typeface="Cambria Math" panose="02040503050406030204" pitchFamily="18" charset="0"/>
+                              </a:rPr>
+                              <m:t>𝑥</m:t>
+                            </m:r>
+                          </m:e>
+                          <m:sub>
+                            <m:r>
+                              <a:rPr kumimoji="1" lang="en-US" altLang="ja-JP" b="0" i="1" smtClean="0">
+                                <a:latin typeface="Cambria Math" panose="02040503050406030204" pitchFamily="18" charset="0"/>
+                              </a:rPr>
+                              <m:t>𝑘</m:t>
+                            </m:r>
+                          </m:sub>
+                        </m:sSub>
+                      </m:e>
+                    </m:acc>
+                  </m:oMath>
+                </a14:m>
+                <a:r>
+                  <a:rPr lang="ja-JP" altLang="en-US" dirty="0"/>
+                  <a:t> </a:t>
+                </a:r>
+                <a:r>
+                  <a:rPr lang="en-US" altLang="ja-JP" dirty="0"/>
+                  <a:t>: </a:t>
+                </a:r>
+                <a:r>
+                  <a:rPr lang="ja-JP" altLang="en-US" dirty="0"/>
+                  <a:t>群</a:t>
+                </a:r>
+                <a14:m>
+                  <m:oMath xmlns:m="http://schemas.openxmlformats.org/officeDocument/2006/math">
+                    <m:r>
+                      <a:rPr kumimoji="1" lang="en-US" altLang="ja-JP" b="0" i="1" smtClean="0">
+                        <a:latin typeface="Cambria Math" panose="02040503050406030204" pitchFamily="18" charset="0"/>
+                      </a:rPr>
+                      <m:t>𝑘</m:t>
+                    </m:r>
+                  </m:oMath>
+                </a14:m>
+                <a:r>
+                  <a:rPr lang="ja-JP" altLang="en-US" dirty="0"/>
+                  <a:t>の標本平均</a:t>
+                </a:r>
+                <a:endParaRPr lang="en-US" altLang="ja-JP" dirty="0"/>
+              </a:p>
+              <a:p>
+                <a:pPr/>
+                <a14:m>
+                  <m:oMath xmlns:m="http://schemas.openxmlformats.org/officeDocument/2006/math">
+                    <m:sSub>
+                      <m:sSubPr>
+                        <m:ctrlPr>
+                          <a:rPr kumimoji="1" lang="en-US" altLang="ja-JP" b="0" i="1" smtClean="0">
+                            <a:latin typeface="Cambria Math" panose="02040503050406030204" pitchFamily="18" charset="0"/>
+                          </a:rPr>
+                        </m:ctrlPr>
+                      </m:sSubPr>
+                      <m:e>
+                        <m:r>
+                          <a:rPr kumimoji="1" lang="en-US" altLang="ja-JP" b="0" i="1" smtClean="0">
+                            <a:latin typeface="Cambria Math" panose="02040503050406030204" pitchFamily="18" charset="0"/>
+                          </a:rPr>
+                          <m:t>𝑛</m:t>
+                        </m:r>
+                      </m:e>
+                      <m:sub>
+                        <m:r>
+                          <a:rPr kumimoji="1" lang="en-US" altLang="ja-JP" b="0" i="1" smtClean="0">
+                            <a:latin typeface="Cambria Math" panose="02040503050406030204" pitchFamily="18" charset="0"/>
+                          </a:rPr>
+                          <m:t>𝑘</m:t>
+                        </m:r>
+                      </m:sub>
+                    </m:sSub>
+                  </m:oMath>
+                </a14:m>
+                <a:r>
+                  <a:rPr lang="ja-JP" altLang="en-US" dirty="0"/>
+                  <a:t> </a:t>
+                </a:r>
+                <a:r>
+                  <a:rPr lang="en-US" altLang="ja-JP" dirty="0"/>
+                  <a:t>: </a:t>
+                </a:r>
+                <a:r>
+                  <a:rPr lang="ja-JP" altLang="en-US" dirty="0"/>
+                  <a:t>群</a:t>
+                </a:r>
+                <a14:m>
+                  <m:oMath xmlns:m="http://schemas.openxmlformats.org/officeDocument/2006/math">
+                    <m:r>
+                      <a:rPr kumimoji="1" lang="en-US" altLang="ja-JP" b="0" i="1" smtClean="0">
+                        <a:latin typeface="Cambria Math" panose="02040503050406030204" pitchFamily="18" charset="0"/>
+                      </a:rPr>
+                      <m:t>𝑘</m:t>
+                    </m:r>
+                    <m:r>
+                      <a:rPr kumimoji="1" lang="ja-JP" altLang="en-US" i="1">
+                        <a:latin typeface="Cambria Math" panose="02040503050406030204" pitchFamily="18" charset="0"/>
+                      </a:rPr>
+                      <m:t>の</m:t>
+                    </m:r>
+                  </m:oMath>
+                </a14:m>
+                <a:r>
+                  <a:rPr lang="ja-JP" altLang="en-US" dirty="0"/>
+                  <a:t>標本数</a:t>
+                </a:r>
+                <a:endParaRPr lang="en-US" altLang="ja-JP" dirty="0"/>
+              </a:p>
+              <a:p>
+                <a:pPr/>
+                <a14:m>
+                  <m:oMath xmlns:m="http://schemas.openxmlformats.org/officeDocument/2006/math">
+                    <m:r>
+                      <a:rPr kumimoji="1" lang="en-US" altLang="ja-JP" b="0" i="1" smtClean="0">
+                        <a:latin typeface="Cambria Math" panose="02040503050406030204" pitchFamily="18" charset="0"/>
+                      </a:rPr>
+                      <m:t>𝑠</m:t>
+                    </m:r>
+                    <m:r>
+                      <a:rPr kumimoji="1" lang="en-US" altLang="ja-JP" b="0" i="1" smtClean="0">
+                        <a:latin typeface="Cambria Math" panose="02040503050406030204" pitchFamily="18" charset="0"/>
+                      </a:rPr>
+                      <m:t> </m:t>
+                    </m:r>
+                  </m:oMath>
+                </a14:m>
+                <a:r>
+                  <a:rPr lang="en-US" altLang="ja-JP" dirty="0"/>
+                  <a:t>:</a:t>
+                </a:r>
+                <a:r>
+                  <a:rPr lang="ja-JP" altLang="en-US" dirty="0"/>
+                  <a:t>プールされた標本標準偏差</a:t>
+                </a:r>
+                <a:endParaRPr lang="en-US" altLang="ja-JP" dirty="0"/>
+              </a:p>
+              <a:p>
+                <a:pPr/>
+                <a14:m>
+                  <m:oMath xmlns:m="http://schemas.openxmlformats.org/officeDocument/2006/math">
+                    <m:sSub>
+                      <m:sSubPr>
+                        <m:ctrlPr>
+                          <a:rPr kumimoji="1" lang="en-US" altLang="ja-JP" b="0" i="1" smtClean="0">
+                            <a:latin typeface="Cambria Math" panose="02040503050406030204" pitchFamily="18" charset="0"/>
+                          </a:rPr>
+                        </m:ctrlPr>
+                      </m:sSubPr>
+                      <m:e>
+                        <m:r>
+                          <a:rPr kumimoji="1" lang="en-US" altLang="ja-JP" b="0" i="1" smtClean="0">
+                            <a:latin typeface="Cambria Math" panose="02040503050406030204" pitchFamily="18" charset="0"/>
+                          </a:rPr>
+                          <m:t>𝑠</m:t>
+                        </m:r>
+                      </m:e>
+                      <m:sub>
+                        <m:r>
+                          <a:rPr kumimoji="1" lang="en-US" altLang="ja-JP" b="0" i="1" smtClean="0">
+                            <a:latin typeface="Cambria Math" panose="02040503050406030204" pitchFamily="18" charset="0"/>
+                          </a:rPr>
+                          <m:t>𝑘</m:t>
+                        </m:r>
+                      </m:sub>
+                    </m:sSub>
+                  </m:oMath>
+                </a14:m>
+                <a:r>
+                  <a:rPr lang="en-US" altLang="ja-JP" dirty="0"/>
+                  <a:t> : </a:t>
+                </a:r>
+                <a:r>
+                  <a:rPr lang="ja-JP" altLang="en-US" dirty="0"/>
+                  <a:t>群</a:t>
+                </a:r>
+                <a14:m>
+                  <m:oMath xmlns:m="http://schemas.openxmlformats.org/officeDocument/2006/math">
+                    <m:r>
+                      <a:rPr kumimoji="1" lang="en-US" altLang="ja-JP" b="0" i="1" smtClean="0">
+                        <a:latin typeface="Cambria Math" panose="02040503050406030204" pitchFamily="18" charset="0"/>
+                      </a:rPr>
+                      <m:t>𝑘</m:t>
+                    </m:r>
+                  </m:oMath>
+                </a14:m>
+                <a:r>
+                  <a:rPr lang="ja-JP" altLang="en-US" dirty="0"/>
+                  <a:t>の標本標準偏差</a:t>
+                </a:r>
+              </a:p>
+            </p:txBody>
+          </p:sp>
+        </mc:Choice>
+        <mc:Fallback>
+          <p:sp>
+            <p:nvSpPr>
+              <p:cNvPr id="10" name="テキスト ボックス 9">
+                <a:extLst>
+                  <a:ext uri="{FF2B5EF4-FFF2-40B4-BE49-F238E27FC236}">
+                    <a16:creationId xmlns:a16="http://schemas.microsoft.com/office/drawing/2014/main" id="{1A712853-9A45-066E-9001-8201AC4CE169}"/>
+                  </a:ext>
+                </a:extLst>
+              </p:cNvPr>
+              <p:cNvSpPr txBox="1">
+                <a:spLocks noRot="1" noChangeAspect="1" noMove="1" noResize="1" noEditPoints="1" noAdjustHandles="1" noChangeArrowheads="1" noChangeShapeType="1" noTextEdit="1"/>
+              </p:cNvSpPr>
+              <p:nvPr/>
+            </p:nvSpPr>
+            <p:spPr>
+              <a:xfrm>
+                <a:off x="6007100" y="6025000"/>
+                <a:ext cx="4038600" cy="1221104"/>
+              </a:xfrm>
+              <a:prstGeom prst="rect">
+                <a:avLst/>
+              </a:prstGeom>
+              <a:blipFill>
+                <a:blip r:embed="rId6"/>
+                <a:stretch>
+                  <a:fillRect t="-3483" b="-5473"/>
+                </a:stretch>
+              </a:blipFill>
+            </p:spPr>
+            <p:txBody>
+              <a:bodyPr/>
+              <a:lstStyle/>
+              <a:p>
+                <a:r>
+                  <a:rPr lang="ja-JP" altLang="en-US">
+                    <a:noFill/>
+                  </a:rPr>
+                  <a:t> </a:t>
+                </a:r>
+              </a:p>
+            </p:txBody>
+          </p:sp>
+        </mc:Fallback>
+      </mc:AlternateContent>
     </p:spTree>
     <p:extLst>
       <p:ext uri="{BB962C8B-B14F-4D97-AF65-F5344CB8AC3E}">
@@ -9343,7 +11071,7 @@
               <a:rPr kumimoji="1" lang="en-US" altLang="ja-JP" smtClean="0"/>
               <a:t>9</a:t>
             </a:fld>
-            <a:endParaRPr kumimoji="1" lang="en-US" altLang="ja-JP"/>
+            <a:endParaRPr kumimoji="1" lang="en-US" altLang="ja-JP" dirty="0"/>
           </a:p>
         </p:txBody>
       </p:sp>
@@ -9376,7 +11104,7 @@
           <a:lstStyle/>
           <a:p>
             <a:r>
-              <a:rPr lang="ja-JP" altLang="en-US" sz="2400">
+              <a:rPr lang="ja-JP" altLang="en-US" sz="2400" dirty="0">
                 <a:latin typeface="Arial" panose="020B0604020202020204" pitchFamily="34" charset="0"/>
                 <a:ea typeface="ＭＳ Ｐゴシック" panose="020B0600070205080204" pitchFamily="50" charset="-128"/>
                 <a:cs typeface="Arial" panose="020B0604020202020204" pitchFamily="34" charset="0"/>
@@ -9384,7 +11112,7 @@
               <a:t>母集団分布の明確な仮定が置けないけど，</a:t>
             </a:r>
             <a:r>
-              <a:rPr kumimoji="1" lang="ja-JP" altLang="en-US" sz="2400">
+              <a:rPr kumimoji="1" lang="ja-JP" altLang="en-US" sz="2400" dirty="0">
                 <a:latin typeface="Arial" panose="020B0604020202020204" pitchFamily="34" charset="0"/>
                 <a:ea typeface="ＭＳ Ｐゴシック" panose="020B0600070205080204" pitchFamily="50" charset="-128"/>
                 <a:cs typeface="Arial" panose="020B0604020202020204" pitchFamily="34" charset="0"/>
@@ -9392,7 +11120,7 @@
               <a:t>何とか母数の推論をしたい</a:t>
             </a:r>
             <a:r>
-              <a:rPr kumimoji="1" lang="en-US" altLang="ja-JP" sz="2400">
+              <a:rPr kumimoji="1" lang="en-US" altLang="ja-JP" sz="2400" dirty="0">
                 <a:latin typeface="Arial" panose="020B0604020202020204" pitchFamily="34" charset="0"/>
                 <a:ea typeface="ＭＳ Ｐゴシック" panose="020B0600070205080204" pitchFamily="50" charset="-128"/>
                 <a:cs typeface="Arial" panose="020B0604020202020204" pitchFamily="34" charset="0"/>
@@ -9401,7 +11129,7 @@
             </a:r>
           </a:p>
           <a:p>
-            <a:endParaRPr lang="en-US" altLang="ja-JP" sz="2400">
+            <a:endParaRPr lang="en-US" altLang="ja-JP" sz="2400" dirty="0">
               <a:latin typeface="Arial" panose="020B0604020202020204" pitchFamily="34" charset="0"/>
               <a:ea typeface="ＭＳ Ｐゴシック" panose="020B0600070205080204" pitchFamily="50" charset="-128"/>
               <a:cs typeface="Arial" panose="020B0604020202020204" pitchFamily="34" charset="0"/>
@@ -9409,7 +11137,7 @@
           </a:p>
           <a:p>
             <a:r>
-              <a:rPr lang="ja-JP" altLang="en-US" sz="2400">
+              <a:rPr lang="ja-JP" altLang="en-US" sz="2400" dirty="0">
                 <a:latin typeface="Arial" panose="020B0604020202020204" pitchFamily="34" charset="0"/>
                 <a:ea typeface="ＭＳ Ｐゴシック" panose="020B0600070205080204" pitchFamily="50" charset="-128"/>
                 <a:cs typeface="Arial" panose="020B0604020202020204" pitchFamily="34" charset="0"/>
@@ -9417,7 +11145,7 @@
               <a:t>平均値の</a:t>
             </a:r>
             <a:r>
-              <a:rPr lang="en-US" altLang="ja-JP" sz="2400">
+              <a:rPr lang="en-US" altLang="ja-JP" sz="2400" dirty="0">
                 <a:latin typeface="Arial" panose="020B0604020202020204" pitchFamily="34" charset="0"/>
                 <a:ea typeface="ＭＳ Ｐゴシック" panose="020B0600070205080204" pitchFamily="50" charset="-128"/>
                 <a:cs typeface="Arial" panose="020B0604020202020204" pitchFamily="34" charset="0"/>
@@ -9425,14 +11153,14 @@
               <a:t>95%</a:t>
             </a:r>
             <a:r>
-              <a:rPr lang="ja-JP" altLang="en-US" sz="2400">
+              <a:rPr lang="ja-JP" altLang="en-US" sz="2400" dirty="0">
                 <a:latin typeface="Arial" panose="020B0604020202020204" pitchFamily="34" charset="0"/>
                 <a:ea typeface="ＭＳ Ｐゴシック" panose="020B0600070205080204" pitchFamily="50" charset="-128"/>
                 <a:cs typeface="Arial" panose="020B0604020202020204" pitchFamily="34" charset="0"/>
               </a:rPr>
               <a:t>信頼区間を求める．</a:t>
             </a:r>
-            <a:endParaRPr lang="en-US" altLang="ja-JP" sz="2400">
+            <a:endParaRPr lang="en-US" altLang="ja-JP" sz="2400" dirty="0">
               <a:latin typeface="Arial" panose="020B0604020202020204" pitchFamily="34" charset="0"/>
               <a:ea typeface="ＭＳ Ｐゴシック" panose="020B0600070205080204" pitchFamily="50" charset="-128"/>
               <a:cs typeface="Arial" panose="020B0604020202020204" pitchFamily="34" charset="0"/>
@@ -9444,7 +11172,7 @@
               <a:buAutoNum type="circleNumDbPlain"/>
             </a:pPr>
             <a:r>
-              <a:rPr kumimoji="1" lang="ja-JP" altLang="en-US" sz="2000">
+              <a:rPr kumimoji="1" lang="ja-JP" altLang="en-US" sz="2000" dirty="0">
                 <a:latin typeface="Arial" panose="020B0604020202020204" pitchFamily="34" charset="0"/>
                 <a:ea typeface="ＭＳ Ｐゴシック" panose="020B0600070205080204" pitchFamily="50" charset="-128"/>
                 <a:cs typeface="Arial" panose="020B0604020202020204" pitchFamily="34" charset="0"/>
@@ -9452,7 +11180,7 @@
               <a:t>サンプルサイズ</a:t>
             </a:r>
             <a:r>
-              <a:rPr kumimoji="1" lang="en-US" altLang="ja-JP" sz="2000">
+              <a:rPr kumimoji="1" lang="en-US" altLang="ja-JP" sz="2000" dirty="0">
                 <a:latin typeface="Arial" panose="020B0604020202020204" pitchFamily="34" charset="0"/>
                 <a:ea typeface="ＭＳ Ｐゴシック" panose="020B0600070205080204" pitchFamily="50" charset="-128"/>
                 <a:cs typeface="Arial" panose="020B0604020202020204" pitchFamily="34" charset="0"/>
@@ -9460,7 +11188,7 @@
               <a:t>n</a:t>
             </a:r>
             <a:r>
-              <a:rPr kumimoji="1" lang="ja-JP" altLang="en-US" sz="2000">
+              <a:rPr kumimoji="1" lang="ja-JP" altLang="en-US" sz="2000" dirty="0">
                 <a:latin typeface="Arial" panose="020B0604020202020204" pitchFamily="34" charset="0"/>
                 <a:ea typeface="ＭＳ Ｐゴシック" panose="020B0600070205080204" pitchFamily="50" charset="-128"/>
                 <a:cs typeface="Arial" panose="020B0604020202020204" pitchFamily="34" charset="0"/>
@@ -9468,7 +11196,7 @@
               <a:t>の標本実現値から，</a:t>
             </a:r>
             <a:r>
-              <a:rPr kumimoji="1" lang="en-US" altLang="ja-JP" sz="2000">
+              <a:rPr kumimoji="1" lang="en-US" altLang="ja-JP" sz="2000" dirty="0">
                 <a:latin typeface="Arial" panose="020B0604020202020204" pitchFamily="34" charset="0"/>
                 <a:ea typeface="ＭＳ Ｐゴシック" panose="020B0600070205080204" pitchFamily="50" charset="-128"/>
                 <a:cs typeface="Arial" panose="020B0604020202020204" pitchFamily="34" charset="0"/>
@@ -9476,7 +11204,7 @@
               <a:t>n</a:t>
             </a:r>
             <a:r>
-              <a:rPr kumimoji="1" lang="ja-JP" altLang="en-US" sz="2000">
+              <a:rPr kumimoji="1" lang="ja-JP" altLang="en-US" sz="2000" dirty="0">
                 <a:latin typeface="Arial" panose="020B0604020202020204" pitchFamily="34" charset="0"/>
                 <a:ea typeface="ＭＳ Ｐゴシック" panose="020B0600070205080204" pitchFamily="50" charset="-128"/>
                 <a:cs typeface="Arial" panose="020B0604020202020204" pitchFamily="34" charset="0"/>
@@ -9484,14 +11212,14 @@
               <a:t>個の実現値を復元抽出</a:t>
             </a:r>
             <a:r>
-              <a:rPr lang="ja-JP" altLang="en-US" sz="2000">
+              <a:rPr lang="ja-JP" altLang="en-US" sz="2000" dirty="0">
                 <a:latin typeface="Arial" panose="020B0604020202020204" pitchFamily="34" charset="0"/>
                 <a:ea typeface="ＭＳ Ｐゴシック" panose="020B0600070205080204" pitchFamily="50" charset="-128"/>
                 <a:cs typeface="Arial" panose="020B0604020202020204" pitchFamily="34" charset="0"/>
               </a:rPr>
               <a:t>し，平均値を計算．</a:t>
             </a:r>
-            <a:endParaRPr lang="en-US" altLang="ja-JP" sz="2000">
+            <a:endParaRPr lang="en-US" altLang="ja-JP" sz="2000" dirty="0">
               <a:latin typeface="Arial" panose="020B0604020202020204" pitchFamily="34" charset="0"/>
               <a:ea typeface="ＭＳ Ｐゴシック" panose="020B0600070205080204" pitchFamily="50" charset="-128"/>
               <a:cs typeface="Arial" panose="020B0604020202020204" pitchFamily="34" charset="0"/>
@@ -9503,7 +11231,7 @@
               <a:buAutoNum type="circleNumDbPlain"/>
             </a:pPr>
             <a:r>
-              <a:rPr kumimoji="1" lang="ja-JP" altLang="en-US" sz="2000">
+              <a:rPr kumimoji="1" lang="ja-JP" altLang="en-US" sz="2000" dirty="0">
                 <a:latin typeface="Arial" panose="020B0604020202020204" pitchFamily="34" charset="0"/>
                 <a:ea typeface="ＭＳ Ｐゴシック" panose="020B0600070205080204" pitchFamily="50" charset="-128"/>
                 <a:cs typeface="Arial" panose="020B0604020202020204" pitchFamily="34" charset="0"/>
@@ -9511,7 +11239,7 @@
               <a:t>①を</a:t>
             </a:r>
             <a:r>
-              <a:rPr kumimoji="1" lang="en-US" altLang="ja-JP" sz="2000">
+              <a:rPr kumimoji="1" lang="en-US" altLang="ja-JP" sz="2000" dirty="0">
                 <a:latin typeface="Arial" panose="020B0604020202020204" pitchFamily="34" charset="0"/>
                 <a:ea typeface="ＭＳ Ｐゴシック" panose="020B0600070205080204" pitchFamily="50" charset="-128"/>
                 <a:cs typeface="Arial" panose="020B0604020202020204" pitchFamily="34" charset="0"/>
@@ -9519,7 +11247,7 @@
               <a:t>B</a:t>
             </a:r>
             <a:r>
-              <a:rPr kumimoji="1" lang="ja-JP" altLang="en-US" sz="2000">
+              <a:rPr kumimoji="1" lang="ja-JP" altLang="en-US" sz="2000" dirty="0">
                 <a:latin typeface="Arial" panose="020B0604020202020204" pitchFamily="34" charset="0"/>
                 <a:ea typeface="ＭＳ Ｐゴシック" panose="020B0600070205080204" pitchFamily="50" charset="-128"/>
                 <a:cs typeface="Arial" panose="020B0604020202020204" pitchFamily="34" charset="0"/>
@@ -9527,14 +11255,14 @@
               <a:t>回（ブートブートストラップ標本数）繰り返す</a:t>
             </a:r>
             <a:r>
-              <a:rPr lang="ja-JP" altLang="en-US" sz="2000">
+              <a:rPr lang="ja-JP" altLang="en-US" sz="2000" dirty="0">
                 <a:latin typeface="Arial" panose="020B0604020202020204" pitchFamily="34" charset="0"/>
                 <a:ea typeface="ＭＳ Ｐゴシック" panose="020B0600070205080204" pitchFamily="50" charset="-128"/>
                 <a:cs typeface="Arial" panose="020B0604020202020204" pitchFamily="34" charset="0"/>
               </a:rPr>
               <a:t>．</a:t>
             </a:r>
-            <a:endParaRPr kumimoji="1" lang="en-US" altLang="ja-JP" sz="2000">
+            <a:endParaRPr kumimoji="1" lang="en-US" altLang="ja-JP" sz="2000" dirty="0">
               <a:latin typeface="Arial" panose="020B0604020202020204" pitchFamily="34" charset="0"/>
               <a:ea typeface="ＭＳ Ｐゴシック" panose="020B0600070205080204" pitchFamily="50" charset="-128"/>
               <a:cs typeface="Arial" panose="020B0604020202020204" pitchFamily="34" charset="0"/>
@@ -9546,7 +11274,7 @@
               <a:buAutoNum type="circleNumDbPlain"/>
             </a:pPr>
             <a:r>
-              <a:rPr lang="ja-JP" altLang="en-US" sz="2000">
+              <a:rPr lang="ja-JP" altLang="en-US" sz="2000" dirty="0">
                 <a:latin typeface="Arial" panose="020B0604020202020204" pitchFamily="34" charset="0"/>
                 <a:ea typeface="ＭＳ Ｐゴシック" panose="020B0600070205080204" pitchFamily="50" charset="-128"/>
                 <a:cs typeface="Arial" panose="020B0604020202020204" pitchFamily="34" charset="0"/>
@@ -9554,7 +11282,7 @@
               <a:t>得られた平均値の分布から</a:t>
             </a:r>
             <a:r>
-              <a:rPr lang="en-US" altLang="ja-JP" sz="2000">
+              <a:rPr lang="en-US" altLang="ja-JP" sz="2000" dirty="0">
                 <a:latin typeface="Arial" panose="020B0604020202020204" pitchFamily="34" charset="0"/>
                 <a:ea typeface="ＭＳ Ｐゴシック" panose="020B0600070205080204" pitchFamily="50" charset="-128"/>
                 <a:cs typeface="Arial" panose="020B0604020202020204" pitchFamily="34" charset="0"/>
@@ -9562,14 +11290,14 @@
               <a:t>95%</a:t>
             </a:r>
             <a:r>
-              <a:rPr lang="ja-JP" altLang="en-US" sz="2000">
+              <a:rPr lang="ja-JP" altLang="en-US" sz="2000" dirty="0">
                 <a:latin typeface="Arial" panose="020B0604020202020204" pitchFamily="34" charset="0"/>
                 <a:ea typeface="ＭＳ Ｐゴシック" panose="020B0600070205080204" pitchFamily="50" charset="-128"/>
                 <a:cs typeface="Arial" panose="020B0604020202020204" pitchFamily="34" charset="0"/>
               </a:rPr>
               <a:t>信頼区間を算出する．</a:t>
             </a:r>
-            <a:endParaRPr lang="en-US" altLang="ja-JP" sz="2000">
+            <a:endParaRPr lang="en-US" altLang="ja-JP" sz="2000" dirty="0">
               <a:latin typeface="Arial" panose="020B0604020202020204" pitchFamily="34" charset="0"/>
               <a:ea typeface="ＭＳ Ｐゴシック" panose="020B0600070205080204" pitchFamily="50" charset="-128"/>
               <a:cs typeface="Arial" panose="020B0604020202020204" pitchFamily="34" charset="0"/>
@@ -9577,7 +11305,7 @@
           </a:p>
           <a:p>
             <a:r>
-              <a:rPr lang="ja-JP" altLang="en-US" sz="2000">
+              <a:rPr lang="ja-JP" altLang="en-US" sz="2000" dirty="0">
                 <a:latin typeface="Arial" panose="020B0604020202020204" pitchFamily="34" charset="0"/>
                 <a:ea typeface="ＭＳ Ｐゴシック" panose="020B0600070205080204" pitchFamily="50" charset="-128"/>
                 <a:cs typeface="Arial" panose="020B0604020202020204" pitchFamily="34" charset="0"/>
@@ -9585,7 +11313,7 @@
               <a:t>昇順に並べ，</a:t>
             </a:r>
             <a:r>
-              <a:rPr lang="en-US" altLang="ja-JP" sz="2000">
+              <a:rPr lang="en-US" altLang="ja-JP" sz="2000" dirty="0">
                 <a:latin typeface="Arial" panose="020B0604020202020204" pitchFamily="34" charset="0"/>
                 <a:ea typeface="ＭＳ Ｐゴシック" panose="020B0600070205080204" pitchFamily="50" charset="-128"/>
                 <a:cs typeface="Arial" panose="020B0604020202020204" pitchFamily="34" charset="0"/>
@@ -9593,7 +11321,7 @@
               <a:t>2.5</a:t>
             </a:r>
             <a:r>
-              <a:rPr lang="ja-JP" altLang="en-US" sz="2000">
+              <a:rPr lang="ja-JP" altLang="en-US" sz="2000" dirty="0">
                 <a:latin typeface="Arial" panose="020B0604020202020204" pitchFamily="34" charset="0"/>
                 <a:ea typeface="ＭＳ Ｐゴシック" panose="020B0600070205080204" pitchFamily="50" charset="-128"/>
                 <a:cs typeface="Arial" panose="020B0604020202020204" pitchFamily="34" charset="0"/>
@@ -9601,7 +11329,7 @@
               <a:t>パーセンタイルと</a:t>
             </a:r>
             <a:r>
-              <a:rPr lang="en-US" altLang="ja-JP" sz="2000">
+              <a:rPr lang="en-US" altLang="ja-JP" sz="2000" dirty="0">
                 <a:latin typeface="Arial" panose="020B0604020202020204" pitchFamily="34" charset="0"/>
                 <a:ea typeface="ＭＳ Ｐゴシック" panose="020B0600070205080204" pitchFamily="50" charset="-128"/>
                 <a:cs typeface="Arial" panose="020B0604020202020204" pitchFamily="34" charset="0"/>
@@ -9609,7 +11337,7 @@
               <a:t>97.5</a:t>
             </a:r>
             <a:r>
-              <a:rPr lang="ja-JP" altLang="en-US" sz="2000">
+              <a:rPr lang="ja-JP" altLang="en-US" sz="2000" dirty="0">
                 <a:latin typeface="Arial" panose="020B0604020202020204" pitchFamily="34" charset="0"/>
                 <a:ea typeface="ＭＳ Ｐゴシック" panose="020B0600070205080204" pitchFamily="50" charset="-128"/>
                 <a:cs typeface="Arial" panose="020B0604020202020204" pitchFamily="34" charset="0"/>
@@ -9617,7 +11345,7 @@
               <a:t>パーセンタイルの値を</a:t>
             </a:r>
             <a:r>
-              <a:rPr lang="en-US" altLang="ja-JP" sz="2000">
+              <a:rPr lang="en-US" altLang="ja-JP" sz="2000" dirty="0">
                 <a:latin typeface="Arial" panose="020B0604020202020204" pitchFamily="34" charset="0"/>
                 <a:ea typeface="ＭＳ Ｐゴシック" panose="020B0600070205080204" pitchFamily="50" charset="-128"/>
                 <a:cs typeface="Arial" panose="020B0604020202020204" pitchFamily="34" charset="0"/>
@@ -9625,14 +11353,14 @@
               <a:t>95%</a:t>
             </a:r>
             <a:r>
-              <a:rPr lang="ja-JP" altLang="en-US" sz="2000">
+              <a:rPr lang="ja-JP" altLang="en-US" sz="2000" dirty="0">
                 <a:latin typeface="Arial" panose="020B0604020202020204" pitchFamily="34" charset="0"/>
                 <a:ea typeface="ＭＳ Ｐゴシック" panose="020B0600070205080204" pitchFamily="50" charset="-128"/>
                 <a:cs typeface="Arial" panose="020B0604020202020204" pitchFamily="34" charset="0"/>
               </a:rPr>
               <a:t>信頼区間の下限と上限とする．</a:t>
             </a:r>
-            <a:endParaRPr kumimoji="1" lang="ja-JP" altLang="en-US" sz="2000">
+            <a:endParaRPr kumimoji="1" lang="ja-JP" altLang="en-US" sz="2000" dirty="0">
               <a:latin typeface="Arial" panose="020B0604020202020204" pitchFamily="34" charset="0"/>
               <a:ea typeface="ＭＳ Ｐゴシック" panose="020B0600070205080204" pitchFamily="50" charset="-128"/>
               <a:cs typeface="Arial" panose="020B0604020202020204" pitchFamily="34" charset="0"/>
@@ -9793,13 +11521,13 @@
                 <a:p>
                   <a:pPr algn="ctr"/>
                   <a:r>
-                    <a:rPr kumimoji="1" lang="en-US" altLang="ja-JP">
+                    <a:rPr kumimoji="1" lang="en-US" altLang="ja-JP" dirty="0">
                       <a:latin typeface="Arial" panose="020B0604020202020204" pitchFamily="34" charset="0"/>
                       <a:cs typeface="Arial" panose="020B0604020202020204" pitchFamily="34" charset="0"/>
                     </a:rPr>
                     <a:t>1</a:t>
                   </a:r>
-                  <a:endParaRPr kumimoji="1" lang="ja-JP" altLang="en-US">
+                  <a:endParaRPr kumimoji="1" lang="ja-JP" altLang="en-US" dirty="0">
                     <a:latin typeface="Arial" panose="020B0604020202020204" pitchFamily="34" charset="0"/>
                     <a:cs typeface="Arial" panose="020B0604020202020204" pitchFamily="34" charset="0"/>
                   </a:endParaRPr>
@@ -9849,13 +11577,13 @@
                 <a:p>
                   <a:pPr algn="ctr"/>
                   <a:r>
-                    <a:rPr kumimoji="1" lang="en-US" altLang="ja-JP">
+                    <a:rPr kumimoji="1" lang="en-US" altLang="ja-JP" dirty="0">
                       <a:latin typeface="Arial" panose="020B0604020202020204" pitchFamily="34" charset="0"/>
                       <a:cs typeface="Arial" panose="020B0604020202020204" pitchFamily="34" charset="0"/>
                     </a:rPr>
                     <a:t>2</a:t>
                   </a:r>
-                  <a:endParaRPr kumimoji="1" lang="ja-JP" altLang="en-US">
+                  <a:endParaRPr kumimoji="1" lang="ja-JP" altLang="en-US" dirty="0">
                     <a:latin typeface="Arial" panose="020B0604020202020204" pitchFamily="34" charset="0"/>
                     <a:cs typeface="Arial" panose="020B0604020202020204" pitchFamily="34" charset="0"/>
                   </a:endParaRPr>
@@ -9905,13 +11633,13 @@
                 <a:p>
                   <a:pPr algn="ctr"/>
                   <a:r>
-                    <a:rPr kumimoji="1" lang="en-US" altLang="ja-JP">
+                    <a:rPr kumimoji="1" lang="en-US" altLang="ja-JP" dirty="0">
                       <a:latin typeface="Arial" panose="020B0604020202020204" pitchFamily="34" charset="0"/>
                       <a:cs typeface="Arial" panose="020B0604020202020204" pitchFamily="34" charset="0"/>
                     </a:rPr>
                     <a:t>3</a:t>
                   </a:r>
-                  <a:endParaRPr kumimoji="1" lang="ja-JP" altLang="en-US">
+                  <a:endParaRPr kumimoji="1" lang="ja-JP" altLang="en-US" dirty="0">
                     <a:latin typeface="Arial" panose="020B0604020202020204" pitchFamily="34" charset="0"/>
                     <a:cs typeface="Arial" panose="020B0604020202020204" pitchFamily="34" charset="0"/>
                   </a:endParaRPr>
@@ -9961,13 +11689,13 @@
                 <a:p>
                   <a:pPr algn="ctr"/>
                   <a:r>
-                    <a:rPr kumimoji="1" lang="en-US" altLang="ja-JP">
+                    <a:rPr kumimoji="1" lang="en-US" altLang="ja-JP" dirty="0">
                       <a:latin typeface="Arial" panose="020B0604020202020204" pitchFamily="34" charset="0"/>
                       <a:cs typeface="Arial" panose="020B0604020202020204" pitchFamily="34" charset="0"/>
                     </a:rPr>
                     <a:t>4</a:t>
                   </a:r>
-                  <a:endParaRPr kumimoji="1" lang="ja-JP" altLang="en-US">
+                  <a:endParaRPr kumimoji="1" lang="ja-JP" altLang="en-US" dirty="0">
                     <a:latin typeface="Arial" panose="020B0604020202020204" pitchFamily="34" charset="0"/>
                     <a:cs typeface="Arial" panose="020B0604020202020204" pitchFamily="34" charset="0"/>
                   </a:endParaRPr>
@@ -10017,13 +11745,13 @@
                 <a:p>
                   <a:pPr algn="ctr"/>
                   <a:r>
-                    <a:rPr lang="en-US" altLang="ja-JP">
+                    <a:rPr lang="en-US" altLang="ja-JP" dirty="0">
                       <a:latin typeface="Arial" panose="020B0604020202020204" pitchFamily="34" charset="0"/>
                       <a:cs typeface="Arial" panose="020B0604020202020204" pitchFamily="34" charset="0"/>
                     </a:rPr>
                     <a:t>5</a:t>
                   </a:r>
-                  <a:endParaRPr kumimoji="1" lang="ja-JP" altLang="en-US">
+                  <a:endParaRPr kumimoji="1" lang="ja-JP" altLang="en-US" dirty="0">
                     <a:latin typeface="Arial" panose="020B0604020202020204" pitchFamily="34" charset="0"/>
                     <a:cs typeface="Arial" panose="020B0604020202020204" pitchFamily="34" charset="0"/>
                   </a:endParaRPr>
@@ -10062,7 +11790,7 @@
             <a:p>
               <a:pPr algn="ctr"/>
               <a:r>
-                <a:rPr lang="ja-JP" altLang="en-US" sz="1200">
+                <a:rPr lang="ja-JP" altLang="en-US" sz="1200" dirty="0">
                   <a:latin typeface="Arial" panose="020B0604020202020204" pitchFamily="34" charset="0"/>
                   <a:ea typeface="ＭＳ ゴシック" panose="020B0609070205080204" pitchFamily="49" charset="-128"/>
                   <a:cs typeface="Arial" panose="020B0604020202020204" pitchFamily="34" charset="0"/>
@@ -10070,7 +11798,7 @@
                 <a:t>サンプルサイズ</a:t>
               </a:r>
               <a:r>
-                <a:rPr lang="en-US" altLang="ja-JP" sz="1200">
+                <a:rPr lang="en-US" altLang="ja-JP" sz="1200" dirty="0">
                   <a:latin typeface="Arial" panose="020B0604020202020204" pitchFamily="34" charset="0"/>
                   <a:ea typeface="ＭＳ ゴシック" panose="020B0609070205080204" pitchFamily="49" charset="-128"/>
                   <a:cs typeface="Arial" panose="020B0604020202020204" pitchFamily="34" charset="0"/>
@@ -10078,14 +11806,14 @@
                 <a:t>5</a:t>
               </a:r>
               <a:r>
-                <a:rPr lang="ja-JP" altLang="en-US" sz="1200">
+                <a:rPr lang="ja-JP" altLang="en-US" sz="1200" dirty="0">
                   <a:latin typeface="Arial" panose="020B0604020202020204" pitchFamily="34" charset="0"/>
                   <a:ea typeface="ＭＳ ゴシック" panose="020B0609070205080204" pitchFamily="49" charset="-128"/>
                   <a:cs typeface="Arial" panose="020B0604020202020204" pitchFamily="34" charset="0"/>
                 </a:rPr>
                 <a:t>の</a:t>
               </a:r>
-              <a:endParaRPr lang="en-US" altLang="ja-JP" sz="1200">
+              <a:endParaRPr lang="en-US" altLang="ja-JP" sz="1200" dirty="0">
                 <a:latin typeface="Arial" panose="020B0604020202020204" pitchFamily="34" charset="0"/>
                 <a:ea typeface="ＭＳ ゴシック" panose="020B0609070205080204" pitchFamily="49" charset="-128"/>
                 <a:cs typeface="Arial" panose="020B0604020202020204" pitchFamily="34" charset="0"/>
@@ -10094,7 +11822,7 @@
             <a:p>
               <a:pPr algn="ctr"/>
               <a:r>
-                <a:rPr lang="ja-JP" altLang="en-US" sz="1200">
+                <a:rPr lang="ja-JP" altLang="en-US" sz="1200" dirty="0">
                   <a:latin typeface="Arial" panose="020B0604020202020204" pitchFamily="34" charset="0"/>
                   <a:ea typeface="ＭＳ ゴシック" panose="020B0609070205080204" pitchFamily="49" charset="-128"/>
                   <a:cs typeface="Arial" panose="020B0604020202020204" pitchFamily="34" charset="0"/>
@@ -10328,13 +12056,13 @@
                   <a:p>
                     <a:pPr algn="ctr"/>
                     <a:r>
-                      <a:rPr kumimoji="1" lang="en-US" altLang="ja-JP">
+                      <a:rPr kumimoji="1" lang="en-US" altLang="ja-JP" dirty="0">
                         <a:latin typeface="Arial" panose="020B0604020202020204" pitchFamily="34" charset="0"/>
                         <a:cs typeface="Arial" panose="020B0604020202020204" pitchFamily="34" charset="0"/>
                       </a:rPr>
                       <a:t>3</a:t>
                     </a:r>
-                    <a:endParaRPr kumimoji="1" lang="ja-JP" altLang="en-US">
+                    <a:endParaRPr kumimoji="1" lang="ja-JP" altLang="en-US" dirty="0">
                       <a:latin typeface="Arial" panose="020B0604020202020204" pitchFamily="34" charset="0"/>
                       <a:cs typeface="Arial" panose="020B0604020202020204" pitchFamily="34" charset="0"/>
                     </a:endParaRPr>
@@ -10384,13 +12112,13 @@
                   <a:p>
                     <a:pPr algn="ctr"/>
                     <a:r>
-                      <a:rPr kumimoji="1" lang="en-US" altLang="ja-JP">
+                      <a:rPr kumimoji="1" lang="en-US" altLang="ja-JP" dirty="0">
                         <a:latin typeface="Arial" panose="020B0604020202020204" pitchFamily="34" charset="0"/>
                         <a:cs typeface="Arial" panose="020B0604020202020204" pitchFamily="34" charset="0"/>
                       </a:rPr>
                       <a:t>3</a:t>
                     </a:r>
-                    <a:endParaRPr kumimoji="1" lang="ja-JP" altLang="en-US">
+                    <a:endParaRPr kumimoji="1" lang="ja-JP" altLang="en-US" dirty="0">
                       <a:latin typeface="Arial" panose="020B0604020202020204" pitchFamily="34" charset="0"/>
                       <a:cs typeface="Arial" panose="020B0604020202020204" pitchFamily="34" charset="0"/>
                     </a:endParaRPr>
@@ -10440,13 +12168,13 @@
                   <a:p>
                     <a:pPr algn="ctr"/>
                     <a:r>
-                      <a:rPr kumimoji="1" lang="en-US" altLang="ja-JP">
+                      <a:rPr kumimoji="1" lang="en-US" altLang="ja-JP" dirty="0">
                         <a:latin typeface="Arial" panose="020B0604020202020204" pitchFamily="34" charset="0"/>
                         <a:cs typeface="Arial" panose="020B0604020202020204" pitchFamily="34" charset="0"/>
                       </a:rPr>
                       <a:t>2</a:t>
                     </a:r>
-                    <a:endParaRPr kumimoji="1" lang="ja-JP" altLang="en-US">
+                    <a:endParaRPr kumimoji="1" lang="ja-JP" altLang="en-US" dirty="0">
                       <a:latin typeface="Arial" panose="020B0604020202020204" pitchFamily="34" charset="0"/>
                       <a:cs typeface="Arial" panose="020B0604020202020204" pitchFamily="34" charset="0"/>
                     </a:endParaRPr>
@@ -10496,13 +12224,13 @@
                   <a:p>
                     <a:pPr algn="ctr"/>
                     <a:r>
-                      <a:rPr kumimoji="1" lang="en-US" altLang="ja-JP">
+                      <a:rPr kumimoji="1" lang="en-US" altLang="ja-JP" dirty="0">
                         <a:latin typeface="Arial" panose="020B0604020202020204" pitchFamily="34" charset="0"/>
                         <a:cs typeface="Arial" panose="020B0604020202020204" pitchFamily="34" charset="0"/>
                       </a:rPr>
                       <a:t>2</a:t>
                     </a:r>
-                    <a:endParaRPr kumimoji="1" lang="ja-JP" altLang="en-US">
+                    <a:endParaRPr kumimoji="1" lang="ja-JP" altLang="en-US" dirty="0">
                       <a:latin typeface="Arial" panose="020B0604020202020204" pitchFamily="34" charset="0"/>
                       <a:cs typeface="Arial" panose="020B0604020202020204" pitchFamily="34" charset="0"/>
                     </a:endParaRPr>
@@ -10552,13 +12280,13 @@
                   <a:p>
                     <a:pPr algn="ctr"/>
                     <a:r>
-                      <a:rPr lang="en-US" altLang="ja-JP">
+                      <a:rPr lang="en-US" altLang="ja-JP" dirty="0">
                         <a:latin typeface="Arial" panose="020B0604020202020204" pitchFamily="34" charset="0"/>
                         <a:cs typeface="Arial" panose="020B0604020202020204" pitchFamily="34" charset="0"/>
                       </a:rPr>
                       <a:t>3</a:t>
                     </a:r>
-                    <a:endParaRPr kumimoji="1" lang="ja-JP" altLang="en-US">
+                    <a:endParaRPr kumimoji="1" lang="ja-JP" altLang="en-US" dirty="0">
                       <a:latin typeface="Arial" panose="020B0604020202020204" pitchFamily="34" charset="0"/>
                       <a:cs typeface="Arial" panose="020B0604020202020204" pitchFamily="34" charset="0"/>
                     </a:endParaRPr>
@@ -10700,13 +12428,13 @@
                   <a:p>
                     <a:pPr algn="ctr"/>
                     <a:r>
-                      <a:rPr kumimoji="1" lang="en-US" altLang="ja-JP">
+                      <a:rPr kumimoji="1" lang="en-US" altLang="ja-JP" dirty="0">
                         <a:latin typeface="Arial" panose="020B0604020202020204" pitchFamily="34" charset="0"/>
                         <a:cs typeface="Arial" panose="020B0604020202020204" pitchFamily="34" charset="0"/>
                       </a:rPr>
                       <a:t>5</a:t>
                     </a:r>
-                    <a:endParaRPr kumimoji="1" lang="ja-JP" altLang="en-US">
+                    <a:endParaRPr kumimoji="1" lang="ja-JP" altLang="en-US" dirty="0">
                       <a:latin typeface="Arial" panose="020B0604020202020204" pitchFamily="34" charset="0"/>
                       <a:cs typeface="Arial" panose="020B0604020202020204" pitchFamily="34" charset="0"/>
                     </a:endParaRPr>
@@ -10756,13 +12484,13 @@
                   <a:p>
                     <a:pPr algn="ctr"/>
                     <a:r>
-                      <a:rPr kumimoji="1" lang="en-US" altLang="ja-JP">
+                      <a:rPr kumimoji="1" lang="en-US" altLang="ja-JP" dirty="0">
                         <a:latin typeface="Arial" panose="020B0604020202020204" pitchFamily="34" charset="0"/>
                         <a:cs typeface="Arial" panose="020B0604020202020204" pitchFamily="34" charset="0"/>
                       </a:rPr>
                       <a:t>4</a:t>
                     </a:r>
-                    <a:endParaRPr kumimoji="1" lang="ja-JP" altLang="en-US">
+                    <a:endParaRPr kumimoji="1" lang="ja-JP" altLang="en-US" dirty="0">
                       <a:latin typeface="Arial" panose="020B0604020202020204" pitchFamily="34" charset="0"/>
                       <a:cs typeface="Arial" panose="020B0604020202020204" pitchFamily="34" charset="0"/>
                     </a:endParaRPr>
@@ -10812,13 +12540,13 @@
                   <a:p>
                     <a:pPr algn="ctr"/>
                     <a:r>
-                      <a:rPr kumimoji="1" lang="en-US" altLang="ja-JP">
+                      <a:rPr kumimoji="1" lang="en-US" altLang="ja-JP" dirty="0">
                         <a:latin typeface="Arial" panose="020B0604020202020204" pitchFamily="34" charset="0"/>
                         <a:cs typeface="Arial" panose="020B0604020202020204" pitchFamily="34" charset="0"/>
                       </a:rPr>
                       <a:t>1</a:t>
                     </a:r>
-                    <a:endParaRPr kumimoji="1" lang="ja-JP" altLang="en-US">
+                    <a:endParaRPr kumimoji="1" lang="ja-JP" altLang="en-US" dirty="0">
                       <a:latin typeface="Arial" panose="020B0604020202020204" pitchFamily="34" charset="0"/>
                       <a:cs typeface="Arial" panose="020B0604020202020204" pitchFamily="34" charset="0"/>
                     </a:endParaRPr>
@@ -10868,13 +12596,13 @@
                   <a:p>
                     <a:pPr algn="ctr"/>
                     <a:r>
-                      <a:rPr kumimoji="1" lang="en-US" altLang="ja-JP">
+                      <a:rPr kumimoji="1" lang="en-US" altLang="ja-JP" dirty="0">
                         <a:latin typeface="Arial" panose="020B0604020202020204" pitchFamily="34" charset="0"/>
                         <a:cs typeface="Arial" panose="020B0604020202020204" pitchFamily="34" charset="0"/>
                       </a:rPr>
                       <a:t>2</a:t>
                     </a:r>
-                    <a:endParaRPr kumimoji="1" lang="ja-JP" altLang="en-US">
+                    <a:endParaRPr kumimoji="1" lang="ja-JP" altLang="en-US" dirty="0">
                       <a:latin typeface="Arial" panose="020B0604020202020204" pitchFamily="34" charset="0"/>
                       <a:cs typeface="Arial" panose="020B0604020202020204" pitchFamily="34" charset="0"/>
                     </a:endParaRPr>
@@ -10924,13 +12652,13 @@
                   <a:p>
                     <a:pPr algn="ctr"/>
                     <a:r>
-                      <a:rPr lang="en-US" altLang="ja-JP">
+                      <a:rPr lang="en-US" altLang="ja-JP" dirty="0">
                         <a:latin typeface="Arial" panose="020B0604020202020204" pitchFamily="34" charset="0"/>
                         <a:cs typeface="Arial" panose="020B0604020202020204" pitchFamily="34" charset="0"/>
                       </a:rPr>
                       <a:t>3</a:t>
                     </a:r>
-                    <a:endParaRPr kumimoji="1" lang="ja-JP" altLang="en-US">
+                    <a:endParaRPr kumimoji="1" lang="ja-JP" altLang="en-US" dirty="0">
                       <a:latin typeface="Arial" panose="020B0604020202020204" pitchFamily="34" charset="0"/>
                       <a:cs typeface="Arial" panose="020B0604020202020204" pitchFamily="34" charset="0"/>
                     </a:endParaRPr>
@@ -11072,13 +12800,13 @@
                   <a:p>
                     <a:pPr algn="ctr"/>
                     <a:r>
-                      <a:rPr kumimoji="1" lang="en-US" altLang="ja-JP">
+                      <a:rPr kumimoji="1" lang="en-US" altLang="ja-JP" dirty="0">
                         <a:latin typeface="Arial" panose="020B0604020202020204" pitchFamily="34" charset="0"/>
                         <a:cs typeface="Arial" panose="020B0604020202020204" pitchFamily="34" charset="0"/>
                       </a:rPr>
                       <a:t>5</a:t>
                     </a:r>
-                    <a:endParaRPr kumimoji="1" lang="ja-JP" altLang="en-US">
+                    <a:endParaRPr kumimoji="1" lang="ja-JP" altLang="en-US" dirty="0">
                       <a:latin typeface="Arial" panose="020B0604020202020204" pitchFamily="34" charset="0"/>
                       <a:cs typeface="Arial" panose="020B0604020202020204" pitchFamily="34" charset="0"/>
                     </a:endParaRPr>
@@ -11128,13 +12856,13 @@
                   <a:p>
                     <a:pPr algn="ctr"/>
                     <a:r>
-                      <a:rPr kumimoji="1" lang="en-US" altLang="ja-JP">
+                      <a:rPr kumimoji="1" lang="en-US" altLang="ja-JP" dirty="0">
                         <a:latin typeface="Arial" panose="020B0604020202020204" pitchFamily="34" charset="0"/>
                         <a:cs typeface="Arial" panose="020B0604020202020204" pitchFamily="34" charset="0"/>
                       </a:rPr>
                       <a:t>3</a:t>
                     </a:r>
-                    <a:endParaRPr kumimoji="1" lang="ja-JP" altLang="en-US">
+                    <a:endParaRPr kumimoji="1" lang="ja-JP" altLang="en-US" dirty="0">
                       <a:latin typeface="Arial" panose="020B0604020202020204" pitchFamily="34" charset="0"/>
                       <a:cs typeface="Arial" panose="020B0604020202020204" pitchFamily="34" charset="0"/>
                     </a:endParaRPr>
@@ -11184,13 +12912,13 @@
                   <a:p>
                     <a:pPr algn="ctr"/>
                     <a:r>
-                      <a:rPr kumimoji="1" lang="en-US" altLang="ja-JP">
+                      <a:rPr kumimoji="1" lang="en-US" altLang="ja-JP" dirty="0">
                         <a:latin typeface="Arial" panose="020B0604020202020204" pitchFamily="34" charset="0"/>
                         <a:cs typeface="Arial" panose="020B0604020202020204" pitchFamily="34" charset="0"/>
                       </a:rPr>
                       <a:t>3</a:t>
                     </a:r>
-                    <a:endParaRPr kumimoji="1" lang="ja-JP" altLang="en-US">
+                    <a:endParaRPr kumimoji="1" lang="ja-JP" altLang="en-US" dirty="0">
                       <a:latin typeface="Arial" panose="020B0604020202020204" pitchFamily="34" charset="0"/>
                       <a:cs typeface="Arial" panose="020B0604020202020204" pitchFamily="34" charset="0"/>
                     </a:endParaRPr>
@@ -11240,13 +12968,13 @@
                   <a:p>
                     <a:pPr algn="ctr"/>
                     <a:r>
-                      <a:rPr kumimoji="1" lang="en-US" altLang="ja-JP">
+                      <a:rPr kumimoji="1" lang="en-US" altLang="ja-JP" dirty="0">
                         <a:latin typeface="Arial" panose="020B0604020202020204" pitchFamily="34" charset="0"/>
                         <a:cs typeface="Arial" panose="020B0604020202020204" pitchFamily="34" charset="0"/>
                       </a:rPr>
                       <a:t>1</a:t>
                     </a:r>
-                    <a:endParaRPr kumimoji="1" lang="ja-JP" altLang="en-US">
+                    <a:endParaRPr kumimoji="1" lang="ja-JP" altLang="en-US" dirty="0">
                       <a:latin typeface="Arial" panose="020B0604020202020204" pitchFamily="34" charset="0"/>
                       <a:cs typeface="Arial" panose="020B0604020202020204" pitchFamily="34" charset="0"/>
                     </a:endParaRPr>
@@ -11296,13 +13024,13 @@
                   <a:p>
                     <a:pPr algn="ctr"/>
                     <a:r>
-                      <a:rPr lang="en-US" altLang="ja-JP">
+                      <a:rPr lang="en-US" altLang="ja-JP" dirty="0">
                         <a:latin typeface="Arial" panose="020B0604020202020204" pitchFamily="34" charset="0"/>
                         <a:cs typeface="Arial" panose="020B0604020202020204" pitchFamily="34" charset="0"/>
                       </a:rPr>
                       <a:t>4</a:t>
                     </a:r>
-                    <a:endParaRPr kumimoji="1" lang="ja-JP" altLang="en-US">
+                    <a:endParaRPr kumimoji="1" lang="ja-JP" altLang="en-US" dirty="0">
                       <a:latin typeface="Arial" panose="020B0604020202020204" pitchFamily="34" charset="0"/>
                       <a:cs typeface="Arial" panose="020B0604020202020204" pitchFamily="34" charset="0"/>
                     </a:endParaRPr>
@@ -11444,13 +13172,13 @@
                   <a:p>
                     <a:pPr algn="ctr"/>
                     <a:r>
-                      <a:rPr kumimoji="1" lang="en-US" altLang="ja-JP">
+                      <a:rPr kumimoji="1" lang="en-US" altLang="ja-JP" dirty="0">
                         <a:latin typeface="Arial" panose="020B0604020202020204" pitchFamily="34" charset="0"/>
                         <a:cs typeface="Arial" panose="020B0604020202020204" pitchFamily="34" charset="0"/>
                       </a:rPr>
                       <a:t>1</a:t>
                     </a:r>
-                    <a:endParaRPr kumimoji="1" lang="ja-JP" altLang="en-US">
+                    <a:endParaRPr kumimoji="1" lang="ja-JP" altLang="en-US" dirty="0">
                       <a:latin typeface="Arial" panose="020B0604020202020204" pitchFamily="34" charset="0"/>
                       <a:cs typeface="Arial" panose="020B0604020202020204" pitchFamily="34" charset="0"/>
                     </a:endParaRPr>
@@ -11500,13 +13228,13 @@
                   <a:p>
                     <a:pPr algn="ctr"/>
                     <a:r>
-                      <a:rPr kumimoji="1" lang="en-US" altLang="ja-JP">
+                      <a:rPr kumimoji="1" lang="en-US" altLang="ja-JP" dirty="0">
                         <a:latin typeface="Arial" panose="020B0604020202020204" pitchFamily="34" charset="0"/>
                         <a:cs typeface="Arial" panose="020B0604020202020204" pitchFamily="34" charset="0"/>
                       </a:rPr>
                       <a:t>1</a:t>
                     </a:r>
-                    <a:endParaRPr kumimoji="1" lang="ja-JP" altLang="en-US">
+                    <a:endParaRPr kumimoji="1" lang="ja-JP" altLang="en-US" dirty="0">
                       <a:latin typeface="Arial" panose="020B0604020202020204" pitchFamily="34" charset="0"/>
                       <a:cs typeface="Arial" panose="020B0604020202020204" pitchFamily="34" charset="0"/>
                     </a:endParaRPr>
@@ -11556,13 +13284,13 @@
                   <a:p>
                     <a:pPr algn="ctr"/>
                     <a:r>
-                      <a:rPr kumimoji="1" lang="en-US" altLang="ja-JP">
+                      <a:rPr kumimoji="1" lang="en-US" altLang="ja-JP" dirty="0">
                         <a:latin typeface="Arial" panose="020B0604020202020204" pitchFamily="34" charset="0"/>
                         <a:cs typeface="Arial" panose="020B0604020202020204" pitchFamily="34" charset="0"/>
                       </a:rPr>
                       <a:t>5</a:t>
                     </a:r>
-                    <a:endParaRPr kumimoji="1" lang="ja-JP" altLang="en-US">
+                    <a:endParaRPr kumimoji="1" lang="ja-JP" altLang="en-US" dirty="0">
                       <a:latin typeface="Arial" panose="020B0604020202020204" pitchFamily="34" charset="0"/>
                       <a:cs typeface="Arial" panose="020B0604020202020204" pitchFamily="34" charset="0"/>
                     </a:endParaRPr>
@@ -11612,13 +13340,13 @@
                   <a:p>
                     <a:pPr algn="ctr"/>
                     <a:r>
-                      <a:rPr kumimoji="1" lang="en-US" altLang="ja-JP">
+                      <a:rPr kumimoji="1" lang="en-US" altLang="ja-JP" dirty="0">
                         <a:latin typeface="Arial" panose="020B0604020202020204" pitchFamily="34" charset="0"/>
                         <a:cs typeface="Arial" panose="020B0604020202020204" pitchFamily="34" charset="0"/>
                       </a:rPr>
                       <a:t>3</a:t>
                     </a:r>
-                    <a:endParaRPr kumimoji="1" lang="ja-JP" altLang="en-US">
+                    <a:endParaRPr kumimoji="1" lang="ja-JP" altLang="en-US" dirty="0">
                       <a:latin typeface="Arial" panose="020B0604020202020204" pitchFamily="34" charset="0"/>
                       <a:cs typeface="Arial" panose="020B0604020202020204" pitchFamily="34" charset="0"/>
                     </a:endParaRPr>
@@ -11668,13 +13396,13 @@
                   <a:p>
                     <a:pPr algn="ctr"/>
                     <a:r>
-                      <a:rPr lang="en-US" altLang="ja-JP">
+                      <a:rPr lang="en-US" altLang="ja-JP" dirty="0">
                         <a:latin typeface="Arial" panose="020B0604020202020204" pitchFamily="34" charset="0"/>
                         <a:cs typeface="Arial" panose="020B0604020202020204" pitchFamily="34" charset="0"/>
                       </a:rPr>
                       <a:t>2</a:t>
                     </a:r>
-                    <a:endParaRPr kumimoji="1" lang="ja-JP" altLang="en-US">
+                    <a:endParaRPr kumimoji="1" lang="ja-JP" altLang="en-US" dirty="0">
                       <a:latin typeface="Arial" panose="020B0604020202020204" pitchFamily="34" charset="0"/>
                       <a:cs typeface="Arial" panose="020B0604020202020204" pitchFamily="34" charset="0"/>
                     </a:endParaRPr>
@@ -11716,7 +13444,7 @@
             <a:p>
               <a:pPr algn="ctr"/>
               <a:r>
-                <a:rPr lang="ja-JP" altLang="en-US" sz="1200">
+                <a:rPr lang="ja-JP" altLang="en-US" sz="1200" dirty="0">
                   <a:latin typeface="Arial" panose="020B0604020202020204" pitchFamily="34" charset="0"/>
                   <a:ea typeface="ＭＳ ゴシック" panose="020B0609070205080204" pitchFamily="49" charset="-128"/>
                   <a:cs typeface="Arial" panose="020B0604020202020204" pitchFamily="34" charset="0"/>
@@ -11724,14 +13452,14 @@
                 <a:t>ブートストラップ標本数：</a:t>
               </a:r>
               <a:r>
-                <a:rPr lang="en-US" altLang="ja-JP" sz="1200">
+                <a:rPr lang="en-US" altLang="ja-JP" sz="1200" dirty="0">
                   <a:latin typeface="Arial" panose="020B0604020202020204" pitchFamily="34" charset="0"/>
                   <a:ea typeface="ＭＳ ゴシック" panose="020B0609070205080204" pitchFamily="49" charset="-128"/>
                   <a:cs typeface="Arial" panose="020B0604020202020204" pitchFamily="34" charset="0"/>
                 </a:rPr>
                 <a:t>B = 4</a:t>
               </a:r>
-              <a:endParaRPr lang="ja-JP" altLang="en-US" sz="1200">
+              <a:endParaRPr lang="ja-JP" altLang="en-US" sz="1200" dirty="0">
                 <a:latin typeface="Arial" panose="020B0604020202020204" pitchFamily="34" charset="0"/>
                 <a:ea typeface="ＭＳ ゴシック" panose="020B0609070205080204" pitchFamily="49" charset="-128"/>
                 <a:cs typeface="Arial" panose="020B0604020202020204" pitchFamily="34" charset="0"/>
@@ -11770,7 +13498,7 @@
           <a:p>
             <a:pPr algn="ctr"/>
             <a:r>
-              <a:rPr kumimoji="1" lang="ja-JP" altLang="en-US" sz="8800">
+              <a:rPr kumimoji="1" lang="ja-JP" altLang="en-US" sz="8800" dirty="0">
                 <a:latin typeface="ＭＳ ゴシック" panose="020B0609070205080204" pitchFamily="49" charset="-128"/>
                 <a:ea typeface="ＭＳ ゴシック" panose="020B0609070205080204" pitchFamily="49" charset="-128"/>
                 <a:cs typeface="Arial" panose="020B0604020202020204" pitchFamily="34" charset="0"/>
@@ -11902,7 +13630,7 @@
           <a:p>
             <a:pPr algn="ctr"/>
             <a:r>
-              <a:rPr lang="ja-JP" altLang="en-US" sz="1200">
+              <a:rPr lang="ja-JP" altLang="en-US" sz="1200" dirty="0">
                 <a:latin typeface="Arial" panose="020B0604020202020204" pitchFamily="34" charset="0"/>
                 <a:ea typeface="ＭＳ ゴシック" panose="020B0609070205080204" pitchFamily="49" charset="-128"/>
                 <a:cs typeface="Arial" panose="020B0604020202020204" pitchFamily="34" charset="0"/>
@@ -11939,7 +13667,7 @@
           <a:lstStyle/>
           <a:p>
             <a:r>
-              <a:rPr kumimoji="1" lang="ja-JP" altLang="en-US">
+              <a:rPr kumimoji="1" lang="ja-JP" altLang="en-US" dirty="0">
                 <a:latin typeface="ＭＳ Ｐゴシック" panose="020B0600070205080204" pitchFamily="50" charset="-128"/>
                 <a:ea typeface="ＭＳ Ｐゴシック" panose="020B0600070205080204" pitchFamily="50" charset="-128"/>
                 <a:cs typeface="Arial" panose="020B0604020202020204" pitchFamily="34" charset="0"/>
@@ -11947,7 +13675,7 @@
               <a:t>ノンパラメトリック・ブートストラップ法　</a:t>
             </a:r>
             <a:r>
-              <a:rPr kumimoji="1" lang="en-US" altLang="ja-JP">
+              <a:rPr kumimoji="1" lang="en-US" altLang="ja-JP" dirty="0">
                 <a:latin typeface="ＭＳ Ｐゴシック" panose="020B0600070205080204" pitchFamily="50" charset="-128"/>
                 <a:ea typeface="ＭＳ Ｐゴシック" panose="020B0600070205080204" pitchFamily="50" charset="-128"/>
                 <a:cs typeface="Arial" panose="020B0604020202020204" pitchFamily="34" charset="0"/>
@@ -11955,7 +13683,7 @@
               <a:t>-</a:t>
             </a:r>
             <a:r>
-              <a:rPr kumimoji="1" lang="ja-JP" altLang="en-US">
+              <a:rPr kumimoji="1" lang="ja-JP" altLang="en-US" dirty="0">
                 <a:latin typeface="ＭＳ Ｐゴシック" panose="020B0600070205080204" pitchFamily="50" charset="-128"/>
                 <a:ea typeface="ＭＳ Ｐゴシック" panose="020B0600070205080204" pitchFamily="50" charset="-128"/>
                 <a:cs typeface="Arial" panose="020B0604020202020204" pitchFamily="34" charset="0"/>
@@ -11963,14 +13691,14 @@
               <a:t>パーセンタイル法</a:t>
             </a:r>
             <a:r>
-              <a:rPr kumimoji="1" lang="en-US" altLang="ja-JP">
+              <a:rPr kumimoji="1" lang="en-US" altLang="ja-JP" dirty="0">
                 <a:latin typeface="ＭＳ Ｐゴシック" panose="020B0600070205080204" pitchFamily="50" charset="-128"/>
                 <a:ea typeface="ＭＳ Ｐゴシック" panose="020B0600070205080204" pitchFamily="50" charset="-128"/>
                 <a:cs typeface="Arial" panose="020B0604020202020204" pitchFamily="34" charset="0"/>
               </a:rPr>
               <a:t>-</a:t>
             </a:r>
-            <a:endParaRPr kumimoji="1" lang="ja-JP" altLang="en-US">
+            <a:endParaRPr kumimoji="1" lang="ja-JP" altLang="en-US" dirty="0">
               <a:latin typeface="ＭＳ Ｐゴシック" panose="020B0600070205080204" pitchFamily="50" charset="-128"/>
               <a:ea typeface="ＭＳ Ｐゴシック" panose="020B0600070205080204" pitchFamily="50" charset="-128"/>
               <a:cs typeface="Arial" panose="020B0604020202020204" pitchFamily="34" charset="0"/>

--- a/Materials/1620-1630_Nakagawa/はじめてのシミュレーション_R with Pharma Lab_20260408.pptx
+++ b/Materials/1620-1630_Nakagawa/はじめてのシミュレーション_R with Pharma Lab_20260408.pptx
@@ -27,7 +27,7 @@
     <p:sldId id="267" r:id="rId15"/>
   </p:sldIdLst>
   <p:sldSz cx="10795000" cy="8102600"/>
-  <p:notesSz cx="10795000" cy="8102600"/>
+  <p:notesSz cx="9939338" cy="6807200"/>
   <p:defaultTextStyle>
     <a:defPPr>
       <a:defRPr kern="0"/>
@@ -84,18 +84,18 @@
         </p:nvSpPr>
         <p:spPr>
           <a:xfrm>
-            <a:off x="0" y="0"/>
-            <a:ext cx="4678363" cy="406400"/>
+            <a:off x="1" y="0"/>
+            <a:ext cx="4307534" cy="341427"/>
           </a:xfrm>
           <a:prstGeom prst="rect">
             <a:avLst/>
           </a:prstGeom>
         </p:spPr>
         <p:txBody>
-          <a:bodyPr vert="horz" lIns="91440" tIns="45720" rIns="91440" bIns="45720" rtlCol="0"/>
+          <a:bodyPr vert="horz" lIns="81025" tIns="40512" rIns="81025" bIns="40512" rtlCol="0"/>
           <a:lstStyle>
             <a:lvl1pPr algn="l">
-              <a:defRPr sz="1200"/>
+              <a:defRPr sz="1100"/>
             </a:lvl1pPr>
           </a:lstStyle>
           <a:p>
@@ -121,24 +121,24 @@
         </p:nvSpPr>
         <p:spPr>
           <a:xfrm>
-            <a:off x="6115050" y="0"/>
-            <a:ext cx="4676775" cy="406400"/>
+            <a:off x="5630343" y="0"/>
+            <a:ext cx="4306072" cy="341427"/>
           </a:xfrm>
           <a:prstGeom prst="rect">
             <a:avLst/>
           </a:prstGeom>
         </p:spPr>
         <p:txBody>
-          <a:bodyPr vert="horz" lIns="91440" tIns="45720" rIns="91440" bIns="45720" rtlCol="0"/>
+          <a:bodyPr vert="horz" lIns="81025" tIns="40512" rIns="81025" bIns="40512" rtlCol="0"/>
           <a:lstStyle>
             <a:lvl1pPr algn="r">
-              <a:defRPr sz="1200"/>
+              <a:defRPr sz="1100"/>
             </a:lvl1pPr>
           </a:lstStyle>
           <a:p>
             <a:fld id="{F9721CEF-AF14-0041-915F-47CFE44F64CA}" type="datetimeFigureOut">
               <a:rPr kumimoji="1" lang="ja-JP" altLang="en-US" smtClean="0"/>
-              <a:t>2026/3/30</a:t>
+              <a:t>2026/4/7</a:t>
             </a:fld>
             <a:endParaRPr kumimoji="1" lang="ja-JP" altLang="en-US"/>
           </a:p>
@@ -162,18 +162,18 @@
         </p:nvSpPr>
         <p:spPr>
           <a:xfrm>
-            <a:off x="0" y="7696200"/>
-            <a:ext cx="4678363" cy="406400"/>
+            <a:off x="1" y="6465773"/>
+            <a:ext cx="4307534" cy="341427"/>
           </a:xfrm>
           <a:prstGeom prst="rect">
             <a:avLst/>
           </a:prstGeom>
         </p:spPr>
         <p:txBody>
-          <a:bodyPr vert="horz" lIns="91440" tIns="45720" rIns="91440" bIns="45720" rtlCol="0" anchor="b"/>
+          <a:bodyPr vert="horz" lIns="81025" tIns="40512" rIns="81025" bIns="40512" rtlCol="0" anchor="b"/>
           <a:lstStyle>
             <a:lvl1pPr algn="l">
-              <a:defRPr sz="1200"/>
+              <a:defRPr sz="1100"/>
             </a:lvl1pPr>
           </a:lstStyle>
           <a:p>
@@ -199,18 +199,18 @@
         </p:nvSpPr>
         <p:spPr>
           <a:xfrm>
-            <a:off x="6115050" y="7696200"/>
-            <a:ext cx="4676775" cy="406400"/>
+            <a:off x="5630343" y="6465773"/>
+            <a:ext cx="4306072" cy="341427"/>
           </a:xfrm>
           <a:prstGeom prst="rect">
             <a:avLst/>
           </a:prstGeom>
         </p:spPr>
         <p:txBody>
-          <a:bodyPr vert="horz" lIns="91440" tIns="45720" rIns="91440" bIns="45720" rtlCol="0" anchor="b"/>
+          <a:bodyPr vert="horz" lIns="81025" tIns="40512" rIns="81025" bIns="40512" rtlCol="0" anchor="b"/>
           <a:lstStyle>
             <a:lvl1pPr algn="r">
-              <a:defRPr sz="1200"/>
+              <a:defRPr sz="1100"/>
             </a:lvl1pPr>
           </a:lstStyle>
           <a:p>
@@ -267,18 +267,18 @@
         </p:nvSpPr>
         <p:spPr>
           <a:xfrm>
-            <a:off x="0" y="0"/>
-            <a:ext cx="4678363" cy="406400"/>
+            <a:off x="1" y="0"/>
+            <a:ext cx="4307534" cy="341427"/>
           </a:xfrm>
           <a:prstGeom prst="rect">
             <a:avLst/>
           </a:prstGeom>
         </p:spPr>
         <p:txBody>
-          <a:bodyPr vert="horz" lIns="91440" tIns="45720" rIns="91440" bIns="45720" rtlCol="0"/>
+          <a:bodyPr vert="horz" lIns="81025" tIns="40512" rIns="81025" bIns="40512" rtlCol="0"/>
           <a:lstStyle>
             <a:lvl1pPr algn="l">
-              <a:defRPr sz="1200"/>
+              <a:defRPr sz="1100"/>
             </a:lvl1pPr>
           </a:lstStyle>
           <a:p>
@@ -298,24 +298,24 @@
         </p:nvSpPr>
         <p:spPr>
           <a:xfrm>
-            <a:off x="6115050" y="0"/>
-            <a:ext cx="4676775" cy="406400"/>
+            <a:off x="5630343" y="0"/>
+            <a:ext cx="4306072" cy="341427"/>
           </a:xfrm>
           <a:prstGeom prst="rect">
             <a:avLst/>
           </a:prstGeom>
         </p:spPr>
         <p:txBody>
-          <a:bodyPr vert="horz" lIns="91440" tIns="45720" rIns="91440" bIns="45720" rtlCol="0"/>
+          <a:bodyPr vert="horz" lIns="81025" tIns="40512" rIns="81025" bIns="40512" rtlCol="0"/>
           <a:lstStyle>
             <a:lvl1pPr algn="r">
-              <a:defRPr sz="1200"/>
+              <a:defRPr sz="1100"/>
             </a:lvl1pPr>
           </a:lstStyle>
           <a:p>
             <a:fld id="{466EDA11-FB64-E74C-B19E-49156B88425C}" type="datetimeFigureOut">
               <a:rPr kumimoji="1" lang="ja-JP" altLang="en-US" smtClean="0"/>
-              <a:t>2026/3/30</a:t>
+              <a:t>2026/4/7</a:t>
             </a:fld>
             <a:endParaRPr kumimoji="1" lang="ja-JP" altLang="en-US"/>
           </a:p>
@@ -333,8 +333,8 @@
         </p:nvSpPr>
         <p:spPr>
           <a:xfrm>
-            <a:off x="3575050" y="1012825"/>
-            <a:ext cx="3644900" cy="2735263"/>
+            <a:off x="3438525" y="850900"/>
+            <a:ext cx="3062288" cy="2298700"/>
           </a:xfrm>
           <a:prstGeom prst="rect">
             <a:avLst/>
@@ -347,7 +347,7 @@
           </a:ln>
         </p:spPr>
         <p:txBody>
-          <a:bodyPr vert="horz" lIns="91440" tIns="45720" rIns="91440" bIns="45720" rtlCol="0" anchor="ctr"/>
+          <a:bodyPr vert="horz" lIns="81025" tIns="40512" rIns="81025" bIns="40512" rtlCol="0" anchor="ctr"/>
           <a:lstStyle/>
           <a:p>
             <a:endParaRPr lang="ja-JP" altLang="en-US"/>
@@ -366,15 +366,15 @@
         </p:nvSpPr>
         <p:spPr>
           <a:xfrm>
-            <a:off x="1079500" y="3898900"/>
-            <a:ext cx="8636000" cy="3190875"/>
+            <a:off x="993934" y="3275565"/>
+            <a:ext cx="7951470" cy="2680735"/>
           </a:xfrm>
           <a:prstGeom prst="rect">
             <a:avLst/>
           </a:prstGeom>
         </p:spPr>
         <p:txBody>
-          <a:bodyPr vert="horz" lIns="91440" tIns="45720" rIns="91440" bIns="45720" rtlCol="0"/>
+          <a:bodyPr vert="horz" lIns="81025" tIns="40512" rIns="81025" bIns="40512" rtlCol="0"/>
           <a:lstStyle/>
           <a:p>
             <a:pPr lvl="0"/>
@@ -457,18 +457,18 @@
         </p:nvSpPr>
         <p:spPr>
           <a:xfrm>
-            <a:off x="0" y="7696200"/>
-            <a:ext cx="4678363" cy="406400"/>
+            <a:off x="1" y="6465773"/>
+            <a:ext cx="4307534" cy="341427"/>
           </a:xfrm>
           <a:prstGeom prst="rect">
             <a:avLst/>
           </a:prstGeom>
         </p:spPr>
         <p:txBody>
-          <a:bodyPr vert="horz" lIns="91440" tIns="45720" rIns="91440" bIns="45720" rtlCol="0" anchor="b"/>
+          <a:bodyPr vert="horz" lIns="81025" tIns="40512" rIns="81025" bIns="40512" rtlCol="0" anchor="b"/>
           <a:lstStyle>
             <a:lvl1pPr algn="l">
-              <a:defRPr sz="1200"/>
+              <a:defRPr sz="1100"/>
             </a:lvl1pPr>
           </a:lstStyle>
           <a:p>
@@ -488,18 +488,18 @@
         </p:nvSpPr>
         <p:spPr>
           <a:xfrm>
-            <a:off x="6115050" y="7696200"/>
-            <a:ext cx="4676775" cy="406400"/>
+            <a:off x="5630343" y="6465773"/>
+            <a:ext cx="4306072" cy="341427"/>
           </a:xfrm>
           <a:prstGeom prst="rect">
             <a:avLst/>
           </a:prstGeom>
         </p:spPr>
         <p:txBody>
-          <a:bodyPr vert="horz" lIns="91440" tIns="45720" rIns="91440" bIns="45720" rtlCol="0" anchor="b"/>
+          <a:bodyPr vert="horz" lIns="81025" tIns="40512" rIns="81025" bIns="40512" rtlCol="0" anchor="b"/>
           <a:lstStyle>
             <a:lvl1pPr algn="r">
-              <a:defRPr sz="1200"/>
+              <a:defRPr sz="1100"/>
             </a:lvl1pPr>
           </a:lstStyle>
           <a:p>
@@ -4426,36 +4426,6 @@
           </a:p>
         </p:txBody>
       </p:sp>
-      <p:pic>
-        <p:nvPicPr>
-          <p:cNvPr id="5" name="図 4">
-            <a:extLst>
-              <a:ext uri="{FF2B5EF4-FFF2-40B4-BE49-F238E27FC236}">
-                <a16:creationId xmlns:a16="http://schemas.microsoft.com/office/drawing/2014/main" id="{95DA28E4-A45A-1E5D-BF23-CDCB41762CC2}"/>
-              </a:ext>
-            </a:extLst>
-          </p:cNvPr>
-          <p:cNvPicPr>
-            <a:picLocks noChangeAspect="1"/>
-          </p:cNvPicPr>
-          <p:nvPr/>
-        </p:nvPicPr>
-        <p:blipFill>
-          <a:blip r:embed="rId2"/>
-          <a:stretch>
-            <a:fillRect/>
-          </a:stretch>
-        </p:blipFill>
-        <p:spPr>
-          <a:xfrm>
-            <a:off x="2044700" y="2679700"/>
-            <a:ext cx="7753350" cy="4772025"/>
-          </a:xfrm>
-          <a:prstGeom prst="rect">
-            <a:avLst/>
-          </a:prstGeom>
-        </p:spPr>
-      </p:pic>
       <p:sp>
         <p:nvSpPr>
           <p:cNvPr id="6" name="テキスト ボックス 5">
@@ -4674,6 +4644,36 @@
           </a:p>
         </p:txBody>
       </p:sp>
+      <p:pic>
+        <p:nvPicPr>
+          <p:cNvPr id="3" name="図 2">
+            <a:extLst>
+              <a:ext uri="{FF2B5EF4-FFF2-40B4-BE49-F238E27FC236}">
+                <a16:creationId xmlns:a16="http://schemas.microsoft.com/office/drawing/2014/main" id="{C5198289-86C6-BC17-0977-5D5AEA05C99B}"/>
+              </a:ext>
+            </a:extLst>
+          </p:cNvPr>
+          <p:cNvPicPr>
+            <a:picLocks noChangeAspect="1"/>
+          </p:cNvPicPr>
+          <p:nvPr/>
+        </p:nvPicPr>
+        <p:blipFill>
+          <a:blip r:embed="rId2"/>
+          <a:stretch>
+            <a:fillRect/>
+          </a:stretch>
+        </p:blipFill>
+        <p:spPr>
+          <a:xfrm>
+            <a:off x="1520108" y="2832100"/>
+            <a:ext cx="7754784" cy="4767485"/>
+          </a:xfrm>
+          <a:prstGeom prst="rect">
+            <a:avLst/>
+          </a:prstGeom>
+        </p:spPr>
+      </p:pic>
     </p:spTree>
     <p:extLst>
       <p:ext uri="{BB962C8B-B14F-4D97-AF65-F5344CB8AC3E}">
@@ -7983,7 +7983,7 @@
                 <a:ea typeface="ＭＳ Ｐゴシック" panose="020B0600070205080204" pitchFamily="50" charset="-128"/>
                 <a:cs typeface="Arial" panose="020B0604020202020204" pitchFamily="34" charset="0"/>
               </a:rPr>
-              <a:t>ループ等で結果を溜める入れ物（ベクトル・行列・リスト等）を，最初に必要サイズで作っておく」 というパフォーマンス最適化</a:t>
+              <a:t>ループ等で結果を溜める入れ物（ベクトル・行列・リスト等）を，最初に必要サイズで作っておく というパフォーマンス最適化</a:t>
             </a:r>
             <a:endParaRPr kumimoji="1" lang="en-US" altLang="ja-JP" sz="1600" dirty="0">
               <a:latin typeface="+mn-lt"/>
@@ -8414,36 +8414,6 @@
           </a:p>
         </p:txBody>
       </p:sp>
-      <p:pic>
-        <p:nvPicPr>
-          <p:cNvPr id="4" name="図 3">
-            <a:extLst>
-              <a:ext uri="{FF2B5EF4-FFF2-40B4-BE49-F238E27FC236}">
-                <a16:creationId xmlns:a16="http://schemas.microsoft.com/office/drawing/2014/main" id="{5877B4B9-B1EB-0D7C-F6B3-0B7804302BA8}"/>
-              </a:ext>
-            </a:extLst>
-          </p:cNvPr>
-          <p:cNvPicPr>
-            <a:picLocks noChangeAspect="1"/>
-          </p:cNvPicPr>
-          <p:nvPr/>
-        </p:nvPicPr>
-        <p:blipFill>
-          <a:blip r:embed="rId2"/>
-          <a:stretch>
-            <a:fillRect/>
-          </a:stretch>
-        </p:blipFill>
-        <p:spPr>
-          <a:xfrm>
-            <a:off x="826149" y="927100"/>
-            <a:ext cx="9142702" cy="5100665"/>
-          </a:xfrm>
-          <a:prstGeom prst="rect">
-            <a:avLst/>
-          </a:prstGeom>
-        </p:spPr>
-      </p:pic>
       <p:sp>
         <p:nvSpPr>
           <p:cNvPr id="7" name="テキスト ボックス 6">
@@ -8582,6 +8552,36 @@
           </a:p>
         </p:txBody>
       </p:sp>
+      <p:pic>
+        <p:nvPicPr>
+          <p:cNvPr id="3" name="図 2">
+            <a:extLst>
+              <a:ext uri="{FF2B5EF4-FFF2-40B4-BE49-F238E27FC236}">
+                <a16:creationId xmlns:a16="http://schemas.microsoft.com/office/drawing/2014/main" id="{5C9B774F-F1DD-66F4-B7E1-D56B2204B177}"/>
+              </a:ext>
+            </a:extLst>
+          </p:cNvPr>
+          <p:cNvPicPr>
+            <a:picLocks noChangeAspect="1"/>
+          </p:cNvPicPr>
+          <p:nvPr/>
+        </p:nvPicPr>
+        <p:blipFill>
+          <a:blip r:embed="rId2"/>
+          <a:stretch>
+            <a:fillRect/>
+          </a:stretch>
+        </p:blipFill>
+        <p:spPr>
+          <a:xfrm>
+            <a:off x="828151" y="1099535"/>
+            <a:ext cx="9138696" cy="5102794"/>
+          </a:xfrm>
+          <a:prstGeom prst="rect">
+            <a:avLst/>
+          </a:prstGeom>
+        </p:spPr>
+      </p:pic>
     </p:spTree>
     <p:extLst>
       <p:ext uri="{BB962C8B-B14F-4D97-AF65-F5344CB8AC3E}">
@@ -9424,96 +9424,6 @@
           </a:p>
         </p:txBody>
       </p:sp>
-      <p:pic>
-        <p:nvPicPr>
-          <p:cNvPr id="4" name="図 3">
-            <a:extLst>
-              <a:ext uri="{FF2B5EF4-FFF2-40B4-BE49-F238E27FC236}">
-                <a16:creationId xmlns:a16="http://schemas.microsoft.com/office/drawing/2014/main" id="{F1ABFBB7-F811-9462-B940-13013CE0F7F9}"/>
-              </a:ext>
-            </a:extLst>
-          </p:cNvPr>
-          <p:cNvPicPr>
-            <a:picLocks noChangeAspect="1"/>
-          </p:cNvPicPr>
-          <p:nvPr/>
-        </p:nvPicPr>
-        <p:blipFill>
-          <a:blip r:embed="rId2"/>
-          <a:stretch>
-            <a:fillRect/>
-          </a:stretch>
-        </p:blipFill>
-        <p:spPr>
-          <a:xfrm>
-            <a:off x="215900" y="943094"/>
-            <a:ext cx="5040000" cy="3108206"/>
-          </a:xfrm>
-          <a:prstGeom prst="rect">
-            <a:avLst/>
-          </a:prstGeom>
-        </p:spPr>
-      </p:pic>
-      <p:pic>
-        <p:nvPicPr>
-          <p:cNvPr id="7" name="図 6">
-            <a:extLst>
-              <a:ext uri="{FF2B5EF4-FFF2-40B4-BE49-F238E27FC236}">
-                <a16:creationId xmlns:a16="http://schemas.microsoft.com/office/drawing/2014/main" id="{66012631-A262-3638-2380-E4E27D44AF7A}"/>
-              </a:ext>
-            </a:extLst>
-          </p:cNvPr>
-          <p:cNvPicPr>
-            <a:picLocks noChangeAspect="1"/>
-          </p:cNvPicPr>
-          <p:nvPr/>
-        </p:nvPicPr>
-        <p:blipFill>
-          <a:blip r:embed="rId3"/>
-          <a:stretch>
-            <a:fillRect/>
-          </a:stretch>
-        </p:blipFill>
-        <p:spPr>
-          <a:xfrm>
-            <a:off x="215900" y="4207075"/>
-            <a:ext cx="5040000" cy="3108206"/>
-          </a:xfrm>
-          <a:prstGeom prst="rect">
-            <a:avLst/>
-          </a:prstGeom>
-        </p:spPr>
-      </p:pic>
-      <p:pic>
-        <p:nvPicPr>
-          <p:cNvPr id="8" name="図 7">
-            <a:extLst>
-              <a:ext uri="{FF2B5EF4-FFF2-40B4-BE49-F238E27FC236}">
-                <a16:creationId xmlns:a16="http://schemas.microsoft.com/office/drawing/2014/main" id="{484A134B-CE5D-3DBF-9041-4790AD35016F}"/>
-              </a:ext>
-            </a:extLst>
-          </p:cNvPr>
-          <p:cNvPicPr>
-            <a:picLocks noChangeAspect="1"/>
-          </p:cNvPicPr>
-          <p:nvPr/>
-        </p:nvPicPr>
-        <p:blipFill>
-          <a:blip r:embed="rId4"/>
-          <a:stretch>
-            <a:fillRect/>
-          </a:stretch>
-        </p:blipFill>
-        <p:spPr>
-          <a:xfrm>
-            <a:off x="5539101" y="1111569"/>
-            <a:ext cx="5040000" cy="3108206"/>
-          </a:xfrm>
-          <a:prstGeom prst="rect">
-            <a:avLst/>
-          </a:prstGeom>
-        </p:spPr>
-      </p:pic>
       <p:sp>
         <p:nvSpPr>
           <p:cNvPr id="9" name="タイトル 2">
@@ -9587,8 +9497,8 @@
           </a:p>
         </p:txBody>
       </p:sp>
-      <mc:AlternateContent xmlns:mc="http://schemas.openxmlformats.org/markup-compatibility/2006">
-        <mc:Choice xmlns:a14="http://schemas.microsoft.com/office/drawing/2010/main" Requires="a14">
+      <mc:AlternateContent xmlns:mc="http://schemas.openxmlformats.org/markup-compatibility/2006" xmlns:a14="http://schemas.microsoft.com/office/drawing/2010/main">
+        <mc:Choice Requires="a14">
           <p:graphicFrame>
             <p:nvGraphicFramePr>
               <p:cNvPr id="5" name="表 4">
@@ -10424,7 +10334,7 @@
             </a:graphic>
           </p:graphicFrame>
         </mc:Choice>
-        <mc:Fallback>
+        <mc:Fallback xmlns="">
           <p:graphicFrame>
             <p:nvGraphicFramePr>
               <p:cNvPr id="5" name="表 4">
@@ -10745,7 +10655,6 @@
               </a:bodyPr>
               <a:lstStyle/>
               <a:p>
-                <a:pPr/>
                 <a14:m>
                   <m:oMath xmlns:m="http://schemas.openxmlformats.org/officeDocument/2006/math">
                     <m:acc>
@@ -10816,7 +10725,6 @@
                 <a:endParaRPr lang="en-US" altLang="ja-JP" dirty="0"/>
               </a:p>
               <a:p>
-                <a:pPr/>
                 <a14:m>
                   <m:oMath xmlns:m="http://schemas.openxmlformats.org/officeDocument/2006/math">
                     <m:sSub>
@@ -10867,9 +10775,10 @@
                       <m:t>𝑘</m:t>
                     </m:r>
                     <m:r>
-                      <a:rPr kumimoji="1" lang="ja-JP" altLang="en-US" i="1">
-                        <a:latin typeface="Cambria Math" panose="02040503050406030204" pitchFamily="18" charset="0"/>
-                      </a:rPr>
+                      <m:rPr>
+                        <m:nor/>
+                      </m:rPr>
+                      <a:rPr lang="ja-JP" altLang="en-US" dirty="0" smtClean="0"/>
                       <m:t>の</m:t>
                     </m:r>
                   </m:oMath>
@@ -10881,7 +10790,6 @@
                 <a:endParaRPr lang="en-US" altLang="ja-JP" dirty="0"/>
               </a:p>
               <a:p>
-                <a:pPr/>
                 <a14:m>
                   <m:oMath xmlns:m="http://schemas.openxmlformats.org/officeDocument/2006/math">
                     <m:r>
@@ -10909,7 +10817,6 @@
                 <a:endParaRPr lang="en-US" altLang="ja-JP" dirty="0"/>
               </a:p>
               <a:p>
-                <a:pPr/>
                 <a14:m>
                   <m:oMath xmlns:m="http://schemas.openxmlformats.org/officeDocument/2006/math">
                     <m:sSub>
@@ -11010,6 +10917,36 @@
           </p:sp>
         </mc:Fallback>
       </mc:AlternateContent>
+      <p:pic>
+        <p:nvPicPr>
+          <p:cNvPr id="3" name="図 2">
+            <a:extLst>
+              <a:ext uri="{FF2B5EF4-FFF2-40B4-BE49-F238E27FC236}">
+                <a16:creationId xmlns:a16="http://schemas.microsoft.com/office/drawing/2014/main" id="{CEFA92DD-CF2E-A6D5-6169-532CFDB522E2}"/>
+              </a:ext>
+            </a:extLst>
+          </p:cNvPr>
+          <p:cNvPicPr>
+            <a:picLocks noChangeAspect="1"/>
+          </p:cNvPicPr>
+          <p:nvPr/>
+        </p:nvPicPr>
+        <p:blipFill>
+          <a:blip r:embed="rId7"/>
+          <a:stretch>
+            <a:fillRect/>
+          </a:stretch>
+        </p:blipFill>
+        <p:spPr>
+          <a:xfrm>
+            <a:off x="215451" y="1134463"/>
+            <a:ext cx="10364098" cy="6370872"/>
+          </a:xfrm>
+          <a:prstGeom prst="rect">
+            <a:avLst/>
+          </a:prstGeom>
+        </p:spPr>
+      </p:pic>
     </p:spTree>
     <p:extLst>
       <p:ext uri="{BB962C8B-B14F-4D97-AF65-F5344CB8AC3E}">
@@ -11252,7 +11189,7 @@
                 <a:ea typeface="ＭＳ Ｐゴシック" panose="020B0600070205080204" pitchFamily="50" charset="-128"/>
                 <a:cs typeface="Arial" panose="020B0604020202020204" pitchFamily="34" charset="0"/>
               </a:rPr>
-              <a:t>回（ブートブートストラップ標本数）繰り返す</a:t>
+              <a:t>回（ブートストラップ標本数）繰り返す</a:t>
             </a:r>
             <a:r>
               <a:rPr lang="ja-JP" altLang="en-US" sz="2000" dirty="0">
